--- a/bench/results/decks/algotune-eight-tasks.pptx
+++ b/bench/results/decks/algotune-eight-tasks.pptx
@@ -952,7 +952,7 @@
           <a:p>
             <a:r>
               <a:rPr lang="en-US" dirty="0"/>
-              <a:t>Two honesty points: the grey bars are our recomputation, and OpenEvolve is amber because its sizes are known to differ.</a:t>
+              <a:t>Do not show the left panel without the right one. The nine excluded models are claude-opus-4, 4.5, 4.6, sonnet-4.5, gemini-2.5-pro, gemini-3-pro, gemini-3.1-pro, gpt-oss-120b, qwen3-coder — their solvers exist upstream but the score is N/A, and they include the newest models on the board.</a:t>
             </a:r>
             <a:endParaRPr lang="en-US" dirty="0"/>
           </a:p>
@@ -3405,8 +3405,8 @@
         </p:nvSpPr>
         <p:spPr>
           <a:xfrm>
-            <a:off x="566928" y="5742432"/>
-            <a:ext cx="11055096" cy="713232"/>
+            <a:off x="566928" y="5669280"/>
+            <a:ext cx="11055096" cy="786384"/>
           </a:xfrm>
           <a:prstGeom prst="rect">
             <a:avLst/>
@@ -3433,7 +3433,7 @@
                 <a:ea typeface="Calibri" pitchFamily="34" charset="-122"/>
                 <a:cs typeface="Calibri" pitchFamily="34" charset="-120"/>
               </a:rPr>
-              <a:t>And one it does not: that this port is better than AlphaEvolve or MetaEvolve. lu_factorization at 7.0x is the reference’s .tolist() serialisation, not a faster factorisation — discount it to 1.19x and the aggregate is 1.905x. Three tasks were run at sizes we can only infer. One seed each is what everyone reports, and it is still one seed.</a:t>
+              <a:t>And one it does not: that this port leads the field. On the four tasks every AlgoTune model has, it ranks 3rd and 5th of 20 — claude-opus-4.6 and gemini-3.1-pro are ahead. lu_factorization at 7.0x is the reference’s .tolist() serialisation, not a faster factorisation; discount it to 1.19x and the eight-task aggregate is 1.905x. Three tasks were run at sizes we can only infer, and one seed each is still one seed.</a:t>
             </a:r>
             <a:endParaRPr lang="en-US" sz="1200" dirty="0"/>
           </a:p>
@@ -6916,7 +6916,7 @@
                 <a:ea typeface="Cambria" pitchFamily="34" charset="-122"/>
                 <a:cs typeface="Cambria" pitchFamily="34" charset="-120"/>
               </a:rPr>
-              <a:t>Harmonic mean over the same eight tasks</a:t>
+              <a:t>Two rankings, because neither one is the whole field</a:t>
             </a:r>
             <a:endParaRPr lang="en-US" sz="3300" dirty="0"/>
           </a:p>
@@ -6931,7 +6931,7 @@
         <p:spPr>
           <a:xfrm>
             <a:off x="566928" y="1243584"/>
-            <a:ext cx="11055096" cy="274320"/>
+            <a:ext cx="11055096" cy="475488"/>
           </a:xfrm>
           <a:prstGeom prst="rect">
             <a:avLst/>
@@ -6958,7 +6958,7 @@
                 <a:ea typeface="Calibri" pitchFamily="34" charset="-122"/>
                 <a:cs typeface="Calibri" pitchFamily="34" charset="-120"/>
               </a:rPr>
-              <a:t>Every bar is the same eight tasks. Grey bars are recomputed by us from AlgoTune’s published per-task data.</a:t>
+              <a:t>Left: the eight tasks the papers report — but only 9 of AlgoTune’s 18 models have a score on all eight. Right: the four tasks every model has, nobody excluded.</a:t>
             </a:r>
             <a:endParaRPr lang="en-US" sz="1350" dirty="0"/>
           </a:p>
@@ -6972,8 +6972,86 @@
         </p:nvSpPr>
         <p:spPr>
           <a:xfrm>
-            <a:off x="566928" y="1828800"/>
-            <a:ext cx="2240280" cy="274320"/>
+            <a:off x="566928" y="1773936"/>
+            <a:ext cx="5321808" cy="237744"/>
+          </a:xfrm>
+          <a:prstGeom prst="rect">
+            <a:avLst/>
+          </a:prstGeom>
+          <a:noFill/>
+          <a:ln/>
+        </p:spPr>
+        <p:txBody>
+          <a:bodyPr wrap="square" lIns="0" tIns="0" rIns="0" bIns="0" rtlCol="0" anchor="ctr"/>
+          <a:lstStyle/>
+          <a:p>
+            <a:pPr indent="0" marL="0">
+              <a:buNone/>
+            </a:pPr>
+            <a:r>
+              <a:rPr lang="en-US" sz="1200" b="1" dirty="0">
+                <a:solidFill>
+                  <a:srgbClr val="10161C"/>
+                </a:solidFill>
+                <a:latin typeface="Calibri" pitchFamily="34" charset="0"/>
+                <a:ea typeface="Calibri" pitchFamily="34" charset="-122"/>
+                <a:cs typeface="Calibri" pitchFamily="34" charset="-120"/>
+              </a:rPr>
+              <a:t>Eight tasks  ·  9 of 18 models</a:t>
+            </a:r>
+            <a:endParaRPr lang="en-US" sz="1200" dirty="0"/>
+          </a:p>
+        </p:txBody>
+      </p:sp>
+      <p:sp>
+        <p:nvSpPr>
+          <p:cNvPr id="6" name="Text 4"/>
+          <p:cNvSpPr txBox="1"/>
+          <p:nvPr/>
+        </p:nvSpPr>
+        <p:spPr>
+          <a:xfrm>
+            <a:off x="566928" y="2011680"/>
+            <a:ext cx="5321808" cy="219456"/>
+          </a:xfrm>
+          <a:prstGeom prst="rect">
+            <a:avLst/>
+          </a:prstGeom>
+          <a:noFill/>
+          <a:ln/>
+        </p:spPr>
+        <p:txBody>
+          <a:bodyPr wrap="square" lIns="0" tIns="0" rIns="0" bIns="0" rtlCol="0" anchor="ctr"/>
+          <a:lstStyle/>
+          <a:p>
+            <a:pPr indent="0" marL="0">
+              <a:buNone/>
+            </a:pPr>
+            <a:r>
+              <a:rPr lang="en-US" sz="900" dirty="0">
+                <a:solidFill>
+                  <a:srgbClr val="93A1AA"/>
+                </a:solidFill>
+                <a:latin typeface="Calibri" pitchFamily="34" charset="0"/>
+                <a:ea typeface="Calibri" pitchFamily="34" charset="-122"/>
+                <a:cs typeface="Calibri" pitchFamily="34" charset="-120"/>
+              </a:rPr>
+              <a:t>the papers’ own task set; 9 models have no score on at least one of the eight</a:t>
+            </a:r>
+            <a:endParaRPr lang="en-US" sz="900" dirty="0"/>
+          </a:p>
+        </p:txBody>
+      </p:sp>
+      <p:sp>
+        <p:nvSpPr>
+          <p:cNvPr id="7" name="Text 5"/>
+          <p:cNvSpPr txBox="1"/>
+          <p:nvPr/>
+        </p:nvSpPr>
+        <p:spPr>
+          <a:xfrm>
+            <a:off x="566928" y="2235708"/>
+            <a:ext cx="1676370" cy="258775"/>
           </a:xfrm>
           <a:prstGeom prst="rect">
             <a:avLst/>
@@ -6989,7 +7067,7 @@
               <a:buNone/>
             </a:pPr>
             <a:r>
-              <a:rPr lang="en-US" sz="1050" b="1" dirty="0">
+              <a:rPr lang="en-US" sz="950" b="1" dirty="0">
                 <a:solidFill>
                   <a:srgbClr val="0E7C66"/>
                 </a:solidFill>
@@ -6999,20 +7077,20 @@
               </a:rPr>
               <a:t>This port — seed 0</a:t>
             </a:r>
-            <a:endParaRPr lang="en-US" sz="1050" dirty="0"/>
+            <a:endParaRPr lang="en-US" sz="950" dirty="0"/>
           </a:p>
         </p:txBody>
       </p:sp>
       <p:sp>
         <p:nvSpPr>
-          <p:cNvPr id="6" name="Shape 4"/>
+          <p:cNvPr id="8" name="Shape 6"/>
           <p:cNvSpPr/>
           <p:nvPr/>
         </p:nvSpPr>
         <p:spPr>
           <a:xfrm>
-            <a:off x="2880360" y="1874520"/>
-            <a:ext cx="7051739" cy="219456"/>
+            <a:off x="2298162" y="2275027"/>
+            <a:ext cx="2791705" cy="181051"/>
           </a:xfrm>
           <a:prstGeom prst="rect">
             <a:avLst/>
@@ -7022,7 +7100,7 @@
           </a:solidFill>
           <a:ln w="12700">
             <a:solidFill>
-              <a:srgbClr val="0E7C66"/>
+              <a:srgbClr val="333333"/>
             </a:solidFill>
             <a:prstDash val="solid"/>
           </a:ln>
@@ -7030,14 +7108,14 @@
       </p:sp>
       <p:sp>
         <p:nvSpPr>
-          <p:cNvPr id="7" name="Text 5"/>
+          <p:cNvPr id="9" name="Text 7"/>
           <p:cNvSpPr txBox="1"/>
           <p:nvPr/>
         </p:nvSpPr>
         <p:spPr>
           <a:xfrm>
-            <a:off x="10005251" y="1828800"/>
-            <a:ext cx="868680" cy="274320"/>
+            <a:off x="5135586" y="2235708"/>
+            <a:ext cx="603504" cy="258775"/>
           </a:xfrm>
           <a:prstGeom prst="rect">
             <a:avLst/>
@@ -7053,7 +7131,7 @@
               <a:buNone/>
             </a:pPr>
             <a:r>
-              <a:rPr lang="en-US" sz="1050" b="1" dirty="0">
+              <a:rPr lang="en-US" sz="950" b="1" dirty="0">
                 <a:solidFill>
                   <a:srgbClr val="0E7C66"/>
                 </a:solidFill>
@@ -7061,22 +7139,22 @@
                 <a:ea typeface="Calibri" pitchFamily="34" charset="-122"/>
                 <a:cs typeface="Calibri" pitchFamily="34" charset="-120"/>
               </a:rPr>
-              <a:t>2.285x</a:t>
+              <a:t>2.285</a:t>
             </a:r>
-            <a:endParaRPr lang="en-US" sz="1050" dirty="0"/>
+            <a:endParaRPr lang="en-US" sz="950" dirty="0"/>
           </a:p>
         </p:txBody>
       </p:sp>
       <p:sp>
         <p:nvSpPr>
-          <p:cNvPr id="8" name="Text 6"/>
+          <p:cNvPr id="10" name="Text 8"/>
           <p:cNvSpPr txBox="1"/>
           <p:nvPr/>
         </p:nvSpPr>
         <p:spPr>
           <a:xfrm>
-            <a:off x="566928" y="2135124"/>
-            <a:ext cx="2240280" cy="274320"/>
+            <a:off x="566928" y="2494483"/>
+            <a:ext cx="1676370" cy="258775"/>
           </a:xfrm>
           <a:prstGeom prst="rect">
             <a:avLst/>
@@ -7092,7 +7170,7 @@
               <a:buNone/>
             </a:pPr>
             <a:r>
-              <a:rPr lang="en-US" sz="1050" b="1" dirty="0">
+              <a:rPr lang="en-US" sz="950" b="1" dirty="0">
                 <a:solidFill>
                   <a:srgbClr val="0E7C66"/>
                 </a:solidFill>
@@ -7102,20 +7180,20 @@
               </a:rPr>
               <a:t>This port — seed 1</a:t>
             </a:r>
-            <a:endParaRPr lang="en-US" sz="1050" dirty="0"/>
+            <a:endParaRPr lang="en-US" sz="950" dirty="0"/>
           </a:p>
         </p:txBody>
       </p:sp>
       <p:sp>
         <p:nvSpPr>
-          <p:cNvPr id="9" name="Shape 7"/>
+          <p:cNvPr id="11" name="Shape 9"/>
           <p:cNvSpPr/>
           <p:nvPr/>
         </p:nvSpPr>
         <p:spPr>
           <a:xfrm>
-            <a:off x="2880360" y="2180844"/>
-            <a:ext cx="6956069" cy="219456"/>
+            <a:off x="2298162" y="2533802"/>
+            <a:ext cx="2753831" cy="181051"/>
           </a:xfrm>
           <a:prstGeom prst="rect">
             <a:avLst/>
@@ -7125,7 +7203,7 @@
           </a:solidFill>
           <a:ln w="12700">
             <a:solidFill>
-              <a:srgbClr val="0E7C66"/>
+              <a:srgbClr val="333333"/>
             </a:solidFill>
             <a:prstDash val="solid"/>
           </a:ln>
@@ -7133,14 +7211,14 @@
       </p:sp>
       <p:sp>
         <p:nvSpPr>
-          <p:cNvPr id="10" name="Text 8"/>
+          <p:cNvPr id="12" name="Text 10"/>
           <p:cNvSpPr txBox="1"/>
           <p:nvPr/>
         </p:nvSpPr>
         <p:spPr>
           <a:xfrm>
-            <a:off x="9909581" y="2135124"/>
-            <a:ext cx="868680" cy="274320"/>
+            <a:off x="5097712" y="2494483"/>
+            <a:ext cx="603504" cy="258775"/>
           </a:xfrm>
           <a:prstGeom prst="rect">
             <a:avLst/>
@@ -7156,7 +7234,7 @@
               <a:buNone/>
             </a:pPr>
             <a:r>
-              <a:rPr lang="en-US" sz="1050" b="1" dirty="0">
+              <a:rPr lang="en-US" sz="950" b="1" dirty="0">
                 <a:solidFill>
                   <a:srgbClr val="0E7C66"/>
                 </a:solidFill>
@@ -7164,22 +7242,22 @@
                 <a:ea typeface="Calibri" pitchFamily="34" charset="-122"/>
                 <a:cs typeface="Calibri" pitchFamily="34" charset="-120"/>
               </a:rPr>
-              <a:t>2.254x</a:t>
+              <a:t>2.254</a:t>
             </a:r>
-            <a:endParaRPr lang="en-US" sz="1050" dirty="0"/>
+            <a:endParaRPr lang="en-US" sz="950" dirty="0"/>
           </a:p>
         </p:txBody>
       </p:sp>
       <p:sp>
         <p:nvSpPr>
-          <p:cNvPr id="11" name="Text 9"/>
+          <p:cNvPr id="13" name="Text 11"/>
           <p:cNvSpPr txBox="1"/>
           <p:nvPr/>
         </p:nvSpPr>
         <p:spPr>
           <a:xfrm>
-            <a:off x="566928" y="2441448"/>
-            <a:ext cx="2240280" cy="274320"/>
+            <a:off x="566928" y="2753258"/>
+            <a:ext cx="1676370" cy="258775"/>
           </a:xfrm>
           <a:prstGeom prst="rect">
             <a:avLst/>
@@ -7195,7 +7273,7 @@
               <a:buNone/>
             </a:pPr>
             <a:r>
-              <a:rPr lang="en-US" sz="1050" dirty="0">
+              <a:rPr lang="en-US" sz="950" dirty="0">
                 <a:solidFill>
                   <a:srgbClr val="3A4750"/>
                 </a:solidFill>
@@ -7205,20 +7283,20 @@
               </a:rPr>
               <a:t>MetaEvolve</a:t>
             </a:r>
-            <a:endParaRPr lang="en-US" sz="1050" dirty="0"/>
+            <a:endParaRPr lang="en-US" sz="950" dirty="0"/>
           </a:p>
         </p:txBody>
       </p:sp>
       <p:sp>
         <p:nvSpPr>
-          <p:cNvPr id="12" name="Shape 10"/>
+          <p:cNvPr id="14" name="Shape 12"/>
           <p:cNvSpPr/>
           <p:nvPr/>
         </p:nvSpPr>
         <p:spPr>
           <a:xfrm>
-            <a:off x="2880360" y="2487168"/>
-            <a:ext cx="6311075" cy="219456"/>
+            <a:off x="2298162" y="2792578"/>
+            <a:ext cx="2498484" cy="181051"/>
           </a:xfrm>
           <a:prstGeom prst="rect">
             <a:avLst/>
@@ -7228,7 +7306,7 @@
           </a:solidFill>
           <a:ln w="12700">
             <a:solidFill>
-              <a:srgbClr val="93A1AA"/>
+              <a:srgbClr val="333333"/>
             </a:solidFill>
             <a:prstDash val="solid"/>
           </a:ln>
@@ -7236,14 +7314,14 @@
       </p:sp>
       <p:sp>
         <p:nvSpPr>
-          <p:cNvPr id="13" name="Text 11"/>
+          <p:cNvPr id="15" name="Text 13"/>
           <p:cNvSpPr txBox="1"/>
           <p:nvPr/>
         </p:nvSpPr>
         <p:spPr>
           <a:xfrm>
-            <a:off x="9264587" y="2441448"/>
-            <a:ext cx="868680" cy="274320"/>
+            <a:off x="4842366" y="2753258"/>
+            <a:ext cx="603504" cy="258775"/>
           </a:xfrm>
           <a:prstGeom prst="rect">
             <a:avLst/>
@@ -7259,7 +7337,7 @@
               <a:buNone/>
             </a:pPr>
             <a:r>
-              <a:rPr lang="en-US" sz="1050" dirty="0">
+              <a:rPr lang="en-US" sz="950" dirty="0">
                 <a:solidFill>
                   <a:srgbClr val="3A4750"/>
                 </a:solidFill>
@@ -7267,22 +7345,22 @@
                 <a:ea typeface="Calibri" pitchFamily="34" charset="-122"/>
                 <a:cs typeface="Calibri" pitchFamily="34" charset="-120"/>
               </a:rPr>
-              <a:t>2.045x</a:t>
+              <a:t>2.045</a:t>
             </a:r>
-            <a:endParaRPr lang="en-US" sz="1050" dirty="0"/>
+            <a:endParaRPr lang="en-US" sz="950" dirty="0"/>
           </a:p>
         </p:txBody>
       </p:sp>
       <p:sp>
         <p:nvSpPr>
-          <p:cNvPr id="14" name="Text 12"/>
+          <p:cNvPr id="16" name="Text 14"/>
           <p:cNvSpPr txBox="1"/>
           <p:nvPr/>
         </p:nvSpPr>
         <p:spPr>
           <a:xfrm>
-            <a:off x="566928" y="2747772"/>
-            <a:ext cx="2240280" cy="274320"/>
+            <a:off x="566928" y="3012034"/>
+            <a:ext cx="1676370" cy="258775"/>
           </a:xfrm>
           <a:prstGeom prst="rect">
             <a:avLst/>
@@ -7298,7 +7376,7 @@
               <a:buNone/>
             </a:pPr>
             <a:r>
-              <a:rPr lang="en-US" sz="1050" dirty="0">
+              <a:rPr lang="en-US" sz="950" dirty="0">
                 <a:solidFill>
                   <a:srgbClr val="3A4750"/>
                 </a:solidFill>
@@ -7308,20 +7386,20 @@
               </a:rPr>
               <a:t>OpenEvolve</a:t>
             </a:r>
-            <a:endParaRPr lang="en-US" sz="1050" dirty="0"/>
+            <a:endParaRPr lang="en-US" sz="950" dirty="0"/>
           </a:p>
         </p:txBody>
       </p:sp>
       <p:sp>
         <p:nvSpPr>
-          <p:cNvPr id="15" name="Shape 13"/>
+          <p:cNvPr id="17" name="Shape 15"/>
           <p:cNvSpPr/>
           <p:nvPr/>
         </p:nvSpPr>
         <p:spPr>
           <a:xfrm>
-            <a:off x="2880360" y="2793492"/>
-            <a:ext cx="6122822" cy="219456"/>
+            <a:off x="2298162" y="3051353"/>
+            <a:ext cx="2423957" cy="181051"/>
           </a:xfrm>
           <a:prstGeom prst="rect">
             <a:avLst/>
@@ -7331,7 +7409,7 @@
           </a:solidFill>
           <a:ln w="12700">
             <a:solidFill>
-              <a:srgbClr val="C2872B"/>
+              <a:srgbClr val="333333"/>
             </a:solidFill>
             <a:prstDash val="solid"/>
           </a:ln>
@@ -7339,14 +7417,14 @@
       </p:sp>
       <p:sp>
         <p:nvSpPr>
-          <p:cNvPr id="16" name="Text 14"/>
+          <p:cNvPr id="18" name="Text 16"/>
           <p:cNvSpPr txBox="1"/>
           <p:nvPr/>
         </p:nvSpPr>
         <p:spPr>
           <a:xfrm>
-            <a:off x="9076334" y="2747772"/>
-            <a:ext cx="868680" cy="274320"/>
+            <a:off x="4767839" y="3012034"/>
+            <a:ext cx="603504" cy="258775"/>
           </a:xfrm>
           <a:prstGeom prst="rect">
             <a:avLst/>
@@ -7362,7 +7440,7 @@
               <a:buNone/>
             </a:pPr>
             <a:r>
-              <a:rPr lang="en-US" sz="1050" dirty="0">
+              <a:rPr lang="en-US" sz="950" dirty="0">
                 <a:solidFill>
                   <a:srgbClr val="3A4750"/>
                 </a:solidFill>
@@ -7370,22 +7448,22 @@
                 <a:ea typeface="Calibri" pitchFamily="34" charset="-122"/>
                 <a:cs typeface="Calibri" pitchFamily="34" charset="-120"/>
               </a:rPr>
-              <a:t>1.984x</a:t>
+              <a:t>1.984</a:t>
             </a:r>
-            <a:endParaRPr lang="en-US" sz="1050" dirty="0"/>
+            <a:endParaRPr lang="en-US" sz="950" dirty="0"/>
           </a:p>
         </p:txBody>
       </p:sp>
       <p:sp>
         <p:nvSpPr>
-          <p:cNvPr id="17" name="Text 15"/>
+          <p:cNvPr id="19" name="Text 17"/>
           <p:cNvSpPr txBox="1"/>
           <p:nvPr/>
         </p:nvSpPr>
         <p:spPr>
           <a:xfrm>
-            <a:off x="566928" y="3054096"/>
-            <a:ext cx="2240280" cy="274320"/>
+            <a:off x="566928" y="3270809"/>
+            <a:ext cx="1676370" cy="258775"/>
           </a:xfrm>
           <a:prstGeom prst="rect">
             <a:avLst/>
@@ -7401,7 +7479,7 @@
               <a:buNone/>
             </a:pPr>
             <a:r>
-              <a:rPr lang="en-US" sz="1050" dirty="0">
+              <a:rPr lang="en-US" sz="950" dirty="0">
                 <a:solidFill>
                   <a:srgbClr val="3A4750"/>
                 </a:solidFill>
@@ -7411,20 +7489,20 @@
               </a:rPr>
               <a:t>gpt-5.4</a:t>
             </a:r>
-            <a:endParaRPr lang="en-US" sz="1050" dirty="0"/>
+            <a:endParaRPr lang="en-US" sz="950" dirty="0"/>
           </a:p>
         </p:txBody>
       </p:sp>
       <p:sp>
         <p:nvSpPr>
-          <p:cNvPr id="18" name="Shape 16"/>
+          <p:cNvPr id="20" name="Shape 18"/>
           <p:cNvSpPr/>
           <p:nvPr/>
         </p:nvSpPr>
         <p:spPr>
           <a:xfrm>
-            <a:off x="2880360" y="3099816"/>
-            <a:ext cx="4832833" cy="219456"/>
+            <a:off x="2298162" y="3310128"/>
+            <a:ext cx="1913265" cy="181051"/>
           </a:xfrm>
           <a:prstGeom prst="rect">
             <a:avLst/>
@@ -7434,7 +7512,7 @@
           </a:solidFill>
           <a:ln w="12700">
             <a:solidFill>
-              <a:srgbClr val="93A1AA"/>
+              <a:srgbClr val="333333"/>
             </a:solidFill>
             <a:prstDash val="solid"/>
           </a:ln>
@@ -7442,14 +7520,14 @@
       </p:sp>
       <p:sp>
         <p:nvSpPr>
-          <p:cNvPr id="19" name="Text 17"/>
+          <p:cNvPr id="21" name="Text 19"/>
           <p:cNvSpPr txBox="1"/>
           <p:nvPr/>
         </p:nvSpPr>
         <p:spPr>
           <a:xfrm>
-            <a:off x="7786345" y="3054096"/>
-            <a:ext cx="868680" cy="274320"/>
+            <a:off x="4257146" y="3270809"/>
+            <a:ext cx="603504" cy="258775"/>
           </a:xfrm>
           <a:prstGeom prst="rect">
             <a:avLst/>
@@ -7465,7 +7543,7 @@
               <a:buNone/>
             </a:pPr>
             <a:r>
-              <a:rPr lang="en-US" sz="1050" dirty="0">
+              <a:rPr lang="en-US" sz="950" dirty="0">
                 <a:solidFill>
                   <a:srgbClr val="3A4750"/>
                 </a:solidFill>
@@ -7473,22 +7551,22 @@
                 <a:ea typeface="Calibri" pitchFamily="34" charset="-122"/>
                 <a:cs typeface="Calibri" pitchFamily="34" charset="-120"/>
               </a:rPr>
-              <a:t>1.566x</a:t>
+              <a:t>1.566</a:t>
             </a:r>
-            <a:endParaRPr lang="en-US" sz="1050" dirty="0"/>
+            <a:endParaRPr lang="en-US" sz="950" dirty="0"/>
           </a:p>
         </p:txBody>
       </p:sp>
       <p:sp>
         <p:nvSpPr>
-          <p:cNvPr id="20" name="Text 18"/>
+          <p:cNvPr id="22" name="Text 20"/>
           <p:cNvSpPr txBox="1"/>
           <p:nvPr/>
         </p:nvSpPr>
         <p:spPr>
           <a:xfrm>
-            <a:off x="566928" y="3360420"/>
-            <a:ext cx="2240280" cy="274320"/>
+            <a:off x="566928" y="3529584"/>
+            <a:ext cx="1676370" cy="258775"/>
           </a:xfrm>
           <a:prstGeom prst="rect">
             <a:avLst/>
@@ -7504,7 +7582,7 @@
               <a:buNone/>
             </a:pPr>
             <a:r>
-              <a:rPr lang="en-US" sz="1050" dirty="0">
+              <a:rPr lang="en-US" sz="950" dirty="0">
                 <a:solidFill>
                   <a:srgbClr val="3A4750"/>
                 </a:solidFill>
@@ -7514,20 +7592,20 @@
               </a:rPr>
               <a:t>AlphaEvolve</a:t>
             </a:r>
-            <a:endParaRPr lang="en-US" sz="1050" dirty="0"/>
+            <a:endParaRPr lang="en-US" sz="950" dirty="0"/>
           </a:p>
         </p:txBody>
       </p:sp>
       <p:sp>
         <p:nvSpPr>
-          <p:cNvPr id="21" name="Shape 19"/>
+          <p:cNvPr id="23" name="Shape 21"/>
           <p:cNvSpPr/>
           <p:nvPr/>
         </p:nvSpPr>
         <p:spPr>
           <a:xfrm>
-            <a:off x="2880360" y="3406140"/>
-            <a:ext cx="4295851" cy="219456"/>
+            <a:off x="2298162" y="3568903"/>
+            <a:ext cx="1700680" cy="181051"/>
           </a:xfrm>
           <a:prstGeom prst="rect">
             <a:avLst/>
@@ -7537,7 +7615,7 @@
           </a:solidFill>
           <a:ln w="12700">
             <a:solidFill>
-              <a:srgbClr val="93A1AA"/>
+              <a:srgbClr val="333333"/>
             </a:solidFill>
             <a:prstDash val="solid"/>
           </a:ln>
@@ -7545,14 +7623,14 @@
       </p:sp>
       <p:sp>
         <p:nvSpPr>
-          <p:cNvPr id="22" name="Text 20"/>
+          <p:cNvPr id="24" name="Text 22"/>
           <p:cNvSpPr txBox="1"/>
           <p:nvPr/>
         </p:nvSpPr>
         <p:spPr>
           <a:xfrm>
-            <a:off x="7249363" y="3360420"/>
-            <a:ext cx="868680" cy="274320"/>
+            <a:off x="4044561" y="3529584"/>
+            <a:ext cx="603504" cy="258775"/>
           </a:xfrm>
           <a:prstGeom prst="rect">
             <a:avLst/>
@@ -7568,7 +7646,7 @@
               <a:buNone/>
             </a:pPr>
             <a:r>
-              <a:rPr lang="en-US" sz="1050" dirty="0">
+              <a:rPr lang="en-US" sz="950" dirty="0">
                 <a:solidFill>
                   <a:srgbClr val="3A4750"/>
                 </a:solidFill>
@@ -7576,22 +7654,22 @@
                 <a:ea typeface="Calibri" pitchFamily="34" charset="-122"/>
                 <a:cs typeface="Calibri" pitchFamily="34" charset="-120"/>
               </a:rPr>
-              <a:t>1.392x</a:t>
+              <a:t>1.392</a:t>
             </a:r>
-            <a:endParaRPr lang="en-US" sz="1050" dirty="0"/>
+            <a:endParaRPr lang="en-US" sz="950" dirty="0"/>
           </a:p>
         </p:txBody>
       </p:sp>
       <p:sp>
         <p:nvSpPr>
-          <p:cNvPr id="23" name="Text 21"/>
+          <p:cNvPr id="25" name="Text 23"/>
           <p:cNvSpPr txBox="1"/>
           <p:nvPr/>
         </p:nvSpPr>
         <p:spPr>
           <a:xfrm>
-            <a:off x="566928" y="3666744"/>
-            <a:ext cx="2240280" cy="274320"/>
+            <a:off x="566928" y="3788359"/>
+            <a:ext cx="1676370" cy="258775"/>
           </a:xfrm>
           <a:prstGeom prst="rect">
             <a:avLst/>
@@ -7607,7 +7685,7 @@
               <a:buNone/>
             </a:pPr>
             <a:r>
-              <a:rPr lang="en-US" sz="1050" dirty="0">
+              <a:rPr lang="en-US" sz="950" dirty="0">
                 <a:solidFill>
                   <a:srgbClr val="3A4750"/>
                 </a:solidFill>
@@ -7617,20 +7695,20 @@
               </a:rPr>
               <a:t>gpt-5.2</a:t>
             </a:r>
-            <a:endParaRPr lang="en-US" sz="1050" dirty="0"/>
+            <a:endParaRPr lang="en-US" sz="950" dirty="0"/>
           </a:p>
         </p:txBody>
       </p:sp>
       <p:sp>
         <p:nvSpPr>
-          <p:cNvPr id="24" name="Shape 22"/>
+          <p:cNvPr id="26" name="Shape 24"/>
           <p:cNvSpPr/>
           <p:nvPr/>
         </p:nvSpPr>
         <p:spPr>
           <a:xfrm>
-            <a:off x="2880360" y="3712464"/>
-            <a:ext cx="3950208" cy="219456"/>
+            <a:off x="2298162" y="3827678"/>
+            <a:ext cx="1563843" cy="181051"/>
           </a:xfrm>
           <a:prstGeom prst="rect">
             <a:avLst/>
@@ -7640,7 +7718,7 @@
           </a:solidFill>
           <a:ln w="12700">
             <a:solidFill>
-              <a:srgbClr val="93A1AA"/>
+              <a:srgbClr val="333333"/>
             </a:solidFill>
             <a:prstDash val="solid"/>
           </a:ln>
@@ -7648,14 +7726,14 @@
       </p:sp>
       <p:sp>
         <p:nvSpPr>
-          <p:cNvPr id="25" name="Text 23"/>
+          <p:cNvPr id="27" name="Text 25"/>
           <p:cNvSpPr txBox="1"/>
           <p:nvPr/>
         </p:nvSpPr>
         <p:spPr>
           <a:xfrm>
-            <a:off x="6903720" y="3666744"/>
-            <a:ext cx="868680" cy="274320"/>
+            <a:off x="3907725" y="3788359"/>
+            <a:ext cx="603504" cy="258775"/>
           </a:xfrm>
           <a:prstGeom prst="rect">
             <a:avLst/>
@@ -7671,7 +7749,7 @@
               <a:buNone/>
             </a:pPr>
             <a:r>
-              <a:rPr lang="en-US" sz="1050" dirty="0">
+              <a:rPr lang="en-US" sz="950" dirty="0">
                 <a:solidFill>
                   <a:srgbClr val="3A4750"/>
                 </a:solidFill>
@@ -7679,22 +7757,22 @@
                 <a:ea typeface="Calibri" pitchFamily="34" charset="-122"/>
                 <a:cs typeface="Calibri" pitchFamily="34" charset="-120"/>
               </a:rPr>
-              <a:t>1.280x</a:t>
+              <a:t>1.280</a:t>
             </a:r>
-            <a:endParaRPr lang="en-US" sz="1050" dirty="0"/>
+            <a:endParaRPr lang="en-US" sz="950" dirty="0"/>
           </a:p>
         </p:txBody>
       </p:sp>
       <p:sp>
         <p:nvSpPr>
-          <p:cNvPr id="26" name="Text 24"/>
+          <p:cNvPr id="28" name="Text 26"/>
           <p:cNvSpPr txBox="1"/>
           <p:nvPr/>
         </p:nvSpPr>
         <p:spPr>
           <a:xfrm>
-            <a:off x="566928" y="3973068"/>
-            <a:ext cx="2240280" cy="274320"/>
+            <a:off x="566928" y="4047134"/>
+            <a:ext cx="1676370" cy="258775"/>
           </a:xfrm>
           <a:prstGeom prst="rect">
             <a:avLst/>
@@ -7710,7 +7788,7 @@
               <a:buNone/>
             </a:pPr>
             <a:r>
-              <a:rPr lang="en-US" sz="1050" dirty="0">
+              <a:rPr lang="en-US" sz="950" dirty="0">
                 <a:solidFill>
                   <a:srgbClr val="3A4750"/>
                 </a:solidFill>
@@ -7720,20 +7798,20 @@
               </a:rPr>
               <a:t>gpt-5</a:t>
             </a:r>
-            <a:endParaRPr lang="en-US" sz="1050" dirty="0"/>
+            <a:endParaRPr lang="en-US" sz="950" dirty="0"/>
           </a:p>
         </p:txBody>
       </p:sp>
       <p:sp>
         <p:nvSpPr>
-          <p:cNvPr id="27" name="Shape 25"/>
+          <p:cNvPr id="29" name="Shape 27"/>
           <p:cNvSpPr/>
           <p:nvPr/>
         </p:nvSpPr>
         <p:spPr>
           <a:xfrm>
-            <a:off x="2880360" y="4018788"/>
-            <a:ext cx="3336074" cy="219456"/>
+            <a:off x="2298162" y="4086454"/>
+            <a:ext cx="1320715" cy="181051"/>
           </a:xfrm>
           <a:prstGeom prst="rect">
             <a:avLst/>
@@ -7743,7 +7821,7 @@
           </a:solidFill>
           <a:ln w="12700">
             <a:solidFill>
-              <a:srgbClr val="93A1AA"/>
+              <a:srgbClr val="333333"/>
             </a:solidFill>
             <a:prstDash val="solid"/>
           </a:ln>
@@ -7751,14 +7829,14 @@
       </p:sp>
       <p:sp>
         <p:nvSpPr>
-          <p:cNvPr id="28" name="Text 26"/>
+          <p:cNvPr id="30" name="Text 28"/>
           <p:cNvSpPr txBox="1"/>
           <p:nvPr/>
         </p:nvSpPr>
         <p:spPr>
           <a:xfrm>
-            <a:off x="6289586" y="3973068"/>
-            <a:ext cx="868680" cy="274320"/>
+            <a:off x="3664596" y="4047134"/>
+            <a:ext cx="603504" cy="258775"/>
           </a:xfrm>
           <a:prstGeom prst="rect">
             <a:avLst/>
@@ -7774,7 +7852,7 @@
               <a:buNone/>
             </a:pPr>
             <a:r>
-              <a:rPr lang="en-US" sz="1050" dirty="0">
+              <a:rPr lang="en-US" sz="950" dirty="0">
                 <a:solidFill>
                   <a:srgbClr val="3A4750"/>
                 </a:solidFill>
@@ -7782,22 +7860,22 @@
                 <a:ea typeface="Calibri" pitchFamily="34" charset="-122"/>
                 <a:cs typeface="Calibri" pitchFamily="34" charset="-120"/>
               </a:rPr>
-              <a:t>1.081x</a:t>
+              <a:t>1.081</a:t>
             </a:r>
-            <a:endParaRPr lang="en-US" sz="1050" dirty="0"/>
+            <a:endParaRPr lang="en-US" sz="950" dirty="0"/>
           </a:p>
         </p:txBody>
       </p:sp>
       <p:sp>
         <p:nvSpPr>
-          <p:cNvPr id="29" name="Text 27"/>
+          <p:cNvPr id="31" name="Text 29"/>
           <p:cNvSpPr txBox="1"/>
           <p:nvPr/>
         </p:nvSpPr>
         <p:spPr>
           <a:xfrm>
-            <a:off x="566928" y="4279392"/>
-            <a:ext cx="2240280" cy="274320"/>
+            <a:off x="566928" y="4305910"/>
+            <a:ext cx="1676370" cy="258775"/>
           </a:xfrm>
           <a:prstGeom prst="rect">
             <a:avLst/>
@@ -7813,7 +7891,7 @@
               <a:buNone/>
             </a:pPr>
             <a:r>
-              <a:rPr lang="en-US" sz="1050" dirty="0">
+              <a:rPr lang="en-US" sz="950" dirty="0">
                 <a:solidFill>
                   <a:srgbClr val="3A4750"/>
                 </a:solidFill>
@@ -7823,20 +7901,20 @@
               </a:rPr>
               <a:t>glm-4.5</a:t>
             </a:r>
-            <a:endParaRPr lang="en-US" sz="1050" dirty="0"/>
+            <a:endParaRPr lang="en-US" sz="950" dirty="0"/>
           </a:p>
         </p:txBody>
       </p:sp>
       <p:sp>
         <p:nvSpPr>
-          <p:cNvPr id="30" name="Shape 28"/>
+          <p:cNvPr id="32" name="Shape 30"/>
           <p:cNvSpPr/>
           <p:nvPr/>
         </p:nvSpPr>
         <p:spPr>
           <a:xfrm>
-            <a:off x="2880360" y="4325112"/>
-            <a:ext cx="2617013" cy="219456"/>
+            <a:off x="2298162" y="4345229"/>
+            <a:ext cx="1036046" cy="181051"/>
           </a:xfrm>
           <a:prstGeom prst="rect">
             <a:avLst/>
@@ -7846,7 +7924,7 @@
           </a:solidFill>
           <a:ln w="12700">
             <a:solidFill>
-              <a:srgbClr val="93A1AA"/>
+              <a:srgbClr val="333333"/>
             </a:solidFill>
             <a:prstDash val="solid"/>
           </a:ln>
@@ -7854,14 +7932,14 @@
       </p:sp>
       <p:sp>
         <p:nvSpPr>
-          <p:cNvPr id="31" name="Text 29"/>
+          <p:cNvPr id="33" name="Text 31"/>
           <p:cNvSpPr txBox="1"/>
           <p:nvPr/>
         </p:nvSpPr>
         <p:spPr>
           <a:xfrm>
-            <a:off x="5570525" y="4279392"/>
-            <a:ext cx="868680" cy="274320"/>
+            <a:off x="3379928" y="4305910"/>
+            <a:ext cx="603504" cy="258775"/>
           </a:xfrm>
           <a:prstGeom prst="rect">
             <a:avLst/>
@@ -7877,7 +7955,7 @@
               <a:buNone/>
             </a:pPr>
             <a:r>
-              <a:rPr lang="en-US" sz="1050" dirty="0">
+              <a:rPr lang="en-US" sz="950" dirty="0">
                 <a:solidFill>
                   <a:srgbClr val="3A4750"/>
                 </a:solidFill>
@@ -7885,22 +7963,22 @@
                 <a:ea typeface="Calibri" pitchFamily="34" charset="-122"/>
                 <a:cs typeface="Calibri" pitchFamily="34" charset="-120"/>
               </a:rPr>
-              <a:t>0.848x</a:t>
+              <a:t>0.848</a:t>
             </a:r>
-            <a:endParaRPr lang="en-US" sz="1050" dirty="0"/>
+            <a:endParaRPr lang="en-US" sz="950" dirty="0"/>
           </a:p>
         </p:txBody>
       </p:sp>
       <p:sp>
         <p:nvSpPr>
-          <p:cNvPr id="32" name="Text 30"/>
+          <p:cNvPr id="34" name="Text 32"/>
           <p:cNvSpPr txBox="1"/>
           <p:nvPr/>
         </p:nvSpPr>
         <p:spPr>
           <a:xfrm>
-            <a:off x="566928" y="4585716"/>
-            <a:ext cx="2240280" cy="274320"/>
+            <a:off x="566928" y="4564685"/>
+            <a:ext cx="1676370" cy="258775"/>
           </a:xfrm>
           <a:prstGeom prst="rect">
             <a:avLst/>
@@ -7916,7 +7994,7 @@
               <a:buNone/>
             </a:pPr>
             <a:r>
-              <a:rPr lang="en-US" sz="1050" dirty="0">
+              <a:rPr lang="en-US" sz="950" dirty="0">
                 <a:solidFill>
                   <a:srgbClr val="3A4750"/>
                 </a:solidFill>
@@ -7926,20 +8004,20 @@
               </a:rPr>
               <a:t>o4-mini</a:t>
             </a:r>
-            <a:endParaRPr lang="en-US" sz="1050" dirty="0"/>
+            <a:endParaRPr lang="en-US" sz="950" dirty="0"/>
           </a:p>
         </p:txBody>
       </p:sp>
       <p:sp>
         <p:nvSpPr>
-          <p:cNvPr id="33" name="Shape 31"/>
+          <p:cNvPr id="35" name="Shape 33"/>
           <p:cNvSpPr/>
           <p:nvPr/>
         </p:nvSpPr>
         <p:spPr>
           <a:xfrm>
-            <a:off x="2880360" y="4631436"/>
-            <a:ext cx="2573807" cy="219456"/>
+            <a:off x="2298162" y="4604004"/>
+            <a:ext cx="1018942" cy="181051"/>
           </a:xfrm>
           <a:prstGeom prst="rect">
             <a:avLst/>
@@ -7949,7 +8027,7 @@
           </a:solidFill>
           <a:ln w="12700">
             <a:solidFill>
-              <a:srgbClr val="93A1AA"/>
+              <a:srgbClr val="333333"/>
             </a:solidFill>
             <a:prstDash val="solid"/>
           </a:ln>
@@ -7957,14 +8035,14 @@
       </p:sp>
       <p:sp>
         <p:nvSpPr>
-          <p:cNvPr id="34" name="Text 32"/>
+          <p:cNvPr id="36" name="Text 34"/>
           <p:cNvSpPr txBox="1"/>
           <p:nvPr/>
         </p:nvSpPr>
         <p:spPr>
           <a:xfrm>
-            <a:off x="5527319" y="4585716"/>
-            <a:ext cx="868680" cy="274320"/>
+            <a:off x="3362823" y="4564685"/>
+            <a:ext cx="603504" cy="258775"/>
           </a:xfrm>
           <a:prstGeom prst="rect">
             <a:avLst/>
@@ -7980,7 +8058,7 @@
               <a:buNone/>
             </a:pPr>
             <a:r>
-              <a:rPr lang="en-US" sz="1050" dirty="0">
+              <a:rPr lang="en-US" sz="950" dirty="0">
                 <a:solidFill>
                   <a:srgbClr val="3A4750"/>
                 </a:solidFill>
@@ -7988,22 +8066,22 @@
                 <a:ea typeface="Calibri" pitchFamily="34" charset="-122"/>
                 <a:cs typeface="Calibri" pitchFamily="34" charset="-120"/>
               </a:rPr>
-              <a:t>0.834x</a:t>
+              <a:t>0.834</a:t>
             </a:r>
-            <a:endParaRPr lang="en-US" sz="1050" dirty="0"/>
+            <a:endParaRPr lang="en-US" sz="950" dirty="0"/>
           </a:p>
         </p:txBody>
       </p:sp>
       <p:sp>
         <p:nvSpPr>
-          <p:cNvPr id="35" name="Text 33"/>
+          <p:cNvPr id="37" name="Text 35"/>
           <p:cNvSpPr txBox="1"/>
           <p:nvPr/>
         </p:nvSpPr>
         <p:spPr>
           <a:xfrm>
-            <a:off x="566928" y="4892040"/>
-            <a:ext cx="2240280" cy="274320"/>
+            <a:off x="566928" y="4823460"/>
+            <a:ext cx="1676370" cy="258775"/>
           </a:xfrm>
           <a:prstGeom prst="rect">
             <a:avLst/>
@@ -8019,7 +8097,7 @@
               <a:buNone/>
             </a:pPr>
             <a:r>
-              <a:rPr lang="en-US" sz="1050" dirty="0">
+              <a:rPr lang="en-US" sz="950" dirty="0">
                 <a:solidFill>
                   <a:srgbClr val="3A4750"/>
                 </a:solidFill>
@@ -8029,20 +8107,20 @@
               </a:rPr>
               <a:t>deepseek-reasoner</a:t>
             </a:r>
-            <a:endParaRPr lang="en-US" sz="1050" dirty="0"/>
+            <a:endParaRPr lang="en-US" sz="950" dirty="0"/>
           </a:p>
         </p:txBody>
       </p:sp>
       <p:sp>
         <p:nvSpPr>
-          <p:cNvPr id="36" name="Shape 34"/>
+          <p:cNvPr id="38" name="Shape 36"/>
           <p:cNvSpPr/>
           <p:nvPr/>
         </p:nvSpPr>
         <p:spPr>
           <a:xfrm>
-            <a:off x="2880360" y="4937760"/>
-            <a:ext cx="2444191" cy="219456"/>
+            <a:off x="2298162" y="4862779"/>
+            <a:ext cx="967628" cy="181051"/>
           </a:xfrm>
           <a:prstGeom prst="rect">
             <a:avLst/>
@@ -8052,7 +8130,7 @@
           </a:solidFill>
           <a:ln w="12700">
             <a:solidFill>
-              <a:srgbClr val="93A1AA"/>
+              <a:srgbClr val="333333"/>
             </a:solidFill>
             <a:prstDash val="solid"/>
           </a:ln>
@@ -8060,14 +8138,14 @@
       </p:sp>
       <p:sp>
         <p:nvSpPr>
-          <p:cNvPr id="37" name="Text 35"/>
+          <p:cNvPr id="39" name="Text 37"/>
           <p:cNvSpPr txBox="1"/>
           <p:nvPr/>
         </p:nvSpPr>
         <p:spPr>
           <a:xfrm>
-            <a:off x="5397703" y="4892040"/>
-            <a:ext cx="868680" cy="274320"/>
+            <a:off x="3311510" y="4823460"/>
+            <a:ext cx="603504" cy="258775"/>
           </a:xfrm>
           <a:prstGeom prst="rect">
             <a:avLst/>
@@ -8083,7 +8161,7 @@
               <a:buNone/>
             </a:pPr>
             <a:r>
-              <a:rPr lang="en-US" sz="1050" dirty="0">
+              <a:rPr lang="en-US" sz="950" dirty="0">
                 <a:solidFill>
                   <a:srgbClr val="3A4750"/>
                 </a:solidFill>
@@ -8091,22 +8169,22 @@
                 <a:ea typeface="Calibri" pitchFamily="34" charset="-122"/>
                 <a:cs typeface="Calibri" pitchFamily="34" charset="-120"/>
               </a:rPr>
-              <a:t>0.792x</a:t>
+              <a:t>0.792</a:t>
             </a:r>
-            <a:endParaRPr lang="en-US" sz="1050" dirty="0"/>
+            <a:endParaRPr lang="en-US" sz="950" dirty="0"/>
           </a:p>
         </p:txBody>
       </p:sp>
       <p:sp>
         <p:nvSpPr>
-          <p:cNvPr id="38" name="Text 36"/>
+          <p:cNvPr id="40" name="Text 38"/>
           <p:cNvSpPr txBox="1"/>
           <p:nvPr/>
         </p:nvSpPr>
         <p:spPr>
           <a:xfrm>
-            <a:off x="566928" y="5198364"/>
-            <a:ext cx="2240280" cy="274320"/>
+            <a:off x="566928" y="5082235"/>
+            <a:ext cx="1676370" cy="258775"/>
           </a:xfrm>
           <a:prstGeom prst="rect">
             <a:avLst/>
@@ -8122,7 +8200,7 @@
               <a:buNone/>
             </a:pPr>
             <a:r>
-              <a:rPr lang="en-US" sz="1050" dirty="0">
+              <a:rPr lang="en-US" sz="950" dirty="0">
                 <a:solidFill>
                   <a:srgbClr val="3A4750"/>
                 </a:solidFill>
@@ -8132,20 +8210,20 @@
               </a:rPr>
               <a:t>claude-opus-4.1</a:t>
             </a:r>
-            <a:endParaRPr lang="en-US" sz="1050" dirty="0"/>
+            <a:endParaRPr lang="en-US" sz="950" dirty="0"/>
           </a:p>
         </p:txBody>
       </p:sp>
       <p:sp>
         <p:nvSpPr>
-          <p:cNvPr id="39" name="Shape 37"/>
+          <p:cNvPr id="41" name="Shape 39"/>
           <p:cNvSpPr/>
           <p:nvPr/>
         </p:nvSpPr>
         <p:spPr>
           <a:xfrm>
-            <a:off x="2880360" y="5244084"/>
-            <a:ext cx="2314575" cy="219456"/>
+            <a:off x="2298162" y="5121554"/>
+            <a:ext cx="916315" cy="181051"/>
           </a:xfrm>
           <a:prstGeom prst="rect">
             <a:avLst/>
@@ -8155,7 +8233,7 @@
           </a:solidFill>
           <a:ln w="12700">
             <a:solidFill>
-              <a:srgbClr val="93A1AA"/>
+              <a:srgbClr val="333333"/>
             </a:solidFill>
             <a:prstDash val="solid"/>
           </a:ln>
@@ -8163,14 +8241,14 @@
       </p:sp>
       <p:sp>
         <p:nvSpPr>
-          <p:cNvPr id="40" name="Text 38"/>
+          <p:cNvPr id="42" name="Text 40"/>
           <p:cNvSpPr txBox="1"/>
           <p:nvPr/>
         </p:nvSpPr>
         <p:spPr>
           <a:xfrm>
-            <a:off x="5268087" y="5198364"/>
-            <a:ext cx="868680" cy="274320"/>
+            <a:off x="3260196" y="5082235"/>
+            <a:ext cx="603504" cy="258775"/>
           </a:xfrm>
           <a:prstGeom prst="rect">
             <a:avLst/>
@@ -8186,7 +8264,7 @@
               <a:buNone/>
             </a:pPr>
             <a:r>
-              <a:rPr lang="en-US" sz="1050" dirty="0">
+              <a:rPr lang="en-US" sz="950" dirty="0">
                 <a:solidFill>
                   <a:srgbClr val="3A4750"/>
                 </a:solidFill>
@@ -8194,22 +8272,22 @@
                 <a:ea typeface="Calibri" pitchFamily="34" charset="-122"/>
                 <a:cs typeface="Calibri" pitchFamily="34" charset="-120"/>
               </a:rPr>
-              <a:t>0.750x</a:t>
+              <a:t>0.750</a:t>
             </a:r>
-            <a:endParaRPr lang="en-US" sz="1050" dirty="0"/>
+            <a:endParaRPr lang="en-US" sz="950" dirty="0"/>
           </a:p>
         </p:txBody>
       </p:sp>
       <p:sp>
         <p:nvSpPr>
-          <p:cNvPr id="41" name="Text 39"/>
+          <p:cNvPr id="43" name="Text 41"/>
           <p:cNvSpPr txBox="1"/>
           <p:nvPr/>
         </p:nvSpPr>
         <p:spPr>
           <a:xfrm>
-            <a:off x="566928" y="5504688"/>
-            <a:ext cx="2240280" cy="274320"/>
+            <a:off x="566928" y="5341010"/>
+            <a:ext cx="1676370" cy="258775"/>
           </a:xfrm>
           <a:prstGeom prst="rect">
             <a:avLst/>
@@ -8225,7 +8303,7 @@
               <a:buNone/>
             </a:pPr>
             <a:r>
-              <a:rPr lang="en-US" sz="1050" dirty="0">
+              <a:rPr lang="en-US" sz="950" dirty="0">
                 <a:solidFill>
                   <a:srgbClr val="3A4750"/>
                 </a:solidFill>
@@ -8235,20 +8313,20 @@
               </a:rPr>
               <a:t>gpt-5-mini</a:t>
             </a:r>
-            <a:endParaRPr lang="en-US" sz="1050" dirty="0"/>
+            <a:endParaRPr lang="en-US" sz="950" dirty="0"/>
           </a:p>
         </p:txBody>
       </p:sp>
       <p:sp>
         <p:nvSpPr>
-          <p:cNvPr id="42" name="Shape 40"/>
+          <p:cNvPr id="44" name="Shape 42"/>
           <p:cNvSpPr/>
           <p:nvPr/>
         </p:nvSpPr>
         <p:spPr>
           <a:xfrm>
-            <a:off x="2880360" y="5550408"/>
-            <a:ext cx="2089290" cy="219456"/>
+            <a:off x="2298162" y="5380330"/>
+            <a:ext cx="827127" cy="181051"/>
           </a:xfrm>
           <a:prstGeom prst="rect">
             <a:avLst/>
@@ -8258,7 +8336,7 @@
           </a:solidFill>
           <a:ln w="12700">
             <a:solidFill>
-              <a:srgbClr val="93A1AA"/>
+              <a:srgbClr val="333333"/>
             </a:solidFill>
             <a:prstDash val="solid"/>
           </a:ln>
@@ -8266,14 +8344,14 @@
       </p:sp>
       <p:sp>
         <p:nvSpPr>
-          <p:cNvPr id="43" name="Text 41"/>
+          <p:cNvPr id="45" name="Text 43"/>
           <p:cNvSpPr txBox="1"/>
           <p:nvPr/>
         </p:nvSpPr>
         <p:spPr>
           <a:xfrm>
-            <a:off x="5042802" y="5504688"/>
-            <a:ext cx="868680" cy="274320"/>
+            <a:off x="3171008" y="5341010"/>
+            <a:ext cx="603504" cy="258775"/>
           </a:xfrm>
           <a:prstGeom prst="rect">
             <a:avLst/>
@@ -8289,7 +8367,7 @@
               <a:buNone/>
             </a:pPr>
             <a:r>
-              <a:rPr lang="en-US" sz="1050" dirty="0">
+              <a:rPr lang="en-US" sz="950" dirty="0">
                 <a:solidFill>
                   <a:srgbClr val="3A4750"/>
                 </a:solidFill>
@@ -8297,22 +8375,22 @@
                 <a:ea typeface="Calibri" pitchFamily="34" charset="-122"/>
                 <a:cs typeface="Calibri" pitchFamily="34" charset="-120"/>
               </a:rPr>
-              <a:t>0.677x</a:t>
+              <a:t>0.677</a:t>
             </a:r>
-            <a:endParaRPr lang="en-US" sz="1050" dirty="0"/>
+            <a:endParaRPr lang="en-US" sz="950" dirty="0"/>
           </a:p>
         </p:txBody>
       </p:sp>
       <p:sp>
         <p:nvSpPr>
-          <p:cNvPr id="44" name="Text 42"/>
+          <p:cNvPr id="46" name="Text 44"/>
           <p:cNvSpPr txBox="1"/>
           <p:nvPr/>
         </p:nvSpPr>
         <p:spPr>
           <a:xfrm>
-            <a:off x="566928" y="5811012"/>
-            <a:ext cx="2240280" cy="274320"/>
+            <a:off x="566928" y="5599786"/>
+            <a:ext cx="1676370" cy="258775"/>
           </a:xfrm>
           <a:prstGeom prst="rect">
             <a:avLst/>
@@ -8328,7 +8406,7 @@
               <a:buNone/>
             </a:pPr>
             <a:r>
-              <a:rPr lang="en-US" sz="1050" dirty="0">
+              <a:rPr lang="en-US" sz="950" dirty="0">
                 <a:solidFill>
                   <a:srgbClr val="3A4750"/>
                 </a:solidFill>
@@ -8338,20 +8416,20 @@
               </a:rPr>
               <a:t>gpt-5-pro (med)</a:t>
             </a:r>
-            <a:endParaRPr lang="en-US" sz="1050" dirty="0"/>
+            <a:endParaRPr lang="en-US" sz="950" dirty="0"/>
           </a:p>
         </p:txBody>
       </p:sp>
       <p:sp>
         <p:nvSpPr>
-          <p:cNvPr id="45" name="Shape 43"/>
+          <p:cNvPr id="47" name="Shape 45"/>
           <p:cNvSpPr/>
           <p:nvPr/>
         </p:nvSpPr>
         <p:spPr>
           <a:xfrm>
-            <a:off x="2880360" y="5856732"/>
-            <a:ext cx="2052257" cy="219456"/>
+            <a:off x="2298162" y="5639105"/>
+            <a:ext cx="812466" cy="181051"/>
           </a:xfrm>
           <a:prstGeom prst="rect">
             <a:avLst/>
@@ -8361,7 +8439,7 @@
           </a:solidFill>
           <a:ln w="12700">
             <a:solidFill>
-              <a:srgbClr val="93A1AA"/>
+              <a:srgbClr val="333333"/>
             </a:solidFill>
             <a:prstDash val="solid"/>
           </a:ln>
@@ -8369,14 +8447,14 @@
       </p:sp>
       <p:sp>
         <p:nvSpPr>
-          <p:cNvPr id="46" name="Text 44"/>
+          <p:cNvPr id="48" name="Text 46"/>
           <p:cNvSpPr txBox="1"/>
           <p:nvPr/>
         </p:nvSpPr>
         <p:spPr>
           <a:xfrm>
-            <a:off x="5005769" y="5811012"/>
-            <a:ext cx="868680" cy="274320"/>
+            <a:off x="3156347" y="5599786"/>
+            <a:ext cx="603504" cy="258775"/>
           </a:xfrm>
           <a:prstGeom prst="rect">
             <a:avLst/>
@@ -8392,7 +8470,7 @@
               <a:buNone/>
             </a:pPr>
             <a:r>
-              <a:rPr lang="en-US" sz="1050" dirty="0">
+              <a:rPr lang="en-US" sz="950" dirty="0">
                 <a:solidFill>
                   <a:srgbClr val="3A4750"/>
                 </a:solidFill>
@@ -8400,22 +8478,22 @@
                 <a:ea typeface="Calibri" pitchFamily="34" charset="-122"/>
                 <a:cs typeface="Calibri" pitchFamily="34" charset="-120"/>
               </a:rPr>
-              <a:t>0.665x</a:t>
+              <a:t>0.665</a:t>
             </a:r>
-            <a:endParaRPr lang="en-US" sz="1050" dirty="0"/>
+            <a:endParaRPr lang="en-US" sz="950" dirty="0"/>
           </a:p>
         </p:txBody>
       </p:sp>
       <p:sp>
         <p:nvSpPr>
-          <p:cNvPr id="47" name="Shape 45"/>
+          <p:cNvPr id="49" name="Shape 47"/>
           <p:cNvSpPr/>
           <p:nvPr/>
         </p:nvSpPr>
         <p:spPr>
           <a:xfrm>
-            <a:off x="5966460" y="1792224"/>
-            <a:ext cx="0" cy="4325112"/>
+            <a:off x="3519914" y="2212848"/>
+            <a:ext cx="0" cy="3641141"/>
           </a:xfrm>
           <a:prstGeom prst="line">
             <a:avLst/>
@@ -8431,14 +8509,14 @@
       </p:sp>
       <p:sp>
         <p:nvSpPr>
-          <p:cNvPr id="48" name="Text 46"/>
+          <p:cNvPr id="50" name="Text 48"/>
           <p:cNvSpPr txBox="1"/>
           <p:nvPr/>
         </p:nvSpPr>
         <p:spPr>
           <a:xfrm>
-            <a:off x="6021324" y="1572768"/>
-            <a:ext cx="2194560" cy="237744"/>
+            <a:off x="6400800" y="1773936"/>
+            <a:ext cx="5221224" cy="237744"/>
           </a:xfrm>
           <a:prstGeom prst="rect">
             <a:avLst/>
@@ -8454,7 +8532,46 @@
               <a:buNone/>
             </a:pPr>
             <a:r>
-              <a:rPr lang="en-US" sz="950" dirty="0">
+              <a:rPr lang="en-US" sz="1200" b="1" dirty="0">
+                <a:solidFill>
+                  <a:srgbClr val="10161C"/>
+                </a:solidFill>
+                <a:latin typeface="Calibri" pitchFamily="34" charset="0"/>
+                <a:ea typeface="Calibri" pitchFamily="34" charset="-122"/>
+                <a:cs typeface="Calibri" pitchFamily="34" charset="-120"/>
+              </a:rPr>
+              <a:t>Four tasks  ·  all 18 models  +  both our seeds</a:t>
+            </a:r>
+            <a:endParaRPr lang="en-US" sz="1200" dirty="0"/>
+          </a:p>
+        </p:txBody>
+      </p:sp>
+      <p:sp>
+        <p:nvSpPr>
+          <p:cNvPr id="51" name="Text 49"/>
+          <p:cNvSpPr txBox="1"/>
+          <p:nvPr/>
+        </p:nvSpPr>
+        <p:spPr>
+          <a:xfrm>
+            <a:off x="6400800" y="2011680"/>
+            <a:ext cx="5221224" cy="219456"/>
+          </a:xfrm>
+          <a:prstGeom prst="rect">
+            <a:avLst/>
+          </a:prstGeom>
+          <a:noFill/>
+          <a:ln/>
+        </p:spPr>
+        <p:txBody>
+          <a:bodyPr wrap="square" lIns="0" tIns="0" rIns="0" bIns="0" rtlCol="0" anchor="ctr"/>
+          <a:lstStyle/>
+          <a:p>
+            <a:pPr indent="0" marL="0">
+              <a:buNone/>
+            </a:pPr>
+            <a:r>
+              <a:rPr lang="en-US" sz="900" dirty="0">
                 <a:solidFill>
                   <a:srgbClr val="93A1AA"/>
                 </a:solidFill>
@@ -8462,22 +8579,22 @@
                 <a:ea typeface="Calibri" pitchFamily="34" charset="-122"/>
                 <a:cs typeface="Calibri" pitchFamily="34" charset="-120"/>
               </a:rPr>
-              <a:t>1.0x  —  no improvement</a:t>
+              <a:t>eigenvectors · psd_cone · fft_cmplx · convolve2d — the only four nobody is missing</a:t>
             </a:r>
-            <a:endParaRPr lang="en-US" sz="950" dirty="0"/>
+            <a:endParaRPr lang="en-US" sz="900" dirty="0"/>
           </a:p>
         </p:txBody>
       </p:sp>
       <p:sp>
         <p:nvSpPr>
-          <p:cNvPr id="49" name="Text 47"/>
+          <p:cNvPr id="52" name="Text 50"/>
           <p:cNvSpPr txBox="1"/>
           <p:nvPr/>
         </p:nvSpPr>
         <p:spPr>
           <a:xfrm>
-            <a:off x="566928" y="6254496"/>
-            <a:ext cx="11055096" cy="420624"/>
+            <a:off x="6400800" y="2235708"/>
+            <a:ext cx="1644686" cy="181051"/>
           </a:xfrm>
           <a:prstGeom prst="rect">
             <a:avLst/>
@@ -8489,24 +8606,2134 @@
           <a:bodyPr wrap="square" lIns="0" tIns="0" rIns="0" bIns="0" rtlCol="0" anchor="ctr"/>
           <a:lstStyle/>
           <a:p>
-            <a:pPr indent="0" marL="0">
-              <a:lnSpc>
-                <a:spcPts val="1200"/>
-              </a:lnSpc>
+            <a:pPr algn="r" indent="0" marL="0">
               <a:buNone/>
             </a:pPr>
             <a:r>
-              <a:rPr lang="en-US" sz="950" dirty="0">
+              <a:rPr lang="en-US" sz="850" dirty="0">
                 <a:solidFill>
-                  <a:srgbClr val="93A1AA"/>
+                  <a:srgbClr val="3A4750"/>
                 </a:solidFill>
                 <a:latin typeface="Calibri" pitchFamily="34" charset="0"/>
                 <a:ea typeface="Calibri" pitchFamily="34" charset="-122"/>
                 <a:cs typeface="Calibri" pitchFamily="34" charset="-120"/>
               </a:rPr>
-              <a:t>AlgoTune’s own published leaderboard scores are NOT used: their aggregation could not be reproduced from their per-task file. These grey bars are harmonic means we computed — the statistic AlphaEvolve and MetaEvolve use, whose tables do reconcile to their headlines.</a:t>
+              <a:t>claude-opus-4.6</a:t>
             </a:r>
-            <a:endParaRPr lang="en-US" sz="950" dirty="0"/>
+            <a:endParaRPr lang="en-US" sz="850" dirty="0"/>
+          </a:p>
+        </p:txBody>
+      </p:sp>
+      <p:sp>
+        <p:nvSpPr>
+          <p:cNvPr id="53" name="Shape 51"/>
+          <p:cNvSpPr/>
+          <p:nvPr/>
+        </p:nvSpPr>
+        <p:spPr>
+          <a:xfrm>
+            <a:off x="8100350" y="2275027"/>
+            <a:ext cx="2708509" cy="103327"/>
+          </a:xfrm>
+          <a:prstGeom prst="rect">
+            <a:avLst/>
+          </a:prstGeom>
+          <a:solidFill>
+            <a:srgbClr val="93A1AA"/>
+          </a:solidFill>
+          <a:ln w="12700">
+            <a:solidFill>
+              <a:srgbClr val="333333"/>
+            </a:solidFill>
+            <a:prstDash val="solid"/>
+          </a:ln>
+        </p:spPr>
+      </p:sp>
+      <p:sp>
+        <p:nvSpPr>
+          <p:cNvPr id="54" name="Text 52"/>
+          <p:cNvSpPr txBox="1"/>
+          <p:nvPr/>
+        </p:nvSpPr>
+        <p:spPr>
+          <a:xfrm>
+            <a:off x="10854578" y="2235708"/>
+            <a:ext cx="603504" cy="181051"/>
+          </a:xfrm>
+          <a:prstGeom prst="rect">
+            <a:avLst/>
+          </a:prstGeom>
+          <a:noFill/>
+          <a:ln/>
+        </p:spPr>
+        <p:txBody>
+          <a:bodyPr wrap="square" lIns="0" tIns="0" rIns="0" bIns="0" rtlCol="0" anchor="ctr"/>
+          <a:lstStyle/>
+          <a:p>
+            <a:pPr indent="0" marL="0">
+              <a:buNone/>
+            </a:pPr>
+            <a:r>
+              <a:rPr lang="en-US" sz="850" dirty="0">
+                <a:solidFill>
+                  <a:srgbClr val="3A4750"/>
+                </a:solidFill>
+                <a:latin typeface="Calibri" pitchFamily="34" charset="0"/>
+                <a:ea typeface="Calibri" pitchFamily="34" charset="-122"/>
+                <a:cs typeface="Calibri" pitchFamily="34" charset="-120"/>
+              </a:rPr>
+              <a:t>3.027</a:t>
+            </a:r>
+            <a:endParaRPr lang="en-US" sz="850" dirty="0"/>
+          </a:p>
+        </p:txBody>
+      </p:sp>
+      <p:sp>
+        <p:nvSpPr>
+          <p:cNvPr id="55" name="Text 53"/>
+          <p:cNvSpPr txBox="1"/>
+          <p:nvPr/>
+        </p:nvSpPr>
+        <p:spPr>
+          <a:xfrm>
+            <a:off x="6400800" y="2416759"/>
+            <a:ext cx="1644686" cy="181051"/>
+          </a:xfrm>
+          <a:prstGeom prst="rect">
+            <a:avLst/>
+          </a:prstGeom>
+          <a:noFill/>
+          <a:ln/>
+        </p:spPr>
+        <p:txBody>
+          <a:bodyPr wrap="square" lIns="0" tIns="0" rIns="0" bIns="0" rtlCol="0" anchor="ctr"/>
+          <a:lstStyle/>
+          <a:p>
+            <a:pPr algn="r" indent="0" marL="0">
+              <a:buNone/>
+            </a:pPr>
+            <a:r>
+              <a:rPr lang="en-US" sz="850" dirty="0">
+                <a:solidFill>
+                  <a:srgbClr val="3A4750"/>
+                </a:solidFill>
+                <a:latin typeface="Calibri" pitchFamily="34" charset="0"/>
+                <a:ea typeface="Calibri" pitchFamily="34" charset="-122"/>
+                <a:cs typeface="Calibri" pitchFamily="34" charset="-120"/>
+              </a:rPr>
+              <a:t>gemini-3.1-pro-preview</a:t>
+            </a:r>
+            <a:endParaRPr lang="en-US" sz="850" dirty="0"/>
+          </a:p>
+        </p:txBody>
+      </p:sp>
+      <p:sp>
+        <p:nvSpPr>
+          <p:cNvPr id="56" name="Shape 54"/>
+          <p:cNvSpPr/>
+          <p:nvPr/>
+        </p:nvSpPr>
+        <p:spPr>
+          <a:xfrm>
+            <a:off x="8100350" y="2456078"/>
+            <a:ext cx="2680771" cy="103327"/>
+          </a:xfrm>
+          <a:prstGeom prst="rect">
+            <a:avLst/>
+          </a:prstGeom>
+          <a:solidFill>
+            <a:srgbClr val="93A1AA"/>
+          </a:solidFill>
+          <a:ln w="12700">
+            <a:solidFill>
+              <a:srgbClr val="333333"/>
+            </a:solidFill>
+            <a:prstDash val="solid"/>
+          </a:ln>
+        </p:spPr>
+      </p:sp>
+      <p:sp>
+        <p:nvSpPr>
+          <p:cNvPr id="57" name="Text 55"/>
+          <p:cNvSpPr txBox="1"/>
+          <p:nvPr/>
+        </p:nvSpPr>
+        <p:spPr>
+          <a:xfrm>
+            <a:off x="10826840" y="2416759"/>
+            <a:ext cx="603504" cy="181051"/>
+          </a:xfrm>
+          <a:prstGeom prst="rect">
+            <a:avLst/>
+          </a:prstGeom>
+          <a:noFill/>
+          <a:ln/>
+        </p:spPr>
+        <p:txBody>
+          <a:bodyPr wrap="square" lIns="0" tIns="0" rIns="0" bIns="0" rtlCol="0" anchor="ctr"/>
+          <a:lstStyle/>
+          <a:p>
+            <a:pPr indent="0" marL="0">
+              <a:buNone/>
+            </a:pPr>
+            <a:r>
+              <a:rPr lang="en-US" sz="850" dirty="0">
+                <a:solidFill>
+                  <a:srgbClr val="3A4750"/>
+                </a:solidFill>
+                <a:latin typeface="Calibri" pitchFamily="34" charset="0"/>
+                <a:ea typeface="Calibri" pitchFamily="34" charset="-122"/>
+                <a:cs typeface="Calibri" pitchFamily="34" charset="-120"/>
+              </a:rPr>
+              <a:t>2.996</a:t>
+            </a:r>
+            <a:endParaRPr lang="en-US" sz="850" dirty="0"/>
+          </a:p>
+        </p:txBody>
+      </p:sp>
+      <p:sp>
+        <p:nvSpPr>
+          <p:cNvPr id="58" name="Text 56"/>
+          <p:cNvSpPr txBox="1"/>
+          <p:nvPr/>
+        </p:nvSpPr>
+        <p:spPr>
+          <a:xfrm>
+            <a:off x="6400800" y="2597810"/>
+            <a:ext cx="1644686" cy="181051"/>
+          </a:xfrm>
+          <a:prstGeom prst="rect">
+            <a:avLst/>
+          </a:prstGeom>
+          <a:noFill/>
+          <a:ln/>
+        </p:spPr>
+        <p:txBody>
+          <a:bodyPr wrap="square" lIns="0" tIns="0" rIns="0" bIns="0" rtlCol="0" anchor="ctr"/>
+          <a:lstStyle/>
+          <a:p>
+            <a:pPr algn="r" indent="0" marL="0">
+              <a:buNone/>
+            </a:pPr>
+            <a:r>
+              <a:rPr lang="en-US" sz="850" b="1" dirty="0">
+                <a:solidFill>
+                  <a:srgbClr val="0E7C66"/>
+                </a:solidFill>
+                <a:latin typeface="Calibri" pitchFamily="34" charset="0"/>
+                <a:ea typeface="Calibri" pitchFamily="34" charset="-122"/>
+                <a:cs typeface="Calibri" pitchFamily="34" charset="-120"/>
+              </a:rPr>
+              <a:t>This port — seed 0</a:t>
+            </a:r>
+            <a:endParaRPr lang="en-US" sz="850" dirty="0"/>
+          </a:p>
+        </p:txBody>
+      </p:sp>
+      <p:sp>
+        <p:nvSpPr>
+          <p:cNvPr id="59" name="Shape 57"/>
+          <p:cNvSpPr/>
+          <p:nvPr/>
+        </p:nvSpPr>
+        <p:spPr>
+          <a:xfrm>
+            <a:off x="8100350" y="2637130"/>
+            <a:ext cx="2648558" cy="103327"/>
+          </a:xfrm>
+          <a:prstGeom prst="rect">
+            <a:avLst/>
+          </a:prstGeom>
+          <a:solidFill>
+            <a:srgbClr val="0E7C66"/>
+          </a:solidFill>
+          <a:ln w="12700">
+            <a:solidFill>
+              <a:srgbClr val="333333"/>
+            </a:solidFill>
+            <a:prstDash val="solid"/>
+          </a:ln>
+        </p:spPr>
+      </p:sp>
+      <p:sp>
+        <p:nvSpPr>
+          <p:cNvPr id="60" name="Text 58"/>
+          <p:cNvSpPr txBox="1"/>
+          <p:nvPr/>
+        </p:nvSpPr>
+        <p:spPr>
+          <a:xfrm>
+            <a:off x="10794628" y="2597810"/>
+            <a:ext cx="603504" cy="181051"/>
+          </a:xfrm>
+          <a:prstGeom prst="rect">
+            <a:avLst/>
+          </a:prstGeom>
+          <a:noFill/>
+          <a:ln/>
+        </p:spPr>
+        <p:txBody>
+          <a:bodyPr wrap="square" lIns="0" tIns="0" rIns="0" bIns="0" rtlCol="0" anchor="ctr"/>
+          <a:lstStyle/>
+          <a:p>
+            <a:pPr indent="0" marL="0">
+              <a:buNone/>
+            </a:pPr>
+            <a:r>
+              <a:rPr lang="en-US" sz="850" b="1" dirty="0">
+                <a:solidFill>
+                  <a:srgbClr val="0E7C66"/>
+                </a:solidFill>
+                <a:latin typeface="Calibri" pitchFamily="34" charset="0"/>
+                <a:ea typeface="Calibri" pitchFamily="34" charset="-122"/>
+                <a:cs typeface="Calibri" pitchFamily="34" charset="-120"/>
+              </a:rPr>
+              <a:t>2.960</a:t>
+            </a:r>
+            <a:endParaRPr lang="en-US" sz="850" dirty="0"/>
+          </a:p>
+        </p:txBody>
+      </p:sp>
+      <p:sp>
+        <p:nvSpPr>
+          <p:cNvPr id="61" name="Text 59"/>
+          <p:cNvSpPr txBox="1"/>
+          <p:nvPr/>
+        </p:nvSpPr>
+        <p:spPr>
+          <a:xfrm>
+            <a:off x="6400800" y="2778862"/>
+            <a:ext cx="1644686" cy="181051"/>
+          </a:xfrm>
+          <a:prstGeom prst="rect">
+            <a:avLst/>
+          </a:prstGeom>
+          <a:noFill/>
+          <a:ln/>
+        </p:spPr>
+        <p:txBody>
+          <a:bodyPr wrap="square" lIns="0" tIns="0" rIns="0" bIns="0" rtlCol="0" anchor="ctr"/>
+          <a:lstStyle/>
+          <a:p>
+            <a:pPr algn="r" indent="0" marL="0">
+              <a:buNone/>
+            </a:pPr>
+            <a:r>
+              <a:rPr lang="en-US" sz="850" dirty="0">
+                <a:solidFill>
+                  <a:srgbClr val="3A4750"/>
+                </a:solidFill>
+                <a:latin typeface="Calibri" pitchFamily="34" charset="0"/>
+                <a:ea typeface="Calibri" pitchFamily="34" charset="-122"/>
+                <a:cs typeface="Calibri" pitchFamily="34" charset="-120"/>
+              </a:rPr>
+              <a:t>claude-opus-4.5</a:t>
+            </a:r>
+            <a:endParaRPr lang="en-US" sz="850" dirty="0"/>
+          </a:p>
+        </p:txBody>
+      </p:sp>
+      <p:sp>
+        <p:nvSpPr>
+          <p:cNvPr id="62" name="Shape 60"/>
+          <p:cNvSpPr/>
+          <p:nvPr/>
+        </p:nvSpPr>
+        <p:spPr>
+          <a:xfrm>
+            <a:off x="8100350" y="2818181"/>
+            <a:ext cx="2585029" cy="103327"/>
+          </a:xfrm>
+          <a:prstGeom prst="rect">
+            <a:avLst/>
+          </a:prstGeom>
+          <a:solidFill>
+            <a:srgbClr val="93A1AA"/>
+          </a:solidFill>
+          <a:ln w="12700">
+            <a:solidFill>
+              <a:srgbClr val="333333"/>
+            </a:solidFill>
+            <a:prstDash val="solid"/>
+          </a:ln>
+        </p:spPr>
+      </p:sp>
+      <p:sp>
+        <p:nvSpPr>
+          <p:cNvPr id="63" name="Text 61"/>
+          <p:cNvSpPr txBox="1"/>
+          <p:nvPr/>
+        </p:nvSpPr>
+        <p:spPr>
+          <a:xfrm>
+            <a:off x="10731098" y="2778862"/>
+            <a:ext cx="603504" cy="181051"/>
+          </a:xfrm>
+          <a:prstGeom prst="rect">
+            <a:avLst/>
+          </a:prstGeom>
+          <a:noFill/>
+          <a:ln/>
+        </p:spPr>
+        <p:txBody>
+          <a:bodyPr wrap="square" lIns="0" tIns="0" rIns="0" bIns="0" rtlCol="0" anchor="ctr"/>
+          <a:lstStyle/>
+          <a:p>
+            <a:pPr indent="0" marL="0">
+              <a:buNone/>
+            </a:pPr>
+            <a:r>
+              <a:rPr lang="en-US" sz="850" dirty="0">
+                <a:solidFill>
+                  <a:srgbClr val="3A4750"/>
+                </a:solidFill>
+                <a:latin typeface="Calibri" pitchFamily="34" charset="0"/>
+                <a:ea typeface="Calibri" pitchFamily="34" charset="-122"/>
+                <a:cs typeface="Calibri" pitchFamily="34" charset="-120"/>
+              </a:rPr>
+              <a:t>2.889</a:t>
+            </a:r>
+            <a:endParaRPr lang="en-US" sz="850" dirty="0"/>
+          </a:p>
+        </p:txBody>
+      </p:sp>
+      <p:sp>
+        <p:nvSpPr>
+          <p:cNvPr id="64" name="Text 62"/>
+          <p:cNvSpPr txBox="1"/>
+          <p:nvPr/>
+        </p:nvSpPr>
+        <p:spPr>
+          <a:xfrm>
+            <a:off x="6400800" y="2959913"/>
+            <a:ext cx="1644686" cy="181051"/>
+          </a:xfrm>
+          <a:prstGeom prst="rect">
+            <a:avLst/>
+          </a:prstGeom>
+          <a:noFill/>
+          <a:ln/>
+        </p:spPr>
+        <p:txBody>
+          <a:bodyPr wrap="square" lIns="0" tIns="0" rIns="0" bIns="0" rtlCol="0" anchor="ctr"/>
+          <a:lstStyle/>
+          <a:p>
+            <a:pPr algn="r" indent="0" marL="0">
+              <a:buNone/>
+            </a:pPr>
+            <a:r>
+              <a:rPr lang="en-US" sz="850" b="1" dirty="0">
+                <a:solidFill>
+                  <a:srgbClr val="0E7C66"/>
+                </a:solidFill>
+                <a:latin typeface="Calibri" pitchFamily="34" charset="0"/>
+                <a:ea typeface="Calibri" pitchFamily="34" charset="-122"/>
+                <a:cs typeface="Calibri" pitchFamily="34" charset="-120"/>
+              </a:rPr>
+              <a:t>This port — seed 1</a:t>
+            </a:r>
+            <a:endParaRPr lang="en-US" sz="850" dirty="0"/>
+          </a:p>
+        </p:txBody>
+      </p:sp>
+      <p:sp>
+        <p:nvSpPr>
+          <p:cNvPr id="65" name="Shape 63"/>
+          <p:cNvSpPr/>
+          <p:nvPr/>
+        </p:nvSpPr>
+        <p:spPr>
+          <a:xfrm>
+            <a:off x="8100350" y="2999232"/>
+            <a:ext cx="2567133" cy="103327"/>
+          </a:xfrm>
+          <a:prstGeom prst="rect">
+            <a:avLst/>
+          </a:prstGeom>
+          <a:solidFill>
+            <a:srgbClr val="0E7C66"/>
+          </a:solidFill>
+          <a:ln w="12700">
+            <a:solidFill>
+              <a:srgbClr val="333333"/>
+            </a:solidFill>
+            <a:prstDash val="solid"/>
+          </a:ln>
+        </p:spPr>
+      </p:sp>
+      <p:sp>
+        <p:nvSpPr>
+          <p:cNvPr id="66" name="Text 64"/>
+          <p:cNvSpPr txBox="1"/>
+          <p:nvPr/>
+        </p:nvSpPr>
+        <p:spPr>
+          <a:xfrm>
+            <a:off x="10713203" y="2959913"/>
+            <a:ext cx="603504" cy="181051"/>
+          </a:xfrm>
+          <a:prstGeom prst="rect">
+            <a:avLst/>
+          </a:prstGeom>
+          <a:noFill/>
+          <a:ln/>
+        </p:spPr>
+        <p:txBody>
+          <a:bodyPr wrap="square" lIns="0" tIns="0" rIns="0" bIns="0" rtlCol="0" anchor="ctr"/>
+          <a:lstStyle/>
+          <a:p>
+            <a:pPr indent="0" marL="0">
+              <a:buNone/>
+            </a:pPr>
+            <a:r>
+              <a:rPr lang="en-US" sz="850" b="1" dirty="0">
+                <a:solidFill>
+                  <a:srgbClr val="0E7C66"/>
+                </a:solidFill>
+                <a:latin typeface="Calibri" pitchFamily="34" charset="0"/>
+                <a:ea typeface="Calibri" pitchFamily="34" charset="-122"/>
+                <a:cs typeface="Calibri" pitchFamily="34" charset="-120"/>
+              </a:rPr>
+              <a:t>2.869</a:t>
+            </a:r>
+            <a:endParaRPr lang="en-US" sz="850" dirty="0"/>
+          </a:p>
+        </p:txBody>
+      </p:sp>
+      <p:sp>
+        <p:nvSpPr>
+          <p:cNvPr id="67" name="Text 65"/>
+          <p:cNvSpPr txBox="1"/>
+          <p:nvPr/>
+        </p:nvSpPr>
+        <p:spPr>
+          <a:xfrm>
+            <a:off x="6400800" y="3140964"/>
+            <a:ext cx="1644686" cy="181051"/>
+          </a:xfrm>
+          <a:prstGeom prst="rect">
+            <a:avLst/>
+          </a:prstGeom>
+          <a:noFill/>
+          <a:ln/>
+        </p:spPr>
+        <p:txBody>
+          <a:bodyPr wrap="square" lIns="0" tIns="0" rIns="0" bIns="0" rtlCol="0" anchor="ctr"/>
+          <a:lstStyle/>
+          <a:p>
+            <a:pPr algn="r" indent="0" marL="0">
+              <a:buNone/>
+            </a:pPr>
+            <a:r>
+              <a:rPr lang="en-US" sz="850" dirty="0">
+                <a:solidFill>
+                  <a:srgbClr val="3A4750"/>
+                </a:solidFill>
+                <a:latin typeface="Calibri" pitchFamily="34" charset="0"/>
+                <a:ea typeface="Calibri" pitchFamily="34" charset="-122"/>
+                <a:cs typeface="Calibri" pitchFamily="34" charset="-120"/>
+              </a:rPr>
+              <a:t>gemini-3-pro-preview</a:t>
+            </a:r>
+            <a:endParaRPr lang="en-US" sz="850" dirty="0"/>
+          </a:p>
+        </p:txBody>
+      </p:sp>
+      <p:sp>
+        <p:nvSpPr>
+          <p:cNvPr id="68" name="Shape 66"/>
+          <p:cNvSpPr/>
+          <p:nvPr/>
+        </p:nvSpPr>
+        <p:spPr>
+          <a:xfrm>
+            <a:off x="8100350" y="3180283"/>
+            <a:ext cx="2559080" cy="103327"/>
+          </a:xfrm>
+          <a:prstGeom prst="rect">
+            <a:avLst/>
+          </a:prstGeom>
+          <a:solidFill>
+            <a:srgbClr val="93A1AA"/>
+          </a:solidFill>
+          <a:ln w="12700">
+            <a:solidFill>
+              <a:srgbClr val="333333"/>
+            </a:solidFill>
+            <a:prstDash val="solid"/>
+          </a:ln>
+        </p:spPr>
+      </p:sp>
+      <p:sp>
+        <p:nvSpPr>
+          <p:cNvPr id="69" name="Text 67"/>
+          <p:cNvSpPr txBox="1"/>
+          <p:nvPr/>
+        </p:nvSpPr>
+        <p:spPr>
+          <a:xfrm>
+            <a:off x="10705150" y="3140964"/>
+            <a:ext cx="603504" cy="181051"/>
+          </a:xfrm>
+          <a:prstGeom prst="rect">
+            <a:avLst/>
+          </a:prstGeom>
+          <a:noFill/>
+          <a:ln/>
+        </p:spPr>
+        <p:txBody>
+          <a:bodyPr wrap="square" lIns="0" tIns="0" rIns="0" bIns="0" rtlCol="0" anchor="ctr"/>
+          <a:lstStyle/>
+          <a:p>
+            <a:pPr indent="0" marL="0">
+              <a:buNone/>
+            </a:pPr>
+            <a:r>
+              <a:rPr lang="en-US" sz="850" dirty="0">
+                <a:solidFill>
+                  <a:srgbClr val="3A4750"/>
+                </a:solidFill>
+                <a:latin typeface="Calibri" pitchFamily="34" charset="0"/>
+                <a:ea typeface="Calibri" pitchFamily="34" charset="-122"/>
+                <a:cs typeface="Calibri" pitchFamily="34" charset="-120"/>
+              </a:rPr>
+              <a:t>2.860</a:t>
+            </a:r>
+            <a:endParaRPr lang="en-US" sz="850" dirty="0"/>
+          </a:p>
+        </p:txBody>
+      </p:sp>
+      <p:sp>
+        <p:nvSpPr>
+          <p:cNvPr id="70" name="Text 68"/>
+          <p:cNvSpPr txBox="1"/>
+          <p:nvPr/>
+        </p:nvSpPr>
+        <p:spPr>
+          <a:xfrm>
+            <a:off x="6400800" y="3322015"/>
+            <a:ext cx="1644686" cy="181051"/>
+          </a:xfrm>
+          <a:prstGeom prst="rect">
+            <a:avLst/>
+          </a:prstGeom>
+          <a:noFill/>
+          <a:ln/>
+        </p:spPr>
+        <p:txBody>
+          <a:bodyPr wrap="square" lIns="0" tIns="0" rIns="0" bIns="0" rtlCol="0" anchor="ctr"/>
+          <a:lstStyle/>
+          <a:p>
+            <a:pPr algn="r" indent="0" marL="0">
+              <a:buNone/>
+            </a:pPr>
+            <a:r>
+              <a:rPr lang="en-US" sz="850" dirty="0">
+                <a:solidFill>
+                  <a:srgbClr val="3A4750"/>
+                </a:solidFill>
+                <a:latin typeface="Calibri" pitchFamily="34" charset="0"/>
+                <a:ea typeface="Calibri" pitchFamily="34" charset="-122"/>
+                <a:cs typeface="Calibri" pitchFamily="34" charset="-120"/>
+              </a:rPr>
+              <a:t>gpt-5.2</a:t>
+            </a:r>
+            <a:endParaRPr lang="en-US" sz="850" dirty="0"/>
+          </a:p>
+        </p:txBody>
+      </p:sp>
+      <p:sp>
+        <p:nvSpPr>
+          <p:cNvPr id="71" name="Shape 69"/>
+          <p:cNvSpPr/>
+          <p:nvPr/>
+        </p:nvSpPr>
+        <p:spPr>
+          <a:xfrm>
+            <a:off x="8100350" y="3361334"/>
+            <a:ext cx="2407862" cy="103327"/>
+          </a:xfrm>
+          <a:prstGeom prst="rect">
+            <a:avLst/>
+          </a:prstGeom>
+          <a:solidFill>
+            <a:srgbClr val="93A1AA"/>
+          </a:solidFill>
+          <a:ln w="12700">
+            <a:solidFill>
+              <a:srgbClr val="333333"/>
+            </a:solidFill>
+            <a:prstDash val="solid"/>
+          </a:ln>
+        </p:spPr>
+      </p:sp>
+      <p:sp>
+        <p:nvSpPr>
+          <p:cNvPr id="72" name="Text 70"/>
+          <p:cNvSpPr txBox="1"/>
+          <p:nvPr/>
+        </p:nvSpPr>
+        <p:spPr>
+          <a:xfrm>
+            <a:off x="10553931" y="3322015"/>
+            <a:ext cx="603504" cy="181051"/>
+          </a:xfrm>
+          <a:prstGeom prst="rect">
+            <a:avLst/>
+          </a:prstGeom>
+          <a:noFill/>
+          <a:ln/>
+        </p:spPr>
+        <p:txBody>
+          <a:bodyPr wrap="square" lIns="0" tIns="0" rIns="0" bIns="0" rtlCol="0" anchor="ctr"/>
+          <a:lstStyle/>
+          <a:p>
+            <a:pPr indent="0" marL="0">
+              <a:buNone/>
+            </a:pPr>
+            <a:r>
+              <a:rPr lang="en-US" sz="850" dirty="0">
+                <a:solidFill>
+                  <a:srgbClr val="3A4750"/>
+                </a:solidFill>
+                <a:latin typeface="Calibri" pitchFamily="34" charset="0"/>
+                <a:ea typeface="Calibri" pitchFamily="34" charset="-122"/>
+                <a:cs typeface="Calibri" pitchFamily="34" charset="-120"/>
+              </a:rPr>
+              <a:t>2.691</a:t>
+            </a:r>
+            <a:endParaRPr lang="en-US" sz="850" dirty="0"/>
+          </a:p>
+        </p:txBody>
+      </p:sp>
+      <p:sp>
+        <p:nvSpPr>
+          <p:cNvPr id="73" name="Text 71"/>
+          <p:cNvSpPr txBox="1"/>
+          <p:nvPr/>
+        </p:nvSpPr>
+        <p:spPr>
+          <a:xfrm>
+            <a:off x="6400800" y="3503066"/>
+            <a:ext cx="1644686" cy="181051"/>
+          </a:xfrm>
+          <a:prstGeom prst="rect">
+            <a:avLst/>
+          </a:prstGeom>
+          <a:noFill/>
+          <a:ln/>
+        </p:spPr>
+        <p:txBody>
+          <a:bodyPr wrap="square" lIns="0" tIns="0" rIns="0" bIns="0" rtlCol="0" anchor="ctr"/>
+          <a:lstStyle/>
+          <a:p>
+            <a:pPr algn="r" indent="0" marL="0">
+              <a:buNone/>
+            </a:pPr>
+            <a:r>
+              <a:rPr lang="en-US" sz="850" dirty="0">
+                <a:solidFill>
+                  <a:srgbClr val="3A4750"/>
+                </a:solidFill>
+                <a:latin typeface="Calibri" pitchFamily="34" charset="0"/>
+                <a:ea typeface="Calibri" pitchFamily="34" charset="-122"/>
+                <a:cs typeface="Calibri" pitchFamily="34" charset="-120"/>
+              </a:rPr>
+              <a:t>o4-mini</a:t>
+            </a:r>
+            <a:endParaRPr lang="en-US" sz="850" dirty="0"/>
+          </a:p>
+        </p:txBody>
+      </p:sp>
+      <p:sp>
+        <p:nvSpPr>
+          <p:cNvPr id="74" name="Shape 72"/>
+          <p:cNvSpPr/>
+          <p:nvPr/>
+        </p:nvSpPr>
+        <p:spPr>
+          <a:xfrm>
+            <a:off x="8100350" y="3542386"/>
+            <a:ext cx="2385492" cy="103327"/>
+          </a:xfrm>
+          <a:prstGeom prst="rect">
+            <a:avLst/>
+          </a:prstGeom>
+          <a:solidFill>
+            <a:srgbClr val="93A1AA"/>
+          </a:solidFill>
+          <a:ln w="12700">
+            <a:solidFill>
+              <a:srgbClr val="333333"/>
+            </a:solidFill>
+            <a:prstDash val="solid"/>
+          </a:ln>
+        </p:spPr>
+      </p:sp>
+      <p:sp>
+        <p:nvSpPr>
+          <p:cNvPr id="75" name="Text 73"/>
+          <p:cNvSpPr txBox="1"/>
+          <p:nvPr/>
+        </p:nvSpPr>
+        <p:spPr>
+          <a:xfrm>
+            <a:off x="10531562" y="3503066"/>
+            <a:ext cx="603504" cy="181051"/>
+          </a:xfrm>
+          <a:prstGeom prst="rect">
+            <a:avLst/>
+          </a:prstGeom>
+          <a:noFill/>
+          <a:ln/>
+        </p:spPr>
+        <p:txBody>
+          <a:bodyPr wrap="square" lIns="0" tIns="0" rIns="0" bIns="0" rtlCol="0" anchor="ctr"/>
+          <a:lstStyle/>
+          <a:p>
+            <a:pPr indent="0" marL="0">
+              <a:buNone/>
+            </a:pPr>
+            <a:r>
+              <a:rPr lang="en-US" sz="850" dirty="0">
+                <a:solidFill>
+                  <a:srgbClr val="3A4750"/>
+                </a:solidFill>
+                <a:latin typeface="Calibri" pitchFamily="34" charset="0"/>
+                <a:ea typeface="Calibri" pitchFamily="34" charset="-122"/>
+                <a:cs typeface="Calibri" pitchFamily="34" charset="-120"/>
+              </a:rPr>
+              <a:t>2.666</a:t>
+            </a:r>
+            <a:endParaRPr lang="en-US" sz="850" dirty="0"/>
+          </a:p>
+        </p:txBody>
+      </p:sp>
+      <p:sp>
+        <p:nvSpPr>
+          <p:cNvPr id="76" name="Text 74"/>
+          <p:cNvSpPr txBox="1"/>
+          <p:nvPr/>
+        </p:nvSpPr>
+        <p:spPr>
+          <a:xfrm>
+            <a:off x="6400800" y="3684118"/>
+            <a:ext cx="1644686" cy="181051"/>
+          </a:xfrm>
+          <a:prstGeom prst="rect">
+            <a:avLst/>
+          </a:prstGeom>
+          <a:noFill/>
+          <a:ln/>
+        </p:spPr>
+        <p:txBody>
+          <a:bodyPr wrap="square" lIns="0" tIns="0" rIns="0" bIns="0" rtlCol="0" anchor="ctr"/>
+          <a:lstStyle/>
+          <a:p>
+            <a:pPr algn="r" indent="0" marL="0">
+              <a:buNone/>
+            </a:pPr>
+            <a:r>
+              <a:rPr lang="en-US" sz="850" dirty="0">
+                <a:solidFill>
+                  <a:srgbClr val="3A4750"/>
+                </a:solidFill>
+                <a:latin typeface="Calibri" pitchFamily="34" charset="0"/>
+                <a:ea typeface="Calibri" pitchFamily="34" charset="-122"/>
+                <a:cs typeface="Calibri" pitchFamily="34" charset="-120"/>
+              </a:rPr>
+              <a:t>glm-4.5</a:t>
+            </a:r>
+            <a:endParaRPr lang="en-US" sz="850" dirty="0"/>
+          </a:p>
+        </p:txBody>
+      </p:sp>
+      <p:sp>
+        <p:nvSpPr>
+          <p:cNvPr id="77" name="Shape 75"/>
+          <p:cNvSpPr/>
+          <p:nvPr/>
+        </p:nvSpPr>
+        <p:spPr>
+          <a:xfrm>
+            <a:off x="8100350" y="3723437"/>
+            <a:ext cx="2331805" cy="103327"/>
+          </a:xfrm>
+          <a:prstGeom prst="rect">
+            <a:avLst/>
+          </a:prstGeom>
+          <a:solidFill>
+            <a:srgbClr val="93A1AA"/>
+          </a:solidFill>
+          <a:ln w="12700">
+            <a:solidFill>
+              <a:srgbClr val="333333"/>
+            </a:solidFill>
+            <a:prstDash val="solid"/>
+          </a:ln>
+        </p:spPr>
+      </p:sp>
+      <p:sp>
+        <p:nvSpPr>
+          <p:cNvPr id="78" name="Text 76"/>
+          <p:cNvSpPr txBox="1"/>
+          <p:nvPr/>
+        </p:nvSpPr>
+        <p:spPr>
+          <a:xfrm>
+            <a:off x="10477875" y="3684118"/>
+            <a:ext cx="603504" cy="181051"/>
+          </a:xfrm>
+          <a:prstGeom prst="rect">
+            <a:avLst/>
+          </a:prstGeom>
+          <a:noFill/>
+          <a:ln/>
+        </p:spPr>
+        <p:txBody>
+          <a:bodyPr wrap="square" lIns="0" tIns="0" rIns="0" bIns="0" rtlCol="0" anchor="ctr"/>
+          <a:lstStyle/>
+          <a:p>
+            <a:pPr indent="0" marL="0">
+              <a:buNone/>
+            </a:pPr>
+            <a:r>
+              <a:rPr lang="en-US" sz="850" dirty="0">
+                <a:solidFill>
+                  <a:srgbClr val="3A4750"/>
+                </a:solidFill>
+                <a:latin typeface="Calibri" pitchFamily="34" charset="0"/>
+                <a:ea typeface="Calibri" pitchFamily="34" charset="-122"/>
+                <a:cs typeface="Calibri" pitchFamily="34" charset="-120"/>
+              </a:rPr>
+              <a:t>2.606</a:t>
+            </a:r>
+            <a:endParaRPr lang="en-US" sz="850" dirty="0"/>
+          </a:p>
+        </p:txBody>
+      </p:sp>
+      <p:sp>
+        <p:nvSpPr>
+          <p:cNvPr id="79" name="Text 77"/>
+          <p:cNvSpPr txBox="1"/>
+          <p:nvPr/>
+        </p:nvSpPr>
+        <p:spPr>
+          <a:xfrm>
+            <a:off x="6400800" y="3865169"/>
+            <a:ext cx="1644686" cy="181051"/>
+          </a:xfrm>
+          <a:prstGeom prst="rect">
+            <a:avLst/>
+          </a:prstGeom>
+          <a:noFill/>
+          <a:ln/>
+        </p:spPr>
+        <p:txBody>
+          <a:bodyPr wrap="square" lIns="0" tIns="0" rIns="0" bIns="0" rtlCol="0" anchor="ctr"/>
+          <a:lstStyle/>
+          <a:p>
+            <a:pPr algn="r" indent="0" marL="0">
+              <a:buNone/>
+            </a:pPr>
+            <a:r>
+              <a:rPr lang="en-US" sz="850" dirty="0">
+                <a:solidFill>
+                  <a:srgbClr val="3A4750"/>
+                </a:solidFill>
+                <a:latin typeface="Calibri" pitchFamily="34" charset="0"/>
+                <a:ea typeface="Calibri" pitchFamily="34" charset="-122"/>
+                <a:cs typeface="Calibri" pitchFamily="34" charset="-120"/>
+              </a:rPr>
+              <a:t>claude-opus-4-20250514</a:t>
+            </a:r>
+            <a:endParaRPr lang="en-US" sz="850" dirty="0"/>
+          </a:p>
+        </p:txBody>
+      </p:sp>
+      <p:sp>
+        <p:nvSpPr>
+          <p:cNvPr id="80" name="Shape 78"/>
+          <p:cNvSpPr/>
+          <p:nvPr/>
+        </p:nvSpPr>
+        <p:spPr>
+          <a:xfrm>
+            <a:off x="8100350" y="3904488"/>
+            <a:ext cx="2324647" cy="103327"/>
+          </a:xfrm>
+          <a:prstGeom prst="rect">
+            <a:avLst/>
+          </a:prstGeom>
+          <a:solidFill>
+            <a:srgbClr val="93A1AA"/>
+          </a:solidFill>
+          <a:ln w="12700">
+            <a:solidFill>
+              <a:srgbClr val="333333"/>
+            </a:solidFill>
+            <a:prstDash val="solid"/>
+          </a:ln>
+        </p:spPr>
+      </p:sp>
+      <p:sp>
+        <p:nvSpPr>
+          <p:cNvPr id="81" name="Text 79"/>
+          <p:cNvSpPr txBox="1"/>
+          <p:nvPr/>
+        </p:nvSpPr>
+        <p:spPr>
+          <a:xfrm>
+            <a:off x="10470716" y="3865169"/>
+            <a:ext cx="603504" cy="181051"/>
+          </a:xfrm>
+          <a:prstGeom prst="rect">
+            <a:avLst/>
+          </a:prstGeom>
+          <a:noFill/>
+          <a:ln/>
+        </p:spPr>
+        <p:txBody>
+          <a:bodyPr wrap="square" lIns="0" tIns="0" rIns="0" bIns="0" rtlCol="0" anchor="ctr"/>
+          <a:lstStyle/>
+          <a:p>
+            <a:pPr indent="0" marL="0">
+              <a:buNone/>
+            </a:pPr>
+            <a:r>
+              <a:rPr lang="en-US" sz="850" dirty="0">
+                <a:solidFill>
+                  <a:srgbClr val="3A4750"/>
+                </a:solidFill>
+                <a:latin typeface="Calibri" pitchFamily="34" charset="0"/>
+                <a:ea typeface="Calibri" pitchFamily="34" charset="-122"/>
+                <a:cs typeface="Calibri" pitchFamily="34" charset="-120"/>
+              </a:rPr>
+              <a:t>2.598</a:t>
+            </a:r>
+            <a:endParaRPr lang="en-US" sz="850" dirty="0"/>
+          </a:p>
+        </p:txBody>
+      </p:sp>
+      <p:sp>
+        <p:nvSpPr>
+          <p:cNvPr id="82" name="Text 80"/>
+          <p:cNvSpPr txBox="1"/>
+          <p:nvPr/>
+        </p:nvSpPr>
+        <p:spPr>
+          <a:xfrm>
+            <a:off x="6400800" y="4046220"/>
+            <a:ext cx="1644686" cy="181051"/>
+          </a:xfrm>
+          <a:prstGeom prst="rect">
+            <a:avLst/>
+          </a:prstGeom>
+          <a:noFill/>
+          <a:ln/>
+        </p:spPr>
+        <p:txBody>
+          <a:bodyPr wrap="square" lIns="0" tIns="0" rIns="0" bIns="0" rtlCol="0" anchor="ctr"/>
+          <a:lstStyle/>
+          <a:p>
+            <a:pPr algn="r" indent="0" marL="0">
+              <a:buNone/>
+            </a:pPr>
+            <a:r>
+              <a:rPr lang="en-US" sz="850" dirty="0">
+                <a:solidFill>
+                  <a:srgbClr val="3A4750"/>
+                </a:solidFill>
+                <a:latin typeface="Calibri" pitchFamily="34" charset="0"/>
+                <a:ea typeface="Calibri" pitchFamily="34" charset="-122"/>
+                <a:cs typeface="Calibri" pitchFamily="34" charset="-120"/>
+              </a:rPr>
+              <a:t>claude-sonnet-4-5-20250929</a:t>
+            </a:r>
+            <a:endParaRPr lang="en-US" sz="850" dirty="0"/>
+          </a:p>
+        </p:txBody>
+      </p:sp>
+      <p:sp>
+        <p:nvSpPr>
+          <p:cNvPr id="83" name="Shape 81"/>
+          <p:cNvSpPr/>
+          <p:nvPr/>
+        </p:nvSpPr>
+        <p:spPr>
+          <a:xfrm>
+            <a:off x="8100350" y="4085539"/>
+            <a:ext cx="2133163" cy="103327"/>
+          </a:xfrm>
+          <a:prstGeom prst="rect">
+            <a:avLst/>
+          </a:prstGeom>
+          <a:solidFill>
+            <a:srgbClr val="93A1AA"/>
+          </a:solidFill>
+          <a:ln w="12700">
+            <a:solidFill>
+              <a:srgbClr val="333333"/>
+            </a:solidFill>
+            <a:prstDash val="solid"/>
+          </a:ln>
+        </p:spPr>
+      </p:sp>
+      <p:sp>
+        <p:nvSpPr>
+          <p:cNvPr id="84" name="Text 82"/>
+          <p:cNvSpPr txBox="1"/>
+          <p:nvPr/>
+        </p:nvSpPr>
+        <p:spPr>
+          <a:xfrm>
+            <a:off x="10279233" y="4046220"/>
+            <a:ext cx="603504" cy="181051"/>
+          </a:xfrm>
+          <a:prstGeom prst="rect">
+            <a:avLst/>
+          </a:prstGeom>
+          <a:noFill/>
+          <a:ln/>
+        </p:spPr>
+        <p:txBody>
+          <a:bodyPr wrap="square" lIns="0" tIns="0" rIns="0" bIns="0" rtlCol="0" anchor="ctr"/>
+          <a:lstStyle/>
+          <a:p>
+            <a:pPr indent="0" marL="0">
+              <a:buNone/>
+            </a:pPr>
+            <a:r>
+              <a:rPr lang="en-US" sz="850" dirty="0">
+                <a:solidFill>
+                  <a:srgbClr val="3A4750"/>
+                </a:solidFill>
+                <a:latin typeface="Calibri" pitchFamily="34" charset="0"/>
+                <a:ea typeface="Calibri" pitchFamily="34" charset="-122"/>
+                <a:cs typeface="Calibri" pitchFamily="34" charset="-120"/>
+              </a:rPr>
+              <a:t>2.384</a:t>
+            </a:r>
+            <a:endParaRPr lang="en-US" sz="850" dirty="0"/>
+          </a:p>
+        </p:txBody>
+      </p:sp>
+      <p:sp>
+        <p:nvSpPr>
+          <p:cNvPr id="85" name="Text 83"/>
+          <p:cNvSpPr txBox="1"/>
+          <p:nvPr/>
+        </p:nvSpPr>
+        <p:spPr>
+          <a:xfrm>
+            <a:off x="6400800" y="4227271"/>
+            <a:ext cx="1644686" cy="181051"/>
+          </a:xfrm>
+          <a:prstGeom prst="rect">
+            <a:avLst/>
+          </a:prstGeom>
+          <a:noFill/>
+          <a:ln/>
+        </p:spPr>
+        <p:txBody>
+          <a:bodyPr wrap="square" lIns="0" tIns="0" rIns="0" bIns="0" rtlCol="0" anchor="ctr"/>
+          <a:lstStyle/>
+          <a:p>
+            <a:pPr algn="r" indent="0" marL="0">
+              <a:buNone/>
+            </a:pPr>
+            <a:r>
+              <a:rPr lang="en-US" sz="850" dirty="0">
+                <a:solidFill>
+                  <a:srgbClr val="3A4750"/>
+                </a:solidFill>
+                <a:latin typeface="Calibri" pitchFamily="34" charset="0"/>
+                <a:ea typeface="Calibri" pitchFamily="34" charset="-122"/>
+                <a:cs typeface="Calibri" pitchFamily="34" charset="-120"/>
+              </a:rPr>
+              <a:t>qwen3-coder</a:t>
+            </a:r>
+            <a:endParaRPr lang="en-US" sz="850" dirty="0"/>
+          </a:p>
+        </p:txBody>
+      </p:sp>
+      <p:sp>
+        <p:nvSpPr>
+          <p:cNvPr id="86" name="Shape 84"/>
+          <p:cNvSpPr/>
+          <p:nvPr/>
+        </p:nvSpPr>
+        <p:spPr>
+          <a:xfrm>
+            <a:off x="8100350" y="4266590"/>
+            <a:ext cx="2101846" cy="103327"/>
+          </a:xfrm>
+          <a:prstGeom prst="rect">
+            <a:avLst/>
+          </a:prstGeom>
+          <a:solidFill>
+            <a:srgbClr val="93A1AA"/>
+          </a:solidFill>
+          <a:ln w="12700">
+            <a:solidFill>
+              <a:srgbClr val="333333"/>
+            </a:solidFill>
+            <a:prstDash val="solid"/>
+          </a:ln>
+        </p:spPr>
+      </p:sp>
+      <p:sp>
+        <p:nvSpPr>
+          <p:cNvPr id="87" name="Text 85"/>
+          <p:cNvSpPr txBox="1"/>
+          <p:nvPr/>
+        </p:nvSpPr>
+        <p:spPr>
+          <a:xfrm>
+            <a:off x="10247915" y="4227271"/>
+            <a:ext cx="603504" cy="181051"/>
+          </a:xfrm>
+          <a:prstGeom prst="rect">
+            <a:avLst/>
+          </a:prstGeom>
+          <a:noFill/>
+          <a:ln/>
+        </p:spPr>
+        <p:txBody>
+          <a:bodyPr wrap="square" lIns="0" tIns="0" rIns="0" bIns="0" rtlCol="0" anchor="ctr"/>
+          <a:lstStyle/>
+          <a:p>
+            <a:pPr indent="0" marL="0">
+              <a:buNone/>
+            </a:pPr>
+            <a:r>
+              <a:rPr lang="en-US" sz="850" dirty="0">
+                <a:solidFill>
+                  <a:srgbClr val="3A4750"/>
+                </a:solidFill>
+                <a:latin typeface="Calibri" pitchFamily="34" charset="0"/>
+                <a:ea typeface="Calibri" pitchFamily="34" charset="-122"/>
+                <a:cs typeface="Calibri" pitchFamily="34" charset="-120"/>
+              </a:rPr>
+              <a:t>2.349</a:t>
+            </a:r>
+            <a:endParaRPr lang="en-US" sz="850" dirty="0"/>
+          </a:p>
+        </p:txBody>
+      </p:sp>
+      <p:sp>
+        <p:nvSpPr>
+          <p:cNvPr id="88" name="Text 86"/>
+          <p:cNvSpPr txBox="1"/>
+          <p:nvPr/>
+        </p:nvSpPr>
+        <p:spPr>
+          <a:xfrm>
+            <a:off x="6400800" y="4408322"/>
+            <a:ext cx="1644686" cy="181051"/>
+          </a:xfrm>
+          <a:prstGeom prst="rect">
+            <a:avLst/>
+          </a:prstGeom>
+          <a:noFill/>
+          <a:ln/>
+        </p:spPr>
+        <p:txBody>
+          <a:bodyPr wrap="square" lIns="0" tIns="0" rIns="0" bIns="0" rtlCol="0" anchor="ctr"/>
+          <a:lstStyle/>
+          <a:p>
+            <a:pPr algn="r" indent="0" marL="0">
+              <a:buNone/>
+            </a:pPr>
+            <a:r>
+              <a:rPr lang="en-US" sz="850" dirty="0">
+                <a:solidFill>
+                  <a:srgbClr val="3A4750"/>
+                </a:solidFill>
+                <a:latin typeface="Calibri" pitchFamily="34" charset="0"/>
+                <a:ea typeface="Calibri" pitchFamily="34" charset="-122"/>
+                <a:cs typeface="Calibri" pitchFamily="34" charset="-120"/>
+              </a:rPr>
+              <a:t>deepseek-reasoner</a:t>
+            </a:r>
+            <a:endParaRPr lang="en-US" sz="850" dirty="0"/>
+          </a:p>
+        </p:txBody>
+      </p:sp>
+      <p:sp>
+        <p:nvSpPr>
+          <p:cNvPr id="89" name="Shape 87"/>
+          <p:cNvSpPr/>
+          <p:nvPr/>
+        </p:nvSpPr>
+        <p:spPr>
+          <a:xfrm>
+            <a:off x="8100350" y="4447642"/>
+            <a:ext cx="2033842" cy="103327"/>
+          </a:xfrm>
+          <a:prstGeom prst="rect">
+            <a:avLst/>
+          </a:prstGeom>
+          <a:solidFill>
+            <a:srgbClr val="93A1AA"/>
+          </a:solidFill>
+          <a:ln w="12700">
+            <a:solidFill>
+              <a:srgbClr val="333333"/>
+            </a:solidFill>
+            <a:prstDash val="solid"/>
+          </a:ln>
+        </p:spPr>
+      </p:sp>
+      <p:sp>
+        <p:nvSpPr>
+          <p:cNvPr id="90" name="Text 88"/>
+          <p:cNvSpPr txBox="1"/>
+          <p:nvPr/>
+        </p:nvSpPr>
+        <p:spPr>
+          <a:xfrm>
+            <a:off x="10179912" y="4408322"/>
+            <a:ext cx="603504" cy="181051"/>
+          </a:xfrm>
+          <a:prstGeom prst="rect">
+            <a:avLst/>
+          </a:prstGeom>
+          <a:noFill/>
+          <a:ln/>
+        </p:spPr>
+        <p:txBody>
+          <a:bodyPr wrap="square" lIns="0" tIns="0" rIns="0" bIns="0" rtlCol="0" anchor="ctr"/>
+          <a:lstStyle/>
+          <a:p>
+            <a:pPr indent="0" marL="0">
+              <a:buNone/>
+            </a:pPr>
+            <a:r>
+              <a:rPr lang="en-US" sz="850" dirty="0">
+                <a:solidFill>
+                  <a:srgbClr val="3A4750"/>
+                </a:solidFill>
+                <a:latin typeface="Calibri" pitchFamily="34" charset="0"/>
+                <a:ea typeface="Calibri" pitchFamily="34" charset="-122"/>
+                <a:cs typeface="Calibri" pitchFamily="34" charset="-120"/>
+              </a:rPr>
+              <a:t>2.273</a:t>
+            </a:r>
+            <a:endParaRPr lang="en-US" sz="850" dirty="0"/>
+          </a:p>
+        </p:txBody>
+      </p:sp>
+      <p:sp>
+        <p:nvSpPr>
+          <p:cNvPr id="91" name="Text 89"/>
+          <p:cNvSpPr txBox="1"/>
+          <p:nvPr/>
+        </p:nvSpPr>
+        <p:spPr>
+          <a:xfrm>
+            <a:off x="6400800" y="4589374"/>
+            <a:ext cx="1644686" cy="181051"/>
+          </a:xfrm>
+          <a:prstGeom prst="rect">
+            <a:avLst/>
+          </a:prstGeom>
+          <a:noFill/>
+          <a:ln/>
+        </p:spPr>
+        <p:txBody>
+          <a:bodyPr wrap="square" lIns="0" tIns="0" rIns="0" bIns="0" rtlCol="0" anchor="ctr"/>
+          <a:lstStyle/>
+          <a:p>
+            <a:pPr algn="r" indent="0" marL="0">
+              <a:buNone/>
+            </a:pPr>
+            <a:r>
+              <a:rPr lang="en-US" sz="850" dirty="0">
+                <a:solidFill>
+                  <a:srgbClr val="3A4750"/>
+                </a:solidFill>
+                <a:latin typeface="Calibri" pitchFamily="34" charset="0"/>
+                <a:ea typeface="Calibri" pitchFamily="34" charset="-122"/>
+                <a:cs typeface="Calibri" pitchFamily="34" charset="-120"/>
+              </a:rPr>
+              <a:t>gemini-2.5-pro</a:t>
+            </a:r>
+            <a:endParaRPr lang="en-US" sz="850" dirty="0"/>
+          </a:p>
+        </p:txBody>
+      </p:sp>
+      <p:sp>
+        <p:nvSpPr>
+          <p:cNvPr id="92" name="Shape 90"/>
+          <p:cNvSpPr/>
+          <p:nvPr/>
+        </p:nvSpPr>
+        <p:spPr>
+          <a:xfrm>
+            <a:off x="8100350" y="4628693"/>
+            <a:ext cx="1962260" cy="103327"/>
+          </a:xfrm>
+          <a:prstGeom prst="rect">
+            <a:avLst/>
+          </a:prstGeom>
+          <a:solidFill>
+            <a:srgbClr val="93A1AA"/>
+          </a:solidFill>
+          <a:ln w="12700">
+            <a:solidFill>
+              <a:srgbClr val="333333"/>
+            </a:solidFill>
+            <a:prstDash val="solid"/>
+          </a:ln>
+        </p:spPr>
+      </p:sp>
+      <p:sp>
+        <p:nvSpPr>
+          <p:cNvPr id="93" name="Text 91"/>
+          <p:cNvSpPr txBox="1"/>
+          <p:nvPr/>
+        </p:nvSpPr>
+        <p:spPr>
+          <a:xfrm>
+            <a:off x="10108329" y="4589374"/>
+            <a:ext cx="603504" cy="181051"/>
+          </a:xfrm>
+          <a:prstGeom prst="rect">
+            <a:avLst/>
+          </a:prstGeom>
+          <a:noFill/>
+          <a:ln/>
+        </p:spPr>
+        <p:txBody>
+          <a:bodyPr wrap="square" lIns="0" tIns="0" rIns="0" bIns="0" rtlCol="0" anchor="ctr"/>
+          <a:lstStyle/>
+          <a:p>
+            <a:pPr indent="0" marL="0">
+              <a:buNone/>
+            </a:pPr>
+            <a:r>
+              <a:rPr lang="en-US" sz="850" dirty="0">
+                <a:solidFill>
+                  <a:srgbClr val="3A4750"/>
+                </a:solidFill>
+                <a:latin typeface="Calibri" pitchFamily="34" charset="0"/>
+                <a:ea typeface="Calibri" pitchFamily="34" charset="-122"/>
+                <a:cs typeface="Calibri" pitchFamily="34" charset="-120"/>
+              </a:rPr>
+              <a:t>2.193</a:t>
+            </a:r>
+            <a:endParaRPr lang="en-US" sz="850" dirty="0"/>
+          </a:p>
+        </p:txBody>
+      </p:sp>
+      <p:sp>
+        <p:nvSpPr>
+          <p:cNvPr id="94" name="Text 92"/>
+          <p:cNvSpPr txBox="1"/>
+          <p:nvPr/>
+        </p:nvSpPr>
+        <p:spPr>
+          <a:xfrm>
+            <a:off x="6400800" y="4770425"/>
+            <a:ext cx="1644686" cy="181051"/>
+          </a:xfrm>
+          <a:prstGeom prst="rect">
+            <a:avLst/>
+          </a:prstGeom>
+          <a:noFill/>
+          <a:ln/>
+        </p:spPr>
+        <p:txBody>
+          <a:bodyPr wrap="square" lIns="0" tIns="0" rIns="0" bIns="0" rtlCol="0" anchor="ctr"/>
+          <a:lstStyle/>
+          <a:p>
+            <a:pPr algn="r" indent="0" marL="0">
+              <a:buNone/>
+            </a:pPr>
+            <a:r>
+              <a:rPr lang="en-US" sz="850" dirty="0">
+                <a:solidFill>
+                  <a:srgbClr val="3A4750"/>
+                </a:solidFill>
+                <a:latin typeface="Calibri" pitchFamily="34" charset="0"/>
+                <a:ea typeface="Calibri" pitchFamily="34" charset="-122"/>
+                <a:cs typeface="Calibri" pitchFamily="34" charset="-120"/>
+              </a:rPr>
+              <a:t>claude-opus-4-1-20250805</a:t>
+            </a:r>
+            <a:endParaRPr lang="en-US" sz="850" dirty="0"/>
+          </a:p>
+        </p:txBody>
+      </p:sp>
+      <p:sp>
+        <p:nvSpPr>
+          <p:cNvPr id="95" name="Shape 93"/>
+          <p:cNvSpPr/>
+          <p:nvPr/>
+        </p:nvSpPr>
+        <p:spPr>
+          <a:xfrm>
+            <a:off x="8100350" y="4809744"/>
+            <a:ext cx="1955996" cy="103327"/>
+          </a:xfrm>
+          <a:prstGeom prst="rect">
+            <a:avLst/>
+          </a:prstGeom>
+          <a:solidFill>
+            <a:srgbClr val="93A1AA"/>
+          </a:solidFill>
+          <a:ln w="12700">
+            <a:solidFill>
+              <a:srgbClr val="333333"/>
+            </a:solidFill>
+            <a:prstDash val="solid"/>
+          </a:ln>
+        </p:spPr>
+      </p:sp>
+      <p:sp>
+        <p:nvSpPr>
+          <p:cNvPr id="96" name="Text 94"/>
+          <p:cNvSpPr txBox="1"/>
+          <p:nvPr/>
+        </p:nvSpPr>
+        <p:spPr>
+          <a:xfrm>
+            <a:off x="10102066" y="4770425"/>
+            <a:ext cx="603504" cy="181051"/>
+          </a:xfrm>
+          <a:prstGeom prst="rect">
+            <a:avLst/>
+          </a:prstGeom>
+          <a:noFill/>
+          <a:ln/>
+        </p:spPr>
+        <p:txBody>
+          <a:bodyPr wrap="square" lIns="0" tIns="0" rIns="0" bIns="0" rtlCol="0" anchor="ctr"/>
+          <a:lstStyle/>
+          <a:p>
+            <a:pPr indent="0" marL="0">
+              <a:buNone/>
+            </a:pPr>
+            <a:r>
+              <a:rPr lang="en-US" sz="850" dirty="0">
+                <a:solidFill>
+                  <a:srgbClr val="3A4750"/>
+                </a:solidFill>
+                <a:latin typeface="Calibri" pitchFamily="34" charset="0"/>
+                <a:ea typeface="Calibri" pitchFamily="34" charset="-122"/>
+                <a:cs typeface="Calibri" pitchFamily="34" charset="-120"/>
+              </a:rPr>
+              <a:t>2.186</a:t>
+            </a:r>
+            <a:endParaRPr lang="en-US" sz="850" dirty="0"/>
+          </a:p>
+        </p:txBody>
+      </p:sp>
+      <p:sp>
+        <p:nvSpPr>
+          <p:cNvPr id="97" name="Text 95"/>
+          <p:cNvSpPr txBox="1"/>
+          <p:nvPr/>
+        </p:nvSpPr>
+        <p:spPr>
+          <a:xfrm>
+            <a:off x="6400800" y="4951476"/>
+            <a:ext cx="1644686" cy="181051"/>
+          </a:xfrm>
+          <a:prstGeom prst="rect">
+            <a:avLst/>
+          </a:prstGeom>
+          <a:noFill/>
+          <a:ln/>
+        </p:spPr>
+        <p:txBody>
+          <a:bodyPr wrap="square" lIns="0" tIns="0" rIns="0" bIns="0" rtlCol="0" anchor="ctr"/>
+          <a:lstStyle/>
+          <a:p>
+            <a:pPr algn="r" indent="0" marL="0">
+              <a:buNone/>
+            </a:pPr>
+            <a:r>
+              <a:rPr lang="en-US" sz="850" dirty="0">
+                <a:solidFill>
+                  <a:srgbClr val="3A4750"/>
+                </a:solidFill>
+                <a:latin typeface="Calibri" pitchFamily="34" charset="0"/>
+                <a:ea typeface="Calibri" pitchFamily="34" charset="-122"/>
+                <a:cs typeface="Calibri" pitchFamily="34" charset="-120"/>
+              </a:rPr>
+              <a:t>gpt-5</a:t>
+            </a:r>
+            <a:endParaRPr lang="en-US" sz="850" dirty="0"/>
+          </a:p>
+        </p:txBody>
+      </p:sp>
+      <p:sp>
+        <p:nvSpPr>
+          <p:cNvPr id="98" name="Shape 96"/>
+          <p:cNvSpPr/>
+          <p:nvPr/>
+        </p:nvSpPr>
+        <p:spPr>
+          <a:xfrm>
+            <a:off x="8100350" y="4990795"/>
+            <a:ext cx="1758249" cy="103327"/>
+          </a:xfrm>
+          <a:prstGeom prst="rect">
+            <a:avLst/>
+          </a:prstGeom>
+          <a:solidFill>
+            <a:srgbClr val="93A1AA"/>
+          </a:solidFill>
+          <a:ln w="12700">
+            <a:solidFill>
+              <a:srgbClr val="333333"/>
+            </a:solidFill>
+            <a:prstDash val="solid"/>
+          </a:ln>
+        </p:spPr>
+      </p:sp>
+      <p:sp>
+        <p:nvSpPr>
+          <p:cNvPr id="99" name="Text 97"/>
+          <p:cNvSpPr txBox="1"/>
+          <p:nvPr/>
+        </p:nvSpPr>
+        <p:spPr>
+          <a:xfrm>
+            <a:off x="9904319" y="4951476"/>
+            <a:ext cx="603504" cy="181051"/>
+          </a:xfrm>
+          <a:prstGeom prst="rect">
+            <a:avLst/>
+          </a:prstGeom>
+          <a:noFill/>
+          <a:ln/>
+        </p:spPr>
+        <p:txBody>
+          <a:bodyPr wrap="square" lIns="0" tIns="0" rIns="0" bIns="0" rtlCol="0" anchor="ctr"/>
+          <a:lstStyle/>
+          <a:p>
+            <a:pPr indent="0" marL="0">
+              <a:buNone/>
+            </a:pPr>
+            <a:r>
+              <a:rPr lang="en-US" sz="850" dirty="0">
+                <a:solidFill>
+                  <a:srgbClr val="3A4750"/>
+                </a:solidFill>
+                <a:latin typeface="Calibri" pitchFamily="34" charset="0"/>
+                <a:ea typeface="Calibri" pitchFamily="34" charset="-122"/>
+                <a:cs typeface="Calibri" pitchFamily="34" charset="-120"/>
+              </a:rPr>
+              <a:t>1.965</a:t>
+            </a:r>
+            <a:endParaRPr lang="en-US" sz="850" dirty="0"/>
+          </a:p>
+        </p:txBody>
+      </p:sp>
+      <p:sp>
+        <p:nvSpPr>
+          <p:cNvPr id="100" name="Text 98"/>
+          <p:cNvSpPr txBox="1"/>
+          <p:nvPr/>
+        </p:nvSpPr>
+        <p:spPr>
+          <a:xfrm>
+            <a:off x="6400800" y="5132527"/>
+            <a:ext cx="1644686" cy="181051"/>
+          </a:xfrm>
+          <a:prstGeom prst="rect">
+            <a:avLst/>
+          </a:prstGeom>
+          <a:noFill/>
+          <a:ln/>
+        </p:spPr>
+        <p:txBody>
+          <a:bodyPr wrap="square" lIns="0" tIns="0" rIns="0" bIns="0" rtlCol="0" anchor="ctr"/>
+          <a:lstStyle/>
+          <a:p>
+            <a:pPr algn="r" indent="0" marL="0">
+              <a:buNone/>
+            </a:pPr>
+            <a:r>
+              <a:rPr lang="en-US" sz="850" dirty="0">
+                <a:solidFill>
+                  <a:srgbClr val="3A4750"/>
+                </a:solidFill>
+                <a:latin typeface="Calibri" pitchFamily="34" charset="0"/>
+                <a:ea typeface="Calibri" pitchFamily="34" charset="-122"/>
+                <a:cs typeface="Calibri" pitchFamily="34" charset="-120"/>
+              </a:rPr>
+              <a:t>gpt-5.4</a:t>
+            </a:r>
+            <a:endParaRPr lang="en-US" sz="850" dirty="0"/>
+          </a:p>
+        </p:txBody>
+      </p:sp>
+      <p:sp>
+        <p:nvSpPr>
+          <p:cNvPr id="101" name="Shape 99"/>
+          <p:cNvSpPr/>
+          <p:nvPr/>
+        </p:nvSpPr>
+        <p:spPr>
+          <a:xfrm>
+            <a:off x="8100350" y="5171846"/>
+            <a:ext cx="1704562" cy="103327"/>
+          </a:xfrm>
+          <a:prstGeom prst="rect">
+            <a:avLst/>
+          </a:prstGeom>
+          <a:solidFill>
+            <a:srgbClr val="93A1AA"/>
+          </a:solidFill>
+          <a:ln w="12700">
+            <a:solidFill>
+              <a:srgbClr val="333333"/>
+            </a:solidFill>
+            <a:prstDash val="solid"/>
+          </a:ln>
+        </p:spPr>
+      </p:sp>
+      <p:sp>
+        <p:nvSpPr>
+          <p:cNvPr id="102" name="Text 100"/>
+          <p:cNvSpPr txBox="1"/>
+          <p:nvPr/>
+        </p:nvSpPr>
+        <p:spPr>
+          <a:xfrm>
+            <a:off x="9850632" y="5132527"/>
+            <a:ext cx="603504" cy="181051"/>
+          </a:xfrm>
+          <a:prstGeom prst="rect">
+            <a:avLst/>
+          </a:prstGeom>
+          <a:noFill/>
+          <a:ln/>
+        </p:spPr>
+        <p:txBody>
+          <a:bodyPr wrap="square" lIns="0" tIns="0" rIns="0" bIns="0" rtlCol="0" anchor="ctr"/>
+          <a:lstStyle/>
+          <a:p>
+            <a:pPr indent="0" marL="0">
+              <a:buNone/>
+            </a:pPr>
+            <a:r>
+              <a:rPr lang="en-US" sz="850" dirty="0">
+                <a:solidFill>
+                  <a:srgbClr val="3A4750"/>
+                </a:solidFill>
+                <a:latin typeface="Calibri" pitchFamily="34" charset="0"/>
+                <a:ea typeface="Calibri" pitchFamily="34" charset="-122"/>
+                <a:cs typeface="Calibri" pitchFamily="34" charset="-120"/>
+              </a:rPr>
+              <a:t>1.905</a:t>
+            </a:r>
+            <a:endParaRPr lang="en-US" sz="850" dirty="0"/>
+          </a:p>
+        </p:txBody>
+      </p:sp>
+      <p:sp>
+        <p:nvSpPr>
+          <p:cNvPr id="103" name="Text 101"/>
+          <p:cNvSpPr txBox="1"/>
+          <p:nvPr/>
+        </p:nvSpPr>
+        <p:spPr>
+          <a:xfrm>
+            <a:off x="6400800" y="5313578"/>
+            <a:ext cx="1644686" cy="181051"/>
+          </a:xfrm>
+          <a:prstGeom prst="rect">
+            <a:avLst/>
+          </a:prstGeom>
+          <a:noFill/>
+          <a:ln/>
+        </p:spPr>
+        <p:txBody>
+          <a:bodyPr wrap="square" lIns="0" tIns="0" rIns="0" bIns="0" rtlCol="0" anchor="ctr"/>
+          <a:lstStyle/>
+          <a:p>
+            <a:pPr algn="r" indent="0" marL="0">
+              <a:buNone/>
+            </a:pPr>
+            <a:r>
+              <a:rPr lang="en-US" sz="850" dirty="0">
+                <a:solidFill>
+                  <a:srgbClr val="3A4750"/>
+                </a:solidFill>
+                <a:latin typeface="Calibri" pitchFamily="34" charset="0"/>
+                <a:ea typeface="Calibri" pitchFamily="34" charset="-122"/>
+                <a:cs typeface="Calibri" pitchFamily="34" charset="-120"/>
+              </a:rPr>
+              <a:t>gpt-5-pro (medium)</a:t>
+            </a:r>
+            <a:endParaRPr lang="en-US" sz="850" dirty="0"/>
+          </a:p>
+        </p:txBody>
+      </p:sp>
+      <p:sp>
+        <p:nvSpPr>
+          <p:cNvPr id="104" name="Shape 102"/>
+          <p:cNvSpPr/>
+          <p:nvPr/>
+        </p:nvSpPr>
+        <p:spPr>
+          <a:xfrm>
+            <a:off x="8100350" y="5352898"/>
+            <a:ext cx="1609715" cy="103327"/>
+          </a:xfrm>
+          <a:prstGeom prst="rect">
+            <a:avLst/>
+          </a:prstGeom>
+          <a:solidFill>
+            <a:srgbClr val="93A1AA"/>
+          </a:solidFill>
+          <a:ln w="12700">
+            <a:solidFill>
+              <a:srgbClr val="333333"/>
+            </a:solidFill>
+            <a:prstDash val="solid"/>
+          </a:ln>
+        </p:spPr>
+      </p:sp>
+      <p:sp>
+        <p:nvSpPr>
+          <p:cNvPr id="105" name="Text 103"/>
+          <p:cNvSpPr txBox="1"/>
+          <p:nvPr/>
+        </p:nvSpPr>
+        <p:spPr>
+          <a:xfrm>
+            <a:off x="9755785" y="5313578"/>
+            <a:ext cx="603504" cy="181051"/>
+          </a:xfrm>
+          <a:prstGeom prst="rect">
+            <a:avLst/>
+          </a:prstGeom>
+          <a:noFill/>
+          <a:ln/>
+        </p:spPr>
+        <p:txBody>
+          <a:bodyPr wrap="square" lIns="0" tIns="0" rIns="0" bIns="0" rtlCol="0" anchor="ctr"/>
+          <a:lstStyle/>
+          <a:p>
+            <a:pPr indent="0" marL="0">
+              <a:buNone/>
+            </a:pPr>
+            <a:r>
+              <a:rPr lang="en-US" sz="850" dirty="0">
+                <a:solidFill>
+                  <a:srgbClr val="3A4750"/>
+                </a:solidFill>
+                <a:latin typeface="Calibri" pitchFamily="34" charset="0"/>
+                <a:ea typeface="Calibri" pitchFamily="34" charset="-122"/>
+                <a:cs typeface="Calibri" pitchFamily="34" charset="-120"/>
+              </a:rPr>
+              <a:t>1.799</a:t>
+            </a:r>
+            <a:endParaRPr lang="en-US" sz="850" dirty="0"/>
+          </a:p>
+        </p:txBody>
+      </p:sp>
+      <p:sp>
+        <p:nvSpPr>
+          <p:cNvPr id="106" name="Text 104"/>
+          <p:cNvSpPr txBox="1"/>
+          <p:nvPr/>
+        </p:nvSpPr>
+        <p:spPr>
+          <a:xfrm>
+            <a:off x="6400800" y="5494630"/>
+            <a:ext cx="1644686" cy="181051"/>
+          </a:xfrm>
+          <a:prstGeom prst="rect">
+            <a:avLst/>
+          </a:prstGeom>
+          <a:noFill/>
+          <a:ln/>
+        </p:spPr>
+        <p:txBody>
+          <a:bodyPr wrap="square" lIns="0" tIns="0" rIns="0" bIns="0" rtlCol="0" anchor="ctr"/>
+          <a:lstStyle/>
+          <a:p>
+            <a:pPr algn="r" indent="0" marL="0">
+              <a:buNone/>
+            </a:pPr>
+            <a:r>
+              <a:rPr lang="en-US" sz="850" dirty="0">
+                <a:solidFill>
+                  <a:srgbClr val="3A4750"/>
+                </a:solidFill>
+                <a:latin typeface="Calibri" pitchFamily="34" charset="0"/>
+                <a:ea typeface="Calibri" pitchFamily="34" charset="-122"/>
+                <a:cs typeface="Calibri" pitchFamily="34" charset="-120"/>
+              </a:rPr>
+              <a:t>gpt-5-mini</a:t>
+            </a:r>
+            <a:endParaRPr lang="en-US" sz="850" dirty="0"/>
+          </a:p>
+        </p:txBody>
+      </p:sp>
+      <p:sp>
+        <p:nvSpPr>
+          <p:cNvPr id="107" name="Shape 105"/>
+          <p:cNvSpPr/>
+          <p:nvPr/>
+        </p:nvSpPr>
+        <p:spPr>
+          <a:xfrm>
+            <a:off x="8100350" y="5533949"/>
+            <a:ext cx="1502341" cy="103327"/>
+          </a:xfrm>
+          <a:prstGeom prst="rect">
+            <a:avLst/>
+          </a:prstGeom>
+          <a:solidFill>
+            <a:srgbClr val="93A1AA"/>
+          </a:solidFill>
+          <a:ln w="12700">
+            <a:solidFill>
+              <a:srgbClr val="333333"/>
+            </a:solidFill>
+            <a:prstDash val="solid"/>
+          </a:ln>
+        </p:spPr>
+      </p:sp>
+      <p:sp>
+        <p:nvSpPr>
+          <p:cNvPr id="108" name="Text 106"/>
+          <p:cNvSpPr txBox="1"/>
+          <p:nvPr/>
+        </p:nvSpPr>
+        <p:spPr>
+          <a:xfrm>
+            <a:off x="9648411" y="5494630"/>
+            <a:ext cx="603504" cy="181051"/>
+          </a:xfrm>
+          <a:prstGeom prst="rect">
+            <a:avLst/>
+          </a:prstGeom>
+          <a:noFill/>
+          <a:ln/>
+        </p:spPr>
+        <p:txBody>
+          <a:bodyPr wrap="square" lIns="0" tIns="0" rIns="0" bIns="0" rtlCol="0" anchor="ctr"/>
+          <a:lstStyle/>
+          <a:p>
+            <a:pPr indent="0" marL="0">
+              <a:buNone/>
+            </a:pPr>
+            <a:r>
+              <a:rPr lang="en-US" sz="850" dirty="0">
+                <a:solidFill>
+                  <a:srgbClr val="3A4750"/>
+                </a:solidFill>
+                <a:latin typeface="Calibri" pitchFamily="34" charset="0"/>
+                <a:ea typeface="Calibri" pitchFamily="34" charset="-122"/>
+                <a:cs typeface="Calibri" pitchFamily="34" charset="-120"/>
+              </a:rPr>
+              <a:t>1.679</a:t>
+            </a:r>
+            <a:endParaRPr lang="en-US" sz="850" dirty="0"/>
+          </a:p>
+        </p:txBody>
+      </p:sp>
+      <p:sp>
+        <p:nvSpPr>
+          <p:cNvPr id="109" name="Text 107"/>
+          <p:cNvSpPr txBox="1"/>
+          <p:nvPr/>
+        </p:nvSpPr>
+        <p:spPr>
+          <a:xfrm>
+            <a:off x="6400800" y="5675681"/>
+            <a:ext cx="1644686" cy="181051"/>
+          </a:xfrm>
+          <a:prstGeom prst="rect">
+            <a:avLst/>
+          </a:prstGeom>
+          <a:noFill/>
+          <a:ln/>
+        </p:spPr>
+        <p:txBody>
+          <a:bodyPr wrap="square" lIns="0" tIns="0" rIns="0" bIns="0" rtlCol="0" anchor="ctr"/>
+          <a:lstStyle/>
+          <a:p>
+            <a:pPr algn="r" indent="0" marL="0">
+              <a:buNone/>
+            </a:pPr>
+            <a:r>
+              <a:rPr lang="en-US" sz="850" dirty="0">
+                <a:solidFill>
+                  <a:srgbClr val="3A4750"/>
+                </a:solidFill>
+                <a:latin typeface="Calibri" pitchFamily="34" charset="0"/>
+                <a:ea typeface="Calibri" pitchFamily="34" charset="-122"/>
+                <a:cs typeface="Calibri" pitchFamily="34" charset="-120"/>
+              </a:rPr>
+              <a:t>gpt-oss-120b</a:t>
+            </a:r>
+            <a:endParaRPr lang="en-US" sz="850" dirty="0"/>
+          </a:p>
+        </p:txBody>
+      </p:sp>
+      <p:sp>
+        <p:nvSpPr>
+          <p:cNvPr id="110" name="Shape 108"/>
+          <p:cNvSpPr/>
+          <p:nvPr/>
+        </p:nvSpPr>
+        <p:spPr>
+          <a:xfrm>
+            <a:off x="8100350" y="5715000"/>
+            <a:ext cx="1476392" cy="103327"/>
+          </a:xfrm>
+          <a:prstGeom prst="rect">
+            <a:avLst/>
+          </a:prstGeom>
+          <a:solidFill>
+            <a:srgbClr val="93A1AA"/>
+          </a:solidFill>
+          <a:ln w="12700">
+            <a:solidFill>
+              <a:srgbClr val="333333"/>
+            </a:solidFill>
+            <a:prstDash val="solid"/>
+          </a:ln>
+        </p:spPr>
+      </p:sp>
+      <p:sp>
+        <p:nvSpPr>
+          <p:cNvPr id="111" name="Text 109"/>
+          <p:cNvSpPr txBox="1"/>
+          <p:nvPr/>
+        </p:nvSpPr>
+        <p:spPr>
+          <a:xfrm>
+            <a:off x="9622462" y="5675681"/>
+            <a:ext cx="603504" cy="181051"/>
+          </a:xfrm>
+          <a:prstGeom prst="rect">
+            <a:avLst/>
+          </a:prstGeom>
+          <a:noFill/>
+          <a:ln/>
+        </p:spPr>
+        <p:txBody>
+          <a:bodyPr wrap="square" lIns="0" tIns="0" rIns="0" bIns="0" rtlCol="0" anchor="ctr"/>
+          <a:lstStyle/>
+          <a:p>
+            <a:pPr indent="0" marL="0">
+              <a:buNone/>
+            </a:pPr>
+            <a:r>
+              <a:rPr lang="en-US" sz="850" dirty="0">
+                <a:solidFill>
+                  <a:srgbClr val="3A4750"/>
+                </a:solidFill>
+                <a:latin typeface="Calibri" pitchFamily="34" charset="0"/>
+                <a:ea typeface="Calibri" pitchFamily="34" charset="-122"/>
+                <a:cs typeface="Calibri" pitchFamily="34" charset="-120"/>
+              </a:rPr>
+              <a:t>1.650</a:t>
+            </a:r>
+            <a:endParaRPr lang="en-US" sz="850" dirty="0"/>
+          </a:p>
+        </p:txBody>
+      </p:sp>
+      <p:sp>
+        <p:nvSpPr>
+          <p:cNvPr id="112" name="Shape 110"/>
+          <p:cNvSpPr/>
+          <p:nvPr/>
+        </p:nvSpPr>
+        <p:spPr>
+          <a:xfrm>
+            <a:off x="8995133" y="2212848"/>
+            <a:ext cx="0" cy="3639312"/>
+          </a:xfrm>
+          <a:prstGeom prst="line">
+            <a:avLst/>
+          </a:prstGeom>
+          <a:noFill/>
+          <a:ln w="12700">
+            <a:solidFill>
+              <a:srgbClr val="93A1AA"/>
+            </a:solidFill>
+            <a:prstDash val="dash"/>
+          </a:ln>
+        </p:spPr>
+      </p:sp>
+      <p:sp>
+        <p:nvSpPr>
+          <p:cNvPr id="113" name="Shape 111"/>
+          <p:cNvSpPr/>
+          <p:nvPr/>
+        </p:nvSpPr>
+        <p:spPr>
+          <a:xfrm>
+            <a:off x="566928" y="5961888"/>
+            <a:ext cx="11055096" cy="676656"/>
+          </a:xfrm>
+          <a:prstGeom prst="roundRect">
+            <a:avLst>
+              <a:gd name="adj" fmla="val 6757"/>
+            </a:avLst>
+          </a:prstGeom>
+          <a:solidFill>
+            <a:srgbClr val="10161C"/>
+          </a:solidFill>
+          <a:ln w="12700">
+            <a:solidFill>
+              <a:srgbClr val="10161C"/>
+            </a:solidFill>
+            <a:prstDash val="solid"/>
+          </a:ln>
+        </p:spPr>
+      </p:sp>
+      <p:sp>
+        <p:nvSpPr>
+          <p:cNvPr id="114" name="Text 112"/>
+          <p:cNvSpPr txBox="1"/>
+          <p:nvPr/>
+        </p:nvSpPr>
+        <p:spPr>
+          <a:xfrm>
+            <a:off x="786384" y="6035040"/>
+            <a:ext cx="10616184" cy="548640"/>
+          </a:xfrm>
+          <a:prstGeom prst="rect">
+            <a:avLst/>
+          </a:prstGeom>
+          <a:noFill/>
+          <a:ln/>
+        </p:spPr>
+        <p:txBody>
+          <a:bodyPr wrap="square" lIns="0" tIns="0" rIns="0" bIns="0" rtlCol="0" anchor="ctr"/>
+          <a:lstStyle/>
+          <a:p>
+            <a:pPr indent="0" marL="0">
+              <a:lnSpc>
+                <a:spcPts val="1500"/>
+              </a:lnSpc>
+              <a:buNone/>
+            </a:pPr>
+            <a:r>
+              <a:rPr lang="en-US" sz="1100" dirty="0">
+                <a:solidFill>
+                  <a:srgbClr val="D6E0E4"/>
+                </a:solidFill>
+                <a:latin typeface="Calibri" pitchFamily="34" charset="0"/>
+                <a:ea typeface="Calibri" pitchFamily="34" charset="-122"/>
+                <a:cs typeface="Calibri" pitchFamily="34" charset="-120"/>
+              </a:rPr>
+              <a:t>The rankings disagree, and that is the point: dropping four tasks moves gpt-5.4 from 4th to 17th, and moves this port from 1st to 3rd — behind claude-opus-4.6 and gemini-3.1-pro. Neither panel is “the” answer; the left one excludes the newest models, the right one excludes the two tasks this port is strongest on.</a:t>
+            </a:r>
+            <a:endParaRPr lang="en-US" sz="1100" dirty="0"/>
           </a:p>
         </p:txBody>
       </p:sp>
@@ -14907,7 +17134,7 @@
                 <a:ea typeface="Calibri" pitchFamily="34" charset="-122"/>
                 <a:cs typeface="Calibri" pitchFamily="34" charset="-120"/>
               </a:rPr>
-              <a:t>Nine of AlgoTune’s 18 models have a result on all eight tasks; max and median use every model that has a result on that task.</a:t>
+              <a:t>Max and median use every model with a result on that task. The nine with no score on at least one of the eight — claude-opus-4, 4.5 and 4.6, sonnet-4.5, gemini-2.5-pro, gemini-3-pro, gemini-3.1-pro, gpt-oss-120b, qwen3-coder — still have solver files upstream; only the score is missing, and they include the newest models on the board. AlgoTune publishes no GLM-5 result at all.</a:t>
             </a:r>
             <a:endParaRPr lang="en-US" sz="950" dirty="0"/>
           </a:p>

--- a/bench/results/decks/algotune-eight-tasks.pptx
+++ b/bench/results/decks/algotune-eight-tasks.pptx
@@ -1988,7 +1988,7 @@
                 <a:ea typeface="Calibri" pitchFamily="34" charset="-122"/>
                 <a:cs typeface="Calibri" pitchFamily="34" charset="-120"/>
               </a:rPr>
-              <a:t>An ERA flat-PUCT tree search on AgentDescent, put beside AlphaEvolve, MetaEvolve, OpenEvolve and the AlgoTune leaderboard — and what turns out not to be the same measurement.</a:t>
+              <a:t>An ERA flat-PUCT tree search on AgentDescent, put beside MetaEvolve, its untrained baseline, OpenEvolve and the AlgoTune leaderboard — and what turns out not to be the same measurement.</a:t>
             </a:r>
             <a:endParaRPr lang="en-US" sz="1500" dirty="0"/>
           </a:p>
@@ -4585,7 +4585,7 @@
                 <a:ea typeface="Calibri" pitchFamily="34" charset="-122"/>
                 <a:cs typeface="Calibri" pitchFamily="34" charset="-120"/>
               </a:rPr>
-              <a:t>Ten tasks have a prior-arm run. The two outside the comparison set have no AlphaEvolve or MetaEvolve number, so AlgoTune is the only yardstick.</a:t>
+              <a:t>Ten tasks have a prior-arm run. The two outside the comparison set have no MetaEvolve number, so AlgoTune is the only yardstick.</a:t>
             </a:r>
             <a:endParaRPr lang="en-US" sz="1350" dirty="0"/>
           </a:p>
@@ -7523,7 +7523,7 @@
                           <a:ea typeface="Calibri" pitchFamily="34" charset="-122"/>
                           <a:cs typeface="Calibri" pitchFamily="34" charset="-120"/>
                         </a:rPr>
-                        <a:t>AlphaEvolve</a:t>
+                        <a:t>Qwen3-14B, no RL</a:t>
                       </a:r>
                       <a:endParaRPr lang="en-US" sz="1050" dirty="0">
                         <a:latin typeface="Calibri" charset="0"/>
@@ -7544,7 +7544,7 @@
                           <a:ea typeface="Calibri" pitchFamily="34" charset="-122"/>
                           <a:cs typeface="Calibri" pitchFamily="34" charset="-120"/>
                         </a:rPr>
-                        <a:t>arXiv:2607.21971</a:t>
+                        <a:t>MetaEvolve’s baseline</a:t>
                       </a:r>
                       <a:endParaRPr lang="en-US" sz="1050" dirty="0">
                         <a:latin typeface="Calibri" charset="0"/>
@@ -7612,7 +7612,28 @@
                           <a:ea typeface="Calibri" pitchFamily="34" charset="-122"/>
                           <a:cs typeface="Calibri" pitchFamily="34" charset="-120"/>
                         </a:rPr>
-                        <a:t>own</a:t>
+                        <a:t>OpenEvolve’s search</a:t>
+                      </a:r>
+                      <a:endParaRPr lang="en-US" sz="1050" dirty="0">
+                        <a:latin typeface="Calibri" charset="0"/>
+                        <a:ea typeface="Calibri" charset="0"/>
+                        <a:cs typeface="Calibri" charset="0"/>
+                      </a:endParaRPr>
+                    </a:p>
+                    <a:p>
+                      <a:pPr algn="ctr" indent="0" marL="0">
+                        <a:buNone/>
+                      </a:pPr>
+                      <a:r>
+                        <a:rPr lang="en-US" sz="1050" dirty="0">
+                          <a:solidFill>
+                            <a:srgbClr val="3A4750"/>
+                          </a:solidFill>
+                          <a:latin typeface="Calibri" pitchFamily="34" charset="0"/>
+                          <a:ea typeface="Calibri" pitchFamily="34" charset="-122"/>
+                          <a:cs typeface="Calibri" pitchFamily="34" charset="-120"/>
+                        </a:rPr>
+                        <a:t>arXiv:2607.21971</a:t>
                       </a:r>
                       <a:endParaRPr lang="en-US" sz="1050" dirty="0">
                         <a:latin typeface="Calibri" charset="0"/>
@@ -7681,6 +7702,27 @@
                           <a:cs typeface="Calibri" pitchFamily="34" charset="-120"/>
                         </a:rPr>
                         <a:t>Qwen3-14B</a:t>
+                      </a:r>
+                      <a:endParaRPr lang="en-US" sz="1050" dirty="0">
+                        <a:latin typeface="Calibri" charset="0"/>
+                        <a:ea typeface="Calibri" charset="0"/>
+                        <a:cs typeface="Calibri" charset="0"/>
+                      </a:endParaRPr>
+                    </a:p>
+                    <a:p>
+                      <a:pPr algn="ctr" indent="0" marL="0">
+                        <a:buNone/>
+                      </a:pPr>
+                      <a:r>
+                        <a:rPr lang="en-US" sz="1050" dirty="0">
+                          <a:solidFill>
+                            <a:srgbClr val="3A4750"/>
+                          </a:solidFill>
+                          <a:latin typeface="Calibri" pitchFamily="34" charset="0"/>
+                          <a:ea typeface="Calibri" pitchFamily="34" charset="-122"/>
+                          <a:cs typeface="Calibri" pitchFamily="34" charset="-120"/>
+                        </a:rPr>
+                        <a:t>no training</a:t>
                       </a:r>
                       <a:endParaRPr lang="en-US" sz="1050" dirty="0">
                         <a:latin typeface="Calibri" charset="0"/>
@@ -7975,7 +8017,7 @@
                           <a:ea typeface="Calibri" pitchFamily="34" charset="-122"/>
                           <a:cs typeface="Calibri" pitchFamily="34" charset="-120"/>
                         </a:rPr>
-                        <a:t>own</a:t>
+                        <a:t>OpenEvolve’s search</a:t>
                       </a:r>
                       <a:endParaRPr lang="en-US" sz="1050" dirty="0">
                         <a:latin typeface="Calibri" charset="0"/>
@@ -8044,6 +8086,48 @@
                           <a:cs typeface="Calibri" pitchFamily="34" charset="-120"/>
                         </a:rPr>
                         <a:t>Qwen3-14B</a:t>
+                      </a:r>
+                      <a:endParaRPr lang="en-US" sz="1050" dirty="0">
+                        <a:latin typeface="Calibri" charset="0"/>
+                        <a:ea typeface="Calibri" charset="0"/>
+                        <a:cs typeface="Calibri" charset="0"/>
+                      </a:endParaRPr>
+                    </a:p>
+                    <a:p>
+                      <a:pPr algn="ctr" indent="0" marL="0">
+                        <a:buNone/>
+                      </a:pPr>
+                      <a:r>
+                        <a:rPr lang="en-US" sz="1050" dirty="0">
+                          <a:solidFill>
+                            <a:srgbClr val="3A4750"/>
+                          </a:solidFill>
+                          <a:latin typeface="Calibri" pitchFamily="34" charset="0"/>
+                          <a:ea typeface="Calibri" pitchFamily="34" charset="-122"/>
+                          <a:cs typeface="Calibri" pitchFamily="34" charset="-120"/>
+                        </a:rPr>
+                        <a:t>+ RL on synthesised</a:t>
+                      </a:r>
+                      <a:endParaRPr lang="en-US" sz="1050" dirty="0">
+                        <a:latin typeface="Calibri" charset="0"/>
+                        <a:ea typeface="Calibri" charset="0"/>
+                        <a:cs typeface="Calibri" charset="0"/>
+                      </a:endParaRPr>
+                    </a:p>
+                    <a:p>
+                      <a:pPr algn="ctr" indent="0" marL="0">
+                        <a:buNone/>
+                      </a:pPr>
+                      <a:r>
+                        <a:rPr lang="en-US" sz="1050" dirty="0">
+                          <a:solidFill>
+                            <a:srgbClr val="3A4750"/>
+                          </a:solidFill>
+                          <a:latin typeface="Calibri" pitchFamily="34" charset="0"/>
+                          <a:ea typeface="Calibri" pitchFamily="34" charset="-122"/>
+                          <a:cs typeface="Calibri" pitchFamily="34" charset="-120"/>
+                        </a:rPr>
+                        <a:t>evolution trajectories</a:t>
                       </a:r>
                       <a:endParaRPr lang="en-US" sz="1050" dirty="0">
                         <a:latin typeface="Calibri" charset="0"/>
@@ -9081,7 +9165,7 @@
                 <a:ea typeface="Calibri" pitchFamily="34" charset="-122"/>
                 <a:cs typeface="Calibri" pitchFamily="34" charset="-120"/>
               </a:rPr>
-              <a:t>“not stated” is not an accusation — neither paper publishes its sizes. Slides 7 and 8 ask what their own numbers imply about them.</a:t>
+              <a:t>The first two rows are one paper’s ablation of a single variable: same search, same model, RL or not. Neither states its problem sizes, and all three run OpenEvolve’s search — whose AlgoTune harness takes n from a config field rather than from AlgoTune’s calibration. DeepMind’s AlphaEvolve is absent because it has never been run on AlgoTune and is not publicly available; the row often labelled with its name is this paper’s untrained baseline.</a:t>
             </a:r>
             <a:endParaRPr lang="en-US" sz="950" dirty="0"/>
           </a:p>
@@ -9588,7 +9672,7 @@
                 <a:ea typeface="Calibri" pitchFamily="34" charset="-122"/>
                 <a:cs typeface="Calibri" pitchFamily="34" charset="-120"/>
               </a:rPr>
-              <a:t>Qwen3-14B  ·  own harness, 50 rounds  ·  arXiv:2607.21971</a:t>
+              <a:t>Qwen3-14B + RL  ·  OpenEvolve’s search  ·  arXiv:2607.21971</a:t>
             </a:r>
             <a:endParaRPr lang="en-US" sz="850" dirty="0"/>
           </a:p>
@@ -9975,7 +10059,7 @@
                 <a:ea typeface="Calibri" pitchFamily="34" charset="-122"/>
                 <a:cs typeface="Calibri" pitchFamily="34" charset="-120"/>
               </a:rPr>
-              <a:t>AlphaEvolve</a:t>
+              <a:t>Qwen3-14B, no RL</a:t>
             </a:r>
             <a:endParaRPr lang="en-US" sz="1250" dirty="0"/>
           </a:p>
@@ -10014,7 +10098,7 @@
                 <a:ea typeface="Calibri" pitchFamily="34" charset="-122"/>
                 <a:cs typeface="Calibri" pitchFamily="34" charset="-120"/>
               </a:rPr>
-              <a:t>Qwen3-14B  ·  own harness, 50 rounds  ·  arXiv:2607.21971</a:t>
+              <a:t>Qwen3-14B, untrained  ·  OpenEvolve’s search algorithm</a:t>
             </a:r>
             <a:endParaRPr lang="en-US" sz="850" dirty="0"/>
           </a:p>
@@ -14578,7 +14662,28 @@
                           <a:ea typeface="Calibri" pitchFamily="34" charset="-122"/>
                           <a:cs typeface="Calibri" pitchFamily="34" charset="-120"/>
                         </a:rPr>
-                        <a:t>Alpha</a:t>
+                        <a:t>Qwen3-14B</a:t>
+                      </a:r>
+                      <a:endParaRPr lang="en-US" sz="1050" dirty="0">
+                        <a:latin typeface="Calibri" charset="0"/>
+                        <a:ea typeface="Calibri" charset="0"/>
+                        <a:cs typeface="Calibri" charset="0"/>
+                      </a:endParaRPr>
+                    </a:p>
+                    <a:p>
+                      <a:pPr algn="ctr" indent="0" marL="0">
+                        <a:buNone/>
+                      </a:pPr>
+                      <a:r>
+                        <a:rPr lang="en-US" sz="1050" b="1" dirty="0">
+                          <a:solidFill>
+                            <a:srgbClr val="FFFFFF"/>
+                          </a:solidFill>
+                          <a:latin typeface="Calibri" pitchFamily="34" charset="0"/>
+                          <a:ea typeface="Calibri" pitchFamily="34" charset="-122"/>
+                          <a:cs typeface="Calibri" pitchFamily="34" charset="-120"/>
+                        </a:rPr>
+                        <a:t>no RL</a:t>
                       </a:r>
                       <a:endParaRPr lang="en-US" sz="1050" dirty="0">
                         <a:latin typeface="Calibri" charset="0"/>
@@ -14654,6 +14759,27 @@
                         <a:cs typeface="Calibri" charset="0"/>
                       </a:endParaRPr>
                     </a:p>
+                    <a:p>
+                      <a:pPr algn="ctr" indent="0" marL="0">
+                        <a:buNone/>
+                      </a:pPr>
+                      <a:r>
+                        <a:rPr lang="en-US" sz="1050" b="1" dirty="0">
+                          <a:solidFill>
+                            <a:srgbClr val="FFFFFF"/>
+                          </a:solidFill>
+                          <a:latin typeface="Calibri" pitchFamily="34" charset="0"/>
+                          <a:ea typeface="Calibri" pitchFamily="34" charset="-122"/>
+                          <a:cs typeface="Calibri" pitchFamily="34" charset="-120"/>
+                        </a:rPr>
+                        <a:t>Evolve</a:t>
+                      </a:r>
+                      <a:endParaRPr lang="en-US" sz="1050" dirty="0">
+                        <a:latin typeface="Calibri" charset="0"/>
+                        <a:ea typeface="Calibri" charset="0"/>
+                        <a:cs typeface="Calibri" charset="0"/>
+                      </a:endParaRPr>
+                    </a:p>
                   </a:txBody>
                   <a:tcPr marL="91440" marR="91440" marT="45720" marB="45720" anchor="ctr">
                     <a:lnL w="6350" cap="flat" cmpd="sng" algn="ctr">
@@ -14714,7 +14840,28 @@
                           <a:ea typeface="Calibri" pitchFamily="34" charset="-122"/>
                           <a:cs typeface="Calibri" pitchFamily="34" charset="-120"/>
                         </a:rPr>
-                        <a:t>OpenEv</a:t>
+                        <a:t>Open</a:t>
+                      </a:r>
+                      <a:endParaRPr lang="en-US" sz="1050" dirty="0">
+                        <a:latin typeface="Calibri" charset="0"/>
+                        <a:ea typeface="Calibri" charset="0"/>
+                        <a:cs typeface="Calibri" charset="0"/>
+                      </a:endParaRPr>
+                    </a:p>
+                    <a:p>
+                      <a:pPr algn="ctr" indent="0" marL="0">
+                        <a:buNone/>
+                      </a:pPr>
+                      <a:r>
+                        <a:rPr lang="en-US" sz="1050" b="1" dirty="0">
+                          <a:solidFill>
+                            <a:srgbClr val="FFFFFF"/>
+                          </a:solidFill>
+                          <a:latin typeface="Calibri" pitchFamily="34" charset="0"/>
+                          <a:ea typeface="Calibri" pitchFamily="34" charset="-122"/>
+                          <a:cs typeface="Calibri" pitchFamily="34" charset="-120"/>
+                        </a:rPr>
+                        <a:t>Evolve</a:t>
                       </a:r>
                       <a:endParaRPr lang="en-US" sz="1050" dirty="0">
                         <a:latin typeface="Calibri" charset="0"/>
@@ -22705,7 +22852,7 @@
                 <a:ea typeface="Calibri" pitchFamily="34" charset="-122"/>
                 <a:cs typeface="Calibri" pitchFamily="34" charset="-120"/>
               </a:rPr>
-              <a:t>Alpha 1.432 · Meta 1.474 · OpenEv 1.48</a:t>
+              <a:t>no-RL 1.432 · MetaEvolve 1.474 · OpenEvolve 1.48</a:t>
             </a:r>
             <a:endParaRPr lang="en-US" sz="1050" dirty="0"/>
           </a:p>
@@ -22849,7 +22996,7 @@
                 <a:ea typeface="Calibri" pitchFamily="34" charset="-122"/>
                 <a:cs typeface="Calibri" pitchFamily="34" charset="-120"/>
               </a:rPr>
-              <a:t>Meta 6.945 · OpenEv 3.22</a:t>
+              <a:t>MetaEvolve 6.945 · OpenEvolve 3.22</a:t>
             </a:r>
             <a:endParaRPr lang="en-US" sz="1050" dirty="0"/>
           </a:p>
@@ -22993,7 +23140,7 @@
                 <a:ea typeface="Calibri" pitchFamily="34" charset="-122"/>
                 <a:cs typeface="Calibri" pitchFamily="34" charset="-120"/>
               </a:rPr>
-              <a:t>Meta 1.346 · OpenEv 1.38</a:t>
+              <a:t>MetaEvolve 1.346 · OpenEvolve 1.38</a:t>
             </a:r>
             <a:endParaRPr lang="en-US" sz="1050" dirty="0"/>
           </a:p>
@@ -23176,7 +23323,7 @@
                 <a:ea typeface="Calibri" pitchFamily="34" charset="-122"/>
                 <a:cs typeface="Calibri" pitchFamily="34" charset="-120"/>
               </a:rPr>
-              <a:t>Alpha 1.795 · Meta 1.914 · OpenEv 1.94</a:t>
+              <a:t>no-RL 1.795 · MetaEvolve 1.914 · OpenEvolve 1.94</a:t>
             </a:r>
             <a:endParaRPr lang="en-US" sz="1050" dirty="0"/>
           </a:p>
@@ -23320,7 +23467,7 @@
                 <a:ea typeface="Calibri" pitchFamily="34" charset="-122"/>
                 <a:cs typeface="Calibri" pitchFamily="34" charset="-120"/>
               </a:rPr>
-              <a:t>Meta 78.128</a:t>
+              <a:t>MetaEvolve 78.128</a:t>
             </a:r>
             <a:endParaRPr lang="en-US" sz="1050" dirty="0"/>
           </a:p>
@@ -23389,7 +23536,7 @@
                 <a:ea typeface="Calibri" pitchFamily="34" charset="-122"/>
                 <a:cs typeface="Calibri" pitchFamily="34" charset="-120"/>
               </a:rPr>
-              <a:t>That two-sided pattern is the signature of a smaller problem, not a better search. Shrink n and the tasks whose only headroom is Python overhead become winnable; the tasks whose win is genuinely algorithmic at scale lose theirs.</a:t>
+              <a:t>That two-sided pattern is the signature of a smaller problem, not a better search. Shrink n and the tasks whose only headroom is Python overhead become winnable; the tasks whose win is genuinely algorithmic at scale lose theirs. All three columns run OpenEvolve’s search, and three of the eight agree with OpenEvolve’s own numbers to within 2.5%.</a:t>
             </a:r>
             <a:endParaRPr lang="en-US" sz="1300" dirty="0"/>
           </a:p>

--- a/bench/results/decks/algotune-eight-tasks.pptx
+++ b/bench/results/decks/algotune-eight-tasks.pptx
@@ -13228,7 +13228,7 @@
                 <a:ea typeface="Calibri" pitchFamily="34" charset="-122"/>
                 <a:cs typeface="Calibri" pitchFamily="34" charset="-120"/>
               </a:rPr>
-              <a:t>OpenEvolve</a:t>
+              <a:t>MetaEvolve (RL)</a:t>
             </a:r>
             <a:endParaRPr lang="en-US" sz="1000" dirty="0"/>
           </a:p>
@@ -13282,7 +13282,7 @@
         <p:spPr>
           <a:xfrm>
             <a:off x="4389120" y="2601468"/>
-            <a:ext cx="778412" cy="91440"/>
+            <a:ext cx="702185" cy="91440"/>
           </a:xfrm>
           <a:prstGeom prst="rect">
             <a:avLst/>
@@ -13331,7 +13331,7 @@
                 <a:ea typeface="Calibri" pitchFamily="34" charset="-122"/>
                 <a:cs typeface="Calibri" pitchFamily="34" charset="-120"/>
               </a:rPr>
-              <a:t>2.267</a:t>
+              <a:t>2.045</a:t>
             </a:r>
             <a:endParaRPr lang="en-US" sz="950" dirty="0"/>
           </a:p>
@@ -13430,13 +13430,13 @@
             <a:r>
               <a:rPr lang="en-US" sz="1000" dirty="0">
                 <a:solidFill>
-                  <a:srgbClr val="C2872B"/>
+                  <a:srgbClr val="93A1AA"/>
                 </a:solidFill>
                 <a:latin typeface="Calibri" pitchFamily="34" charset="0"/>
                 <a:ea typeface="Calibri" pitchFamily="34" charset="-122"/>
                 <a:cs typeface="Calibri" pitchFamily="34" charset="-120"/>
               </a:rPr>
-              <a:t>MetaEvolve (RL)</a:t>
+              <a:t>OpenEvolve</a:t>
             </a:r>
             <a:endParaRPr lang="en-US" sz="1000" dirty="0"/>
           </a:p>
@@ -13475,7 +13475,7 @@
                 <a:ea typeface="Calibri" pitchFamily="34" charset="-122"/>
                 <a:cs typeface="Calibri" pitchFamily="34" charset="-120"/>
               </a:rPr>
-              <a:t>OpenEvolve</a:t>
+              <a:t>OpenEvolve*</a:t>
             </a:r>
             <a:endParaRPr lang="en-US" sz="750" dirty="0"/>
           </a:p>
@@ -13490,13 +13490,13 @@
         <p:spPr>
           <a:xfrm>
             <a:off x="4389120" y="2944368"/>
-            <a:ext cx="702185" cy="91440"/>
+            <a:ext cx="681239" cy="91440"/>
           </a:xfrm>
           <a:prstGeom prst="rect">
             <a:avLst/>
           </a:prstGeom>
           <a:solidFill>
-            <a:srgbClr val="C2872B"/>
+            <a:srgbClr val="93A1AA"/>
           </a:solidFill>
           <a:ln w="12700">
             <a:solidFill>
@@ -13539,7 +13539,7 @@
                 <a:ea typeface="Calibri" pitchFamily="34" charset="-122"/>
                 <a:cs typeface="Calibri" pitchFamily="34" charset="-120"/>
               </a:rPr>
-              <a:t>2.045</a:t>
+              <a:t>1.984</a:t>
             </a:r>
             <a:endParaRPr lang="en-US" sz="950" dirty="0"/>
           </a:p>
@@ -17577,7 +17577,24 @@
                 <a:ea typeface="Calibri" pitchFamily="34" charset="-122"/>
                 <a:cs typeface="Calibri" pitchFamily="34" charset="-120"/>
               </a:rPr>
-              <a:t>Eighteen AlgoTuner rows run the benchmark’s own agent at its calibrated n. Three amber rows run OpenEvolve’s search — MetaEvolve and its baseline say so outright, and none of the three states its problem sizes. That is the axis to hold in mind before reading the order: the top four and the AlgoTuner field may not be measuring the same problems.</a:t>
+              <a:t>Eighteen AlgoTuner rows run the benchmark’s own agent at its calibrated n; three amber rows run OpenEvolve’s search, and none of those three states its problem sizes. Read that before the order — the top four and the AlgoTuner field may not be measuring the same problems.  </a:t>
+            </a:r>
+            <a:pPr indent="0" marL="0">
+              <a:lnSpc>
+                <a:spcPts val="1400"/>
+              </a:lnSpc>
+              <a:buNone/>
+            </a:pPr>
+            <a:r>
+              <a:rPr lang="en-US" sz="1050" dirty="0">
+                <a:solidFill>
+                  <a:srgbClr val="E8C98A"/>
+                </a:solidFill>
+                <a:latin typeface="Calibri" pitchFamily="34" charset="0"/>
+                <a:ea typeface="Calibri" pitchFamily="34" charset="-122"/>
+                <a:cs typeface="Calibri" pitchFamily="34" charset="-120"/>
+              </a:rPr>
+              <a:t>OpenEvolve* is its own published 1.984x (the final of four phases). Its per-task list is a cross-phase discoveries log, so the 2.267x that list averages to is not a score anyone achieved in one configuration.</a:t>
             </a:r>
             <a:endParaRPr lang="en-US" sz="1050" dirty="0"/>
           </a:p>
@@ -29837,7 +29854,7 @@
                           <a:ea typeface="Calibri" pitchFamily="34" charset="-122"/>
                           <a:cs typeface="Calibri" pitchFamily="34" charset="-120"/>
                         </a:rPr>
-                        <a:t>2.267</a:t>
+                        <a:t>1.984</a:t>
                       </a:r>
                       <a:endParaRPr lang="en-US" sz="1100" dirty="0">
                         <a:latin typeface="Calibri" charset="0"/>
@@ -30065,7 +30082,7 @@
                 <a:ea typeface="Calibri" pitchFamily="34" charset="-122"/>
                 <a:cs typeface="Calibri" pitchFamily="34" charset="-120"/>
               </a:rPr>
-              <a:t>amber = above the best of all 14–18 AlgoTune models at this n.  “Clipped” is AlgoTune’s own rule: anything under 1.0 counts as 1.0, which is why OpenEvolve’s column moves from its published 1.984 to the 2.267 its own table computes to.</a:t>
+              <a:t>amber = above the best of all 14–18 AlgoTune models at this n.  “Clipped” is AlgoTune’s own rule: anything under 1.0 counts as 1.0.  The OpenEvolve column is that project’s cross-phase discoveries log rather than one run, so its per-task cells and its published 1.984x score do not come from the same configuration.</a:t>
             </a:r>
             <a:endParaRPr lang="en-US" sz="950" dirty="0"/>
           </a:p>

--- a/bench/results/decks/algotune-eight-tasks.pptx
+++ b/bench/results/decks/algotune-eight-tasks.pptx
@@ -18,9 +18,10 @@
     <p:sldId id="266" r:id="rId12"/>
     <p:sldId id="267" r:id="rId13"/>
     <p:sldId id="268" r:id="rId14"/>
+    <p:sldId id="269" r:id="rId15"/>
   </p:sldIdLst>
   <p:notesMasterIdLst>
-    <p:notesMasterId r:id="rId15"/>
+    <p:notesMasterId r:id="rId16"/>
   </p:notesMasterIdLst>
   <p:sldSz cx="12192000" cy="6858000"/>
   <p:notesSz cx="6858000" cy="12192000"/>
@@ -602,7 +603,7 @@
           <a:p>
             <a:r>
               <a:rPr lang="en-US" dirty="0"/>
-              <a:t>The two escapes are what makes this a conclusion rather than a suspicion. Say so.</a:t>
+              <a:t>Both directions matter. One direction alone would be explainable as a stronger search.</a:t>
             </a:r>
             <a:endParaRPr lang="en-US" dirty="0"/>
           </a:p>
@@ -690,7 +691,7 @@
           <a:p>
             <a:r>
               <a:rPr lang="en-US" dirty="0"/>
-              <a:t>Correcting an earlier read: affine is nearly closed, lu and psd are where the room is.</a:t>
+              <a:t>The two escapes are what makes this a conclusion rather than a suspicion. Say so.</a:t>
             </a:r>
             <a:endParaRPr lang="en-US" dirty="0"/>
           </a:p>
@@ -778,7 +779,7 @@
           <a:p>
             <a:r>
               <a:rPr lang="en-US" dirty="0"/>
-              <a:t>Show the miss. A deck that only shows wins is not a measurement.</a:t>
+              <a:t>Correcting an earlier read: affine is nearly closed, lu and psd are where the room is.</a:t>
             </a:r>
             <a:endParaRPr lang="en-US" dirty="0"/>
           </a:p>
@@ -866,7 +867,7 @@
           <a:p>
             <a:r>
               <a:rPr lang="en-US" dirty="0"/>
-              <a:t>End on the limits. The credibility of slides 4-9 depends on saying this one out loud.</a:t>
+              <a:t>Show the miss. A deck that only shows wins is not a measurement.</a:t>
             </a:r>
             <a:endParaRPr lang="en-US" dirty="0"/>
           </a:p>
@@ -890,6 +891,94 @@
             <a:fld id="{F7021451-1387-4CA6-816F-3879F97B5CBC}" type="slidenum">
               <a:rPr lang="en-US"/>
               <a:t>13</a:t>
+            </a:fld>
+            <a:endParaRPr lang="en-US"/>
+          </a:p>
+        </p:txBody>
+      </p:sp>
+    </p:spTree>
+    <p:extLst>
+      <p:ext uri="{BB962C8B-B14F-4D97-AF65-F5344CB8AC3E}">
+        <p14:creationId xmlns:p14="http://schemas.microsoft.com/office/powerpoint/2010/main" val="1024086991"/>
+      </p:ext>
+    </p:extLst>
+  </p:cSld>
+  <p:clrMapOvr>
+    <a:masterClrMapping/>
+  </p:clrMapOvr>
+</p:notes>
+</file>
+
+<file path=ppt/notesSlides/notesSlide14.xml><?xml version="1.0" encoding="utf-8"?>
+<p:notes xmlns:a="http://schemas.openxmlformats.org/drawingml/2006/main" xmlns:r="http://schemas.openxmlformats.org/officeDocument/2006/relationships" xmlns:p="http://schemas.openxmlformats.org/presentationml/2006/main">
+  <p:cSld>
+    <p:spTree>
+      <p:nvGrpSpPr>
+        <p:cNvPr id="1" name=""/>
+        <p:cNvGrpSpPr/>
+        <p:nvPr/>
+      </p:nvGrpSpPr>
+      <p:grpSpPr>
+        <a:xfrm>
+          <a:off x="0" y="0"/>
+          <a:ext cx="0" cy="0"/>
+          <a:chOff x="0" y="0"/>
+          <a:chExt cx="0" cy="0"/>
+        </a:xfrm>
+      </p:grpSpPr>
+      <p:sp>
+        <p:nvSpPr>
+          <p:cNvPr id="2" name="Slide Image Placeholder 1"/>
+          <p:cNvSpPr>
+            <a:spLocks noGrp="1" noRot="1" noChangeAspect="1"/>
+          </p:cNvSpPr>
+          <p:nvPr>
+            <p:ph type="sldImg"/>
+          </p:nvPr>
+        </p:nvSpPr>
+        <p:spPr/>
+      </p:sp>
+      <p:sp>
+        <p:nvSpPr>
+          <p:cNvPr id="3" name="Notes Placeholder 2"/>
+          <p:cNvSpPr>
+            <a:spLocks noGrp="1"/>
+          </p:cNvSpPr>
+          <p:nvPr>
+            <p:ph type="body" idx="1"/>
+          </p:nvPr>
+        </p:nvSpPr>
+        <p:spPr/>
+        <p:txBody>
+          <a:bodyPr/>
+          <a:lstStyle/>
+          <a:p>
+            <a:r>
+              <a:rPr lang="en-US" dirty="0"/>
+              <a:t>End on the limits. The credibility of slides 4-9 depends on saying this one out loud.</a:t>
+            </a:r>
+            <a:endParaRPr lang="en-US" dirty="0"/>
+          </a:p>
+        </p:txBody>
+      </p:sp>
+      <p:sp>
+        <p:nvSpPr>
+          <p:cNvPr id="4" name="Slide Number Placeholder 3"/>
+          <p:cNvSpPr>
+            <a:spLocks noGrp="1"/>
+          </p:cNvSpPr>
+          <p:nvPr>
+            <p:ph type="sldNum" sz="quarter" idx="10"/>
+          </p:nvPr>
+        </p:nvSpPr>
+        <p:spPr/>
+        <p:txBody>
+          <a:bodyPr/>
+          <a:lstStyle/>
+          <a:p>
+            <a:fld id="{F7021451-1387-4CA6-816F-3879F97B5CBC}" type="slidenum">
+              <a:rPr lang="en-US"/>
+              <a:t>14</a:t>
             </a:fld>
             <a:endParaRPr lang="en-US"/>
           </a:p>
@@ -1306,7 +1395,7 @@
           <a:p>
             <a:r>
               <a:rPr lang="en-US" dirty="0"/>
-              <a:t>Checked and not on AlgoTune: CodeEvolve (AlphaEvolve suite), ThetaEvolve (circle packing), ParEVO (PBBS/ParEval), RL4RLA, ProgramBench.</a:t>
+              <a:t>The port’s own hint ablation was run on a different task batch and the feature was then removed: naming four techniques was worth 3/8 draws reaching for a compiler against 0/8, and a one-sentence invitation to use the listed packages bought nothing (0/8 against the bare list’s 1/8 on polynomial_real).</a:t>
             </a:r>
             <a:endParaRPr lang="en-US" dirty="0"/>
           </a:p>
@@ -1394,7 +1483,7 @@
           <a:p>
             <a:r>
               <a:rPr lang="en-US" dirty="0"/>
-              <a:t>The amber cells are the whole argument of slide 7.</a:t>
+              <a:t>Checked and not on AlgoTune: CodeEvolve (AlphaEvolve suite), ThetaEvolve (circle packing), ParEVO (PBBS/ParEval), RL4RLA, ProgramBench.</a:t>
             </a:r>
             <a:endParaRPr lang="en-US" dirty="0"/>
           </a:p>
@@ -1482,7 +1571,7 @@
           <a:p>
             <a:r>
               <a:rPr lang="en-US" dirty="0"/>
-              <a:t>This is why the comparison is now worth making at all.</a:t>
+              <a:t>The amber cells are the whole argument of slide 7.</a:t>
             </a:r>
             <a:endParaRPr lang="en-US" dirty="0"/>
           </a:p>
@@ -1570,7 +1659,7 @@
           <a:p>
             <a:r>
               <a:rPr lang="en-US" dirty="0"/>
-              <a:t>Both directions matter. One direction alone would be explainable as a stronger search.</a:t>
+              <a:t>This is why the comparison is now worth making at all.</a:t>
             </a:r>
             <a:endParaRPr lang="en-US" dirty="0"/>
           </a:p>
@@ -2414,6 +2503,1018 @@
                 <a:ea typeface="Calibri" pitchFamily="34" charset="-122"/>
                 <a:cs typeface="Calibri" pitchFamily="34" charset="-120"/>
               </a:rPr>
+              <a:t>THE FINDING</a:t>
+            </a:r>
+            <a:endParaRPr lang="en-US" sz="1100" dirty="0"/>
+          </a:p>
+        </p:txBody>
+      </p:sp>
+      <p:sp>
+        <p:nvSpPr>
+          <p:cNvPr id="3" name="Text 1"/>
+          <p:cNvSpPr txBox="1"/>
+          <p:nvPr/>
+        </p:nvSpPr>
+        <p:spPr>
+          <a:xfrm>
+            <a:off x="566928" y="658368"/>
+            <a:ext cx="11055096" cy="566928"/>
+          </a:xfrm>
+          <a:prstGeom prst="rect">
+            <a:avLst/>
+          </a:prstGeom>
+          <a:noFill/>
+          <a:ln/>
+        </p:spPr>
+        <p:txBody>
+          <a:bodyPr wrap="square" lIns="0" tIns="0" rIns="0" bIns="0" rtlCol="0" anchor="ctr"/>
+          <a:lstStyle/>
+          <a:p>
+            <a:pPr indent="0" marL="0">
+              <a:buNone/>
+            </a:pPr>
+            <a:r>
+              <a:rPr lang="en-US" sz="3300" b="1" dirty="0">
+                <a:solidFill>
+                  <a:srgbClr val="10161C"/>
+                </a:solidFill>
+                <a:latin typeface="Cambria" pitchFamily="34" charset="0"/>
+                <a:ea typeface="Cambria" pitchFamily="34" charset="-122"/>
+                <a:cs typeface="Cambria" pitchFamily="34" charset="-120"/>
+              </a:rPr>
+              <a:t>Half the comparison is not the same problem</a:t>
+            </a:r>
+            <a:endParaRPr lang="en-US" sz="3300" dirty="0"/>
+          </a:p>
+        </p:txBody>
+      </p:sp>
+      <p:sp>
+        <p:nvSpPr>
+          <p:cNvPr id="4" name="Text 2"/>
+          <p:cNvSpPr txBox="1"/>
+          <p:nvPr/>
+        </p:nvSpPr>
+        <p:spPr>
+          <a:xfrm>
+            <a:off x="566928" y="1243584"/>
+            <a:ext cx="11055096" cy="438912"/>
+          </a:xfrm>
+          <a:prstGeom prst="rect">
+            <a:avLst/>
+          </a:prstGeom>
+          <a:noFill/>
+          <a:ln/>
+        </p:spPr>
+        <p:txBody>
+          <a:bodyPr wrap="square" lIns="0" tIns="0" rIns="0" bIns="0" rtlCol="0" anchor="ctr"/>
+          <a:lstStyle/>
+          <a:p>
+            <a:pPr indent="0" marL="0">
+              <a:lnSpc>
+                <a:spcPts val="1800"/>
+              </a:lnSpc>
+              <a:buNone/>
+            </a:pPr>
+            <a:r>
+              <a:rPr lang="en-US" sz="1350" dirty="0">
+                <a:solidFill>
+                  <a:srgbClr val="3A4750"/>
+                </a:solidFill>
+                <a:latin typeface="Calibri" pitchFamily="34" charset="0"/>
+                <a:ea typeface="Calibri" pitchFamily="34" charset="-122"/>
+                <a:cs typeface="Calibri" pitchFamily="34" charset="-120"/>
+              </a:rPr>
+              <a:t>AlgoTune’s own 14–18 models, at the calibrated n, bracket what is achievable. Three systems fall outside the bracket — in both directions.</a:t>
+            </a:r>
+            <a:endParaRPr lang="en-US" sz="1350" dirty="0"/>
+          </a:p>
+        </p:txBody>
+      </p:sp>
+      <p:sp>
+        <p:nvSpPr>
+          <p:cNvPr id="5" name="Text 3"/>
+          <p:cNvSpPr txBox="1"/>
+          <p:nvPr/>
+        </p:nvSpPr>
+        <p:spPr>
+          <a:xfrm>
+            <a:off x="566928" y="1847088"/>
+            <a:ext cx="5394960" cy="274320"/>
+          </a:xfrm>
+          <a:prstGeom prst="rect">
+            <a:avLst/>
+          </a:prstGeom>
+          <a:noFill/>
+          <a:ln/>
+        </p:spPr>
+        <p:txBody>
+          <a:bodyPr wrap="square" lIns="0" tIns="0" rIns="0" bIns="0" rtlCol="0" anchor="ctr"/>
+          <a:lstStyle/>
+          <a:p>
+            <a:pPr indent="0" marL="0">
+              <a:buNone/>
+            </a:pPr>
+            <a:r>
+              <a:rPr lang="en-US" sz="1250" b="1" spc="60" kern="0" dirty="0">
+                <a:solidFill>
+                  <a:srgbClr val="C2872B"/>
+                </a:solidFill>
+                <a:latin typeface="Calibri" pitchFamily="34" charset="0"/>
+                <a:ea typeface="Calibri" pitchFamily="34" charset="-122"/>
+                <a:cs typeface="Calibri" pitchFamily="34" charset="-120"/>
+              </a:rPr>
+              <a:t>Above the best of every AlgoTune model</a:t>
+            </a:r>
+            <a:endParaRPr lang="en-US" sz="1250" dirty="0"/>
+          </a:p>
+        </p:txBody>
+      </p:sp>
+      <p:sp>
+        <p:nvSpPr>
+          <p:cNvPr id="6" name="Shape 4"/>
+          <p:cNvSpPr/>
+          <p:nvPr/>
+        </p:nvSpPr>
+        <p:spPr>
+          <a:xfrm>
+            <a:off x="566928" y="2231136"/>
+            <a:ext cx="5394960" cy="841248"/>
+          </a:xfrm>
+          <a:prstGeom prst="roundRect">
+            <a:avLst>
+              <a:gd name="adj" fmla="val 6522"/>
+            </a:avLst>
+          </a:prstGeom>
+          <a:solidFill>
+            <a:srgbClr val="EEF1F3"/>
+          </a:solidFill>
+          <a:ln w="9525">
+            <a:solidFill>
+              <a:srgbClr val="D7DDE2"/>
+            </a:solidFill>
+            <a:prstDash val="solid"/>
+          </a:ln>
+        </p:spPr>
+      </p:sp>
+      <p:sp>
+        <p:nvSpPr>
+          <p:cNvPr id="7" name="Text 5"/>
+          <p:cNvSpPr txBox="1"/>
+          <p:nvPr/>
+        </p:nvSpPr>
+        <p:spPr>
+          <a:xfrm>
+            <a:off x="786384" y="2322576"/>
+            <a:ext cx="4983480" cy="237744"/>
+          </a:xfrm>
+          <a:prstGeom prst="rect">
+            <a:avLst/>
+          </a:prstGeom>
+          <a:noFill/>
+          <a:ln/>
+        </p:spPr>
+        <p:txBody>
+          <a:bodyPr wrap="square" lIns="0" tIns="0" rIns="0" bIns="0" rtlCol="0" anchor="ctr"/>
+          <a:lstStyle/>
+          <a:p>
+            <a:pPr indent="0" marL="0">
+              <a:buNone/>
+            </a:pPr>
+            <a:r>
+              <a:rPr lang="en-US" sz="1150" b="1" dirty="0">
+                <a:solidFill>
+                  <a:srgbClr val="10161C"/>
+                </a:solidFill>
+                <a:latin typeface="Calibri" pitchFamily="34" charset="0"/>
+                <a:ea typeface="Calibri" pitchFamily="34" charset="-122"/>
+                <a:cs typeface="Calibri" pitchFamily="34" charset="-120"/>
+              </a:rPr>
+              <a:t>eigenvectors_complex</a:t>
+            </a:r>
+            <a:endParaRPr lang="en-US" sz="1150" dirty="0"/>
+          </a:p>
+        </p:txBody>
+      </p:sp>
+      <p:sp>
+        <p:nvSpPr>
+          <p:cNvPr id="8" name="Text 6"/>
+          <p:cNvSpPr txBox="1"/>
+          <p:nvPr/>
+        </p:nvSpPr>
+        <p:spPr>
+          <a:xfrm>
+            <a:off x="786384" y="2560320"/>
+            <a:ext cx="4983480" cy="219456"/>
+          </a:xfrm>
+          <a:prstGeom prst="rect">
+            <a:avLst/>
+          </a:prstGeom>
+          <a:noFill/>
+          <a:ln/>
+        </p:spPr>
+        <p:txBody>
+          <a:bodyPr wrap="square" lIns="0" tIns="0" rIns="0" bIns="0" rtlCol="0" anchor="ctr"/>
+          <a:lstStyle/>
+          <a:p>
+            <a:pPr indent="0" marL="0">
+              <a:buNone/>
+            </a:pPr>
+            <a:r>
+              <a:rPr lang="en-US" sz="1050" dirty="0">
+                <a:solidFill>
+                  <a:srgbClr val="93A1AA"/>
+                </a:solidFill>
+                <a:latin typeface="Calibri" pitchFamily="34" charset="0"/>
+                <a:ea typeface="Calibri" pitchFamily="34" charset="-122"/>
+                <a:cs typeface="Calibri" pitchFamily="34" charset="-120"/>
+              </a:rPr>
+              <a:t>AlgoTune  max 1.039x over 18 models</a:t>
+            </a:r>
+            <a:endParaRPr lang="en-US" sz="1050" dirty="0"/>
+          </a:p>
+        </p:txBody>
+      </p:sp>
+      <p:sp>
+        <p:nvSpPr>
+          <p:cNvPr id="9" name="Text 7"/>
+          <p:cNvSpPr txBox="1"/>
+          <p:nvPr/>
+        </p:nvSpPr>
+        <p:spPr>
+          <a:xfrm>
+            <a:off x="786384" y="2779776"/>
+            <a:ext cx="4983480" cy="219456"/>
+          </a:xfrm>
+          <a:prstGeom prst="rect">
+            <a:avLst/>
+          </a:prstGeom>
+          <a:noFill/>
+          <a:ln/>
+        </p:spPr>
+        <p:txBody>
+          <a:bodyPr wrap="square" lIns="0" tIns="0" rIns="0" bIns="0" rtlCol="0" anchor="ctr"/>
+          <a:lstStyle/>
+          <a:p>
+            <a:pPr indent="0" marL="0">
+              <a:buNone/>
+            </a:pPr>
+            <a:r>
+              <a:rPr lang="en-US" sz="1050" b="1" dirty="0">
+                <a:solidFill>
+                  <a:srgbClr val="C2872B"/>
+                </a:solidFill>
+                <a:latin typeface="Calibri" pitchFamily="34" charset="0"/>
+                <a:ea typeface="Calibri" pitchFamily="34" charset="-122"/>
+                <a:cs typeface="Calibri" pitchFamily="34" charset="-120"/>
+              </a:rPr>
+              <a:t>no-RL 1.432 · MetaEvolve 1.474 · OpenEvolve 1.48</a:t>
+            </a:r>
+            <a:endParaRPr lang="en-US" sz="1050" dirty="0"/>
+          </a:p>
+        </p:txBody>
+      </p:sp>
+      <p:sp>
+        <p:nvSpPr>
+          <p:cNvPr id="10" name="Shape 8"/>
+          <p:cNvSpPr/>
+          <p:nvPr/>
+        </p:nvSpPr>
+        <p:spPr>
+          <a:xfrm>
+            <a:off x="566928" y="3200400"/>
+            <a:ext cx="5394960" cy="841248"/>
+          </a:xfrm>
+          <a:prstGeom prst="roundRect">
+            <a:avLst>
+              <a:gd name="adj" fmla="val 6522"/>
+            </a:avLst>
+          </a:prstGeom>
+          <a:solidFill>
+            <a:srgbClr val="EEF1F3"/>
+          </a:solidFill>
+          <a:ln w="9525">
+            <a:solidFill>
+              <a:srgbClr val="D7DDE2"/>
+            </a:solidFill>
+            <a:prstDash val="solid"/>
+          </a:ln>
+        </p:spPr>
+      </p:sp>
+      <p:sp>
+        <p:nvSpPr>
+          <p:cNvPr id="11" name="Text 9"/>
+          <p:cNvSpPr txBox="1"/>
+          <p:nvPr/>
+        </p:nvSpPr>
+        <p:spPr>
+          <a:xfrm>
+            <a:off x="786384" y="3291840"/>
+            <a:ext cx="4983480" cy="237744"/>
+          </a:xfrm>
+          <a:prstGeom prst="rect">
+            <a:avLst/>
+          </a:prstGeom>
+          <a:noFill/>
+          <a:ln/>
+        </p:spPr>
+        <p:txBody>
+          <a:bodyPr wrap="square" lIns="0" tIns="0" rIns="0" bIns="0" rtlCol="0" anchor="ctr"/>
+          <a:lstStyle/>
+          <a:p>
+            <a:pPr indent="0" marL="0">
+              <a:buNone/>
+            </a:pPr>
+            <a:r>
+              <a:rPr lang="en-US" sz="1150" b="1" dirty="0">
+                <a:solidFill>
+                  <a:srgbClr val="10161C"/>
+                </a:solidFill>
+                <a:latin typeface="Calibri" pitchFamily="34" charset="0"/>
+                <a:ea typeface="Calibri" pitchFamily="34" charset="-122"/>
+                <a:cs typeface="Calibri" pitchFamily="34" charset="-120"/>
+              </a:rPr>
+              <a:t>affine_transform_2d</a:t>
+            </a:r>
+            <a:endParaRPr lang="en-US" sz="1150" dirty="0"/>
+          </a:p>
+        </p:txBody>
+      </p:sp>
+      <p:sp>
+        <p:nvSpPr>
+          <p:cNvPr id="12" name="Text 10"/>
+          <p:cNvSpPr txBox="1"/>
+          <p:nvPr/>
+        </p:nvSpPr>
+        <p:spPr>
+          <a:xfrm>
+            <a:off x="786384" y="3529584"/>
+            <a:ext cx="4983480" cy="219456"/>
+          </a:xfrm>
+          <a:prstGeom prst="rect">
+            <a:avLst/>
+          </a:prstGeom>
+          <a:noFill/>
+          <a:ln/>
+        </p:spPr>
+        <p:txBody>
+          <a:bodyPr wrap="square" lIns="0" tIns="0" rIns="0" bIns="0" rtlCol="0" anchor="ctr"/>
+          <a:lstStyle/>
+          <a:p>
+            <a:pPr indent="0" marL="0">
+              <a:buNone/>
+            </a:pPr>
+            <a:r>
+              <a:rPr lang="en-US" sz="1050" dirty="0">
+                <a:solidFill>
+                  <a:srgbClr val="93A1AA"/>
+                </a:solidFill>
+                <a:latin typeface="Calibri" pitchFamily="34" charset="0"/>
+                <a:ea typeface="Calibri" pitchFamily="34" charset="-122"/>
+                <a:cs typeface="Calibri" pitchFamily="34" charset="-120"/>
+              </a:rPr>
+              <a:t>AlgoTune  max 1.015x over 14 models</a:t>
+            </a:r>
+            <a:endParaRPr lang="en-US" sz="1050" dirty="0"/>
+          </a:p>
+        </p:txBody>
+      </p:sp>
+      <p:sp>
+        <p:nvSpPr>
+          <p:cNvPr id="13" name="Text 11"/>
+          <p:cNvSpPr txBox="1"/>
+          <p:nvPr/>
+        </p:nvSpPr>
+        <p:spPr>
+          <a:xfrm>
+            <a:off x="786384" y="3749040"/>
+            <a:ext cx="4983480" cy="219456"/>
+          </a:xfrm>
+          <a:prstGeom prst="rect">
+            <a:avLst/>
+          </a:prstGeom>
+          <a:noFill/>
+          <a:ln/>
+        </p:spPr>
+        <p:txBody>
+          <a:bodyPr wrap="square" lIns="0" tIns="0" rIns="0" bIns="0" rtlCol="0" anchor="ctr"/>
+          <a:lstStyle/>
+          <a:p>
+            <a:pPr indent="0" marL="0">
+              <a:buNone/>
+            </a:pPr>
+            <a:r>
+              <a:rPr lang="en-US" sz="1050" b="1" dirty="0">
+                <a:solidFill>
+                  <a:srgbClr val="C2872B"/>
+                </a:solidFill>
+                <a:latin typeface="Calibri" pitchFamily="34" charset="0"/>
+                <a:ea typeface="Calibri" pitchFamily="34" charset="-122"/>
+                <a:cs typeface="Calibri" pitchFamily="34" charset="-120"/>
+              </a:rPr>
+              <a:t>MetaEvolve 6.945 · OpenEvolve 3.22</a:t>
+            </a:r>
+            <a:endParaRPr lang="en-US" sz="1050" dirty="0"/>
+          </a:p>
+        </p:txBody>
+      </p:sp>
+      <p:sp>
+        <p:nvSpPr>
+          <p:cNvPr id="14" name="Shape 12"/>
+          <p:cNvSpPr/>
+          <p:nvPr/>
+        </p:nvSpPr>
+        <p:spPr>
+          <a:xfrm>
+            <a:off x="566928" y="4169664"/>
+            <a:ext cx="5394960" cy="841248"/>
+          </a:xfrm>
+          <a:prstGeom prst="roundRect">
+            <a:avLst>
+              <a:gd name="adj" fmla="val 6522"/>
+            </a:avLst>
+          </a:prstGeom>
+          <a:solidFill>
+            <a:srgbClr val="EEF1F3"/>
+          </a:solidFill>
+          <a:ln w="9525">
+            <a:solidFill>
+              <a:srgbClr val="D7DDE2"/>
+            </a:solidFill>
+            <a:prstDash val="solid"/>
+          </a:ln>
+        </p:spPr>
+      </p:sp>
+      <p:sp>
+        <p:nvSpPr>
+          <p:cNvPr id="15" name="Text 13"/>
+          <p:cNvSpPr txBox="1"/>
+          <p:nvPr/>
+        </p:nvSpPr>
+        <p:spPr>
+          <a:xfrm>
+            <a:off x="786384" y="4261104"/>
+            <a:ext cx="4983480" cy="237744"/>
+          </a:xfrm>
+          <a:prstGeom prst="rect">
+            <a:avLst/>
+          </a:prstGeom>
+          <a:noFill/>
+          <a:ln/>
+        </p:spPr>
+        <p:txBody>
+          <a:bodyPr wrap="square" lIns="0" tIns="0" rIns="0" bIns="0" rtlCol="0" anchor="ctr"/>
+          <a:lstStyle/>
+          <a:p>
+            <a:pPr indent="0" marL="0">
+              <a:buNone/>
+            </a:pPr>
+            <a:r>
+              <a:rPr lang="en-US" sz="1150" b="1" dirty="0">
+                <a:solidFill>
+                  <a:srgbClr val="10161C"/>
+                </a:solidFill>
+                <a:latin typeface="Calibri" pitchFamily="34" charset="0"/>
+                <a:ea typeface="Calibri" pitchFamily="34" charset="-122"/>
+                <a:cs typeface="Calibri" pitchFamily="34" charset="-120"/>
+              </a:rPr>
+              <a:t>fft_convolution</a:t>
+            </a:r>
+            <a:endParaRPr lang="en-US" sz="1150" dirty="0"/>
+          </a:p>
+        </p:txBody>
+      </p:sp>
+      <p:sp>
+        <p:nvSpPr>
+          <p:cNvPr id="16" name="Text 14"/>
+          <p:cNvSpPr txBox="1"/>
+          <p:nvPr/>
+        </p:nvSpPr>
+        <p:spPr>
+          <a:xfrm>
+            <a:off x="786384" y="4498848"/>
+            <a:ext cx="4983480" cy="219456"/>
+          </a:xfrm>
+          <a:prstGeom prst="rect">
+            <a:avLst/>
+          </a:prstGeom>
+          <a:noFill/>
+          <a:ln/>
+        </p:spPr>
+        <p:txBody>
+          <a:bodyPr wrap="square" lIns="0" tIns="0" rIns="0" bIns="0" rtlCol="0" anchor="ctr"/>
+          <a:lstStyle/>
+          <a:p>
+            <a:pPr indent="0" marL="0">
+              <a:buNone/>
+            </a:pPr>
+            <a:r>
+              <a:rPr lang="en-US" sz="1050" dirty="0">
+                <a:solidFill>
+                  <a:srgbClr val="93A1AA"/>
+                </a:solidFill>
+                <a:latin typeface="Calibri" pitchFamily="34" charset="0"/>
+                <a:ea typeface="Calibri" pitchFamily="34" charset="-122"/>
+                <a:cs typeface="Calibri" pitchFamily="34" charset="-120"/>
+              </a:rPr>
+              <a:t>AlgoTune  max 1.021x over 15 models</a:t>
+            </a:r>
+            <a:endParaRPr lang="en-US" sz="1050" dirty="0"/>
+          </a:p>
+        </p:txBody>
+      </p:sp>
+      <p:sp>
+        <p:nvSpPr>
+          <p:cNvPr id="17" name="Text 15"/>
+          <p:cNvSpPr txBox="1"/>
+          <p:nvPr/>
+        </p:nvSpPr>
+        <p:spPr>
+          <a:xfrm>
+            <a:off x="786384" y="4718304"/>
+            <a:ext cx="4983480" cy="219456"/>
+          </a:xfrm>
+          <a:prstGeom prst="rect">
+            <a:avLst/>
+          </a:prstGeom>
+          <a:noFill/>
+          <a:ln/>
+        </p:spPr>
+        <p:txBody>
+          <a:bodyPr wrap="square" lIns="0" tIns="0" rIns="0" bIns="0" rtlCol="0" anchor="ctr"/>
+          <a:lstStyle/>
+          <a:p>
+            <a:pPr indent="0" marL="0">
+              <a:buNone/>
+            </a:pPr>
+            <a:r>
+              <a:rPr lang="en-US" sz="1050" b="1" dirty="0">
+                <a:solidFill>
+                  <a:srgbClr val="C2872B"/>
+                </a:solidFill>
+                <a:latin typeface="Calibri" pitchFamily="34" charset="0"/>
+                <a:ea typeface="Calibri" pitchFamily="34" charset="-122"/>
+                <a:cs typeface="Calibri" pitchFamily="34" charset="-120"/>
+              </a:rPr>
+              <a:t>MetaEvolve 1.346 · OpenEvolve 1.38</a:t>
+            </a:r>
+            <a:endParaRPr lang="en-US" sz="1050" dirty="0"/>
+          </a:p>
+        </p:txBody>
+      </p:sp>
+      <p:sp>
+        <p:nvSpPr>
+          <p:cNvPr id="18" name="Text 16"/>
+          <p:cNvSpPr txBox="1"/>
+          <p:nvPr/>
+        </p:nvSpPr>
+        <p:spPr>
+          <a:xfrm>
+            <a:off x="6190488" y="1847088"/>
+            <a:ext cx="5394960" cy="274320"/>
+          </a:xfrm>
+          <a:prstGeom prst="rect">
+            <a:avLst/>
+          </a:prstGeom>
+          <a:noFill/>
+          <a:ln/>
+        </p:spPr>
+        <p:txBody>
+          <a:bodyPr wrap="square" lIns="0" tIns="0" rIns="0" bIns="0" rtlCol="0" anchor="ctr"/>
+          <a:lstStyle/>
+          <a:p>
+            <a:pPr indent="0" marL="0">
+              <a:buNone/>
+            </a:pPr>
+            <a:r>
+              <a:rPr lang="en-US" sz="1250" b="1" spc="60" kern="0" dirty="0">
+                <a:solidFill>
+                  <a:srgbClr val="93A1AA"/>
+                </a:solidFill>
+                <a:latin typeface="Calibri" pitchFamily="34" charset="0"/>
+                <a:ea typeface="Calibri" pitchFamily="34" charset="-122"/>
+                <a:cs typeface="Calibri" pitchFamily="34" charset="-120"/>
+              </a:rPr>
+              <a:t>Below AlgoTune’s median</a:t>
+            </a:r>
+            <a:endParaRPr lang="en-US" sz="1250" dirty="0"/>
+          </a:p>
+        </p:txBody>
+      </p:sp>
+      <p:sp>
+        <p:nvSpPr>
+          <p:cNvPr id="19" name="Shape 17"/>
+          <p:cNvSpPr/>
+          <p:nvPr/>
+        </p:nvSpPr>
+        <p:spPr>
+          <a:xfrm>
+            <a:off x="6190488" y="2231136"/>
+            <a:ext cx="5394960" cy="841248"/>
+          </a:xfrm>
+          <a:prstGeom prst="roundRect">
+            <a:avLst>
+              <a:gd name="adj" fmla="val 6522"/>
+            </a:avLst>
+          </a:prstGeom>
+          <a:solidFill>
+            <a:srgbClr val="EEF1F3"/>
+          </a:solidFill>
+          <a:ln w="9525">
+            <a:solidFill>
+              <a:srgbClr val="D7DDE2"/>
+            </a:solidFill>
+            <a:prstDash val="solid"/>
+          </a:ln>
+        </p:spPr>
+      </p:sp>
+      <p:sp>
+        <p:nvSpPr>
+          <p:cNvPr id="20" name="Text 18"/>
+          <p:cNvSpPr txBox="1"/>
+          <p:nvPr/>
+        </p:nvSpPr>
+        <p:spPr>
+          <a:xfrm>
+            <a:off x="6409944" y="2322576"/>
+            <a:ext cx="4983480" cy="237744"/>
+          </a:xfrm>
+          <a:prstGeom prst="rect">
+            <a:avLst/>
+          </a:prstGeom>
+          <a:noFill/>
+          <a:ln/>
+        </p:spPr>
+        <p:txBody>
+          <a:bodyPr wrap="square" lIns="0" tIns="0" rIns="0" bIns="0" rtlCol="0" anchor="ctr"/>
+          <a:lstStyle/>
+          <a:p>
+            <a:pPr indent="0" marL="0">
+              <a:buNone/>
+            </a:pPr>
+            <a:r>
+              <a:rPr lang="en-US" sz="1150" b="1" dirty="0">
+                <a:solidFill>
+                  <a:srgbClr val="10161C"/>
+                </a:solidFill>
+                <a:latin typeface="Calibri" pitchFamily="34" charset="0"/>
+                <a:ea typeface="Calibri" pitchFamily="34" charset="-122"/>
+                <a:cs typeface="Calibri" pitchFamily="34" charset="-120"/>
+              </a:rPr>
+              <a:t>psd_cone_projection</a:t>
+            </a:r>
+            <a:endParaRPr lang="en-US" sz="1150" dirty="0"/>
+          </a:p>
+        </p:txBody>
+      </p:sp>
+      <p:sp>
+        <p:nvSpPr>
+          <p:cNvPr id="21" name="Text 19"/>
+          <p:cNvSpPr txBox="1"/>
+          <p:nvPr/>
+        </p:nvSpPr>
+        <p:spPr>
+          <a:xfrm>
+            <a:off x="6409944" y="2560320"/>
+            <a:ext cx="4983480" cy="219456"/>
+          </a:xfrm>
+          <a:prstGeom prst="rect">
+            <a:avLst/>
+          </a:prstGeom>
+          <a:noFill/>
+          <a:ln/>
+        </p:spPr>
+        <p:txBody>
+          <a:bodyPr wrap="square" lIns="0" tIns="0" rIns="0" bIns="0" rtlCol="0" anchor="ctr"/>
+          <a:lstStyle/>
+          <a:p>
+            <a:pPr indent="0" marL="0">
+              <a:buNone/>
+            </a:pPr>
+            <a:r>
+              <a:rPr lang="en-US" sz="1050" dirty="0">
+                <a:solidFill>
+                  <a:srgbClr val="93A1AA"/>
+                </a:solidFill>
+                <a:latin typeface="Calibri" pitchFamily="34" charset="0"/>
+                <a:ea typeface="Calibri" pitchFamily="34" charset="-122"/>
+                <a:cs typeface="Calibri" pitchFamily="34" charset="-120"/>
+              </a:rPr>
+              <a:t>AlgoTune  median 8.728x over 18 models</a:t>
+            </a:r>
+            <a:endParaRPr lang="en-US" sz="1050" dirty="0"/>
+          </a:p>
+        </p:txBody>
+      </p:sp>
+      <p:sp>
+        <p:nvSpPr>
+          <p:cNvPr id="22" name="Text 20"/>
+          <p:cNvSpPr txBox="1"/>
+          <p:nvPr/>
+        </p:nvSpPr>
+        <p:spPr>
+          <a:xfrm>
+            <a:off x="6409944" y="2779776"/>
+            <a:ext cx="4983480" cy="219456"/>
+          </a:xfrm>
+          <a:prstGeom prst="rect">
+            <a:avLst/>
+          </a:prstGeom>
+          <a:noFill/>
+          <a:ln/>
+        </p:spPr>
+        <p:txBody>
+          <a:bodyPr wrap="square" lIns="0" tIns="0" rIns="0" bIns="0" rtlCol="0" anchor="ctr"/>
+          <a:lstStyle/>
+          <a:p>
+            <a:pPr indent="0" marL="0">
+              <a:buNone/>
+            </a:pPr>
+            <a:r>
+              <a:rPr lang="en-US" sz="1050" b="1" dirty="0">
+                <a:solidFill>
+                  <a:srgbClr val="93A1AA"/>
+                </a:solidFill>
+                <a:latin typeface="Calibri" pitchFamily="34" charset="0"/>
+                <a:ea typeface="Calibri" pitchFamily="34" charset="-122"/>
+                <a:cs typeface="Calibri" pitchFamily="34" charset="-120"/>
+              </a:rPr>
+              <a:t>no-RL 1.795 · MetaEvolve 1.914 · OpenEvolve 1.94</a:t>
+            </a:r>
+            <a:endParaRPr lang="en-US" sz="1050" dirty="0"/>
+          </a:p>
+        </p:txBody>
+      </p:sp>
+      <p:sp>
+        <p:nvSpPr>
+          <p:cNvPr id="23" name="Shape 21"/>
+          <p:cNvSpPr/>
+          <p:nvPr/>
+        </p:nvSpPr>
+        <p:spPr>
+          <a:xfrm>
+            <a:off x="6190488" y="3200400"/>
+            <a:ext cx="5394960" cy="841248"/>
+          </a:xfrm>
+          <a:prstGeom prst="roundRect">
+            <a:avLst>
+              <a:gd name="adj" fmla="val 6522"/>
+            </a:avLst>
+          </a:prstGeom>
+          <a:solidFill>
+            <a:srgbClr val="EEF1F3"/>
+          </a:solidFill>
+          <a:ln w="9525">
+            <a:solidFill>
+              <a:srgbClr val="D7DDE2"/>
+            </a:solidFill>
+            <a:prstDash val="solid"/>
+          </a:ln>
+        </p:spPr>
+      </p:sp>
+      <p:sp>
+        <p:nvSpPr>
+          <p:cNvPr id="24" name="Text 22"/>
+          <p:cNvSpPr txBox="1"/>
+          <p:nvPr/>
+        </p:nvSpPr>
+        <p:spPr>
+          <a:xfrm>
+            <a:off x="6409944" y="3291840"/>
+            <a:ext cx="4983480" cy="237744"/>
+          </a:xfrm>
+          <a:prstGeom prst="rect">
+            <a:avLst/>
+          </a:prstGeom>
+          <a:noFill/>
+          <a:ln/>
+        </p:spPr>
+        <p:txBody>
+          <a:bodyPr wrap="square" lIns="0" tIns="0" rIns="0" bIns="0" rtlCol="0" anchor="ctr"/>
+          <a:lstStyle/>
+          <a:p>
+            <a:pPr indent="0" marL="0">
+              <a:buNone/>
+            </a:pPr>
+            <a:r>
+              <a:rPr lang="en-US" sz="1150" b="1" dirty="0">
+                <a:solidFill>
+                  <a:srgbClr val="10161C"/>
+                </a:solidFill>
+                <a:latin typeface="Calibri" pitchFamily="34" charset="0"/>
+                <a:ea typeface="Calibri" pitchFamily="34" charset="-122"/>
+                <a:cs typeface="Calibri" pitchFamily="34" charset="-120"/>
+              </a:rPr>
+              <a:t>convolve2d_full_fill</a:t>
+            </a:r>
+            <a:endParaRPr lang="en-US" sz="1150" dirty="0"/>
+          </a:p>
+        </p:txBody>
+      </p:sp>
+      <p:sp>
+        <p:nvSpPr>
+          <p:cNvPr id="25" name="Text 23"/>
+          <p:cNvSpPr txBox="1"/>
+          <p:nvPr/>
+        </p:nvSpPr>
+        <p:spPr>
+          <a:xfrm>
+            <a:off x="6409944" y="3529584"/>
+            <a:ext cx="4983480" cy="219456"/>
+          </a:xfrm>
+          <a:prstGeom prst="rect">
+            <a:avLst/>
+          </a:prstGeom>
+          <a:noFill/>
+          <a:ln/>
+        </p:spPr>
+        <p:txBody>
+          <a:bodyPr wrap="square" lIns="0" tIns="0" rIns="0" bIns="0" rtlCol="0" anchor="ctr"/>
+          <a:lstStyle/>
+          <a:p>
+            <a:pPr indent="0" marL="0">
+              <a:buNone/>
+            </a:pPr>
+            <a:r>
+              <a:rPr lang="en-US" sz="1050" dirty="0">
+                <a:solidFill>
+                  <a:srgbClr val="93A1AA"/>
+                </a:solidFill>
+                <a:latin typeface="Calibri" pitchFamily="34" charset="0"/>
+                <a:ea typeface="Calibri" pitchFamily="34" charset="-122"/>
+                <a:cs typeface="Calibri" pitchFamily="34" charset="-120"/>
+              </a:rPr>
+              <a:t>AlgoTune  median 144.938x over 18 models</a:t>
+            </a:r>
+            <a:endParaRPr lang="en-US" sz="1050" dirty="0"/>
+          </a:p>
+        </p:txBody>
+      </p:sp>
+      <p:sp>
+        <p:nvSpPr>
+          <p:cNvPr id="26" name="Text 24"/>
+          <p:cNvSpPr txBox="1"/>
+          <p:nvPr/>
+        </p:nvSpPr>
+        <p:spPr>
+          <a:xfrm>
+            <a:off x="6409944" y="3749040"/>
+            <a:ext cx="4983480" cy="219456"/>
+          </a:xfrm>
+          <a:prstGeom prst="rect">
+            <a:avLst/>
+          </a:prstGeom>
+          <a:noFill/>
+          <a:ln/>
+        </p:spPr>
+        <p:txBody>
+          <a:bodyPr wrap="square" lIns="0" tIns="0" rIns="0" bIns="0" rtlCol="0" anchor="ctr"/>
+          <a:lstStyle/>
+          <a:p>
+            <a:pPr indent="0" marL="0">
+              <a:buNone/>
+            </a:pPr>
+            <a:r>
+              <a:rPr lang="en-US" sz="1050" b="1" dirty="0">
+                <a:solidFill>
+                  <a:srgbClr val="93A1AA"/>
+                </a:solidFill>
+                <a:latin typeface="Calibri" pitchFamily="34" charset="0"/>
+                <a:ea typeface="Calibri" pitchFamily="34" charset="-122"/>
+                <a:cs typeface="Calibri" pitchFamily="34" charset="-120"/>
+              </a:rPr>
+              <a:t>MetaEvolve 78.128</a:t>
+            </a:r>
+            <a:endParaRPr lang="en-US" sz="1050" dirty="0"/>
+          </a:p>
+        </p:txBody>
+      </p:sp>
+      <p:sp>
+        <p:nvSpPr>
+          <p:cNvPr id="27" name="Shape 25"/>
+          <p:cNvSpPr/>
+          <p:nvPr/>
+        </p:nvSpPr>
+        <p:spPr>
+          <a:xfrm>
+            <a:off x="566928" y="5175504"/>
+            <a:ext cx="11055096" cy="969264"/>
+          </a:xfrm>
+          <a:prstGeom prst="roundRect">
+            <a:avLst>
+              <a:gd name="adj" fmla="val 5660"/>
+            </a:avLst>
+          </a:prstGeom>
+          <a:solidFill>
+            <a:srgbClr val="10161C"/>
+          </a:solidFill>
+          <a:ln w="12700">
+            <a:solidFill>
+              <a:srgbClr val="10161C"/>
+            </a:solidFill>
+            <a:prstDash val="solid"/>
+          </a:ln>
+        </p:spPr>
+      </p:sp>
+      <p:sp>
+        <p:nvSpPr>
+          <p:cNvPr id="28" name="Text 26"/>
+          <p:cNvSpPr txBox="1"/>
+          <p:nvPr/>
+        </p:nvSpPr>
+        <p:spPr>
+          <a:xfrm>
+            <a:off x="822960" y="5321808"/>
+            <a:ext cx="10543032" cy="694944"/>
+          </a:xfrm>
+          <a:prstGeom prst="rect">
+            <a:avLst/>
+          </a:prstGeom>
+          <a:noFill/>
+          <a:ln/>
+        </p:spPr>
+        <p:txBody>
+          <a:bodyPr wrap="square" lIns="0" tIns="0" rIns="0" bIns="0" rtlCol="0" anchor="ctr"/>
+          <a:lstStyle/>
+          <a:p>
+            <a:pPr indent="0" marL="0">
+              <a:lnSpc>
+                <a:spcPts val="1900"/>
+              </a:lnSpc>
+              <a:buNone/>
+            </a:pPr>
+            <a:r>
+              <a:rPr lang="en-US" sz="1300" dirty="0">
+                <a:solidFill>
+                  <a:srgbClr val="D6E0E4"/>
+                </a:solidFill>
+                <a:latin typeface="Calibri" pitchFamily="34" charset="0"/>
+                <a:ea typeface="Calibri" pitchFamily="34" charset="-122"/>
+                <a:cs typeface="Calibri" pitchFamily="34" charset="-120"/>
+              </a:rPr>
+              <a:t>That two-sided pattern is the signature of a smaller problem, not a better search. Shrink n and the tasks whose only headroom is Python overhead become winnable; the tasks whose win is genuinely algorithmic at scale lose theirs. All three columns run OpenEvolve’s search, and three of the eight agree with OpenEvolve’s own numbers to within 2.5%.</a:t>
+            </a:r>
+            <a:endParaRPr lang="en-US" sz="1300" dirty="0"/>
+          </a:p>
+        </p:txBody>
+      </p:sp>
+    </p:spTree>
+  </p:cSld>
+  <p:clrMapOvr>
+    <a:masterClrMapping/>
+  </p:clrMapOvr>
+</p:sld>
+</file>
+
+<file path=ppt/slides/slide11.xml><?xml version="1.0" encoding="utf-8"?>
+<p:sld xmlns:a="http://schemas.openxmlformats.org/drawingml/2006/main" xmlns:r="http://schemas.openxmlformats.org/officeDocument/2006/relationships" xmlns:p="http://schemas.openxmlformats.org/presentationml/2006/main">
+  <p:cSld name="Slide 11">
+    <p:spTree>
+      <p:nvGrpSpPr>
+        <p:cNvPr id="1" name=""/>
+        <p:cNvGrpSpPr/>
+        <p:nvPr/>
+      </p:nvGrpSpPr>
+      <p:grpSpPr>
+        <a:xfrm>
+          <a:off x="0" y="0"/>
+          <a:ext cx="0" cy="0"/>
+          <a:chOff x="0" y="0"/>
+          <a:chExt cx="0" cy="0"/>
+        </a:xfrm>
+      </p:grpSpPr>
+      <p:sp>
+        <p:nvSpPr>
+          <p:cNvPr id="2" name="Text 0"/>
+          <p:cNvSpPr txBox="1"/>
+          <p:nvPr/>
+        </p:nvSpPr>
+        <p:spPr>
+          <a:xfrm>
+            <a:off x="566928" y="384048"/>
+            <a:ext cx="11055096" cy="237744"/>
+          </a:xfrm>
+          <a:prstGeom prst="rect">
+            <a:avLst/>
+          </a:prstGeom>
+          <a:noFill/>
+          <a:ln/>
+        </p:spPr>
+        <p:txBody>
+          <a:bodyPr wrap="square" lIns="0" tIns="0" rIns="0" bIns="0" rtlCol="0" anchor="ctr"/>
+          <a:lstStyle/>
+          <a:p>
+            <a:pPr indent="0" marL="0">
+              <a:buNone/>
+            </a:pPr>
+            <a:r>
+              <a:rPr lang="en-US" sz="1100" b="1" spc="220" kern="0" dirty="0">
+                <a:solidFill>
+                  <a:srgbClr val="0E7C66"/>
+                </a:solidFill>
+                <a:latin typeface="Calibri" pitchFamily="34" charset="0"/>
+                <a:ea typeface="Calibri" pitchFamily="34" charset="-122"/>
+                <a:cs typeface="Calibri" pitchFamily="34" charset="-120"/>
+              </a:rPr>
               <a:t>THE PROOF CASE  ·  EIGENVECTORS_COMPLEX</a:t>
             </a:r>
             <a:endParaRPr lang="en-US" sz="1100" dirty="0"/>
@@ -3019,7 +4120,7 @@
       </p:sp>
       <p:graphicFrame>
         <p:nvGraphicFramePr>
-          <p:cNvPr id="11" name="Table 0"/>
+          <p:cNvPr id="12" name="Table 0"/>
           <p:cNvGraphicFramePr>
             <a:graphicFrameLocks noGrp="1"/>
           </p:cNvGraphicFramePr>
@@ -5672,9 +6773,9 @@
 </p:sld>
 </file>
 
-<file path=ppt/slides/slide11.xml><?xml version="1.0" encoding="utf-8"?>
+<file path=ppt/slides/slide12.xml><?xml version="1.0" encoding="utf-8"?>
 <p:sld xmlns:a="http://schemas.openxmlformats.org/drawingml/2006/main" xmlns:r="http://schemas.openxmlformats.org/officeDocument/2006/relationships" xmlns:p="http://schemas.openxmlformats.org/presentationml/2006/main">
-  <p:cSld name="Slide 11">
+  <p:cSld name="Slide 12">
     <p:spTree>
       <p:nvGrpSpPr>
         <p:cNvPr id="1" name=""/>
@@ -7851,9 +8952,9 @@
 </p:sld>
 </file>
 
-<file path=ppt/slides/slide12.xml><?xml version="1.0" encoding="utf-8"?>
+<file path=ppt/slides/slide13.xml><?xml version="1.0" encoding="utf-8"?>
 <p:sld xmlns:a="http://schemas.openxmlformats.org/drawingml/2006/main" xmlns:r="http://schemas.openxmlformats.org/officeDocument/2006/relationships" xmlns:p="http://schemas.openxmlformats.org/presentationml/2006/main">
-  <p:cSld name="Slide 12">
+  <p:cSld name="Slide 13">
     <p:spTree>
       <p:nvGrpSpPr>
         <p:cNvPr id="1" name=""/>
@@ -8580,9 +9681,9 @@
 </p:sld>
 </file>
 
-<file path=ppt/slides/slide13.xml><?xml version="1.0" encoding="utf-8"?>
+<file path=ppt/slides/slide14.xml><?xml version="1.0" encoding="utf-8"?>
 <p:sld xmlns:a="http://schemas.openxmlformats.org/drawingml/2006/main" xmlns:r="http://schemas.openxmlformats.org/officeDocument/2006/relationships" xmlns:p="http://schemas.openxmlformats.org/presentationml/2006/main">
-  <p:cSld name="Slide 13">
+  <p:cSld name="Slide 14">
     <p:bg>
       <p:bgPr>
         <a:solidFill>
@@ -12722,11 +13823,11 @@
         <p:spPr>
           <a:xfrm>
             <a:off x="566928" y="1810512"/>
-            <a:ext cx="5221224" cy="301752"/>
+            <a:ext cx="5221224" cy="283464"/>
           </a:xfrm>
           <a:prstGeom prst="roundRect">
             <a:avLst>
-              <a:gd name="adj" fmla="val 15152"/>
+              <a:gd name="adj" fmla="val 16129"/>
             </a:avLst>
           </a:prstGeom>
           <a:solidFill>
@@ -12749,7 +13850,7 @@
         <p:spPr>
           <a:xfrm>
             <a:off x="658368" y="1810512"/>
-            <a:ext cx="329184" cy="301752"/>
+            <a:ext cx="329184" cy="283464"/>
           </a:xfrm>
           <a:prstGeom prst="rect">
             <a:avLst/>
@@ -12765,7 +13866,7 @@
               <a:buNone/>
             </a:pPr>
             <a:r>
-              <a:rPr lang="en-US" sz="950" b="1" dirty="0">
+              <a:rPr lang="en-US" sz="900" b="1" dirty="0">
                 <a:solidFill>
                   <a:srgbClr val="0E7C66"/>
                 </a:solidFill>
@@ -12775,7 +13876,7 @@
               </a:rPr>
               <a:t>1</a:t>
             </a:r>
-            <a:endParaRPr lang="en-US" sz="950" dirty="0"/>
+            <a:endParaRPr lang="en-US" sz="900" dirty="0"/>
           </a:p>
         </p:txBody>
       </p:sp>
@@ -12787,8 +13888,8 @@
         </p:nvSpPr>
         <p:spPr>
           <a:xfrm>
-            <a:off x="1078992" y="1810512"/>
-            <a:ext cx="2395728" cy="301752"/>
+            <a:off x="1042416" y="1810512"/>
+            <a:ext cx="2487168" cy="283464"/>
           </a:xfrm>
           <a:prstGeom prst="rect">
             <a:avLst/>
@@ -12804,7 +13905,7 @@
               <a:buNone/>
             </a:pPr>
             <a:r>
-              <a:rPr lang="en-US" sz="1000" b="1" dirty="0">
+              <a:rPr lang="en-US" sz="900" b="1" dirty="0">
                 <a:solidFill>
                   <a:srgbClr val="0E7C66"/>
                 </a:solidFill>
@@ -12814,7 +13915,7 @@
               </a:rPr>
               <a:t>This port — seed 0</a:t>
             </a:r>
-            <a:endParaRPr lang="en-US" sz="1000" dirty="0"/>
+            <a:endParaRPr lang="en-US" sz="900" dirty="0"/>
           </a:p>
         </p:txBody>
       </p:sp>
@@ -12826,8 +13927,8 @@
         </p:nvSpPr>
         <p:spPr>
           <a:xfrm>
-            <a:off x="3493008" y="1810512"/>
-            <a:ext cx="841248" cy="301752"/>
+            <a:off x="3566160" y="1810512"/>
+            <a:ext cx="786384" cy="283464"/>
           </a:xfrm>
           <a:prstGeom prst="rect">
             <a:avLst/>
@@ -12843,7 +13944,7 @@
               <a:buNone/>
             </a:pPr>
             <a:r>
-              <a:rPr lang="en-US" sz="750" dirty="0">
+              <a:rPr lang="en-US" sz="700" dirty="0">
                 <a:solidFill>
                   <a:srgbClr val="93A1AA"/>
                 </a:solidFill>
@@ -12853,7 +13954,7 @@
               </a:rPr>
               <a:t>ERA</a:t>
             </a:r>
-            <a:endParaRPr lang="en-US" sz="750" dirty="0"/>
+            <a:endParaRPr lang="en-US" sz="700" dirty="0"/>
           </a:p>
         </p:txBody>
       </p:sp>
@@ -12865,7 +13966,7 @@
         </p:nvSpPr>
         <p:spPr>
           <a:xfrm>
-            <a:off x="4389120" y="1915668"/>
+            <a:off x="4389120" y="1906524"/>
             <a:ext cx="786309" cy="91440"/>
           </a:xfrm>
           <a:prstGeom prst="rect">
@@ -12891,7 +13992,7 @@
         <p:spPr>
           <a:xfrm>
             <a:off x="5248656" y="1810512"/>
-            <a:ext cx="457200" cy="301752"/>
+            <a:ext cx="457200" cy="283464"/>
           </a:xfrm>
           <a:prstGeom prst="rect">
             <a:avLst/>
@@ -12907,7 +14008,7 @@
               <a:buNone/>
             </a:pPr>
             <a:r>
-              <a:rPr lang="en-US" sz="950" b="1" dirty="0">
+              <a:rPr lang="en-US" sz="900" b="1" dirty="0">
                 <a:solidFill>
                   <a:srgbClr val="0E7C66"/>
                 </a:solidFill>
@@ -12917,7 +14018,7 @@
               </a:rPr>
               <a:t>2.290</a:t>
             </a:r>
-            <a:endParaRPr lang="en-US" sz="950" dirty="0"/>
+            <a:endParaRPr lang="en-US" sz="900" dirty="0"/>
           </a:p>
         </p:txBody>
       </p:sp>
@@ -12929,12 +14030,12 @@
         </p:nvSpPr>
         <p:spPr>
           <a:xfrm>
-            <a:off x="566928" y="2153412"/>
-            <a:ext cx="5221224" cy="301752"/>
+            <a:off x="566928" y="2128723"/>
+            <a:ext cx="5221224" cy="283464"/>
           </a:xfrm>
           <a:prstGeom prst="roundRect">
             <a:avLst>
-              <a:gd name="adj" fmla="val 15152"/>
+              <a:gd name="adj" fmla="val 16129"/>
             </a:avLst>
           </a:prstGeom>
           <a:solidFill>
@@ -12956,8 +14057,8 @@
         </p:nvSpPr>
         <p:spPr>
           <a:xfrm>
-            <a:off x="658368" y="2153412"/>
-            <a:ext cx="329184" cy="301752"/>
+            <a:off x="658368" y="2128723"/>
+            <a:ext cx="329184" cy="283464"/>
           </a:xfrm>
           <a:prstGeom prst="rect">
             <a:avLst/>
@@ -12973,7 +14074,7 @@
               <a:buNone/>
             </a:pPr>
             <a:r>
-              <a:rPr lang="en-US" sz="950" b="1" dirty="0">
+              <a:rPr lang="en-US" sz="900" b="1" dirty="0">
                 <a:solidFill>
                   <a:srgbClr val="0E7C66"/>
                 </a:solidFill>
@@ -12983,7 +14084,7 @@
               </a:rPr>
               <a:t>2</a:t>
             </a:r>
-            <a:endParaRPr lang="en-US" sz="950" dirty="0"/>
+            <a:endParaRPr lang="en-US" sz="900" dirty="0"/>
           </a:p>
         </p:txBody>
       </p:sp>
@@ -12995,8 +14096,8 @@
         </p:nvSpPr>
         <p:spPr>
           <a:xfrm>
-            <a:off x="1078992" y="2153412"/>
-            <a:ext cx="2395728" cy="301752"/>
+            <a:off x="1042416" y="2128723"/>
+            <a:ext cx="2487168" cy="283464"/>
           </a:xfrm>
           <a:prstGeom prst="rect">
             <a:avLst/>
@@ -13012,7 +14113,7 @@
               <a:buNone/>
             </a:pPr>
             <a:r>
-              <a:rPr lang="en-US" sz="1000" b="1" dirty="0">
+              <a:rPr lang="en-US" sz="900" b="1" dirty="0">
                 <a:solidFill>
                   <a:srgbClr val="0E7C66"/>
                 </a:solidFill>
@@ -13022,7 +14123,7 @@
               </a:rPr>
               <a:t>This port — seed 1</a:t>
             </a:r>
-            <a:endParaRPr lang="en-US" sz="1000" dirty="0"/>
+            <a:endParaRPr lang="en-US" sz="900" dirty="0"/>
           </a:p>
         </p:txBody>
       </p:sp>
@@ -13034,8 +14135,8 @@
         </p:nvSpPr>
         <p:spPr>
           <a:xfrm>
-            <a:off x="3493008" y="2153412"/>
-            <a:ext cx="841248" cy="301752"/>
+            <a:off x="3566160" y="2128723"/>
+            <a:ext cx="786384" cy="283464"/>
           </a:xfrm>
           <a:prstGeom prst="rect">
             <a:avLst/>
@@ -13051,7 +14152,7 @@
               <a:buNone/>
             </a:pPr>
             <a:r>
-              <a:rPr lang="en-US" sz="750" dirty="0">
+              <a:rPr lang="en-US" sz="700" dirty="0">
                 <a:solidFill>
                   <a:srgbClr val="93A1AA"/>
                 </a:solidFill>
@@ -13061,7 +14162,7 @@
               </a:rPr>
               <a:t>ERA</a:t>
             </a:r>
-            <a:endParaRPr lang="en-US" sz="750" dirty="0"/>
+            <a:endParaRPr lang="en-US" sz="700" dirty="0"/>
           </a:p>
         </p:txBody>
       </p:sp>
@@ -13073,7 +14174,7 @@
         </p:nvSpPr>
         <p:spPr>
           <a:xfrm>
-            <a:off x="4389120" y="2258568"/>
+            <a:off x="4389120" y="2224735"/>
             <a:ext cx="778755" cy="91440"/>
           </a:xfrm>
           <a:prstGeom prst="rect">
@@ -13098,8 +14199,8 @@
         </p:nvSpPr>
         <p:spPr>
           <a:xfrm>
-            <a:off x="5248656" y="2153412"/>
-            <a:ext cx="457200" cy="301752"/>
+            <a:off x="5248656" y="2128723"/>
+            <a:ext cx="457200" cy="283464"/>
           </a:xfrm>
           <a:prstGeom prst="rect">
             <a:avLst/>
@@ -13115,7 +14216,7 @@
               <a:buNone/>
             </a:pPr>
             <a:r>
-              <a:rPr lang="en-US" sz="950" b="1" dirty="0">
+              <a:rPr lang="en-US" sz="900" b="1" dirty="0">
                 <a:solidFill>
                   <a:srgbClr val="0E7C66"/>
                 </a:solidFill>
@@ -13125,7 +14226,7 @@
               </a:rPr>
               <a:t>2.268</a:t>
             </a:r>
-            <a:endParaRPr lang="en-US" sz="950" dirty="0"/>
+            <a:endParaRPr lang="en-US" sz="900" dirty="0"/>
           </a:p>
         </p:txBody>
       </p:sp>
@@ -13137,12 +14238,12 @@
         </p:nvSpPr>
         <p:spPr>
           <a:xfrm>
-            <a:off x="566928" y="2496312"/>
-            <a:ext cx="5221224" cy="301752"/>
+            <a:off x="566928" y="2446934"/>
+            <a:ext cx="5221224" cy="283464"/>
           </a:xfrm>
           <a:prstGeom prst="roundRect">
             <a:avLst>
-              <a:gd name="adj" fmla="val 15152"/>
+              <a:gd name="adj" fmla="val 16129"/>
             </a:avLst>
           </a:prstGeom>
           <a:solidFill>
@@ -13164,8 +14265,8 @@
         </p:nvSpPr>
         <p:spPr>
           <a:xfrm>
-            <a:off x="658368" y="2496312"/>
-            <a:ext cx="329184" cy="301752"/>
+            <a:off x="658368" y="2446934"/>
+            <a:ext cx="329184" cy="283464"/>
           </a:xfrm>
           <a:prstGeom prst="rect">
             <a:avLst/>
@@ -13181,7 +14282,7 @@
               <a:buNone/>
             </a:pPr>
             <a:r>
-              <a:rPr lang="en-US" sz="950" dirty="0">
+              <a:rPr lang="en-US" sz="900" dirty="0">
                 <a:solidFill>
                   <a:srgbClr val="93A1AA"/>
                 </a:solidFill>
@@ -13191,7 +14292,7 @@
               </a:rPr>
               <a:t>3</a:t>
             </a:r>
-            <a:endParaRPr lang="en-US" sz="950" dirty="0"/>
+            <a:endParaRPr lang="en-US" sz="900" dirty="0"/>
           </a:p>
         </p:txBody>
       </p:sp>
@@ -13203,8 +14304,8 @@
         </p:nvSpPr>
         <p:spPr>
           <a:xfrm>
-            <a:off x="1078992" y="2496312"/>
-            <a:ext cx="2395728" cy="301752"/>
+            <a:off x="1042416" y="2446934"/>
+            <a:ext cx="2487168" cy="283464"/>
           </a:xfrm>
           <a:prstGeom prst="rect">
             <a:avLst/>
@@ -13220,7 +14321,7 @@
               <a:buNone/>
             </a:pPr>
             <a:r>
-              <a:rPr lang="en-US" sz="1000" dirty="0">
+              <a:rPr lang="en-US" sz="900" dirty="0">
                 <a:solidFill>
                   <a:srgbClr val="C2872B"/>
                 </a:solidFill>
@@ -13230,7 +14331,7 @@
               </a:rPr>
               <a:t>MetaEvolve (RL)</a:t>
             </a:r>
-            <a:endParaRPr lang="en-US" sz="1000" dirty="0"/>
+            <a:endParaRPr lang="en-US" sz="900" dirty="0"/>
           </a:p>
         </p:txBody>
       </p:sp>
@@ -13242,8 +14343,8 @@
         </p:nvSpPr>
         <p:spPr>
           <a:xfrm>
-            <a:off x="3493008" y="2496312"/>
-            <a:ext cx="841248" cy="301752"/>
+            <a:off x="3566160" y="2446934"/>
+            <a:ext cx="786384" cy="283464"/>
           </a:xfrm>
           <a:prstGeom prst="rect">
             <a:avLst/>
@@ -13259,7 +14360,7 @@
               <a:buNone/>
             </a:pPr>
             <a:r>
-              <a:rPr lang="en-US" sz="750" dirty="0">
+              <a:rPr lang="en-US" sz="700" dirty="0">
                 <a:solidFill>
                   <a:srgbClr val="93A1AA"/>
                 </a:solidFill>
@@ -13269,7 +14370,7 @@
               </a:rPr>
               <a:t>OpenEvolve</a:t>
             </a:r>
-            <a:endParaRPr lang="en-US" sz="750" dirty="0"/>
+            <a:endParaRPr lang="en-US" sz="700" dirty="0"/>
           </a:p>
         </p:txBody>
       </p:sp>
@@ -13281,7 +14382,7 @@
         </p:nvSpPr>
         <p:spPr>
           <a:xfrm>
-            <a:off x="4389120" y="2601468"/>
+            <a:off x="4389120" y="2542946"/>
             <a:ext cx="702185" cy="91440"/>
           </a:xfrm>
           <a:prstGeom prst="rect">
@@ -13306,8 +14407,8 @@
         </p:nvSpPr>
         <p:spPr>
           <a:xfrm>
-            <a:off x="5248656" y="2496312"/>
-            <a:ext cx="457200" cy="301752"/>
+            <a:off x="5248656" y="2446934"/>
+            <a:ext cx="457200" cy="283464"/>
           </a:xfrm>
           <a:prstGeom prst="rect">
             <a:avLst/>
@@ -13323,7 +14424,7 @@
               <a:buNone/>
             </a:pPr>
             <a:r>
-              <a:rPr lang="en-US" sz="950" dirty="0">
+              <a:rPr lang="en-US" sz="900" dirty="0">
                 <a:solidFill>
                   <a:srgbClr val="3A4750"/>
                 </a:solidFill>
@@ -13333,7 +14434,7 @@
               </a:rPr>
               <a:t>2.045</a:t>
             </a:r>
-            <a:endParaRPr lang="en-US" sz="950" dirty="0"/>
+            <a:endParaRPr lang="en-US" sz="900" dirty="0"/>
           </a:p>
         </p:txBody>
       </p:sp>
@@ -13345,12 +14446,12 @@
         </p:nvSpPr>
         <p:spPr>
           <a:xfrm>
-            <a:off x="566928" y="2839212"/>
-            <a:ext cx="5221224" cy="301752"/>
+            <a:off x="566928" y="2765146"/>
+            <a:ext cx="5221224" cy="283464"/>
           </a:xfrm>
           <a:prstGeom prst="roundRect">
             <a:avLst>
-              <a:gd name="adj" fmla="val 15152"/>
+              <a:gd name="adj" fmla="val 16129"/>
             </a:avLst>
           </a:prstGeom>
           <a:solidFill>
@@ -13372,8 +14473,8 @@
         </p:nvSpPr>
         <p:spPr>
           <a:xfrm>
-            <a:off x="658368" y="2839212"/>
-            <a:ext cx="329184" cy="301752"/>
+            <a:off x="658368" y="2765146"/>
+            <a:ext cx="329184" cy="283464"/>
           </a:xfrm>
           <a:prstGeom prst="rect">
             <a:avLst/>
@@ -13389,7 +14490,7 @@
               <a:buNone/>
             </a:pPr>
             <a:r>
-              <a:rPr lang="en-US" sz="950" dirty="0">
+              <a:rPr lang="en-US" sz="900" dirty="0">
                 <a:solidFill>
                   <a:srgbClr val="93A1AA"/>
                 </a:solidFill>
@@ -13399,7 +14500,7 @@
               </a:rPr>
               <a:t>4</a:t>
             </a:r>
-            <a:endParaRPr lang="en-US" sz="950" dirty="0"/>
+            <a:endParaRPr lang="en-US" sz="900" dirty="0"/>
           </a:p>
         </p:txBody>
       </p:sp>
@@ -13411,8 +14512,8 @@
         </p:nvSpPr>
         <p:spPr>
           <a:xfrm>
-            <a:off x="1078992" y="2839212"/>
-            <a:ext cx="2395728" cy="301752"/>
+            <a:off x="1042416" y="2765146"/>
+            <a:ext cx="2487168" cy="283464"/>
           </a:xfrm>
           <a:prstGeom prst="rect">
             <a:avLst/>
@@ -13428,7 +14529,46 @@
               <a:buNone/>
             </a:pPr>
             <a:r>
-              <a:rPr lang="en-US" sz="1000" dirty="0">
+              <a:rPr lang="en-US" sz="900" dirty="0">
+                <a:solidFill>
+                  <a:srgbClr val="C2872B"/>
+                </a:solidFill>
+                <a:latin typeface="Calibri" pitchFamily="34" charset="0"/>
+                <a:ea typeface="Calibri" pitchFamily="34" charset="-122"/>
+                <a:cs typeface="Calibri" pitchFamily="34" charset="-120"/>
+              </a:rPr>
+              <a:t>OpenEvolve — ph.4, hints + config</a:t>
+            </a:r>
+            <a:endParaRPr lang="en-US" sz="900" dirty="0"/>
+          </a:p>
+        </p:txBody>
+      </p:sp>
+      <p:sp>
+        <p:nvSpPr>
+          <p:cNvPr id="26" name="Text 24"/>
+          <p:cNvSpPr txBox="1"/>
+          <p:nvPr/>
+        </p:nvSpPr>
+        <p:spPr>
+          <a:xfrm>
+            <a:off x="3566160" y="2765146"/>
+            <a:ext cx="786384" cy="283464"/>
+          </a:xfrm>
+          <a:prstGeom prst="rect">
+            <a:avLst/>
+          </a:prstGeom>
+          <a:noFill/>
+          <a:ln/>
+        </p:spPr>
+        <p:txBody>
+          <a:bodyPr wrap="square" lIns="0" tIns="0" rIns="0" bIns="0" rtlCol="0" anchor="ctr"/>
+          <a:lstStyle/>
+          <a:p>
+            <a:pPr indent="0" marL="0">
+              <a:buNone/>
+            </a:pPr>
+            <a:r>
+              <a:rPr lang="en-US" sz="700" dirty="0">
                 <a:solidFill>
                   <a:srgbClr val="93A1AA"/>
                 </a:solidFill>
@@ -13438,20 +14578,150 @@
               </a:rPr>
               <a:t>OpenEvolve</a:t>
             </a:r>
-            <a:endParaRPr lang="en-US" sz="1000" dirty="0"/>
+            <a:endParaRPr lang="en-US" sz="700" dirty="0"/>
           </a:p>
         </p:txBody>
       </p:sp>
       <p:sp>
         <p:nvSpPr>
-          <p:cNvPr id="26" name="Text 24"/>
+          <p:cNvPr id="27" name="Shape 25"/>
+          <p:cNvSpPr/>
+          <p:nvPr/>
+        </p:nvSpPr>
+        <p:spPr>
+          <a:xfrm>
+            <a:off x="4389120" y="2861158"/>
+            <a:ext cx="681239" cy="91440"/>
+          </a:xfrm>
+          <a:prstGeom prst="rect">
+            <a:avLst/>
+          </a:prstGeom>
+          <a:solidFill>
+            <a:srgbClr val="C2872B"/>
+          </a:solidFill>
+          <a:ln w="12700">
+            <a:solidFill>
+              <a:srgbClr val="333333"/>
+            </a:solidFill>
+            <a:prstDash val="solid"/>
+          </a:ln>
+        </p:spPr>
+      </p:sp>
+      <p:sp>
+        <p:nvSpPr>
+          <p:cNvPr id="28" name="Text 26"/>
           <p:cNvSpPr txBox="1"/>
           <p:nvPr/>
         </p:nvSpPr>
         <p:spPr>
           <a:xfrm>
-            <a:off x="3493008" y="2839212"/>
-            <a:ext cx="841248" cy="301752"/>
+            <a:off x="5248656" y="2765146"/>
+            <a:ext cx="457200" cy="283464"/>
+          </a:xfrm>
+          <a:prstGeom prst="rect">
+            <a:avLst/>
+          </a:prstGeom>
+          <a:noFill/>
+          <a:ln/>
+        </p:spPr>
+        <p:txBody>
+          <a:bodyPr wrap="square" lIns="0" tIns="0" rIns="0" bIns="0" rtlCol="0" anchor="ctr"/>
+          <a:lstStyle/>
+          <a:p>
+            <a:pPr algn="r" indent="0" marL="0">
+              <a:buNone/>
+            </a:pPr>
+            <a:r>
+              <a:rPr lang="en-US" sz="900" dirty="0">
+                <a:solidFill>
+                  <a:srgbClr val="3A4750"/>
+                </a:solidFill>
+                <a:latin typeface="Calibri" pitchFamily="34" charset="0"/>
+                <a:ea typeface="Calibri" pitchFamily="34" charset="-122"/>
+                <a:cs typeface="Calibri" pitchFamily="34" charset="-120"/>
+              </a:rPr>
+              <a:t>1.984</a:t>
+            </a:r>
+            <a:endParaRPr lang="en-US" sz="900" dirty="0"/>
+          </a:p>
+        </p:txBody>
+      </p:sp>
+      <p:sp>
+        <p:nvSpPr>
+          <p:cNvPr id="29" name="Shape 27"/>
+          <p:cNvSpPr/>
+          <p:nvPr/>
+        </p:nvSpPr>
+        <p:spPr>
+          <a:xfrm>
+            <a:off x="566928" y="3083357"/>
+            <a:ext cx="5221224" cy="283464"/>
+          </a:xfrm>
+          <a:prstGeom prst="roundRect">
+            <a:avLst>
+              <a:gd name="adj" fmla="val 16129"/>
+            </a:avLst>
+          </a:prstGeom>
+          <a:solidFill>
+            <a:srgbClr val="EEF1F3"/>
+          </a:solidFill>
+          <a:ln w="7620">
+            <a:solidFill>
+              <a:srgbClr val="D7DDE2"/>
+            </a:solidFill>
+            <a:prstDash val="solid"/>
+          </a:ln>
+        </p:spPr>
+      </p:sp>
+      <p:sp>
+        <p:nvSpPr>
+          <p:cNvPr id="30" name="Text 28"/>
+          <p:cNvSpPr txBox="1"/>
+          <p:nvPr/>
+        </p:nvSpPr>
+        <p:spPr>
+          <a:xfrm>
+            <a:off x="658368" y="3083357"/>
+            <a:ext cx="329184" cy="283464"/>
+          </a:xfrm>
+          <a:prstGeom prst="rect">
+            <a:avLst/>
+          </a:prstGeom>
+          <a:noFill/>
+          <a:ln/>
+        </p:spPr>
+        <p:txBody>
+          <a:bodyPr wrap="square" lIns="0" tIns="0" rIns="0" bIns="0" rtlCol="0" anchor="ctr"/>
+          <a:lstStyle/>
+          <a:p>
+            <a:pPr algn="r" indent="0" marL="0">
+              <a:buNone/>
+            </a:pPr>
+            <a:r>
+              <a:rPr lang="en-US" sz="900" dirty="0">
+                <a:solidFill>
+                  <a:srgbClr val="93A1AA"/>
+                </a:solidFill>
+                <a:latin typeface="Calibri" pitchFamily="34" charset="0"/>
+                <a:ea typeface="Calibri" pitchFamily="34" charset="-122"/>
+                <a:cs typeface="Calibri" pitchFamily="34" charset="-120"/>
+              </a:rPr>
+              <a:t>5</a:t>
+            </a:r>
+            <a:endParaRPr lang="en-US" sz="900" dirty="0"/>
+          </a:p>
+        </p:txBody>
+      </p:sp>
+      <p:sp>
+        <p:nvSpPr>
+          <p:cNvPr id="31" name="Text 29"/>
+          <p:cNvSpPr txBox="1"/>
+          <p:nvPr/>
+        </p:nvSpPr>
+        <p:spPr>
+          <a:xfrm>
+            <a:off x="1042416" y="3083357"/>
+            <a:ext cx="2487168" cy="283464"/>
           </a:xfrm>
           <a:prstGeom prst="rect">
             <a:avLst/>
@@ -13467,7 +14737,46 @@
               <a:buNone/>
             </a:pPr>
             <a:r>
-              <a:rPr lang="en-US" sz="750" dirty="0">
+              <a:rPr lang="en-US" sz="900" dirty="0">
+                <a:solidFill>
+                  <a:srgbClr val="C2872B"/>
+                </a:solidFill>
+                <a:latin typeface="Calibri" pitchFamily="34" charset="0"/>
+                <a:ea typeface="Calibri" pitchFamily="34" charset="-122"/>
+                <a:cs typeface="Calibri" pitchFamily="34" charset="-120"/>
+              </a:rPr>
+              <a:t>OpenEvolve — ph.3, specific hints</a:t>
+            </a:r>
+            <a:endParaRPr lang="en-US" sz="900" dirty="0"/>
+          </a:p>
+        </p:txBody>
+      </p:sp>
+      <p:sp>
+        <p:nvSpPr>
+          <p:cNvPr id="32" name="Text 30"/>
+          <p:cNvSpPr txBox="1"/>
+          <p:nvPr/>
+        </p:nvSpPr>
+        <p:spPr>
+          <a:xfrm>
+            <a:off x="3566160" y="3083357"/>
+            <a:ext cx="786384" cy="283464"/>
+          </a:xfrm>
+          <a:prstGeom prst="rect">
+            <a:avLst/>
+          </a:prstGeom>
+          <a:noFill/>
+          <a:ln/>
+        </p:spPr>
+        <p:txBody>
+          <a:bodyPr wrap="square" lIns="0" tIns="0" rIns="0" bIns="0" rtlCol="0" anchor="ctr"/>
+          <a:lstStyle/>
+          <a:p>
+            <a:pPr indent="0" marL="0">
+              <a:buNone/>
+            </a:pPr>
+            <a:r>
+              <a:rPr lang="en-US" sz="700" dirty="0">
                 <a:solidFill>
                   <a:srgbClr val="93A1AA"/>
                 </a:solidFill>
@@ -13475,22 +14784,230 @@
                 <a:ea typeface="Calibri" pitchFamily="34" charset="-122"/>
                 <a:cs typeface="Calibri" pitchFamily="34" charset="-120"/>
               </a:rPr>
-              <a:t>OpenEvolve*</a:t>
+              <a:t>OpenEvolve</a:t>
             </a:r>
-            <a:endParaRPr lang="en-US" sz="750" dirty="0"/>
+            <a:endParaRPr lang="en-US" sz="700" dirty="0"/>
           </a:p>
         </p:txBody>
       </p:sp>
       <p:sp>
         <p:nvSpPr>
-          <p:cNvPr id="27" name="Shape 25"/>
+          <p:cNvPr id="33" name="Shape 31"/>
           <p:cNvSpPr/>
           <p:nvPr/>
         </p:nvSpPr>
         <p:spPr>
           <a:xfrm>
-            <a:off x="4389120" y="2944368"/>
-            <a:ext cx="681239" cy="91440"/>
+            <a:off x="4389120" y="3179369"/>
+            <a:ext cx="647589" cy="91440"/>
+          </a:xfrm>
+          <a:prstGeom prst="rect">
+            <a:avLst/>
+          </a:prstGeom>
+          <a:solidFill>
+            <a:srgbClr val="C2872B"/>
+          </a:solidFill>
+          <a:ln w="12700">
+            <a:solidFill>
+              <a:srgbClr val="333333"/>
+            </a:solidFill>
+            <a:prstDash val="solid"/>
+          </a:ln>
+        </p:spPr>
+      </p:sp>
+      <p:sp>
+        <p:nvSpPr>
+          <p:cNvPr id="34" name="Text 32"/>
+          <p:cNvSpPr txBox="1"/>
+          <p:nvPr/>
+        </p:nvSpPr>
+        <p:spPr>
+          <a:xfrm>
+            <a:off x="5248656" y="3083357"/>
+            <a:ext cx="457200" cy="283464"/>
+          </a:xfrm>
+          <a:prstGeom prst="rect">
+            <a:avLst/>
+          </a:prstGeom>
+          <a:noFill/>
+          <a:ln/>
+        </p:spPr>
+        <p:txBody>
+          <a:bodyPr wrap="square" lIns="0" tIns="0" rIns="0" bIns="0" rtlCol="0" anchor="ctr"/>
+          <a:lstStyle/>
+          <a:p>
+            <a:pPr algn="r" indent="0" marL="0">
+              <a:buNone/>
+            </a:pPr>
+            <a:r>
+              <a:rPr lang="en-US" sz="900" dirty="0">
+                <a:solidFill>
+                  <a:srgbClr val="3A4750"/>
+                </a:solidFill>
+                <a:latin typeface="Calibri" pitchFamily="34" charset="0"/>
+                <a:ea typeface="Calibri" pitchFamily="34" charset="-122"/>
+                <a:cs typeface="Calibri" pitchFamily="34" charset="-120"/>
+              </a:rPr>
+              <a:t>1.886</a:t>
+            </a:r>
+            <a:endParaRPr lang="en-US" sz="900" dirty="0"/>
+          </a:p>
+        </p:txBody>
+      </p:sp>
+      <p:sp>
+        <p:nvSpPr>
+          <p:cNvPr id="35" name="Shape 33"/>
+          <p:cNvSpPr/>
+          <p:nvPr/>
+        </p:nvSpPr>
+        <p:spPr>
+          <a:xfrm>
+            <a:off x="566928" y="3401568"/>
+            <a:ext cx="5221224" cy="283464"/>
+          </a:xfrm>
+          <a:prstGeom prst="roundRect">
+            <a:avLst>
+              <a:gd name="adj" fmla="val 16129"/>
+            </a:avLst>
+          </a:prstGeom>
+          <a:solidFill>
+            <a:srgbClr val="FFFFFF"/>
+          </a:solidFill>
+          <a:ln w="7620">
+            <a:solidFill>
+              <a:srgbClr val="D7DDE2"/>
+            </a:solidFill>
+            <a:prstDash val="solid"/>
+          </a:ln>
+        </p:spPr>
+      </p:sp>
+      <p:sp>
+        <p:nvSpPr>
+          <p:cNvPr id="36" name="Text 34"/>
+          <p:cNvSpPr txBox="1"/>
+          <p:nvPr/>
+        </p:nvSpPr>
+        <p:spPr>
+          <a:xfrm>
+            <a:off x="658368" y="3401568"/>
+            <a:ext cx="329184" cy="283464"/>
+          </a:xfrm>
+          <a:prstGeom prst="rect">
+            <a:avLst/>
+          </a:prstGeom>
+          <a:noFill/>
+          <a:ln/>
+        </p:spPr>
+        <p:txBody>
+          <a:bodyPr wrap="square" lIns="0" tIns="0" rIns="0" bIns="0" rtlCol="0" anchor="ctr"/>
+          <a:lstStyle/>
+          <a:p>
+            <a:pPr algn="r" indent="0" marL="0">
+              <a:buNone/>
+            </a:pPr>
+            <a:r>
+              <a:rPr lang="en-US" sz="900" dirty="0">
+                <a:solidFill>
+                  <a:srgbClr val="93A1AA"/>
+                </a:solidFill>
+                <a:latin typeface="Calibri" pitchFamily="34" charset="0"/>
+                <a:ea typeface="Calibri" pitchFamily="34" charset="-122"/>
+                <a:cs typeface="Calibri" pitchFamily="34" charset="-120"/>
+              </a:rPr>
+              <a:t>6</a:t>
+            </a:r>
+            <a:endParaRPr lang="en-US" sz="900" dirty="0"/>
+          </a:p>
+        </p:txBody>
+      </p:sp>
+      <p:sp>
+        <p:nvSpPr>
+          <p:cNvPr id="37" name="Text 35"/>
+          <p:cNvSpPr txBox="1"/>
+          <p:nvPr/>
+        </p:nvSpPr>
+        <p:spPr>
+          <a:xfrm>
+            <a:off x="1042416" y="3401568"/>
+            <a:ext cx="2487168" cy="283464"/>
+          </a:xfrm>
+          <a:prstGeom prst="rect">
+            <a:avLst/>
+          </a:prstGeom>
+          <a:noFill/>
+          <a:ln/>
+        </p:spPr>
+        <p:txBody>
+          <a:bodyPr wrap="square" lIns="0" tIns="0" rIns="0" bIns="0" rtlCol="0" anchor="ctr"/>
+          <a:lstStyle/>
+          <a:p>
+            <a:pPr indent="0" marL="0">
+              <a:buNone/>
+            </a:pPr>
+            <a:r>
+              <a:rPr lang="en-US" sz="900" dirty="0">
+                <a:solidFill>
+                  <a:srgbClr val="93A1AA"/>
+                </a:solidFill>
+                <a:latin typeface="Calibri" pitchFamily="34" charset="0"/>
+                <a:ea typeface="Calibri" pitchFamily="34" charset="-122"/>
+                <a:cs typeface="Calibri" pitchFamily="34" charset="-120"/>
+              </a:rPr>
+              <a:t>claude-opus-4.6</a:t>
+            </a:r>
+            <a:endParaRPr lang="en-US" sz="900" dirty="0"/>
+          </a:p>
+        </p:txBody>
+      </p:sp>
+      <p:sp>
+        <p:nvSpPr>
+          <p:cNvPr id="38" name="Text 36"/>
+          <p:cNvSpPr txBox="1"/>
+          <p:nvPr/>
+        </p:nvSpPr>
+        <p:spPr>
+          <a:xfrm>
+            <a:off x="3566160" y="3401568"/>
+            <a:ext cx="786384" cy="283464"/>
+          </a:xfrm>
+          <a:prstGeom prst="rect">
+            <a:avLst/>
+          </a:prstGeom>
+          <a:noFill/>
+          <a:ln/>
+        </p:spPr>
+        <p:txBody>
+          <a:bodyPr wrap="square" lIns="0" tIns="0" rIns="0" bIns="0" rtlCol="0" anchor="ctr"/>
+          <a:lstStyle/>
+          <a:p>
+            <a:pPr indent="0" marL="0">
+              <a:buNone/>
+            </a:pPr>
+            <a:r>
+              <a:rPr lang="en-US" sz="700" dirty="0">
+                <a:solidFill>
+                  <a:srgbClr val="93A1AA"/>
+                </a:solidFill>
+                <a:latin typeface="Calibri" pitchFamily="34" charset="0"/>
+                <a:ea typeface="Calibri" pitchFamily="34" charset="-122"/>
+                <a:cs typeface="Calibri" pitchFamily="34" charset="-120"/>
+              </a:rPr>
+              <a:t>AlgoTuner</a:t>
+            </a:r>
+            <a:endParaRPr lang="en-US" sz="700" dirty="0"/>
+          </a:p>
+        </p:txBody>
+      </p:sp>
+      <p:sp>
+        <p:nvSpPr>
+          <p:cNvPr id="39" name="Shape 37"/>
+          <p:cNvSpPr/>
+          <p:nvPr/>
+        </p:nvSpPr>
+        <p:spPr>
+          <a:xfrm>
+            <a:off x="4389120" y="3497580"/>
+            <a:ext cx="630764" cy="91440"/>
           </a:xfrm>
           <a:prstGeom prst="rect">
             <a:avLst/>
@@ -13508,14 +15025,14 @@
       </p:sp>
       <p:sp>
         <p:nvSpPr>
-          <p:cNvPr id="28" name="Text 26"/>
+          <p:cNvPr id="40" name="Text 38"/>
           <p:cNvSpPr txBox="1"/>
           <p:nvPr/>
         </p:nvSpPr>
         <p:spPr>
           <a:xfrm>
-            <a:off x="5248656" y="2839212"/>
-            <a:ext cx="457200" cy="301752"/>
+            <a:off x="5248656" y="3401568"/>
+            <a:ext cx="457200" cy="283464"/>
           </a:xfrm>
           <a:prstGeom prst="rect">
             <a:avLst/>
@@ -13531,7 +15048,7 @@
               <a:buNone/>
             </a:pPr>
             <a:r>
-              <a:rPr lang="en-US" sz="950" dirty="0">
+              <a:rPr lang="en-US" sz="900" dirty="0">
                 <a:solidFill>
                   <a:srgbClr val="3A4750"/>
                 </a:solidFill>
@@ -13539,26 +15056,26 @@
                 <a:ea typeface="Calibri" pitchFamily="34" charset="-122"/>
                 <a:cs typeface="Calibri" pitchFamily="34" charset="-120"/>
               </a:rPr>
-              <a:t>1.984</a:t>
+              <a:t>1.837</a:t>
             </a:r>
-            <a:endParaRPr lang="en-US" sz="950" dirty="0"/>
+            <a:endParaRPr lang="en-US" sz="900" dirty="0"/>
           </a:p>
         </p:txBody>
       </p:sp>
       <p:sp>
         <p:nvSpPr>
-          <p:cNvPr id="29" name="Shape 27"/>
+          <p:cNvPr id="41" name="Shape 39"/>
           <p:cNvSpPr/>
           <p:nvPr/>
         </p:nvSpPr>
         <p:spPr>
           <a:xfrm>
-            <a:off x="566928" y="3182112"/>
-            <a:ext cx="5221224" cy="301752"/>
+            <a:off x="566928" y="3719779"/>
+            <a:ext cx="5221224" cy="283464"/>
           </a:xfrm>
           <a:prstGeom prst="roundRect">
             <a:avLst>
-              <a:gd name="adj" fmla="val 15152"/>
+              <a:gd name="adj" fmla="val 16129"/>
             </a:avLst>
           </a:prstGeom>
           <a:solidFill>
@@ -13574,14 +15091,14 @@
       </p:sp>
       <p:sp>
         <p:nvSpPr>
-          <p:cNvPr id="30" name="Text 28"/>
+          <p:cNvPr id="42" name="Text 40"/>
           <p:cNvSpPr txBox="1"/>
           <p:nvPr/>
         </p:nvSpPr>
         <p:spPr>
           <a:xfrm>
-            <a:off x="658368" y="3182112"/>
-            <a:ext cx="329184" cy="301752"/>
+            <a:off x="658368" y="3719779"/>
+            <a:ext cx="329184" cy="283464"/>
           </a:xfrm>
           <a:prstGeom prst="rect">
             <a:avLst/>
@@ -13597,7 +15114,7 @@
               <a:buNone/>
             </a:pPr>
             <a:r>
-              <a:rPr lang="en-US" sz="950" dirty="0">
+              <a:rPr lang="en-US" sz="900" dirty="0">
                 <a:solidFill>
                   <a:srgbClr val="93A1AA"/>
                 </a:solidFill>
@@ -13605,22 +15122,22 @@
                 <a:ea typeface="Calibri" pitchFamily="34" charset="-122"/>
                 <a:cs typeface="Calibri" pitchFamily="34" charset="-120"/>
               </a:rPr>
-              <a:t>5</a:t>
+              <a:t>7</a:t>
             </a:r>
-            <a:endParaRPr lang="en-US" sz="950" dirty="0"/>
+            <a:endParaRPr lang="en-US" sz="900" dirty="0"/>
           </a:p>
         </p:txBody>
       </p:sp>
       <p:sp>
         <p:nvSpPr>
-          <p:cNvPr id="31" name="Text 29"/>
+          <p:cNvPr id="43" name="Text 41"/>
           <p:cNvSpPr txBox="1"/>
           <p:nvPr/>
         </p:nvSpPr>
         <p:spPr>
           <a:xfrm>
-            <a:off x="1078992" y="3182112"/>
-            <a:ext cx="2395728" cy="301752"/>
+            <a:off x="1042416" y="3719779"/>
+            <a:ext cx="2487168" cy="283464"/>
           </a:xfrm>
           <a:prstGeom prst="rect">
             <a:avLst/>
@@ -13636,7 +15153,7 @@
               <a:buNone/>
             </a:pPr>
             <a:r>
-              <a:rPr lang="en-US" sz="1000" dirty="0">
+              <a:rPr lang="en-US" sz="900" dirty="0">
                 <a:solidFill>
                   <a:srgbClr val="93A1AA"/>
                 </a:solidFill>
@@ -13644,22 +15161,22 @@
                 <a:ea typeface="Calibri" pitchFamily="34" charset="-122"/>
                 <a:cs typeface="Calibri" pitchFamily="34" charset="-120"/>
               </a:rPr>
-              <a:t>claude-opus-4.6</a:t>
+              <a:t>gemini-3.1-pro-preview</a:t>
             </a:r>
-            <a:endParaRPr lang="en-US" sz="1000" dirty="0"/>
+            <a:endParaRPr lang="en-US" sz="900" dirty="0"/>
           </a:p>
         </p:txBody>
       </p:sp>
       <p:sp>
         <p:nvSpPr>
-          <p:cNvPr id="32" name="Text 30"/>
+          <p:cNvPr id="44" name="Text 42"/>
           <p:cNvSpPr txBox="1"/>
           <p:nvPr/>
         </p:nvSpPr>
         <p:spPr>
           <a:xfrm>
-            <a:off x="3493008" y="3182112"/>
-            <a:ext cx="841248" cy="301752"/>
+            <a:off x="3566160" y="3719779"/>
+            <a:ext cx="786384" cy="283464"/>
           </a:xfrm>
           <a:prstGeom prst="rect">
             <a:avLst/>
@@ -13675,7 +15192,7 @@
               <a:buNone/>
             </a:pPr>
             <a:r>
-              <a:rPr lang="en-US" sz="750" dirty="0">
+              <a:rPr lang="en-US" sz="700" dirty="0">
                 <a:solidFill>
                   <a:srgbClr val="93A1AA"/>
                 </a:solidFill>
@@ -13685,20 +15202,20 @@
               </a:rPr>
               <a:t>AlgoTuner</a:t>
             </a:r>
-            <a:endParaRPr lang="en-US" sz="750" dirty="0"/>
+            <a:endParaRPr lang="en-US" sz="700" dirty="0"/>
           </a:p>
         </p:txBody>
       </p:sp>
       <p:sp>
         <p:nvSpPr>
-          <p:cNvPr id="33" name="Shape 31"/>
+          <p:cNvPr id="45" name="Shape 43"/>
           <p:cNvSpPr/>
           <p:nvPr/>
         </p:nvSpPr>
         <p:spPr>
           <a:xfrm>
-            <a:off x="4389120" y="3287268"/>
-            <a:ext cx="630764" cy="91440"/>
+            <a:off x="4389120" y="3815791"/>
+            <a:ext cx="629391" cy="91440"/>
           </a:xfrm>
           <a:prstGeom prst="rect">
             <a:avLst/>
@@ -13716,14 +15233,14 @@
       </p:sp>
       <p:sp>
         <p:nvSpPr>
-          <p:cNvPr id="34" name="Text 32"/>
+          <p:cNvPr id="46" name="Text 44"/>
           <p:cNvSpPr txBox="1"/>
           <p:nvPr/>
         </p:nvSpPr>
         <p:spPr>
           <a:xfrm>
-            <a:off x="5248656" y="3182112"/>
-            <a:ext cx="457200" cy="301752"/>
+            <a:off x="5248656" y="3719779"/>
+            <a:ext cx="457200" cy="283464"/>
           </a:xfrm>
           <a:prstGeom prst="rect">
             <a:avLst/>
@@ -13739,7 +15256,7 @@
               <a:buNone/>
             </a:pPr>
             <a:r>
-              <a:rPr lang="en-US" sz="950" dirty="0">
+              <a:rPr lang="en-US" sz="900" dirty="0">
                 <a:solidFill>
                   <a:srgbClr val="3A4750"/>
                 </a:solidFill>
@@ -13747,26 +15264,26 @@
                 <a:ea typeface="Calibri" pitchFamily="34" charset="-122"/>
                 <a:cs typeface="Calibri" pitchFamily="34" charset="-120"/>
               </a:rPr>
-              <a:t>1.837</a:t>
+              <a:t>1.833</a:t>
             </a:r>
-            <a:endParaRPr lang="en-US" sz="950" dirty="0"/>
+            <a:endParaRPr lang="en-US" sz="900" dirty="0"/>
           </a:p>
         </p:txBody>
       </p:sp>
       <p:sp>
         <p:nvSpPr>
-          <p:cNvPr id="35" name="Shape 33"/>
+          <p:cNvPr id="47" name="Shape 45"/>
           <p:cNvSpPr/>
           <p:nvPr/>
         </p:nvSpPr>
         <p:spPr>
           <a:xfrm>
-            <a:off x="566928" y="3525012"/>
-            <a:ext cx="5221224" cy="301752"/>
+            <a:off x="566928" y="4037990"/>
+            <a:ext cx="5221224" cy="283464"/>
           </a:xfrm>
           <a:prstGeom prst="roundRect">
             <a:avLst>
-              <a:gd name="adj" fmla="val 15152"/>
+              <a:gd name="adj" fmla="val 16129"/>
             </a:avLst>
           </a:prstGeom>
           <a:solidFill>
@@ -13782,14 +15299,14 @@
       </p:sp>
       <p:sp>
         <p:nvSpPr>
-          <p:cNvPr id="36" name="Text 34"/>
+          <p:cNvPr id="48" name="Text 46"/>
           <p:cNvSpPr txBox="1"/>
           <p:nvPr/>
         </p:nvSpPr>
         <p:spPr>
           <a:xfrm>
-            <a:off x="658368" y="3525012"/>
-            <a:ext cx="329184" cy="301752"/>
+            <a:off x="658368" y="4037990"/>
+            <a:ext cx="329184" cy="283464"/>
           </a:xfrm>
           <a:prstGeom prst="rect">
             <a:avLst/>
@@ -13805,7 +15322,7 @@
               <a:buNone/>
             </a:pPr>
             <a:r>
-              <a:rPr lang="en-US" sz="950" dirty="0">
+              <a:rPr lang="en-US" sz="900" dirty="0">
                 <a:solidFill>
                   <a:srgbClr val="93A1AA"/>
                 </a:solidFill>
@@ -13813,22 +15330,22 @@
                 <a:ea typeface="Calibri" pitchFamily="34" charset="-122"/>
                 <a:cs typeface="Calibri" pitchFamily="34" charset="-120"/>
               </a:rPr>
-              <a:t>6</a:t>
+              <a:t>8</a:t>
             </a:r>
-            <a:endParaRPr lang="en-US" sz="950" dirty="0"/>
+            <a:endParaRPr lang="en-US" sz="900" dirty="0"/>
           </a:p>
         </p:txBody>
       </p:sp>
       <p:sp>
         <p:nvSpPr>
-          <p:cNvPr id="37" name="Text 35"/>
+          <p:cNvPr id="49" name="Text 47"/>
           <p:cNvSpPr txBox="1"/>
           <p:nvPr/>
         </p:nvSpPr>
         <p:spPr>
           <a:xfrm>
-            <a:off x="1078992" y="3525012"/>
-            <a:ext cx="2395728" cy="301752"/>
+            <a:off x="1042416" y="4037990"/>
+            <a:ext cx="2487168" cy="283464"/>
           </a:xfrm>
           <a:prstGeom prst="rect">
             <a:avLst/>
@@ -13844,7 +15361,7 @@
               <a:buNone/>
             </a:pPr>
             <a:r>
-              <a:rPr lang="en-US" sz="1000" dirty="0">
+              <a:rPr lang="en-US" sz="900" dirty="0">
                 <a:solidFill>
                   <a:srgbClr val="93A1AA"/>
                 </a:solidFill>
@@ -13852,22 +15369,22 @@
                 <a:ea typeface="Calibri" pitchFamily="34" charset="-122"/>
                 <a:cs typeface="Calibri" pitchFamily="34" charset="-120"/>
               </a:rPr>
-              <a:t>gemini-3.1-pro-preview</a:t>
+              <a:t>claude-opus-4.5</a:t>
             </a:r>
-            <a:endParaRPr lang="en-US" sz="1000" dirty="0"/>
+            <a:endParaRPr lang="en-US" sz="900" dirty="0"/>
           </a:p>
         </p:txBody>
       </p:sp>
       <p:sp>
         <p:nvSpPr>
-          <p:cNvPr id="38" name="Text 36"/>
+          <p:cNvPr id="50" name="Text 48"/>
           <p:cNvSpPr txBox="1"/>
           <p:nvPr/>
         </p:nvSpPr>
         <p:spPr>
           <a:xfrm>
-            <a:off x="3493008" y="3525012"/>
-            <a:ext cx="841248" cy="301752"/>
+            <a:off x="3566160" y="4037990"/>
+            <a:ext cx="786384" cy="283464"/>
           </a:xfrm>
           <a:prstGeom prst="rect">
             <a:avLst/>
@@ -13883,7 +15400,7 @@
               <a:buNone/>
             </a:pPr>
             <a:r>
-              <a:rPr lang="en-US" sz="750" dirty="0">
+              <a:rPr lang="en-US" sz="700" dirty="0">
                 <a:solidFill>
                   <a:srgbClr val="93A1AA"/>
                 </a:solidFill>
@@ -13893,20 +15410,20 @@
               </a:rPr>
               <a:t>AlgoTuner</a:t>
             </a:r>
-            <a:endParaRPr lang="en-US" sz="750" dirty="0"/>
+            <a:endParaRPr lang="en-US" sz="700" dirty="0"/>
           </a:p>
         </p:txBody>
       </p:sp>
       <p:sp>
         <p:nvSpPr>
-          <p:cNvPr id="39" name="Shape 37"/>
+          <p:cNvPr id="51" name="Shape 49"/>
           <p:cNvSpPr/>
           <p:nvPr/>
         </p:nvSpPr>
         <p:spPr>
           <a:xfrm>
-            <a:off x="4389120" y="3630168"/>
-            <a:ext cx="629391" cy="91440"/>
+            <a:off x="4389120" y="4134002"/>
+            <a:ext cx="628361" cy="91440"/>
           </a:xfrm>
           <a:prstGeom prst="rect">
             <a:avLst/>
@@ -13924,14 +15441,14 @@
       </p:sp>
       <p:sp>
         <p:nvSpPr>
-          <p:cNvPr id="40" name="Text 38"/>
+          <p:cNvPr id="52" name="Text 50"/>
           <p:cNvSpPr txBox="1"/>
           <p:nvPr/>
         </p:nvSpPr>
         <p:spPr>
           <a:xfrm>
-            <a:off x="5248656" y="3525012"/>
-            <a:ext cx="457200" cy="301752"/>
+            <a:off x="5248656" y="4037990"/>
+            <a:ext cx="457200" cy="283464"/>
           </a:xfrm>
           <a:prstGeom prst="rect">
             <a:avLst/>
@@ -13947,7 +15464,7 @@
               <a:buNone/>
             </a:pPr>
             <a:r>
-              <a:rPr lang="en-US" sz="950" dirty="0">
+              <a:rPr lang="en-US" sz="900" dirty="0">
                 <a:solidFill>
                   <a:srgbClr val="3A4750"/>
                 </a:solidFill>
@@ -13955,26 +15472,26 @@
                 <a:ea typeface="Calibri" pitchFamily="34" charset="-122"/>
                 <a:cs typeface="Calibri" pitchFamily="34" charset="-120"/>
               </a:rPr>
-              <a:t>1.833</a:t>
+              <a:t>1.830</a:t>
             </a:r>
-            <a:endParaRPr lang="en-US" sz="950" dirty="0"/>
+            <a:endParaRPr lang="en-US" sz="900" dirty="0"/>
           </a:p>
         </p:txBody>
       </p:sp>
       <p:sp>
         <p:nvSpPr>
-          <p:cNvPr id="41" name="Shape 39"/>
+          <p:cNvPr id="53" name="Shape 51"/>
           <p:cNvSpPr/>
           <p:nvPr/>
         </p:nvSpPr>
         <p:spPr>
           <a:xfrm>
-            <a:off x="566928" y="3867912"/>
-            <a:ext cx="5221224" cy="301752"/>
+            <a:off x="566928" y="4356202"/>
+            <a:ext cx="5221224" cy="283464"/>
           </a:xfrm>
           <a:prstGeom prst="roundRect">
             <a:avLst>
-              <a:gd name="adj" fmla="val 15152"/>
+              <a:gd name="adj" fmla="val 16129"/>
             </a:avLst>
           </a:prstGeom>
           <a:solidFill>
@@ -13990,14 +15507,14 @@
       </p:sp>
       <p:sp>
         <p:nvSpPr>
-          <p:cNvPr id="42" name="Text 40"/>
+          <p:cNvPr id="54" name="Text 52"/>
           <p:cNvSpPr txBox="1"/>
           <p:nvPr/>
         </p:nvSpPr>
         <p:spPr>
           <a:xfrm>
-            <a:off x="658368" y="3867912"/>
-            <a:ext cx="329184" cy="301752"/>
+            <a:off x="658368" y="4356202"/>
+            <a:ext cx="329184" cy="283464"/>
           </a:xfrm>
           <a:prstGeom prst="rect">
             <a:avLst/>
@@ -14013,7 +15530,7 @@
               <a:buNone/>
             </a:pPr>
             <a:r>
-              <a:rPr lang="en-US" sz="950" dirty="0">
+              <a:rPr lang="en-US" sz="900" dirty="0">
                 <a:solidFill>
                   <a:srgbClr val="93A1AA"/>
                 </a:solidFill>
@@ -14021,22 +15538,22 @@
                 <a:ea typeface="Calibri" pitchFamily="34" charset="-122"/>
                 <a:cs typeface="Calibri" pitchFamily="34" charset="-120"/>
               </a:rPr>
-              <a:t>7</a:t>
+              <a:t>9</a:t>
             </a:r>
-            <a:endParaRPr lang="en-US" sz="950" dirty="0"/>
+            <a:endParaRPr lang="en-US" sz="900" dirty="0"/>
           </a:p>
         </p:txBody>
       </p:sp>
       <p:sp>
         <p:nvSpPr>
-          <p:cNvPr id="43" name="Text 41"/>
+          <p:cNvPr id="55" name="Text 53"/>
           <p:cNvSpPr txBox="1"/>
           <p:nvPr/>
         </p:nvSpPr>
         <p:spPr>
           <a:xfrm>
-            <a:off x="1078992" y="3867912"/>
-            <a:ext cx="2395728" cy="301752"/>
+            <a:off x="1042416" y="4356202"/>
+            <a:ext cx="2487168" cy="283464"/>
           </a:xfrm>
           <a:prstGeom prst="rect">
             <a:avLst/>
@@ -14052,7 +15569,7 @@
               <a:buNone/>
             </a:pPr>
             <a:r>
-              <a:rPr lang="en-US" sz="1000" dirty="0">
+              <a:rPr lang="en-US" sz="900" dirty="0">
                 <a:solidFill>
                   <a:srgbClr val="93A1AA"/>
                 </a:solidFill>
@@ -14060,22 +15577,22 @@
                 <a:ea typeface="Calibri" pitchFamily="34" charset="-122"/>
                 <a:cs typeface="Calibri" pitchFamily="34" charset="-120"/>
               </a:rPr>
-              <a:t>claude-opus-4.5</a:t>
+              <a:t>gpt-5.2</a:t>
             </a:r>
-            <a:endParaRPr lang="en-US" sz="1000" dirty="0"/>
+            <a:endParaRPr lang="en-US" sz="900" dirty="0"/>
           </a:p>
         </p:txBody>
       </p:sp>
       <p:sp>
         <p:nvSpPr>
-          <p:cNvPr id="44" name="Text 42"/>
+          <p:cNvPr id="56" name="Text 54"/>
           <p:cNvSpPr txBox="1"/>
           <p:nvPr/>
         </p:nvSpPr>
         <p:spPr>
           <a:xfrm>
-            <a:off x="3493008" y="3867912"/>
-            <a:ext cx="841248" cy="301752"/>
+            <a:off x="3566160" y="4356202"/>
+            <a:ext cx="786384" cy="283464"/>
           </a:xfrm>
           <a:prstGeom prst="rect">
             <a:avLst/>
@@ -14091,7 +15608,7 @@
               <a:buNone/>
             </a:pPr>
             <a:r>
-              <a:rPr lang="en-US" sz="750" dirty="0">
+              <a:rPr lang="en-US" sz="700" dirty="0">
                 <a:solidFill>
                   <a:srgbClr val="93A1AA"/>
                 </a:solidFill>
@@ -14101,20 +15618,20 @@
               </a:rPr>
               <a:t>AlgoTuner</a:t>
             </a:r>
-            <a:endParaRPr lang="en-US" sz="750" dirty="0"/>
+            <a:endParaRPr lang="en-US" sz="700" dirty="0"/>
           </a:p>
         </p:txBody>
       </p:sp>
       <p:sp>
         <p:nvSpPr>
-          <p:cNvPr id="45" name="Shape 43"/>
+          <p:cNvPr id="57" name="Shape 55"/>
           <p:cNvSpPr/>
           <p:nvPr/>
         </p:nvSpPr>
         <p:spPr>
           <a:xfrm>
-            <a:off x="4389120" y="3973068"/>
-            <a:ext cx="628361" cy="91440"/>
+            <a:off x="4389120" y="4452214"/>
+            <a:ext cx="613939" cy="91440"/>
           </a:xfrm>
           <a:prstGeom prst="rect">
             <a:avLst/>
@@ -14132,14 +15649,14 @@
       </p:sp>
       <p:sp>
         <p:nvSpPr>
-          <p:cNvPr id="46" name="Text 44"/>
+          <p:cNvPr id="58" name="Text 56"/>
           <p:cNvSpPr txBox="1"/>
           <p:nvPr/>
         </p:nvSpPr>
         <p:spPr>
           <a:xfrm>
-            <a:off x="5248656" y="3867912"/>
-            <a:ext cx="457200" cy="301752"/>
+            <a:off x="5248656" y="4356202"/>
+            <a:ext cx="457200" cy="283464"/>
           </a:xfrm>
           <a:prstGeom prst="rect">
             <a:avLst/>
@@ -14155,7 +15672,7 @@
               <a:buNone/>
             </a:pPr>
             <a:r>
-              <a:rPr lang="en-US" sz="950" dirty="0">
+              <a:rPr lang="en-US" sz="900" dirty="0">
                 <a:solidFill>
                   <a:srgbClr val="3A4750"/>
                 </a:solidFill>
@@ -14163,26 +15680,26 @@
                 <a:ea typeface="Calibri" pitchFamily="34" charset="-122"/>
                 <a:cs typeface="Calibri" pitchFamily="34" charset="-120"/>
               </a:rPr>
-              <a:t>1.830</a:t>
+              <a:t>1.788</a:t>
             </a:r>
-            <a:endParaRPr lang="en-US" sz="950" dirty="0"/>
+            <a:endParaRPr lang="en-US" sz="900" dirty="0"/>
           </a:p>
         </p:txBody>
       </p:sp>
       <p:sp>
         <p:nvSpPr>
-          <p:cNvPr id="47" name="Shape 45"/>
+          <p:cNvPr id="59" name="Shape 57"/>
           <p:cNvSpPr/>
           <p:nvPr/>
         </p:nvSpPr>
         <p:spPr>
           <a:xfrm>
-            <a:off x="566928" y="4210812"/>
-            <a:ext cx="5221224" cy="301752"/>
+            <a:off x="566928" y="4674413"/>
+            <a:ext cx="5221224" cy="283464"/>
           </a:xfrm>
           <a:prstGeom prst="roundRect">
             <a:avLst>
-              <a:gd name="adj" fmla="val 15152"/>
+              <a:gd name="adj" fmla="val 16129"/>
             </a:avLst>
           </a:prstGeom>
           <a:solidFill>
@@ -14198,14 +15715,14 @@
       </p:sp>
       <p:sp>
         <p:nvSpPr>
-          <p:cNvPr id="48" name="Text 46"/>
+          <p:cNvPr id="60" name="Text 58"/>
           <p:cNvSpPr txBox="1"/>
           <p:nvPr/>
         </p:nvSpPr>
         <p:spPr>
           <a:xfrm>
-            <a:off x="658368" y="4210812"/>
-            <a:ext cx="329184" cy="301752"/>
+            <a:off x="658368" y="4674413"/>
+            <a:ext cx="329184" cy="283464"/>
           </a:xfrm>
           <a:prstGeom prst="rect">
             <a:avLst/>
@@ -14221,7 +15738,7 @@
               <a:buNone/>
             </a:pPr>
             <a:r>
-              <a:rPr lang="en-US" sz="950" dirty="0">
+              <a:rPr lang="en-US" sz="900" dirty="0">
                 <a:solidFill>
                   <a:srgbClr val="93A1AA"/>
                 </a:solidFill>
@@ -14229,22 +15746,22 @@
                 <a:ea typeface="Calibri" pitchFamily="34" charset="-122"/>
                 <a:cs typeface="Calibri" pitchFamily="34" charset="-120"/>
               </a:rPr>
-              <a:t>8</a:t>
+              <a:t>10</a:t>
             </a:r>
-            <a:endParaRPr lang="en-US" sz="950" dirty="0"/>
+            <a:endParaRPr lang="en-US" sz="900" dirty="0"/>
           </a:p>
         </p:txBody>
       </p:sp>
       <p:sp>
         <p:nvSpPr>
-          <p:cNvPr id="49" name="Text 47"/>
+          <p:cNvPr id="61" name="Text 59"/>
           <p:cNvSpPr txBox="1"/>
           <p:nvPr/>
         </p:nvSpPr>
         <p:spPr>
           <a:xfrm>
-            <a:off x="1078992" y="4210812"/>
-            <a:ext cx="2395728" cy="301752"/>
+            <a:off x="1042416" y="4674413"/>
+            <a:ext cx="2487168" cy="283464"/>
           </a:xfrm>
           <a:prstGeom prst="rect">
             <a:avLst/>
@@ -14260,7 +15777,7 @@
               <a:buNone/>
             </a:pPr>
             <a:r>
-              <a:rPr lang="en-US" sz="1000" dirty="0">
+              <a:rPr lang="en-US" sz="900" dirty="0">
                 <a:solidFill>
                   <a:srgbClr val="93A1AA"/>
                 </a:solidFill>
@@ -14268,22 +15785,22 @@
                 <a:ea typeface="Calibri" pitchFamily="34" charset="-122"/>
                 <a:cs typeface="Calibri" pitchFamily="34" charset="-120"/>
               </a:rPr>
-              <a:t>gpt-5.2</a:t>
+              <a:t>o4-mini</a:t>
             </a:r>
-            <a:endParaRPr lang="en-US" sz="1000" dirty="0"/>
+            <a:endParaRPr lang="en-US" sz="900" dirty="0"/>
           </a:p>
         </p:txBody>
       </p:sp>
       <p:sp>
         <p:nvSpPr>
-          <p:cNvPr id="50" name="Text 48"/>
+          <p:cNvPr id="62" name="Text 60"/>
           <p:cNvSpPr txBox="1"/>
           <p:nvPr/>
         </p:nvSpPr>
         <p:spPr>
           <a:xfrm>
-            <a:off x="3493008" y="4210812"/>
-            <a:ext cx="841248" cy="301752"/>
+            <a:off x="3566160" y="4674413"/>
+            <a:ext cx="786384" cy="283464"/>
           </a:xfrm>
           <a:prstGeom prst="rect">
             <a:avLst/>
@@ -14299,7 +15816,7 @@
               <a:buNone/>
             </a:pPr>
             <a:r>
-              <a:rPr lang="en-US" sz="750" dirty="0">
+              <a:rPr lang="en-US" sz="700" dirty="0">
                 <a:solidFill>
                   <a:srgbClr val="93A1AA"/>
                 </a:solidFill>
@@ -14309,20 +15826,20 @@
               </a:rPr>
               <a:t>AlgoTuner</a:t>
             </a:r>
-            <a:endParaRPr lang="en-US" sz="750" dirty="0"/>
+            <a:endParaRPr lang="en-US" sz="700" dirty="0"/>
           </a:p>
         </p:txBody>
       </p:sp>
       <p:sp>
         <p:nvSpPr>
-          <p:cNvPr id="51" name="Shape 49"/>
+          <p:cNvPr id="63" name="Shape 61"/>
           <p:cNvSpPr/>
           <p:nvPr/>
         </p:nvSpPr>
         <p:spPr>
           <a:xfrm>
-            <a:off x="4389120" y="4315968"/>
-            <a:ext cx="613939" cy="91440"/>
+            <a:off x="4389120" y="4770425"/>
+            <a:ext cx="609132" cy="91440"/>
           </a:xfrm>
           <a:prstGeom prst="rect">
             <a:avLst/>
@@ -14340,14 +15857,14 @@
       </p:sp>
       <p:sp>
         <p:nvSpPr>
-          <p:cNvPr id="52" name="Text 50"/>
+          <p:cNvPr id="64" name="Text 62"/>
           <p:cNvSpPr txBox="1"/>
           <p:nvPr/>
         </p:nvSpPr>
         <p:spPr>
           <a:xfrm>
-            <a:off x="5248656" y="4210812"/>
-            <a:ext cx="457200" cy="301752"/>
+            <a:off x="5248656" y="4674413"/>
+            <a:ext cx="457200" cy="283464"/>
           </a:xfrm>
           <a:prstGeom prst="rect">
             <a:avLst/>
@@ -14363,7 +15880,7 @@
               <a:buNone/>
             </a:pPr>
             <a:r>
-              <a:rPr lang="en-US" sz="950" dirty="0">
+              <a:rPr lang="en-US" sz="900" dirty="0">
                 <a:solidFill>
                   <a:srgbClr val="3A4750"/>
                 </a:solidFill>
@@ -14371,26 +15888,26 @@
                 <a:ea typeface="Calibri" pitchFamily="34" charset="-122"/>
                 <a:cs typeface="Calibri" pitchFamily="34" charset="-120"/>
               </a:rPr>
-              <a:t>1.788</a:t>
+              <a:t>1.774</a:t>
             </a:r>
-            <a:endParaRPr lang="en-US" sz="950" dirty="0"/>
+            <a:endParaRPr lang="en-US" sz="900" dirty="0"/>
           </a:p>
         </p:txBody>
       </p:sp>
       <p:sp>
         <p:nvSpPr>
-          <p:cNvPr id="53" name="Shape 51"/>
+          <p:cNvPr id="65" name="Shape 63"/>
           <p:cNvSpPr/>
           <p:nvPr/>
         </p:nvSpPr>
         <p:spPr>
           <a:xfrm>
-            <a:off x="566928" y="4553712"/>
-            <a:ext cx="5221224" cy="301752"/>
+            <a:off x="566928" y="4992624"/>
+            <a:ext cx="5221224" cy="283464"/>
           </a:xfrm>
           <a:prstGeom prst="roundRect">
             <a:avLst>
-              <a:gd name="adj" fmla="val 15152"/>
+              <a:gd name="adj" fmla="val 16129"/>
             </a:avLst>
           </a:prstGeom>
           <a:solidFill>
@@ -14406,14 +15923,14 @@
       </p:sp>
       <p:sp>
         <p:nvSpPr>
-          <p:cNvPr id="54" name="Text 52"/>
+          <p:cNvPr id="66" name="Text 64"/>
           <p:cNvSpPr txBox="1"/>
           <p:nvPr/>
         </p:nvSpPr>
         <p:spPr>
           <a:xfrm>
-            <a:off x="658368" y="4553712"/>
-            <a:ext cx="329184" cy="301752"/>
+            <a:off x="658368" y="4992624"/>
+            <a:ext cx="329184" cy="283464"/>
           </a:xfrm>
           <a:prstGeom prst="rect">
             <a:avLst/>
@@ -14429,7 +15946,7 @@
               <a:buNone/>
             </a:pPr>
             <a:r>
-              <a:rPr lang="en-US" sz="950" dirty="0">
+              <a:rPr lang="en-US" sz="900" dirty="0">
                 <a:solidFill>
                   <a:srgbClr val="93A1AA"/>
                 </a:solidFill>
@@ -14437,22 +15954,22 @@
                 <a:ea typeface="Calibri" pitchFamily="34" charset="-122"/>
                 <a:cs typeface="Calibri" pitchFamily="34" charset="-120"/>
               </a:rPr>
-              <a:t>9</a:t>
+              <a:t>11</a:t>
             </a:r>
-            <a:endParaRPr lang="en-US" sz="950" dirty="0"/>
+            <a:endParaRPr lang="en-US" sz="900" dirty="0"/>
           </a:p>
         </p:txBody>
       </p:sp>
       <p:sp>
         <p:nvSpPr>
-          <p:cNvPr id="55" name="Text 53"/>
+          <p:cNvPr id="67" name="Text 65"/>
           <p:cNvSpPr txBox="1"/>
           <p:nvPr/>
         </p:nvSpPr>
         <p:spPr>
           <a:xfrm>
-            <a:off x="1078992" y="4553712"/>
-            <a:ext cx="2395728" cy="301752"/>
+            <a:off x="1042416" y="4992624"/>
+            <a:ext cx="2487168" cy="283464"/>
           </a:xfrm>
           <a:prstGeom prst="rect">
             <a:avLst/>
@@ -14468,7 +15985,7 @@
               <a:buNone/>
             </a:pPr>
             <a:r>
-              <a:rPr lang="en-US" sz="1000" dirty="0">
+              <a:rPr lang="en-US" sz="900" dirty="0">
                 <a:solidFill>
                   <a:srgbClr val="93A1AA"/>
                 </a:solidFill>
@@ -14476,22 +15993,22 @@
                 <a:ea typeface="Calibri" pitchFamily="34" charset="-122"/>
                 <a:cs typeface="Calibri" pitchFamily="34" charset="-120"/>
               </a:rPr>
-              <a:t>o4-mini</a:t>
+              <a:t>glm-4.5</a:t>
             </a:r>
-            <a:endParaRPr lang="en-US" sz="1000" dirty="0"/>
+            <a:endParaRPr lang="en-US" sz="900" dirty="0"/>
           </a:p>
         </p:txBody>
       </p:sp>
       <p:sp>
         <p:nvSpPr>
-          <p:cNvPr id="56" name="Text 54"/>
+          <p:cNvPr id="68" name="Text 66"/>
           <p:cNvSpPr txBox="1"/>
           <p:nvPr/>
         </p:nvSpPr>
         <p:spPr>
           <a:xfrm>
-            <a:off x="3493008" y="4553712"/>
-            <a:ext cx="841248" cy="301752"/>
+            <a:off x="3566160" y="4992624"/>
+            <a:ext cx="786384" cy="283464"/>
           </a:xfrm>
           <a:prstGeom prst="rect">
             <a:avLst/>
@@ -14507,7 +16024,7 @@
               <a:buNone/>
             </a:pPr>
             <a:r>
-              <a:rPr lang="en-US" sz="750" dirty="0">
+              <a:rPr lang="en-US" sz="700" dirty="0">
                 <a:solidFill>
                   <a:srgbClr val="93A1AA"/>
                 </a:solidFill>
@@ -14517,20 +16034,20 @@
               </a:rPr>
               <a:t>AlgoTuner</a:t>
             </a:r>
-            <a:endParaRPr lang="en-US" sz="750" dirty="0"/>
+            <a:endParaRPr lang="en-US" sz="700" dirty="0"/>
           </a:p>
         </p:txBody>
       </p:sp>
       <p:sp>
         <p:nvSpPr>
-          <p:cNvPr id="57" name="Shape 55"/>
+          <p:cNvPr id="69" name="Shape 67"/>
           <p:cNvSpPr/>
           <p:nvPr/>
         </p:nvSpPr>
         <p:spPr>
           <a:xfrm>
-            <a:off x="4389120" y="4658868"/>
-            <a:ext cx="609132" cy="91440"/>
+            <a:off x="4389120" y="5088636"/>
+            <a:ext cx="604668" cy="91440"/>
           </a:xfrm>
           <a:prstGeom prst="rect">
             <a:avLst/>
@@ -14548,14 +16065,14 @@
       </p:sp>
       <p:sp>
         <p:nvSpPr>
-          <p:cNvPr id="58" name="Text 56"/>
+          <p:cNvPr id="70" name="Text 68"/>
           <p:cNvSpPr txBox="1"/>
           <p:nvPr/>
         </p:nvSpPr>
         <p:spPr>
           <a:xfrm>
-            <a:off x="5248656" y="4553712"/>
-            <a:ext cx="457200" cy="301752"/>
+            <a:off x="5248656" y="4992624"/>
+            <a:ext cx="457200" cy="283464"/>
           </a:xfrm>
           <a:prstGeom prst="rect">
             <a:avLst/>
@@ -14571,7 +16088,7 @@
               <a:buNone/>
             </a:pPr>
             <a:r>
-              <a:rPr lang="en-US" sz="950" dirty="0">
+              <a:rPr lang="en-US" sz="900" dirty="0">
                 <a:solidFill>
                   <a:srgbClr val="3A4750"/>
                 </a:solidFill>
@@ -14579,26 +16096,26 @@
                 <a:ea typeface="Calibri" pitchFamily="34" charset="-122"/>
                 <a:cs typeface="Calibri" pitchFamily="34" charset="-120"/>
               </a:rPr>
-              <a:t>1.774</a:t>
+              <a:t>1.761</a:t>
             </a:r>
-            <a:endParaRPr lang="en-US" sz="950" dirty="0"/>
+            <a:endParaRPr lang="en-US" sz="900" dirty="0"/>
           </a:p>
         </p:txBody>
       </p:sp>
       <p:sp>
         <p:nvSpPr>
-          <p:cNvPr id="59" name="Shape 57"/>
+          <p:cNvPr id="71" name="Shape 69"/>
           <p:cNvSpPr/>
           <p:nvPr/>
         </p:nvSpPr>
         <p:spPr>
           <a:xfrm>
-            <a:off x="566928" y="4896612"/>
-            <a:ext cx="5221224" cy="301752"/>
+            <a:off x="566928" y="5310835"/>
+            <a:ext cx="5221224" cy="283464"/>
           </a:xfrm>
           <a:prstGeom prst="roundRect">
             <a:avLst>
-              <a:gd name="adj" fmla="val 15152"/>
+              <a:gd name="adj" fmla="val 16129"/>
             </a:avLst>
           </a:prstGeom>
           <a:solidFill>
@@ -14614,14 +16131,14 @@
       </p:sp>
       <p:sp>
         <p:nvSpPr>
-          <p:cNvPr id="60" name="Text 58"/>
+          <p:cNvPr id="72" name="Text 70"/>
           <p:cNvSpPr txBox="1"/>
           <p:nvPr/>
         </p:nvSpPr>
         <p:spPr>
           <a:xfrm>
-            <a:off x="658368" y="4896612"/>
-            <a:ext cx="329184" cy="301752"/>
+            <a:off x="658368" y="5310835"/>
+            <a:ext cx="329184" cy="283464"/>
           </a:xfrm>
           <a:prstGeom prst="rect">
             <a:avLst/>
@@ -14637,7 +16154,7 @@
               <a:buNone/>
             </a:pPr>
             <a:r>
-              <a:rPr lang="en-US" sz="950" dirty="0">
+              <a:rPr lang="en-US" sz="900" dirty="0">
                 <a:solidFill>
                   <a:srgbClr val="93A1AA"/>
                 </a:solidFill>
@@ -14645,22 +16162,22 @@
                 <a:ea typeface="Calibri" pitchFamily="34" charset="-122"/>
                 <a:cs typeface="Calibri" pitchFamily="34" charset="-120"/>
               </a:rPr>
-              <a:t>10</a:t>
+              <a:t>12</a:t>
             </a:r>
-            <a:endParaRPr lang="en-US" sz="950" dirty="0"/>
+            <a:endParaRPr lang="en-US" sz="900" dirty="0"/>
           </a:p>
         </p:txBody>
       </p:sp>
       <p:sp>
         <p:nvSpPr>
-          <p:cNvPr id="61" name="Text 59"/>
+          <p:cNvPr id="73" name="Text 71"/>
           <p:cNvSpPr txBox="1"/>
           <p:nvPr/>
         </p:nvSpPr>
         <p:spPr>
           <a:xfrm>
-            <a:off x="1078992" y="4896612"/>
-            <a:ext cx="2395728" cy="301752"/>
+            <a:off x="1042416" y="5310835"/>
+            <a:ext cx="2487168" cy="283464"/>
           </a:xfrm>
           <a:prstGeom prst="rect">
             <a:avLst/>
@@ -14676,7 +16193,7 @@
               <a:buNone/>
             </a:pPr>
             <a:r>
-              <a:rPr lang="en-US" sz="1000" dirty="0">
+              <a:rPr lang="en-US" sz="900" dirty="0">
                 <a:solidFill>
                   <a:srgbClr val="93A1AA"/>
                 </a:solidFill>
@@ -14684,22 +16201,22 @@
                 <a:ea typeface="Calibri" pitchFamily="34" charset="-122"/>
                 <a:cs typeface="Calibri" pitchFamily="34" charset="-120"/>
               </a:rPr>
-              <a:t>glm-4.5</a:t>
+              <a:t>claude-sonnet-4-5-20250929</a:t>
             </a:r>
-            <a:endParaRPr lang="en-US" sz="1000" dirty="0"/>
+            <a:endParaRPr lang="en-US" sz="900" dirty="0"/>
           </a:p>
         </p:txBody>
       </p:sp>
       <p:sp>
         <p:nvSpPr>
-          <p:cNvPr id="62" name="Text 60"/>
+          <p:cNvPr id="74" name="Text 72"/>
           <p:cNvSpPr txBox="1"/>
           <p:nvPr/>
         </p:nvSpPr>
         <p:spPr>
           <a:xfrm>
-            <a:off x="3493008" y="4896612"/>
-            <a:ext cx="841248" cy="301752"/>
+            <a:off x="3566160" y="5310835"/>
+            <a:ext cx="786384" cy="283464"/>
           </a:xfrm>
           <a:prstGeom prst="rect">
             <a:avLst/>
@@ -14715,7 +16232,7 @@
               <a:buNone/>
             </a:pPr>
             <a:r>
-              <a:rPr lang="en-US" sz="750" dirty="0">
+              <a:rPr lang="en-US" sz="700" dirty="0">
                 <a:solidFill>
                   <a:srgbClr val="93A1AA"/>
                 </a:solidFill>
@@ -14725,20 +16242,20 @@
               </a:rPr>
               <a:t>AlgoTuner</a:t>
             </a:r>
-            <a:endParaRPr lang="en-US" sz="750" dirty="0"/>
+            <a:endParaRPr lang="en-US" sz="700" dirty="0"/>
           </a:p>
         </p:txBody>
       </p:sp>
       <p:sp>
         <p:nvSpPr>
-          <p:cNvPr id="63" name="Shape 61"/>
+          <p:cNvPr id="75" name="Shape 73"/>
           <p:cNvSpPr/>
           <p:nvPr/>
         </p:nvSpPr>
         <p:spPr>
           <a:xfrm>
-            <a:off x="4389120" y="5001768"/>
-            <a:ext cx="604668" cy="91440"/>
+            <a:off x="4389120" y="5406847"/>
+            <a:ext cx="586127" cy="91440"/>
           </a:xfrm>
           <a:prstGeom prst="rect">
             <a:avLst/>
@@ -14756,14 +16273,14 @@
       </p:sp>
       <p:sp>
         <p:nvSpPr>
-          <p:cNvPr id="64" name="Text 62"/>
+          <p:cNvPr id="76" name="Text 74"/>
           <p:cNvSpPr txBox="1"/>
           <p:nvPr/>
         </p:nvSpPr>
         <p:spPr>
           <a:xfrm>
-            <a:off x="5248656" y="4896612"/>
-            <a:ext cx="457200" cy="301752"/>
+            <a:off x="5248656" y="5310835"/>
+            <a:ext cx="457200" cy="283464"/>
           </a:xfrm>
           <a:prstGeom prst="rect">
             <a:avLst/>
@@ -14779,7 +16296,7 @@
               <a:buNone/>
             </a:pPr>
             <a:r>
-              <a:rPr lang="en-US" sz="950" dirty="0">
+              <a:rPr lang="en-US" sz="900" dirty="0">
                 <a:solidFill>
                   <a:srgbClr val="3A4750"/>
                 </a:solidFill>
@@ -14787,26 +16304,26 @@
                 <a:ea typeface="Calibri" pitchFamily="34" charset="-122"/>
                 <a:cs typeface="Calibri" pitchFamily="34" charset="-120"/>
               </a:rPr>
-              <a:t>1.761</a:t>
+              <a:t>1.707</a:t>
             </a:r>
-            <a:endParaRPr lang="en-US" sz="950" dirty="0"/>
+            <a:endParaRPr lang="en-US" sz="900" dirty="0"/>
           </a:p>
         </p:txBody>
       </p:sp>
       <p:sp>
         <p:nvSpPr>
-          <p:cNvPr id="65" name="Shape 63"/>
+          <p:cNvPr id="77" name="Shape 75"/>
           <p:cNvSpPr/>
           <p:nvPr/>
         </p:nvSpPr>
         <p:spPr>
           <a:xfrm>
-            <a:off x="566928" y="5239512"/>
-            <a:ext cx="5221224" cy="301752"/>
+            <a:off x="566928" y="5629046"/>
+            <a:ext cx="5221224" cy="283464"/>
           </a:xfrm>
           <a:prstGeom prst="roundRect">
             <a:avLst>
-              <a:gd name="adj" fmla="val 15152"/>
+              <a:gd name="adj" fmla="val 16129"/>
             </a:avLst>
           </a:prstGeom>
           <a:solidFill>
@@ -14822,14 +16339,14 @@
       </p:sp>
       <p:sp>
         <p:nvSpPr>
-          <p:cNvPr id="66" name="Text 64"/>
+          <p:cNvPr id="78" name="Text 76"/>
           <p:cNvSpPr txBox="1"/>
           <p:nvPr/>
         </p:nvSpPr>
         <p:spPr>
           <a:xfrm>
-            <a:off x="658368" y="5239512"/>
-            <a:ext cx="329184" cy="301752"/>
+            <a:off x="658368" y="5629046"/>
+            <a:ext cx="329184" cy="283464"/>
           </a:xfrm>
           <a:prstGeom prst="rect">
             <a:avLst/>
@@ -14845,7 +16362,7 @@
               <a:buNone/>
             </a:pPr>
             <a:r>
-              <a:rPr lang="en-US" sz="950" dirty="0">
+              <a:rPr lang="en-US" sz="900" dirty="0">
                 <a:solidFill>
                   <a:srgbClr val="93A1AA"/>
                 </a:solidFill>
@@ -14853,22 +16370,22 @@
                 <a:ea typeface="Calibri" pitchFamily="34" charset="-122"/>
                 <a:cs typeface="Calibri" pitchFamily="34" charset="-120"/>
               </a:rPr>
-              <a:t>11</a:t>
+              <a:t>13</a:t>
             </a:r>
-            <a:endParaRPr lang="en-US" sz="950" dirty="0"/>
+            <a:endParaRPr lang="en-US" sz="900" dirty="0"/>
           </a:p>
         </p:txBody>
       </p:sp>
       <p:sp>
         <p:nvSpPr>
-          <p:cNvPr id="67" name="Text 65"/>
+          <p:cNvPr id="79" name="Text 77"/>
           <p:cNvSpPr txBox="1"/>
           <p:nvPr/>
         </p:nvSpPr>
         <p:spPr>
           <a:xfrm>
-            <a:off x="1078992" y="5239512"/>
-            <a:ext cx="2395728" cy="301752"/>
+            <a:off x="1042416" y="5629046"/>
+            <a:ext cx="2487168" cy="283464"/>
           </a:xfrm>
           <a:prstGeom prst="rect">
             <a:avLst/>
@@ -14884,7 +16401,7 @@
               <a:buNone/>
             </a:pPr>
             <a:r>
-              <a:rPr lang="en-US" sz="1000" dirty="0">
+              <a:rPr lang="en-US" sz="900" dirty="0">
                 <a:solidFill>
                   <a:srgbClr val="93A1AA"/>
                 </a:solidFill>
@@ -14892,22 +16409,22 @@
                 <a:ea typeface="Calibri" pitchFamily="34" charset="-122"/>
                 <a:cs typeface="Calibri" pitchFamily="34" charset="-120"/>
               </a:rPr>
-              <a:t>claude-sonnet-4-5-20250929</a:t>
+              <a:t>deepseek-reasoner</a:t>
             </a:r>
-            <a:endParaRPr lang="en-US" sz="1000" dirty="0"/>
+            <a:endParaRPr lang="en-US" sz="900" dirty="0"/>
           </a:p>
         </p:txBody>
       </p:sp>
       <p:sp>
         <p:nvSpPr>
-          <p:cNvPr id="68" name="Text 66"/>
+          <p:cNvPr id="80" name="Text 78"/>
           <p:cNvSpPr txBox="1"/>
           <p:nvPr/>
         </p:nvSpPr>
         <p:spPr>
           <a:xfrm>
-            <a:off x="3493008" y="5239512"/>
-            <a:ext cx="841248" cy="301752"/>
+            <a:off x="3566160" y="5629046"/>
+            <a:ext cx="786384" cy="283464"/>
           </a:xfrm>
           <a:prstGeom prst="rect">
             <a:avLst/>
@@ -14923,7 +16440,7 @@
               <a:buNone/>
             </a:pPr>
             <a:r>
-              <a:rPr lang="en-US" sz="750" dirty="0">
+              <a:rPr lang="en-US" sz="700" dirty="0">
                 <a:solidFill>
                   <a:srgbClr val="93A1AA"/>
                 </a:solidFill>
@@ -14933,20 +16450,20 @@
               </a:rPr>
               <a:t>AlgoTuner</a:t>
             </a:r>
-            <a:endParaRPr lang="en-US" sz="750" dirty="0"/>
+            <a:endParaRPr lang="en-US" sz="700" dirty="0"/>
           </a:p>
         </p:txBody>
       </p:sp>
       <p:sp>
         <p:nvSpPr>
-          <p:cNvPr id="69" name="Shape 67"/>
+          <p:cNvPr id="81" name="Shape 79"/>
           <p:cNvSpPr/>
           <p:nvPr/>
         </p:nvSpPr>
         <p:spPr>
           <a:xfrm>
-            <a:off x="4389120" y="5344668"/>
-            <a:ext cx="586127" cy="91440"/>
+            <a:off x="4389120" y="5725058"/>
+            <a:ext cx="576512" cy="91440"/>
           </a:xfrm>
           <a:prstGeom prst="rect">
             <a:avLst/>
@@ -14964,14 +16481,14 @@
       </p:sp>
       <p:sp>
         <p:nvSpPr>
-          <p:cNvPr id="70" name="Text 68"/>
+          <p:cNvPr id="82" name="Text 80"/>
           <p:cNvSpPr txBox="1"/>
           <p:nvPr/>
         </p:nvSpPr>
         <p:spPr>
           <a:xfrm>
-            <a:off x="5248656" y="5239512"/>
-            <a:ext cx="457200" cy="301752"/>
+            <a:off x="5248656" y="5629046"/>
+            <a:ext cx="457200" cy="283464"/>
           </a:xfrm>
           <a:prstGeom prst="rect">
             <a:avLst/>
@@ -14987,7 +16504,7 @@
               <a:buNone/>
             </a:pPr>
             <a:r>
-              <a:rPr lang="en-US" sz="950" dirty="0">
+              <a:rPr lang="en-US" sz="900" dirty="0">
                 <a:solidFill>
                   <a:srgbClr val="3A4750"/>
                 </a:solidFill>
@@ -14995,26 +16512,234 @@
                 <a:ea typeface="Calibri" pitchFamily="34" charset="-122"/>
                 <a:cs typeface="Calibri" pitchFamily="34" charset="-120"/>
               </a:rPr>
-              <a:t>1.707</a:t>
+              <a:t>1.679</a:t>
             </a:r>
-            <a:endParaRPr lang="en-US" sz="950" dirty="0"/>
+            <a:endParaRPr lang="en-US" sz="900" dirty="0"/>
           </a:p>
         </p:txBody>
       </p:sp>
       <p:sp>
         <p:nvSpPr>
-          <p:cNvPr id="71" name="Shape 69"/>
+          <p:cNvPr id="83" name="Shape 81"/>
           <p:cNvSpPr/>
           <p:nvPr/>
         </p:nvSpPr>
         <p:spPr>
           <a:xfrm>
-            <a:off x="566928" y="5582412"/>
-            <a:ext cx="5221224" cy="301752"/>
+            <a:off x="6400800" y="1810512"/>
+            <a:ext cx="5221224" cy="283464"/>
           </a:xfrm>
           <a:prstGeom prst="roundRect">
             <a:avLst>
-              <a:gd name="adj" fmla="val 15152"/>
+              <a:gd name="adj" fmla="val 16129"/>
+            </a:avLst>
+          </a:prstGeom>
+          <a:solidFill>
+            <a:srgbClr val="EEF1F3"/>
+          </a:solidFill>
+          <a:ln w="7620">
+            <a:solidFill>
+              <a:srgbClr val="D7DDE2"/>
+            </a:solidFill>
+            <a:prstDash val="solid"/>
+          </a:ln>
+        </p:spPr>
+      </p:sp>
+      <p:sp>
+        <p:nvSpPr>
+          <p:cNvPr id="84" name="Text 82"/>
+          <p:cNvSpPr txBox="1"/>
+          <p:nvPr/>
+        </p:nvSpPr>
+        <p:spPr>
+          <a:xfrm>
+            <a:off x="6492240" y="1810512"/>
+            <a:ext cx="329184" cy="283464"/>
+          </a:xfrm>
+          <a:prstGeom prst="rect">
+            <a:avLst/>
+          </a:prstGeom>
+          <a:noFill/>
+          <a:ln/>
+        </p:spPr>
+        <p:txBody>
+          <a:bodyPr wrap="square" lIns="0" tIns="0" rIns="0" bIns="0" rtlCol="0" anchor="ctr"/>
+          <a:lstStyle/>
+          <a:p>
+            <a:pPr algn="r" indent="0" marL="0">
+              <a:buNone/>
+            </a:pPr>
+            <a:r>
+              <a:rPr lang="en-US" sz="900" dirty="0">
+                <a:solidFill>
+                  <a:srgbClr val="93A1AA"/>
+                </a:solidFill>
+                <a:latin typeface="Calibri" pitchFamily="34" charset="0"/>
+                <a:ea typeface="Calibri" pitchFamily="34" charset="-122"/>
+                <a:cs typeface="Calibri" pitchFamily="34" charset="-120"/>
+              </a:rPr>
+              <a:t>14</a:t>
+            </a:r>
+            <a:endParaRPr lang="en-US" sz="900" dirty="0"/>
+          </a:p>
+        </p:txBody>
+      </p:sp>
+      <p:sp>
+        <p:nvSpPr>
+          <p:cNvPr id="85" name="Text 83"/>
+          <p:cNvSpPr txBox="1"/>
+          <p:nvPr/>
+        </p:nvSpPr>
+        <p:spPr>
+          <a:xfrm>
+            <a:off x="6876288" y="1810512"/>
+            <a:ext cx="2487168" cy="283464"/>
+          </a:xfrm>
+          <a:prstGeom prst="rect">
+            <a:avLst/>
+          </a:prstGeom>
+          <a:noFill/>
+          <a:ln/>
+        </p:spPr>
+        <p:txBody>
+          <a:bodyPr wrap="square" lIns="0" tIns="0" rIns="0" bIns="0" rtlCol="0" anchor="ctr"/>
+          <a:lstStyle/>
+          <a:p>
+            <a:pPr indent="0" marL="0">
+              <a:buNone/>
+            </a:pPr>
+            <a:r>
+              <a:rPr lang="en-US" sz="900" dirty="0">
+                <a:solidFill>
+                  <a:srgbClr val="93A1AA"/>
+                </a:solidFill>
+                <a:latin typeface="Calibri" pitchFamily="34" charset="0"/>
+                <a:ea typeface="Calibri" pitchFamily="34" charset="-122"/>
+                <a:cs typeface="Calibri" pitchFamily="34" charset="-120"/>
+              </a:rPr>
+              <a:t>gpt-5.4</a:t>
+            </a:r>
+            <a:endParaRPr lang="en-US" sz="900" dirty="0"/>
+          </a:p>
+        </p:txBody>
+      </p:sp>
+      <p:sp>
+        <p:nvSpPr>
+          <p:cNvPr id="86" name="Text 84"/>
+          <p:cNvSpPr txBox="1"/>
+          <p:nvPr/>
+        </p:nvSpPr>
+        <p:spPr>
+          <a:xfrm>
+            <a:off x="9400032" y="1810512"/>
+            <a:ext cx="786384" cy="283464"/>
+          </a:xfrm>
+          <a:prstGeom prst="rect">
+            <a:avLst/>
+          </a:prstGeom>
+          <a:noFill/>
+          <a:ln/>
+        </p:spPr>
+        <p:txBody>
+          <a:bodyPr wrap="square" lIns="0" tIns="0" rIns="0" bIns="0" rtlCol="0" anchor="ctr"/>
+          <a:lstStyle/>
+          <a:p>
+            <a:pPr indent="0" marL="0">
+              <a:buNone/>
+            </a:pPr>
+            <a:r>
+              <a:rPr lang="en-US" sz="700" dirty="0">
+                <a:solidFill>
+                  <a:srgbClr val="93A1AA"/>
+                </a:solidFill>
+                <a:latin typeface="Calibri" pitchFamily="34" charset="0"/>
+                <a:ea typeface="Calibri" pitchFamily="34" charset="-122"/>
+                <a:cs typeface="Calibri" pitchFamily="34" charset="-120"/>
+              </a:rPr>
+              <a:t>AlgoTuner</a:t>
+            </a:r>
+            <a:endParaRPr lang="en-US" sz="700" dirty="0"/>
+          </a:p>
+        </p:txBody>
+      </p:sp>
+      <p:sp>
+        <p:nvSpPr>
+          <p:cNvPr id="87" name="Shape 85"/>
+          <p:cNvSpPr/>
+          <p:nvPr/>
+        </p:nvSpPr>
+        <p:spPr>
+          <a:xfrm>
+            <a:off x="10222992" y="1906524"/>
+            <a:ext cx="538055" cy="91440"/>
+          </a:xfrm>
+          <a:prstGeom prst="rect">
+            <a:avLst/>
+          </a:prstGeom>
+          <a:solidFill>
+            <a:srgbClr val="93A1AA"/>
+          </a:solidFill>
+          <a:ln w="12700">
+            <a:solidFill>
+              <a:srgbClr val="333333"/>
+            </a:solidFill>
+            <a:prstDash val="solid"/>
+          </a:ln>
+        </p:spPr>
+      </p:sp>
+      <p:sp>
+        <p:nvSpPr>
+          <p:cNvPr id="88" name="Text 86"/>
+          <p:cNvSpPr txBox="1"/>
+          <p:nvPr/>
+        </p:nvSpPr>
+        <p:spPr>
+          <a:xfrm>
+            <a:off x="11082528" y="1810512"/>
+            <a:ext cx="457200" cy="283464"/>
+          </a:xfrm>
+          <a:prstGeom prst="rect">
+            <a:avLst/>
+          </a:prstGeom>
+          <a:noFill/>
+          <a:ln/>
+        </p:spPr>
+        <p:txBody>
+          <a:bodyPr wrap="square" lIns="0" tIns="0" rIns="0" bIns="0" rtlCol="0" anchor="ctr"/>
+          <a:lstStyle/>
+          <a:p>
+            <a:pPr algn="r" indent="0" marL="0">
+              <a:buNone/>
+            </a:pPr>
+            <a:r>
+              <a:rPr lang="en-US" sz="900" dirty="0">
+                <a:solidFill>
+                  <a:srgbClr val="3A4750"/>
+                </a:solidFill>
+                <a:latin typeface="Calibri" pitchFamily="34" charset="0"/>
+                <a:ea typeface="Calibri" pitchFamily="34" charset="-122"/>
+                <a:cs typeface="Calibri" pitchFamily="34" charset="-120"/>
+              </a:rPr>
+              <a:t>1.567</a:t>
+            </a:r>
+            <a:endParaRPr lang="en-US" sz="900" dirty="0"/>
+          </a:p>
+        </p:txBody>
+      </p:sp>
+      <p:sp>
+        <p:nvSpPr>
+          <p:cNvPr id="89" name="Shape 87"/>
+          <p:cNvSpPr/>
+          <p:nvPr/>
+        </p:nvSpPr>
+        <p:spPr>
+          <a:xfrm>
+            <a:off x="6400800" y="2128723"/>
+            <a:ext cx="5221224" cy="283464"/>
+          </a:xfrm>
+          <a:prstGeom prst="roundRect">
+            <a:avLst>
+              <a:gd name="adj" fmla="val 16129"/>
             </a:avLst>
           </a:prstGeom>
           <a:solidFill>
@@ -15030,14 +16755,14 @@
       </p:sp>
       <p:sp>
         <p:nvSpPr>
-          <p:cNvPr id="72" name="Text 70"/>
+          <p:cNvPr id="90" name="Text 88"/>
           <p:cNvSpPr txBox="1"/>
           <p:nvPr/>
         </p:nvSpPr>
         <p:spPr>
           <a:xfrm>
-            <a:off x="658368" y="5582412"/>
-            <a:ext cx="329184" cy="301752"/>
+            <a:off x="6492240" y="2128723"/>
+            <a:ext cx="329184" cy="283464"/>
           </a:xfrm>
           <a:prstGeom prst="rect">
             <a:avLst/>
@@ -15053,7 +16778,7 @@
               <a:buNone/>
             </a:pPr>
             <a:r>
-              <a:rPr lang="en-US" sz="950" dirty="0">
+              <a:rPr lang="en-US" sz="900" dirty="0">
                 <a:solidFill>
                   <a:srgbClr val="93A1AA"/>
                 </a:solidFill>
@@ -15061,22 +16786,22 @@
                 <a:ea typeface="Calibri" pitchFamily="34" charset="-122"/>
                 <a:cs typeface="Calibri" pitchFamily="34" charset="-120"/>
               </a:rPr>
-              <a:t>12</a:t>
+              <a:t>15</a:t>
             </a:r>
-            <a:endParaRPr lang="en-US" sz="950" dirty="0"/>
+            <a:endParaRPr lang="en-US" sz="900" dirty="0"/>
           </a:p>
         </p:txBody>
       </p:sp>
       <p:sp>
         <p:nvSpPr>
-          <p:cNvPr id="73" name="Text 71"/>
+          <p:cNvPr id="91" name="Text 89"/>
           <p:cNvSpPr txBox="1"/>
           <p:nvPr/>
         </p:nvSpPr>
         <p:spPr>
           <a:xfrm>
-            <a:off x="1078992" y="5582412"/>
-            <a:ext cx="2395728" cy="301752"/>
+            <a:off x="6876288" y="2128723"/>
+            <a:ext cx="2487168" cy="283464"/>
           </a:xfrm>
           <a:prstGeom prst="rect">
             <a:avLst/>
@@ -15092,7 +16817,7 @@
               <a:buNone/>
             </a:pPr>
             <a:r>
-              <a:rPr lang="en-US" sz="1000" dirty="0">
+              <a:rPr lang="en-US" sz="900" dirty="0">
                 <a:solidFill>
                   <a:srgbClr val="93A1AA"/>
                 </a:solidFill>
@@ -15100,22 +16825,22 @@
                 <a:ea typeface="Calibri" pitchFamily="34" charset="-122"/>
                 <a:cs typeface="Calibri" pitchFamily="34" charset="-120"/>
               </a:rPr>
-              <a:t>deepseek-reasoner</a:t>
+              <a:t>claude-opus-4-20250514</a:t>
             </a:r>
-            <a:endParaRPr lang="en-US" sz="1000" dirty="0"/>
+            <a:endParaRPr lang="en-US" sz="900" dirty="0"/>
           </a:p>
         </p:txBody>
       </p:sp>
       <p:sp>
         <p:nvSpPr>
-          <p:cNvPr id="74" name="Text 72"/>
+          <p:cNvPr id="92" name="Text 90"/>
           <p:cNvSpPr txBox="1"/>
           <p:nvPr/>
         </p:nvSpPr>
         <p:spPr>
           <a:xfrm>
-            <a:off x="3493008" y="5582412"/>
-            <a:ext cx="841248" cy="301752"/>
+            <a:off x="9400032" y="2128723"/>
+            <a:ext cx="786384" cy="283464"/>
           </a:xfrm>
           <a:prstGeom prst="rect">
             <a:avLst/>
@@ -15131,7 +16856,7 @@
               <a:buNone/>
             </a:pPr>
             <a:r>
-              <a:rPr lang="en-US" sz="750" dirty="0">
+              <a:rPr lang="en-US" sz="700" dirty="0">
                 <a:solidFill>
                   <a:srgbClr val="93A1AA"/>
                 </a:solidFill>
@@ -15141,20 +16866,20 @@
               </a:rPr>
               <a:t>AlgoTuner</a:t>
             </a:r>
-            <a:endParaRPr lang="en-US" sz="750" dirty="0"/>
+            <a:endParaRPr lang="en-US" sz="700" dirty="0"/>
           </a:p>
         </p:txBody>
       </p:sp>
       <p:sp>
         <p:nvSpPr>
-          <p:cNvPr id="75" name="Shape 73"/>
+          <p:cNvPr id="93" name="Shape 91"/>
           <p:cNvSpPr/>
           <p:nvPr/>
         </p:nvSpPr>
         <p:spPr>
           <a:xfrm>
-            <a:off x="4389120" y="5687568"/>
-            <a:ext cx="576512" cy="91440"/>
+            <a:off x="10222992" y="2224735"/>
+            <a:ext cx="514020" cy="91440"/>
           </a:xfrm>
           <a:prstGeom prst="rect">
             <a:avLst/>
@@ -15172,14 +16897,14 @@
       </p:sp>
       <p:sp>
         <p:nvSpPr>
-          <p:cNvPr id="76" name="Text 74"/>
+          <p:cNvPr id="94" name="Text 92"/>
           <p:cNvSpPr txBox="1"/>
           <p:nvPr/>
         </p:nvSpPr>
         <p:spPr>
           <a:xfrm>
-            <a:off x="5248656" y="5582412"/>
-            <a:ext cx="457200" cy="301752"/>
+            <a:off x="11082528" y="2128723"/>
+            <a:ext cx="457200" cy="283464"/>
           </a:xfrm>
           <a:prstGeom prst="rect">
             <a:avLst/>
@@ -15195,7 +16920,7 @@
               <a:buNone/>
             </a:pPr>
             <a:r>
-              <a:rPr lang="en-US" sz="950" dirty="0">
+              <a:rPr lang="en-US" sz="900" dirty="0">
                 <a:solidFill>
                   <a:srgbClr val="3A4750"/>
                 </a:solidFill>
@@ -15203,26 +16928,26 @@
                 <a:ea typeface="Calibri" pitchFamily="34" charset="-122"/>
                 <a:cs typeface="Calibri" pitchFamily="34" charset="-120"/>
               </a:rPr>
-              <a:t>1.679</a:t>
+              <a:t>1.497</a:t>
             </a:r>
-            <a:endParaRPr lang="en-US" sz="950" dirty="0"/>
+            <a:endParaRPr lang="en-US" sz="900" dirty="0"/>
           </a:p>
         </p:txBody>
       </p:sp>
       <p:sp>
         <p:nvSpPr>
-          <p:cNvPr id="77" name="Shape 75"/>
+          <p:cNvPr id="95" name="Shape 93"/>
           <p:cNvSpPr/>
           <p:nvPr/>
         </p:nvSpPr>
         <p:spPr>
           <a:xfrm>
-            <a:off x="6400800" y="1810512"/>
-            <a:ext cx="5221224" cy="301752"/>
+            <a:off x="6400800" y="2446934"/>
+            <a:ext cx="5221224" cy="283464"/>
           </a:xfrm>
           <a:prstGeom prst="roundRect">
             <a:avLst>
-              <a:gd name="adj" fmla="val 15152"/>
+              <a:gd name="adj" fmla="val 16129"/>
             </a:avLst>
           </a:prstGeom>
           <a:solidFill>
@@ -15238,14 +16963,14 @@
       </p:sp>
       <p:sp>
         <p:nvSpPr>
-          <p:cNvPr id="78" name="Text 76"/>
+          <p:cNvPr id="96" name="Text 94"/>
           <p:cNvSpPr txBox="1"/>
           <p:nvPr/>
         </p:nvSpPr>
         <p:spPr>
           <a:xfrm>
-            <a:off x="6492240" y="1810512"/>
-            <a:ext cx="329184" cy="301752"/>
+            <a:off x="6492240" y="2446934"/>
+            <a:ext cx="329184" cy="283464"/>
           </a:xfrm>
           <a:prstGeom prst="rect">
             <a:avLst/>
@@ -15261,7 +16986,7 @@
               <a:buNone/>
             </a:pPr>
             <a:r>
-              <a:rPr lang="en-US" sz="950" dirty="0">
+              <a:rPr lang="en-US" sz="900" dirty="0">
                 <a:solidFill>
                   <a:srgbClr val="93A1AA"/>
                 </a:solidFill>
@@ -15269,22 +16994,22 @@
                 <a:ea typeface="Calibri" pitchFamily="34" charset="-122"/>
                 <a:cs typeface="Calibri" pitchFamily="34" charset="-120"/>
               </a:rPr>
-              <a:t>13</a:t>
+              <a:t>16</a:t>
             </a:r>
-            <a:endParaRPr lang="en-US" sz="950" dirty="0"/>
+            <a:endParaRPr lang="en-US" sz="900" dirty="0"/>
           </a:p>
         </p:txBody>
       </p:sp>
       <p:sp>
         <p:nvSpPr>
-          <p:cNvPr id="79" name="Text 77"/>
+          <p:cNvPr id="97" name="Text 95"/>
           <p:cNvSpPr txBox="1"/>
           <p:nvPr/>
         </p:nvSpPr>
         <p:spPr>
           <a:xfrm>
-            <a:off x="6912864" y="1810512"/>
-            <a:ext cx="2395728" cy="301752"/>
+            <a:off x="6876288" y="2446934"/>
+            <a:ext cx="2487168" cy="283464"/>
           </a:xfrm>
           <a:prstGeom prst="rect">
             <a:avLst/>
@@ -15300,7 +17025,7 @@
               <a:buNone/>
             </a:pPr>
             <a:r>
-              <a:rPr lang="en-US" sz="1000" dirty="0">
+              <a:rPr lang="en-US" sz="900" dirty="0">
                 <a:solidFill>
                   <a:srgbClr val="93A1AA"/>
                 </a:solidFill>
@@ -15308,22 +17033,22 @@
                 <a:ea typeface="Calibri" pitchFamily="34" charset="-122"/>
                 <a:cs typeface="Calibri" pitchFamily="34" charset="-120"/>
               </a:rPr>
-              <a:t>gpt-5.4</a:t>
+              <a:t>gemini-3-pro-preview</a:t>
             </a:r>
-            <a:endParaRPr lang="en-US" sz="1000" dirty="0"/>
+            <a:endParaRPr lang="en-US" sz="900" dirty="0"/>
           </a:p>
         </p:txBody>
       </p:sp>
       <p:sp>
         <p:nvSpPr>
-          <p:cNvPr id="80" name="Text 78"/>
+          <p:cNvPr id="98" name="Text 96"/>
           <p:cNvSpPr txBox="1"/>
           <p:nvPr/>
         </p:nvSpPr>
         <p:spPr>
           <a:xfrm>
-            <a:off x="9326880" y="1810512"/>
-            <a:ext cx="841248" cy="301752"/>
+            <a:off x="9400032" y="2446934"/>
+            <a:ext cx="786384" cy="283464"/>
           </a:xfrm>
           <a:prstGeom prst="rect">
             <a:avLst/>
@@ -15339,7 +17064,7 @@
               <a:buNone/>
             </a:pPr>
             <a:r>
-              <a:rPr lang="en-US" sz="750" dirty="0">
+              <a:rPr lang="en-US" sz="700" dirty="0">
                 <a:solidFill>
                   <a:srgbClr val="93A1AA"/>
                 </a:solidFill>
@@ -15349,20 +17074,20 @@
               </a:rPr>
               <a:t>AlgoTuner</a:t>
             </a:r>
-            <a:endParaRPr lang="en-US" sz="750" dirty="0"/>
+            <a:endParaRPr lang="en-US" sz="700" dirty="0"/>
           </a:p>
         </p:txBody>
       </p:sp>
       <p:sp>
         <p:nvSpPr>
-          <p:cNvPr id="81" name="Shape 79"/>
+          <p:cNvPr id="99" name="Shape 97"/>
           <p:cNvSpPr/>
           <p:nvPr/>
         </p:nvSpPr>
         <p:spPr>
           <a:xfrm>
-            <a:off x="10222992" y="1915668"/>
-            <a:ext cx="538055" cy="91440"/>
+            <a:off x="10222992" y="2542946"/>
+            <a:ext cx="509213" cy="91440"/>
           </a:xfrm>
           <a:prstGeom prst="rect">
             <a:avLst/>
@@ -15380,14 +17105,14 @@
       </p:sp>
       <p:sp>
         <p:nvSpPr>
-          <p:cNvPr id="82" name="Text 80"/>
+          <p:cNvPr id="100" name="Text 98"/>
           <p:cNvSpPr txBox="1"/>
           <p:nvPr/>
         </p:nvSpPr>
         <p:spPr>
           <a:xfrm>
-            <a:off x="11082528" y="1810512"/>
-            <a:ext cx="457200" cy="301752"/>
+            <a:off x="11082528" y="2446934"/>
+            <a:ext cx="457200" cy="283464"/>
           </a:xfrm>
           <a:prstGeom prst="rect">
             <a:avLst/>
@@ -15403,7 +17128,7 @@
               <a:buNone/>
             </a:pPr>
             <a:r>
-              <a:rPr lang="en-US" sz="950" dirty="0">
+              <a:rPr lang="en-US" sz="900" dirty="0">
                 <a:solidFill>
                   <a:srgbClr val="3A4750"/>
                 </a:solidFill>
@@ -15411,26 +17136,26 @@
                 <a:ea typeface="Calibri" pitchFamily="34" charset="-122"/>
                 <a:cs typeface="Calibri" pitchFamily="34" charset="-120"/>
               </a:rPr>
-              <a:t>1.567</a:t>
+              <a:t>1.483</a:t>
             </a:r>
-            <a:endParaRPr lang="en-US" sz="950" dirty="0"/>
+            <a:endParaRPr lang="en-US" sz="900" dirty="0"/>
           </a:p>
         </p:txBody>
       </p:sp>
       <p:sp>
         <p:nvSpPr>
-          <p:cNvPr id="83" name="Shape 81"/>
+          <p:cNvPr id="101" name="Shape 99"/>
           <p:cNvSpPr/>
           <p:nvPr/>
         </p:nvSpPr>
         <p:spPr>
           <a:xfrm>
-            <a:off x="6400800" y="2153412"/>
-            <a:ext cx="5221224" cy="301752"/>
+            <a:off x="6400800" y="2765146"/>
+            <a:ext cx="5221224" cy="283464"/>
           </a:xfrm>
           <a:prstGeom prst="roundRect">
             <a:avLst>
-              <a:gd name="adj" fmla="val 15152"/>
+              <a:gd name="adj" fmla="val 16129"/>
             </a:avLst>
           </a:prstGeom>
           <a:solidFill>
@@ -15446,14 +17171,14 @@
       </p:sp>
       <p:sp>
         <p:nvSpPr>
-          <p:cNvPr id="84" name="Text 82"/>
+          <p:cNvPr id="102" name="Text 100"/>
           <p:cNvSpPr txBox="1"/>
           <p:nvPr/>
         </p:nvSpPr>
         <p:spPr>
           <a:xfrm>
-            <a:off x="6492240" y="2153412"/>
-            <a:ext cx="329184" cy="301752"/>
+            <a:off x="6492240" y="2765146"/>
+            <a:ext cx="329184" cy="283464"/>
           </a:xfrm>
           <a:prstGeom prst="rect">
             <a:avLst/>
@@ -15469,7 +17194,7 @@
               <a:buNone/>
             </a:pPr>
             <a:r>
-              <a:rPr lang="en-US" sz="950" dirty="0">
+              <a:rPr lang="en-US" sz="900" dirty="0">
                 <a:solidFill>
                   <a:srgbClr val="93A1AA"/>
                 </a:solidFill>
@@ -15477,22 +17202,22 @@
                 <a:ea typeface="Calibri" pitchFamily="34" charset="-122"/>
                 <a:cs typeface="Calibri" pitchFamily="34" charset="-120"/>
               </a:rPr>
-              <a:t>14</a:t>
+              <a:t>17</a:t>
             </a:r>
-            <a:endParaRPr lang="en-US" sz="950" dirty="0"/>
+            <a:endParaRPr lang="en-US" sz="900" dirty="0"/>
           </a:p>
         </p:txBody>
       </p:sp>
       <p:sp>
         <p:nvSpPr>
-          <p:cNvPr id="85" name="Text 83"/>
+          <p:cNvPr id="103" name="Text 101"/>
           <p:cNvSpPr txBox="1"/>
           <p:nvPr/>
         </p:nvSpPr>
         <p:spPr>
           <a:xfrm>
-            <a:off x="6912864" y="2153412"/>
-            <a:ext cx="2395728" cy="301752"/>
+            <a:off x="6876288" y="2765146"/>
+            <a:ext cx="2487168" cy="283464"/>
           </a:xfrm>
           <a:prstGeom prst="rect">
             <a:avLst/>
@@ -15508,7 +17233,7 @@
               <a:buNone/>
             </a:pPr>
             <a:r>
-              <a:rPr lang="en-US" sz="1000" dirty="0">
+              <a:rPr lang="en-US" sz="900" dirty="0">
                 <a:solidFill>
                   <a:srgbClr val="93A1AA"/>
                 </a:solidFill>
@@ -15516,22 +17241,22 @@
                 <a:ea typeface="Calibri" pitchFamily="34" charset="-122"/>
                 <a:cs typeface="Calibri" pitchFamily="34" charset="-120"/>
               </a:rPr>
-              <a:t>claude-opus-4-20250514</a:t>
+              <a:t>qwen3-coder</a:t>
             </a:r>
-            <a:endParaRPr lang="en-US" sz="1000" dirty="0"/>
+            <a:endParaRPr lang="en-US" sz="900" dirty="0"/>
           </a:p>
         </p:txBody>
       </p:sp>
       <p:sp>
         <p:nvSpPr>
-          <p:cNvPr id="86" name="Text 84"/>
+          <p:cNvPr id="104" name="Text 102"/>
           <p:cNvSpPr txBox="1"/>
           <p:nvPr/>
         </p:nvSpPr>
         <p:spPr>
           <a:xfrm>
-            <a:off x="9326880" y="2153412"/>
-            <a:ext cx="841248" cy="301752"/>
+            <a:off x="9400032" y="2765146"/>
+            <a:ext cx="786384" cy="283464"/>
           </a:xfrm>
           <a:prstGeom prst="rect">
             <a:avLst/>
@@ -15547,7 +17272,7 @@
               <a:buNone/>
             </a:pPr>
             <a:r>
-              <a:rPr lang="en-US" sz="750" dirty="0">
+              <a:rPr lang="en-US" sz="700" dirty="0">
                 <a:solidFill>
                   <a:srgbClr val="93A1AA"/>
                 </a:solidFill>
@@ -15557,20 +17282,20 @@
               </a:rPr>
               <a:t>AlgoTuner</a:t>
             </a:r>
-            <a:endParaRPr lang="en-US" sz="750" dirty="0"/>
+            <a:endParaRPr lang="en-US" sz="700" dirty="0"/>
           </a:p>
         </p:txBody>
       </p:sp>
       <p:sp>
         <p:nvSpPr>
-          <p:cNvPr id="87" name="Shape 85"/>
+          <p:cNvPr id="105" name="Shape 103"/>
           <p:cNvSpPr/>
           <p:nvPr/>
         </p:nvSpPr>
         <p:spPr>
           <a:xfrm>
-            <a:off x="10222992" y="2258568"/>
-            <a:ext cx="514020" cy="91440"/>
+            <a:off x="10222992" y="2861158"/>
+            <a:ext cx="481743" cy="91440"/>
           </a:xfrm>
           <a:prstGeom prst="rect">
             <a:avLst/>
@@ -15588,14 +17313,14 @@
       </p:sp>
       <p:sp>
         <p:nvSpPr>
-          <p:cNvPr id="88" name="Text 86"/>
+          <p:cNvPr id="106" name="Text 104"/>
           <p:cNvSpPr txBox="1"/>
           <p:nvPr/>
         </p:nvSpPr>
         <p:spPr>
           <a:xfrm>
-            <a:off x="11082528" y="2153412"/>
-            <a:ext cx="457200" cy="301752"/>
+            <a:off x="11082528" y="2765146"/>
+            <a:ext cx="457200" cy="283464"/>
           </a:xfrm>
           <a:prstGeom prst="rect">
             <a:avLst/>
@@ -15611,7 +17336,7 @@
               <a:buNone/>
             </a:pPr>
             <a:r>
-              <a:rPr lang="en-US" sz="950" dirty="0">
+              <a:rPr lang="en-US" sz="900" dirty="0">
                 <a:solidFill>
                   <a:srgbClr val="3A4750"/>
                 </a:solidFill>
@@ -15619,26 +17344,26 @@
                 <a:ea typeface="Calibri" pitchFamily="34" charset="-122"/>
                 <a:cs typeface="Calibri" pitchFamily="34" charset="-120"/>
               </a:rPr>
-              <a:t>1.497</a:t>
+              <a:t>1.403</a:t>
             </a:r>
-            <a:endParaRPr lang="en-US" sz="950" dirty="0"/>
+            <a:endParaRPr lang="en-US" sz="900" dirty="0"/>
           </a:p>
         </p:txBody>
       </p:sp>
       <p:sp>
         <p:nvSpPr>
-          <p:cNvPr id="89" name="Shape 87"/>
+          <p:cNvPr id="107" name="Shape 105"/>
           <p:cNvSpPr/>
           <p:nvPr/>
         </p:nvSpPr>
         <p:spPr>
           <a:xfrm>
-            <a:off x="6400800" y="2496312"/>
-            <a:ext cx="5221224" cy="301752"/>
+            <a:off x="6400800" y="3083357"/>
+            <a:ext cx="5221224" cy="283464"/>
           </a:xfrm>
           <a:prstGeom prst="roundRect">
             <a:avLst>
-              <a:gd name="adj" fmla="val 15152"/>
+              <a:gd name="adj" fmla="val 16129"/>
             </a:avLst>
           </a:prstGeom>
           <a:solidFill>
@@ -15654,14 +17379,14 @@
       </p:sp>
       <p:sp>
         <p:nvSpPr>
-          <p:cNvPr id="90" name="Text 88"/>
+          <p:cNvPr id="108" name="Text 106"/>
           <p:cNvSpPr txBox="1"/>
           <p:nvPr/>
         </p:nvSpPr>
         <p:spPr>
           <a:xfrm>
-            <a:off x="6492240" y="2496312"/>
-            <a:ext cx="329184" cy="301752"/>
+            <a:off x="6492240" y="3083357"/>
+            <a:ext cx="329184" cy="283464"/>
           </a:xfrm>
           <a:prstGeom prst="rect">
             <a:avLst/>
@@ -15677,7 +17402,7 @@
               <a:buNone/>
             </a:pPr>
             <a:r>
-              <a:rPr lang="en-US" sz="950" dirty="0">
+              <a:rPr lang="en-US" sz="900" dirty="0">
                 <a:solidFill>
                   <a:srgbClr val="93A1AA"/>
                 </a:solidFill>
@@ -15685,22 +17410,22 @@
                 <a:ea typeface="Calibri" pitchFamily="34" charset="-122"/>
                 <a:cs typeface="Calibri" pitchFamily="34" charset="-120"/>
               </a:rPr>
-              <a:t>15</a:t>
+              <a:t>18</a:t>
             </a:r>
-            <a:endParaRPr lang="en-US" sz="950" dirty="0"/>
+            <a:endParaRPr lang="en-US" sz="900" dirty="0"/>
           </a:p>
         </p:txBody>
       </p:sp>
       <p:sp>
         <p:nvSpPr>
-          <p:cNvPr id="91" name="Text 89"/>
+          <p:cNvPr id="109" name="Text 107"/>
           <p:cNvSpPr txBox="1"/>
           <p:nvPr/>
         </p:nvSpPr>
         <p:spPr>
           <a:xfrm>
-            <a:off x="6912864" y="2496312"/>
-            <a:ext cx="2395728" cy="301752"/>
+            <a:off x="6876288" y="3083357"/>
+            <a:ext cx="2487168" cy="283464"/>
           </a:xfrm>
           <a:prstGeom prst="rect">
             <a:avLst/>
@@ -15716,30 +17441,30 @@
               <a:buNone/>
             </a:pPr>
             <a:r>
-              <a:rPr lang="en-US" sz="1000" dirty="0">
+              <a:rPr lang="en-US" sz="900" dirty="0">
                 <a:solidFill>
-                  <a:srgbClr val="93A1AA"/>
+                  <a:srgbClr val="C2872B"/>
                 </a:solidFill>
                 <a:latin typeface="Calibri" pitchFamily="34" charset="0"/>
                 <a:ea typeface="Calibri" pitchFamily="34" charset="-122"/>
                 <a:cs typeface="Calibri" pitchFamily="34" charset="-120"/>
               </a:rPr>
-              <a:t>gemini-3-pro-preview</a:t>
+              <a:t>Qwen3-14B, no RL</a:t>
             </a:r>
-            <a:endParaRPr lang="en-US" sz="1000" dirty="0"/>
+            <a:endParaRPr lang="en-US" sz="900" dirty="0"/>
           </a:p>
         </p:txBody>
       </p:sp>
       <p:sp>
         <p:nvSpPr>
-          <p:cNvPr id="92" name="Text 90"/>
+          <p:cNvPr id="110" name="Text 108"/>
           <p:cNvSpPr txBox="1"/>
           <p:nvPr/>
         </p:nvSpPr>
         <p:spPr>
           <a:xfrm>
-            <a:off x="9326880" y="2496312"/>
-            <a:ext cx="841248" cy="301752"/>
+            <a:off x="9400032" y="3083357"/>
+            <a:ext cx="786384" cy="283464"/>
           </a:xfrm>
           <a:prstGeom prst="rect">
             <a:avLst/>
@@ -15755,7 +17480,423 @@
               <a:buNone/>
             </a:pPr>
             <a:r>
-              <a:rPr lang="en-US" sz="750" dirty="0">
+              <a:rPr lang="en-US" sz="700" dirty="0">
+                <a:solidFill>
+                  <a:srgbClr val="93A1AA"/>
+                </a:solidFill>
+                <a:latin typeface="Calibri" pitchFamily="34" charset="0"/>
+                <a:ea typeface="Calibri" pitchFamily="34" charset="-122"/>
+                <a:cs typeface="Calibri" pitchFamily="34" charset="-120"/>
+              </a:rPr>
+              <a:t>OpenEvolve</a:t>
+            </a:r>
+            <a:endParaRPr lang="en-US" sz="700" dirty="0"/>
+          </a:p>
+        </p:txBody>
+      </p:sp>
+      <p:sp>
+        <p:nvSpPr>
+          <p:cNvPr id="111" name="Shape 109"/>
+          <p:cNvSpPr/>
+          <p:nvPr/>
+        </p:nvSpPr>
+        <p:spPr>
+          <a:xfrm>
+            <a:off x="10222992" y="3179369"/>
+            <a:ext cx="477966" cy="91440"/>
+          </a:xfrm>
+          <a:prstGeom prst="rect">
+            <a:avLst/>
+          </a:prstGeom>
+          <a:solidFill>
+            <a:srgbClr val="C2872B"/>
+          </a:solidFill>
+          <a:ln w="12700">
+            <a:solidFill>
+              <a:srgbClr val="333333"/>
+            </a:solidFill>
+            <a:prstDash val="solid"/>
+          </a:ln>
+        </p:spPr>
+      </p:sp>
+      <p:sp>
+        <p:nvSpPr>
+          <p:cNvPr id="112" name="Text 110"/>
+          <p:cNvSpPr txBox="1"/>
+          <p:nvPr/>
+        </p:nvSpPr>
+        <p:spPr>
+          <a:xfrm>
+            <a:off x="11082528" y="3083357"/>
+            <a:ext cx="457200" cy="283464"/>
+          </a:xfrm>
+          <a:prstGeom prst="rect">
+            <a:avLst/>
+          </a:prstGeom>
+          <a:noFill/>
+          <a:ln/>
+        </p:spPr>
+        <p:txBody>
+          <a:bodyPr wrap="square" lIns="0" tIns="0" rIns="0" bIns="0" rtlCol="0" anchor="ctr"/>
+          <a:lstStyle/>
+          <a:p>
+            <a:pPr algn="r" indent="0" marL="0">
+              <a:buNone/>
+            </a:pPr>
+            <a:r>
+              <a:rPr lang="en-US" sz="900" dirty="0">
+                <a:solidFill>
+                  <a:srgbClr val="3A4750"/>
+                </a:solidFill>
+                <a:latin typeface="Calibri" pitchFamily="34" charset="0"/>
+                <a:ea typeface="Calibri" pitchFamily="34" charset="-122"/>
+                <a:cs typeface="Calibri" pitchFamily="34" charset="-120"/>
+              </a:rPr>
+              <a:t>1.392</a:t>
+            </a:r>
+            <a:endParaRPr lang="en-US" sz="900" dirty="0"/>
+          </a:p>
+        </p:txBody>
+      </p:sp>
+      <p:sp>
+        <p:nvSpPr>
+          <p:cNvPr id="113" name="Shape 111"/>
+          <p:cNvSpPr/>
+          <p:nvPr/>
+        </p:nvSpPr>
+        <p:spPr>
+          <a:xfrm>
+            <a:off x="6400800" y="3401568"/>
+            <a:ext cx="5221224" cy="283464"/>
+          </a:xfrm>
+          <a:prstGeom prst="roundRect">
+            <a:avLst>
+              <a:gd name="adj" fmla="val 16129"/>
+            </a:avLst>
+          </a:prstGeom>
+          <a:solidFill>
+            <a:srgbClr val="FFFFFF"/>
+          </a:solidFill>
+          <a:ln w="7620">
+            <a:solidFill>
+              <a:srgbClr val="D7DDE2"/>
+            </a:solidFill>
+            <a:prstDash val="solid"/>
+          </a:ln>
+        </p:spPr>
+      </p:sp>
+      <p:sp>
+        <p:nvSpPr>
+          <p:cNvPr id="114" name="Text 112"/>
+          <p:cNvSpPr txBox="1"/>
+          <p:nvPr/>
+        </p:nvSpPr>
+        <p:spPr>
+          <a:xfrm>
+            <a:off x="6492240" y="3401568"/>
+            <a:ext cx="329184" cy="283464"/>
+          </a:xfrm>
+          <a:prstGeom prst="rect">
+            <a:avLst/>
+          </a:prstGeom>
+          <a:noFill/>
+          <a:ln/>
+        </p:spPr>
+        <p:txBody>
+          <a:bodyPr wrap="square" lIns="0" tIns="0" rIns="0" bIns="0" rtlCol="0" anchor="ctr"/>
+          <a:lstStyle/>
+          <a:p>
+            <a:pPr algn="r" indent="0" marL="0">
+              <a:buNone/>
+            </a:pPr>
+            <a:r>
+              <a:rPr lang="en-US" sz="900" dirty="0">
+                <a:solidFill>
+                  <a:srgbClr val="93A1AA"/>
+                </a:solidFill>
+                <a:latin typeface="Calibri" pitchFamily="34" charset="0"/>
+                <a:ea typeface="Calibri" pitchFamily="34" charset="-122"/>
+                <a:cs typeface="Calibri" pitchFamily="34" charset="-120"/>
+              </a:rPr>
+              <a:t>19</a:t>
+            </a:r>
+            <a:endParaRPr lang="en-US" sz="900" dirty="0"/>
+          </a:p>
+        </p:txBody>
+      </p:sp>
+      <p:sp>
+        <p:nvSpPr>
+          <p:cNvPr id="115" name="Text 113"/>
+          <p:cNvSpPr txBox="1"/>
+          <p:nvPr/>
+        </p:nvSpPr>
+        <p:spPr>
+          <a:xfrm>
+            <a:off x="6876288" y="3401568"/>
+            <a:ext cx="2487168" cy="283464"/>
+          </a:xfrm>
+          <a:prstGeom prst="rect">
+            <a:avLst/>
+          </a:prstGeom>
+          <a:noFill/>
+          <a:ln/>
+        </p:spPr>
+        <p:txBody>
+          <a:bodyPr wrap="square" lIns="0" tIns="0" rIns="0" bIns="0" rtlCol="0" anchor="ctr"/>
+          <a:lstStyle/>
+          <a:p>
+            <a:pPr indent="0" marL="0">
+              <a:buNone/>
+            </a:pPr>
+            <a:r>
+              <a:rPr lang="en-US" sz="900" dirty="0">
+                <a:solidFill>
+                  <a:srgbClr val="C2872B"/>
+                </a:solidFill>
+                <a:latin typeface="Calibri" pitchFamily="34" charset="0"/>
+                <a:ea typeface="Calibri" pitchFamily="34" charset="-122"/>
+                <a:cs typeface="Calibri" pitchFamily="34" charset="-120"/>
+              </a:rPr>
+              <a:t>OpenEvolve — ph.1, library names</a:t>
+            </a:r>
+            <a:endParaRPr lang="en-US" sz="900" dirty="0"/>
+          </a:p>
+        </p:txBody>
+      </p:sp>
+      <p:sp>
+        <p:nvSpPr>
+          <p:cNvPr id="116" name="Text 114"/>
+          <p:cNvSpPr txBox="1"/>
+          <p:nvPr/>
+        </p:nvSpPr>
+        <p:spPr>
+          <a:xfrm>
+            <a:off x="9400032" y="3401568"/>
+            <a:ext cx="786384" cy="283464"/>
+          </a:xfrm>
+          <a:prstGeom prst="rect">
+            <a:avLst/>
+          </a:prstGeom>
+          <a:noFill/>
+          <a:ln/>
+        </p:spPr>
+        <p:txBody>
+          <a:bodyPr wrap="square" lIns="0" tIns="0" rIns="0" bIns="0" rtlCol="0" anchor="ctr"/>
+          <a:lstStyle/>
+          <a:p>
+            <a:pPr indent="0" marL="0">
+              <a:buNone/>
+            </a:pPr>
+            <a:r>
+              <a:rPr lang="en-US" sz="700" dirty="0">
+                <a:solidFill>
+                  <a:srgbClr val="93A1AA"/>
+                </a:solidFill>
+                <a:latin typeface="Calibri" pitchFamily="34" charset="0"/>
+                <a:ea typeface="Calibri" pitchFamily="34" charset="-122"/>
+                <a:cs typeface="Calibri" pitchFamily="34" charset="-120"/>
+              </a:rPr>
+              <a:t>OpenEvolve</a:t>
+            </a:r>
+            <a:endParaRPr lang="en-US" sz="700" dirty="0"/>
+          </a:p>
+        </p:txBody>
+      </p:sp>
+      <p:sp>
+        <p:nvSpPr>
+          <p:cNvPr id="117" name="Shape 115"/>
+          <p:cNvSpPr/>
+          <p:nvPr/>
+        </p:nvSpPr>
+        <p:spPr>
+          <a:xfrm>
+            <a:off x="10222992" y="3497580"/>
+            <a:ext cx="474189" cy="91440"/>
+          </a:xfrm>
+          <a:prstGeom prst="rect">
+            <a:avLst/>
+          </a:prstGeom>
+          <a:solidFill>
+            <a:srgbClr val="C2872B"/>
+          </a:solidFill>
+          <a:ln w="12700">
+            <a:solidFill>
+              <a:srgbClr val="333333"/>
+            </a:solidFill>
+            <a:prstDash val="solid"/>
+          </a:ln>
+        </p:spPr>
+      </p:sp>
+      <p:sp>
+        <p:nvSpPr>
+          <p:cNvPr id="118" name="Text 116"/>
+          <p:cNvSpPr txBox="1"/>
+          <p:nvPr/>
+        </p:nvSpPr>
+        <p:spPr>
+          <a:xfrm>
+            <a:off x="11082528" y="3401568"/>
+            <a:ext cx="457200" cy="283464"/>
+          </a:xfrm>
+          <a:prstGeom prst="rect">
+            <a:avLst/>
+          </a:prstGeom>
+          <a:noFill/>
+          <a:ln/>
+        </p:spPr>
+        <p:txBody>
+          <a:bodyPr wrap="square" lIns="0" tIns="0" rIns="0" bIns="0" rtlCol="0" anchor="ctr"/>
+          <a:lstStyle/>
+          <a:p>
+            <a:pPr algn="r" indent="0" marL="0">
+              <a:buNone/>
+            </a:pPr>
+            <a:r>
+              <a:rPr lang="en-US" sz="900" dirty="0">
+                <a:solidFill>
+                  <a:srgbClr val="3A4750"/>
+                </a:solidFill>
+                <a:latin typeface="Calibri" pitchFamily="34" charset="0"/>
+                <a:ea typeface="Calibri" pitchFamily="34" charset="-122"/>
+                <a:cs typeface="Calibri" pitchFamily="34" charset="-120"/>
+              </a:rPr>
+              <a:t>1.381</a:t>
+            </a:r>
+            <a:endParaRPr lang="en-US" sz="900" dirty="0"/>
+          </a:p>
+        </p:txBody>
+      </p:sp>
+      <p:sp>
+        <p:nvSpPr>
+          <p:cNvPr id="119" name="Shape 117"/>
+          <p:cNvSpPr/>
+          <p:nvPr/>
+        </p:nvSpPr>
+        <p:spPr>
+          <a:xfrm>
+            <a:off x="6400800" y="3719779"/>
+            <a:ext cx="5221224" cy="283464"/>
+          </a:xfrm>
+          <a:prstGeom prst="roundRect">
+            <a:avLst>
+              <a:gd name="adj" fmla="val 16129"/>
+            </a:avLst>
+          </a:prstGeom>
+          <a:solidFill>
+            <a:srgbClr val="EEF1F3"/>
+          </a:solidFill>
+          <a:ln w="7620">
+            <a:solidFill>
+              <a:srgbClr val="D7DDE2"/>
+            </a:solidFill>
+            <a:prstDash val="solid"/>
+          </a:ln>
+        </p:spPr>
+      </p:sp>
+      <p:sp>
+        <p:nvSpPr>
+          <p:cNvPr id="120" name="Text 118"/>
+          <p:cNvSpPr txBox="1"/>
+          <p:nvPr/>
+        </p:nvSpPr>
+        <p:spPr>
+          <a:xfrm>
+            <a:off x="6492240" y="3719779"/>
+            <a:ext cx="329184" cy="283464"/>
+          </a:xfrm>
+          <a:prstGeom prst="rect">
+            <a:avLst/>
+          </a:prstGeom>
+          <a:noFill/>
+          <a:ln/>
+        </p:spPr>
+        <p:txBody>
+          <a:bodyPr wrap="square" lIns="0" tIns="0" rIns="0" bIns="0" rtlCol="0" anchor="ctr"/>
+          <a:lstStyle/>
+          <a:p>
+            <a:pPr algn="r" indent="0" marL="0">
+              <a:buNone/>
+            </a:pPr>
+            <a:r>
+              <a:rPr lang="en-US" sz="900" dirty="0">
+                <a:solidFill>
+                  <a:srgbClr val="93A1AA"/>
+                </a:solidFill>
+                <a:latin typeface="Calibri" pitchFamily="34" charset="0"/>
+                <a:ea typeface="Calibri" pitchFamily="34" charset="-122"/>
+                <a:cs typeface="Calibri" pitchFamily="34" charset="-120"/>
+              </a:rPr>
+              <a:t>20</a:t>
+            </a:r>
+            <a:endParaRPr lang="en-US" sz="900" dirty="0"/>
+          </a:p>
+        </p:txBody>
+      </p:sp>
+      <p:sp>
+        <p:nvSpPr>
+          <p:cNvPr id="121" name="Text 119"/>
+          <p:cNvSpPr txBox="1"/>
+          <p:nvPr/>
+        </p:nvSpPr>
+        <p:spPr>
+          <a:xfrm>
+            <a:off x="6876288" y="3719779"/>
+            <a:ext cx="2487168" cy="283464"/>
+          </a:xfrm>
+          <a:prstGeom prst="rect">
+            <a:avLst/>
+          </a:prstGeom>
+          <a:noFill/>
+          <a:ln/>
+        </p:spPr>
+        <p:txBody>
+          <a:bodyPr wrap="square" lIns="0" tIns="0" rIns="0" bIns="0" rtlCol="0" anchor="ctr"/>
+          <a:lstStyle/>
+          <a:p>
+            <a:pPr indent="0" marL="0">
+              <a:buNone/>
+            </a:pPr>
+            <a:r>
+              <a:rPr lang="en-US" sz="900" dirty="0">
+                <a:solidFill>
+                  <a:srgbClr val="93A1AA"/>
+                </a:solidFill>
+                <a:latin typeface="Calibri" pitchFamily="34" charset="0"/>
+                <a:ea typeface="Calibri" pitchFamily="34" charset="-122"/>
+                <a:cs typeface="Calibri" pitchFamily="34" charset="-120"/>
+              </a:rPr>
+              <a:t>gemini-2.5-pro</a:t>
+            </a:r>
+            <a:endParaRPr lang="en-US" sz="900" dirty="0"/>
+          </a:p>
+        </p:txBody>
+      </p:sp>
+      <p:sp>
+        <p:nvSpPr>
+          <p:cNvPr id="122" name="Text 120"/>
+          <p:cNvSpPr txBox="1"/>
+          <p:nvPr/>
+        </p:nvSpPr>
+        <p:spPr>
+          <a:xfrm>
+            <a:off x="9400032" y="3719779"/>
+            <a:ext cx="786384" cy="283464"/>
+          </a:xfrm>
+          <a:prstGeom prst="rect">
+            <a:avLst/>
+          </a:prstGeom>
+          <a:noFill/>
+          <a:ln/>
+        </p:spPr>
+        <p:txBody>
+          <a:bodyPr wrap="square" lIns="0" tIns="0" rIns="0" bIns="0" rtlCol="0" anchor="ctr"/>
+          <a:lstStyle/>
+          <a:p>
+            <a:pPr indent="0" marL="0">
+              <a:buNone/>
+            </a:pPr>
+            <a:r>
+              <a:rPr lang="en-US" sz="700" dirty="0">
                 <a:solidFill>
                   <a:srgbClr val="93A1AA"/>
                 </a:solidFill>
@@ -15765,20 +17906,20 @@
               </a:rPr>
               <a:t>AlgoTuner</a:t>
             </a:r>
-            <a:endParaRPr lang="en-US" sz="750" dirty="0"/>
+            <a:endParaRPr lang="en-US" sz="700" dirty="0"/>
           </a:p>
         </p:txBody>
       </p:sp>
       <p:sp>
         <p:nvSpPr>
-          <p:cNvPr id="93" name="Shape 91"/>
+          <p:cNvPr id="123" name="Shape 121"/>
           <p:cNvSpPr/>
           <p:nvPr/>
         </p:nvSpPr>
         <p:spPr>
           <a:xfrm>
-            <a:off x="10222992" y="2601468"/>
-            <a:ext cx="509213" cy="91440"/>
+            <a:off x="10222992" y="3815791"/>
+            <a:ext cx="471786" cy="91440"/>
           </a:xfrm>
           <a:prstGeom prst="rect">
             <a:avLst/>
@@ -15796,14 +17937,14 @@
       </p:sp>
       <p:sp>
         <p:nvSpPr>
-          <p:cNvPr id="94" name="Text 92"/>
+          <p:cNvPr id="124" name="Text 122"/>
           <p:cNvSpPr txBox="1"/>
           <p:nvPr/>
         </p:nvSpPr>
         <p:spPr>
           <a:xfrm>
-            <a:off x="11082528" y="2496312"/>
-            <a:ext cx="457200" cy="301752"/>
+            <a:off x="11082528" y="3719779"/>
+            <a:ext cx="457200" cy="283464"/>
           </a:xfrm>
           <a:prstGeom prst="rect">
             <a:avLst/>
@@ -15819,7 +17960,7 @@
               <a:buNone/>
             </a:pPr>
             <a:r>
-              <a:rPr lang="en-US" sz="950" dirty="0">
+              <a:rPr lang="en-US" sz="900" dirty="0">
                 <a:solidFill>
                   <a:srgbClr val="3A4750"/>
                 </a:solidFill>
@@ -15827,26 +17968,26 @@
                 <a:ea typeface="Calibri" pitchFamily="34" charset="-122"/>
                 <a:cs typeface="Calibri" pitchFamily="34" charset="-120"/>
               </a:rPr>
-              <a:t>1.483</a:t>
+              <a:t>1.374</a:t>
             </a:r>
-            <a:endParaRPr lang="en-US" sz="950" dirty="0"/>
+            <a:endParaRPr lang="en-US" sz="900" dirty="0"/>
           </a:p>
         </p:txBody>
       </p:sp>
       <p:sp>
         <p:nvSpPr>
-          <p:cNvPr id="95" name="Shape 93"/>
+          <p:cNvPr id="125" name="Shape 123"/>
           <p:cNvSpPr/>
           <p:nvPr/>
         </p:nvSpPr>
         <p:spPr>
           <a:xfrm>
-            <a:off x="6400800" y="2839212"/>
-            <a:ext cx="5221224" cy="301752"/>
+            <a:off x="6400800" y="4037990"/>
+            <a:ext cx="5221224" cy="283464"/>
           </a:xfrm>
           <a:prstGeom prst="roundRect">
             <a:avLst>
-              <a:gd name="adj" fmla="val 15152"/>
+              <a:gd name="adj" fmla="val 16129"/>
             </a:avLst>
           </a:prstGeom>
           <a:solidFill>
@@ -15862,14 +18003,14 @@
       </p:sp>
       <p:sp>
         <p:nvSpPr>
-          <p:cNvPr id="96" name="Text 94"/>
+          <p:cNvPr id="126" name="Text 124"/>
           <p:cNvSpPr txBox="1"/>
           <p:nvPr/>
         </p:nvSpPr>
         <p:spPr>
           <a:xfrm>
-            <a:off x="6492240" y="2839212"/>
-            <a:ext cx="329184" cy="301752"/>
+            <a:off x="6492240" y="4037990"/>
+            <a:ext cx="329184" cy="283464"/>
           </a:xfrm>
           <a:prstGeom prst="rect">
             <a:avLst/>
@@ -15885,7 +18026,7 @@
               <a:buNone/>
             </a:pPr>
             <a:r>
-              <a:rPr lang="en-US" sz="950" dirty="0">
+              <a:rPr lang="en-US" sz="900" dirty="0">
                 <a:solidFill>
                   <a:srgbClr val="93A1AA"/>
                 </a:solidFill>
@@ -15893,22 +18034,22 @@
                 <a:ea typeface="Calibri" pitchFamily="34" charset="-122"/>
                 <a:cs typeface="Calibri" pitchFamily="34" charset="-120"/>
               </a:rPr>
-              <a:t>16</a:t>
+              <a:t>21</a:t>
             </a:r>
-            <a:endParaRPr lang="en-US" sz="950" dirty="0"/>
+            <a:endParaRPr lang="en-US" sz="900" dirty="0"/>
           </a:p>
         </p:txBody>
       </p:sp>
       <p:sp>
         <p:nvSpPr>
-          <p:cNvPr id="97" name="Text 95"/>
+          <p:cNvPr id="127" name="Text 125"/>
           <p:cNvSpPr txBox="1"/>
           <p:nvPr/>
         </p:nvSpPr>
         <p:spPr>
           <a:xfrm>
-            <a:off x="6912864" y="2839212"/>
-            <a:ext cx="2395728" cy="301752"/>
+            <a:off x="6876288" y="4037990"/>
+            <a:ext cx="2487168" cy="283464"/>
           </a:xfrm>
           <a:prstGeom prst="rect">
             <a:avLst/>
@@ -15924,7 +18065,7 @@
               <a:buNone/>
             </a:pPr>
             <a:r>
-              <a:rPr lang="en-US" sz="1000" dirty="0">
+              <a:rPr lang="en-US" sz="900" dirty="0">
                 <a:solidFill>
                   <a:srgbClr val="93A1AA"/>
                 </a:solidFill>
@@ -15932,22 +18073,22 @@
                 <a:ea typeface="Calibri" pitchFamily="34" charset="-122"/>
                 <a:cs typeface="Calibri" pitchFamily="34" charset="-120"/>
               </a:rPr>
-              <a:t>qwen3-coder</a:t>
+              <a:t>claude-opus-4-1-20250805</a:t>
             </a:r>
-            <a:endParaRPr lang="en-US" sz="1000" dirty="0"/>
+            <a:endParaRPr lang="en-US" sz="900" dirty="0"/>
           </a:p>
         </p:txBody>
       </p:sp>
       <p:sp>
         <p:nvSpPr>
-          <p:cNvPr id="98" name="Text 96"/>
+          <p:cNvPr id="128" name="Text 126"/>
           <p:cNvSpPr txBox="1"/>
           <p:nvPr/>
         </p:nvSpPr>
         <p:spPr>
           <a:xfrm>
-            <a:off x="9326880" y="2839212"/>
-            <a:ext cx="841248" cy="301752"/>
+            <a:off x="9400032" y="4037990"/>
+            <a:ext cx="786384" cy="283464"/>
           </a:xfrm>
           <a:prstGeom prst="rect">
             <a:avLst/>
@@ -15963,7 +18104,7 @@
               <a:buNone/>
             </a:pPr>
             <a:r>
-              <a:rPr lang="en-US" sz="750" dirty="0">
+              <a:rPr lang="en-US" sz="700" dirty="0">
                 <a:solidFill>
                   <a:srgbClr val="93A1AA"/>
                 </a:solidFill>
@@ -15973,20 +18114,20 @@
               </a:rPr>
               <a:t>AlgoTuner</a:t>
             </a:r>
-            <a:endParaRPr lang="en-US" sz="750" dirty="0"/>
+            <a:endParaRPr lang="en-US" sz="700" dirty="0"/>
           </a:p>
         </p:txBody>
       </p:sp>
       <p:sp>
         <p:nvSpPr>
-          <p:cNvPr id="99" name="Shape 97"/>
+          <p:cNvPr id="129" name="Shape 127"/>
           <p:cNvSpPr/>
           <p:nvPr/>
         </p:nvSpPr>
         <p:spPr>
           <a:xfrm>
-            <a:off x="10222992" y="2944368"/>
-            <a:ext cx="481743" cy="91440"/>
+            <a:off x="10222992" y="4134002"/>
+            <a:ext cx="471442" cy="91440"/>
           </a:xfrm>
           <a:prstGeom prst="rect">
             <a:avLst/>
@@ -16004,14 +18145,14 @@
       </p:sp>
       <p:sp>
         <p:nvSpPr>
-          <p:cNvPr id="100" name="Text 98"/>
+          <p:cNvPr id="130" name="Text 128"/>
           <p:cNvSpPr txBox="1"/>
           <p:nvPr/>
         </p:nvSpPr>
         <p:spPr>
           <a:xfrm>
-            <a:off x="11082528" y="2839212"/>
-            <a:ext cx="457200" cy="301752"/>
+            <a:off x="11082528" y="4037990"/>
+            <a:ext cx="457200" cy="283464"/>
           </a:xfrm>
           <a:prstGeom prst="rect">
             <a:avLst/>
@@ -16027,7 +18168,7 @@
               <a:buNone/>
             </a:pPr>
             <a:r>
-              <a:rPr lang="en-US" sz="950" dirty="0">
+              <a:rPr lang="en-US" sz="900" dirty="0">
                 <a:solidFill>
                   <a:srgbClr val="3A4750"/>
                 </a:solidFill>
@@ -16035,26 +18176,26 @@
                 <a:ea typeface="Calibri" pitchFamily="34" charset="-122"/>
                 <a:cs typeface="Calibri" pitchFamily="34" charset="-120"/>
               </a:rPr>
-              <a:t>1.403</a:t>
+              <a:t>1.373</a:t>
             </a:r>
-            <a:endParaRPr lang="en-US" sz="950" dirty="0"/>
+            <a:endParaRPr lang="en-US" sz="900" dirty="0"/>
           </a:p>
         </p:txBody>
       </p:sp>
       <p:sp>
         <p:nvSpPr>
-          <p:cNvPr id="101" name="Shape 99"/>
+          <p:cNvPr id="131" name="Shape 129"/>
           <p:cNvSpPr/>
           <p:nvPr/>
         </p:nvSpPr>
         <p:spPr>
           <a:xfrm>
-            <a:off x="6400800" y="3182112"/>
-            <a:ext cx="5221224" cy="301752"/>
+            <a:off x="6400800" y="4356202"/>
+            <a:ext cx="5221224" cy="283464"/>
           </a:xfrm>
           <a:prstGeom prst="roundRect">
             <a:avLst>
-              <a:gd name="adj" fmla="val 15152"/>
+              <a:gd name="adj" fmla="val 16129"/>
             </a:avLst>
           </a:prstGeom>
           <a:solidFill>
@@ -16070,14 +18211,14 @@
       </p:sp>
       <p:sp>
         <p:nvSpPr>
-          <p:cNvPr id="102" name="Text 100"/>
+          <p:cNvPr id="132" name="Text 130"/>
           <p:cNvSpPr txBox="1"/>
           <p:nvPr/>
         </p:nvSpPr>
         <p:spPr>
           <a:xfrm>
-            <a:off x="6492240" y="3182112"/>
-            <a:ext cx="329184" cy="301752"/>
+            <a:off x="6492240" y="4356202"/>
+            <a:ext cx="329184" cy="283464"/>
           </a:xfrm>
           <a:prstGeom prst="rect">
             <a:avLst/>
@@ -16093,7 +18234,7 @@
               <a:buNone/>
             </a:pPr>
             <a:r>
-              <a:rPr lang="en-US" sz="950" dirty="0">
+              <a:rPr lang="en-US" sz="900" dirty="0">
                 <a:solidFill>
                   <a:srgbClr val="93A1AA"/>
                 </a:solidFill>
@@ -16101,22 +18242,22 @@
                 <a:ea typeface="Calibri" pitchFamily="34" charset="-122"/>
                 <a:cs typeface="Calibri" pitchFamily="34" charset="-120"/>
               </a:rPr>
-              <a:t>17</a:t>
+              <a:t>22</a:t>
             </a:r>
-            <a:endParaRPr lang="en-US" sz="950" dirty="0"/>
+            <a:endParaRPr lang="en-US" sz="900" dirty="0"/>
           </a:p>
         </p:txBody>
       </p:sp>
       <p:sp>
         <p:nvSpPr>
-          <p:cNvPr id="103" name="Text 101"/>
+          <p:cNvPr id="133" name="Text 131"/>
           <p:cNvSpPr txBox="1"/>
           <p:nvPr/>
         </p:nvSpPr>
         <p:spPr>
           <a:xfrm>
-            <a:off x="6912864" y="3182112"/>
-            <a:ext cx="2395728" cy="301752"/>
+            <a:off x="6876288" y="4356202"/>
+            <a:ext cx="2487168" cy="283464"/>
           </a:xfrm>
           <a:prstGeom prst="rect">
             <a:avLst/>
@@ -16132,30 +18273,30 @@
               <a:buNone/>
             </a:pPr>
             <a:r>
-              <a:rPr lang="en-US" sz="1000" dirty="0">
+              <a:rPr lang="en-US" sz="900" dirty="0">
                 <a:solidFill>
-                  <a:srgbClr val="C2872B"/>
+                  <a:srgbClr val="93A1AA"/>
                 </a:solidFill>
                 <a:latin typeface="Calibri" pitchFamily="34" charset="0"/>
                 <a:ea typeface="Calibri" pitchFamily="34" charset="-122"/>
                 <a:cs typeface="Calibri" pitchFamily="34" charset="-120"/>
               </a:rPr>
-              <a:t>Qwen3-14B, no RL</a:t>
+              <a:t>gpt-5</a:t>
             </a:r>
-            <a:endParaRPr lang="en-US" sz="1000" dirty="0"/>
+            <a:endParaRPr lang="en-US" sz="900" dirty="0"/>
           </a:p>
         </p:txBody>
       </p:sp>
       <p:sp>
         <p:nvSpPr>
-          <p:cNvPr id="104" name="Text 102"/>
+          <p:cNvPr id="134" name="Text 132"/>
           <p:cNvSpPr txBox="1"/>
           <p:nvPr/>
         </p:nvSpPr>
         <p:spPr>
           <a:xfrm>
-            <a:off x="9326880" y="3182112"/>
-            <a:ext cx="841248" cy="301752"/>
+            <a:off x="9400032" y="4356202"/>
+            <a:ext cx="786384" cy="283464"/>
           </a:xfrm>
           <a:prstGeom prst="rect">
             <a:avLst/>
@@ -16171,7 +18312,7 @@
               <a:buNone/>
             </a:pPr>
             <a:r>
-              <a:rPr lang="en-US" sz="750" dirty="0">
+              <a:rPr lang="en-US" sz="700" dirty="0">
                 <a:solidFill>
                   <a:srgbClr val="93A1AA"/>
                 </a:solidFill>
@@ -16179,28 +18320,28 @@
                 <a:ea typeface="Calibri" pitchFamily="34" charset="-122"/>
                 <a:cs typeface="Calibri" pitchFamily="34" charset="-120"/>
               </a:rPr>
-              <a:t>OpenEvolve</a:t>
+              <a:t>AlgoTuner</a:t>
             </a:r>
-            <a:endParaRPr lang="en-US" sz="750" dirty="0"/>
+            <a:endParaRPr lang="en-US" sz="700" dirty="0"/>
           </a:p>
         </p:txBody>
       </p:sp>
       <p:sp>
         <p:nvSpPr>
-          <p:cNvPr id="105" name="Shape 103"/>
+          <p:cNvPr id="135" name="Shape 133"/>
           <p:cNvSpPr/>
           <p:nvPr/>
         </p:nvSpPr>
         <p:spPr>
           <a:xfrm>
-            <a:off x="10222992" y="3287268"/>
-            <a:ext cx="477966" cy="91440"/>
+            <a:off x="10222992" y="4452214"/>
+            <a:ext cx="455991" cy="91440"/>
           </a:xfrm>
           <a:prstGeom prst="rect">
             <a:avLst/>
           </a:prstGeom>
           <a:solidFill>
-            <a:srgbClr val="C2872B"/>
+            <a:srgbClr val="93A1AA"/>
           </a:solidFill>
           <a:ln w="12700">
             <a:solidFill>
@@ -16212,14 +18353,14 @@
       </p:sp>
       <p:sp>
         <p:nvSpPr>
-          <p:cNvPr id="106" name="Text 104"/>
+          <p:cNvPr id="136" name="Text 134"/>
           <p:cNvSpPr txBox="1"/>
           <p:nvPr/>
         </p:nvSpPr>
         <p:spPr>
           <a:xfrm>
-            <a:off x="11082528" y="3182112"/>
-            <a:ext cx="457200" cy="301752"/>
+            <a:off x="11082528" y="4356202"/>
+            <a:ext cx="457200" cy="283464"/>
           </a:xfrm>
           <a:prstGeom prst="rect">
             <a:avLst/>
@@ -16235,7 +18376,7 @@
               <a:buNone/>
             </a:pPr>
             <a:r>
-              <a:rPr lang="en-US" sz="950" dirty="0">
+              <a:rPr lang="en-US" sz="900" dirty="0">
                 <a:solidFill>
                   <a:srgbClr val="3A4750"/>
                 </a:solidFill>
@@ -16243,26 +18384,26 @@
                 <a:ea typeface="Calibri" pitchFamily="34" charset="-122"/>
                 <a:cs typeface="Calibri" pitchFamily="34" charset="-120"/>
               </a:rPr>
-              <a:t>1.392</a:t>
+              <a:t>1.328</a:t>
             </a:r>
-            <a:endParaRPr lang="en-US" sz="950" dirty="0"/>
+            <a:endParaRPr lang="en-US" sz="900" dirty="0"/>
           </a:p>
         </p:txBody>
       </p:sp>
       <p:sp>
         <p:nvSpPr>
-          <p:cNvPr id="107" name="Shape 105"/>
+          <p:cNvPr id="137" name="Shape 135"/>
           <p:cNvSpPr/>
           <p:nvPr/>
         </p:nvSpPr>
         <p:spPr>
           <a:xfrm>
-            <a:off x="6400800" y="3525012"/>
-            <a:ext cx="5221224" cy="301752"/>
+            <a:off x="6400800" y="4674413"/>
+            <a:ext cx="5221224" cy="283464"/>
           </a:xfrm>
           <a:prstGeom prst="roundRect">
             <a:avLst>
-              <a:gd name="adj" fmla="val 15152"/>
+              <a:gd name="adj" fmla="val 16129"/>
             </a:avLst>
           </a:prstGeom>
           <a:solidFill>
@@ -16278,14 +18419,14 @@
       </p:sp>
       <p:sp>
         <p:nvSpPr>
-          <p:cNvPr id="108" name="Text 106"/>
+          <p:cNvPr id="138" name="Text 136"/>
           <p:cNvSpPr txBox="1"/>
           <p:nvPr/>
         </p:nvSpPr>
         <p:spPr>
           <a:xfrm>
-            <a:off x="6492240" y="3525012"/>
-            <a:ext cx="329184" cy="301752"/>
+            <a:off x="6492240" y="4674413"/>
+            <a:ext cx="329184" cy="283464"/>
           </a:xfrm>
           <a:prstGeom prst="rect">
             <a:avLst/>
@@ -16301,7 +18442,7 @@
               <a:buNone/>
             </a:pPr>
             <a:r>
-              <a:rPr lang="en-US" sz="950" dirty="0">
+              <a:rPr lang="en-US" sz="900" dirty="0">
                 <a:solidFill>
                   <a:srgbClr val="93A1AA"/>
                 </a:solidFill>
@@ -16309,22 +18450,22 @@
                 <a:ea typeface="Calibri" pitchFamily="34" charset="-122"/>
                 <a:cs typeface="Calibri" pitchFamily="34" charset="-120"/>
               </a:rPr>
-              <a:t>18</a:t>
+              <a:t>23</a:t>
             </a:r>
-            <a:endParaRPr lang="en-US" sz="950" dirty="0"/>
+            <a:endParaRPr lang="en-US" sz="900" dirty="0"/>
           </a:p>
         </p:txBody>
       </p:sp>
       <p:sp>
         <p:nvSpPr>
-          <p:cNvPr id="109" name="Text 107"/>
+          <p:cNvPr id="139" name="Text 137"/>
           <p:cNvSpPr txBox="1"/>
           <p:nvPr/>
         </p:nvSpPr>
         <p:spPr>
           <a:xfrm>
-            <a:off x="6912864" y="3525012"/>
-            <a:ext cx="2395728" cy="301752"/>
+            <a:off x="6876288" y="4674413"/>
+            <a:ext cx="2487168" cy="283464"/>
           </a:xfrm>
           <a:prstGeom prst="rect">
             <a:avLst/>
@@ -16340,7 +18481,7 @@
               <a:buNone/>
             </a:pPr>
             <a:r>
-              <a:rPr lang="en-US" sz="1000" dirty="0">
+              <a:rPr lang="en-US" sz="900" dirty="0">
                 <a:solidFill>
                   <a:srgbClr val="93A1AA"/>
                 </a:solidFill>
@@ -16348,22 +18489,22 @@
                 <a:ea typeface="Calibri" pitchFamily="34" charset="-122"/>
                 <a:cs typeface="Calibri" pitchFamily="34" charset="-120"/>
               </a:rPr>
-              <a:t>gemini-2.5-pro</a:t>
+              <a:t>gpt-5-pro (medium)</a:t>
             </a:r>
-            <a:endParaRPr lang="en-US" sz="1000" dirty="0"/>
+            <a:endParaRPr lang="en-US" sz="900" dirty="0"/>
           </a:p>
         </p:txBody>
       </p:sp>
       <p:sp>
         <p:nvSpPr>
-          <p:cNvPr id="110" name="Text 108"/>
+          <p:cNvPr id="140" name="Text 138"/>
           <p:cNvSpPr txBox="1"/>
           <p:nvPr/>
         </p:nvSpPr>
         <p:spPr>
           <a:xfrm>
-            <a:off x="9326880" y="3525012"/>
-            <a:ext cx="841248" cy="301752"/>
+            <a:off x="9400032" y="4674413"/>
+            <a:ext cx="786384" cy="283464"/>
           </a:xfrm>
           <a:prstGeom prst="rect">
             <a:avLst/>
@@ -16379,7 +18520,7 @@
               <a:buNone/>
             </a:pPr>
             <a:r>
-              <a:rPr lang="en-US" sz="750" dirty="0">
+              <a:rPr lang="en-US" sz="700" dirty="0">
                 <a:solidFill>
                   <a:srgbClr val="93A1AA"/>
                 </a:solidFill>
@@ -16389,20 +18530,20 @@
               </a:rPr>
               <a:t>AlgoTuner</a:t>
             </a:r>
-            <a:endParaRPr lang="en-US" sz="750" dirty="0"/>
+            <a:endParaRPr lang="en-US" sz="700" dirty="0"/>
           </a:p>
         </p:txBody>
       </p:sp>
       <p:sp>
         <p:nvSpPr>
-          <p:cNvPr id="111" name="Shape 109"/>
+          <p:cNvPr id="141" name="Shape 139"/>
           <p:cNvSpPr/>
           <p:nvPr/>
         </p:nvSpPr>
         <p:spPr>
           <a:xfrm>
-            <a:off x="10222992" y="3630168"/>
-            <a:ext cx="471786" cy="91440"/>
+            <a:off x="10222992" y="4770425"/>
+            <a:ext cx="449810" cy="91440"/>
           </a:xfrm>
           <a:prstGeom prst="rect">
             <a:avLst/>
@@ -16420,14 +18561,14 @@
       </p:sp>
       <p:sp>
         <p:nvSpPr>
-          <p:cNvPr id="112" name="Text 110"/>
+          <p:cNvPr id="142" name="Text 140"/>
           <p:cNvSpPr txBox="1"/>
           <p:nvPr/>
         </p:nvSpPr>
         <p:spPr>
           <a:xfrm>
-            <a:off x="11082528" y="3525012"/>
-            <a:ext cx="457200" cy="301752"/>
+            <a:off x="11082528" y="4674413"/>
+            <a:ext cx="457200" cy="283464"/>
           </a:xfrm>
           <a:prstGeom prst="rect">
             <a:avLst/>
@@ -16443,7 +18584,7 @@
               <a:buNone/>
             </a:pPr>
             <a:r>
-              <a:rPr lang="en-US" sz="950" dirty="0">
+              <a:rPr lang="en-US" sz="900" dirty="0">
                 <a:solidFill>
                   <a:srgbClr val="3A4750"/>
                 </a:solidFill>
@@ -16451,26 +18592,26 @@
                 <a:ea typeface="Calibri" pitchFamily="34" charset="-122"/>
                 <a:cs typeface="Calibri" pitchFamily="34" charset="-120"/>
               </a:rPr>
-              <a:t>1.374</a:t>
+              <a:t>1.310</a:t>
             </a:r>
-            <a:endParaRPr lang="en-US" sz="950" dirty="0"/>
+            <a:endParaRPr lang="en-US" sz="900" dirty="0"/>
           </a:p>
         </p:txBody>
       </p:sp>
       <p:sp>
         <p:nvSpPr>
-          <p:cNvPr id="113" name="Shape 111"/>
+          <p:cNvPr id="143" name="Shape 141"/>
           <p:cNvSpPr/>
           <p:nvPr/>
         </p:nvSpPr>
         <p:spPr>
           <a:xfrm>
-            <a:off x="6400800" y="3867912"/>
-            <a:ext cx="5221224" cy="301752"/>
+            <a:off x="6400800" y="4992624"/>
+            <a:ext cx="5221224" cy="283464"/>
           </a:xfrm>
           <a:prstGeom prst="roundRect">
             <a:avLst>
-              <a:gd name="adj" fmla="val 15152"/>
+              <a:gd name="adj" fmla="val 16129"/>
             </a:avLst>
           </a:prstGeom>
           <a:solidFill>
@@ -16486,14 +18627,14 @@
       </p:sp>
       <p:sp>
         <p:nvSpPr>
-          <p:cNvPr id="114" name="Text 112"/>
+          <p:cNvPr id="144" name="Text 142"/>
           <p:cNvSpPr txBox="1"/>
           <p:nvPr/>
         </p:nvSpPr>
         <p:spPr>
           <a:xfrm>
-            <a:off x="6492240" y="3867912"/>
-            <a:ext cx="329184" cy="301752"/>
+            <a:off x="6492240" y="4992624"/>
+            <a:ext cx="329184" cy="283464"/>
           </a:xfrm>
           <a:prstGeom prst="rect">
             <a:avLst/>
@@ -16509,7 +18650,7 @@
               <a:buNone/>
             </a:pPr>
             <a:r>
-              <a:rPr lang="en-US" sz="950" dirty="0">
+              <a:rPr lang="en-US" sz="900" dirty="0">
                 <a:solidFill>
                   <a:srgbClr val="93A1AA"/>
                 </a:solidFill>
@@ -16517,22 +18658,22 @@
                 <a:ea typeface="Calibri" pitchFamily="34" charset="-122"/>
                 <a:cs typeface="Calibri" pitchFamily="34" charset="-120"/>
               </a:rPr>
-              <a:t>19</a:t>
+              <a:t>24</a:t>
             </a:r>
-            <a:endParaRPr lang="en-US" sz="950" dirty="0"/>
+            <a:endParaRPr lang="en-US" sz="900" dirty="0"/>
           </a:p>
         </p:txBody>
       </p:sp>
       <p:sp>
         <p:nvSpPr>
-          <p:cNvPr id="115" name="Text 113"/>
+          <p:cNvPr id="145" name="Text 143"/>
           <p:cNvSpPr txBox="1"/>
           <p:nvPr/>
         </p:nvSpPr>
         <p:spPr>
           <a:xfrm>
-            <a:off x="6912864" y="3867912"/>
-            <a:ext cx="2395728" cy="301752"/>
+            <a:off x="6876288" y="4992624"/>
+            <a:ext cx="2487168" cy="283464"/>
           </a:xfrm>
           <a:prstGeom prst="rect">
             <a:avLst/>
@@ -16548,7 +18689,7 @@
               <a:buNone/>
             </a:pPr>
             <a:r>
-              <a:rPr lang="en-US" sz="1000" dirty="0">
+              <a:rPr lang="en-US" sz="900" dirty="0">
                 <a:solidFill>
                   <a:srgbClr val="93A1AA"/>
                 </a:solidFill>
@@ -16556,22 +18697,22 @@
                 <a:ea typeface="Calibri" pitchFamily="34" charset="-122"/>
                 <a:cs typeface="Calibri" pitchFamily="34" charset="-120"/>
               </a:rPr>
-              <a:t>claude-opus-4-1-20250805</a:t>
+              <a:t>gpt-oss-120b</a:t>
             </a:r>
-            <a:endParaRPr lang="en-US" sz="1000" dirty="0"/>
+            <a:endParaRPr lang="en-US" sz="900" dirty="0"/>
           </a:p>
         </p:txBody>
       </p:sp>
       <p:sp>
         <p:nvSpPr>
-          <p:cNvPr id="116" name="Text 114"/>
+          <p:cNvPr id="146" name="Text 144"/>
           <p:cNvSpPr txBox="1"/>
           <p:nvPr/>
         </p:nvSpPr>
         <p:spPr>
           <a:xfrm>
-            <a:off x="9326880" y="3867912"/>
-            <a:ext cx="841248" cy="301752"/>
+            <a:off x="9400032" y="4992624"/>
+            <a:ext cx="786384" cy="283464"/>
           </a:xfrm>
           <a:prstGeom prst="rect">
             <a:avLst/>
@@ -16587,7 +18728,7 @@
               <a:buNone/>
             </a:pPr>
             <a:r>
-              <a:rPr lang="en-US" sz="750" dirty="0">
+              <a:rPr lang="en-US" sz="700" dirty="0">
                 <a:solidFill>
                   <a:srgbClr val="93A1AA"/>
                 </a:solidFill>
@@ -16597,20 +18738,20 @@
               </a:rPr>
               <a:t>AlgoTuner</a:t>
             </a:r>
-            <a:endParaRPr lang="en-US" sz="750" dirty="0"/>
+            <a:endParaRPr lang="en-US" sz="700" dirty="0"/>
           </a:p>
         </p:txBody>
       </p:sp>
       <p:sp>
         <p:nvSpPr>
-          <p:cNvPr id="117" name="Shape 115"/>
+          <p:cNvPr id="147" name="Shape 145"/>
           <p:cNvSpPr/>
           <p:nvPr/>
         </p:nvSpPr>
         <p:spPr>
           <a:xfrm>
-            <a:off x="10222992" y="3973068"/>
-            <a:ext cx="471442" cy="91440"/>
+            <a:off x="10222992" y="5088636"/>
+            <a:ext cx="449467" cy="91440"/>
           </a:xfrm>
           <a:prstGeom prst="rect">
             <a:avLst/>
@@ -16628,14 +18769,14 @@
       </p:sp>
       <p:sp>
         <p:nvSpPr>
-          <p:cNvPr id="118" name="Text 116"/>
+          <p:cNvPr id="148" name="Text 146"/>
           <p:cNvSpPr txBox="1"/>
           <p:nvPr/>
         </p:nvSpPr>
         <p:spPr>
           <a:xfrm>
-            <a:off x="11082528" y="3867912"/>
-            <a:ext cx="457200" cy="301752"/>
+            <a:off x="11082528" y="4992624"/>
+            <a:ext cx="457200" cy="283464"/>
           </a:xfrm>
           <a:prstGeom prst="rect">
             <a:avLst/>
@@ -16651,7 +18792,7 @@
               <a:buNone/>
             </a:pPr>
             <a:r>
-              <a:rPr lang="en-US" sz="950" dirty="0">
+              <a:rPr lang="en-US" sz="900" dirty="0">
                 <a:solidFill>
                   <a:srgbClr val="3A4750"/>
                 </a:solidFill>
@@ -16659,26 +18800,26 @@
                 <a:ea typeface="Calibri" pitchFamily="34" charset="-122"/>
                 <a:cs typeface="Calibri" pitchFamily="34" charset="-120"/>
               </a:rPr>
-              <a:t>1.373</a:t>
+              <a:t>1.309</a:t>
             </a:r>
-            <a:endParaRPr lang="en-US" sz="950" dirty="0"/>
+            <a:endParaRPr lang="en-US" sz="900" dirty="0"/>
           </a:p>
         </p:txBody>
       </p:sp>
       <p:sp>
         <p:nvSpPr>
-          <p:cNvPr id="119" name="Shape 117"/>
+          <p:cNvPr id="149" name="Shape 147"/>
           <p:cNvSpPr/>
           <p:nvPr/>
         </p:nvSpPr>
         <p:spPr>
           <a:xfrm>
-            <a:off x="6400800" y="4210812"/>
-            <a:ext cx="5221224" cy="301752"/>
+            <a:off x="6400800" y="5310835"/>
+            <a:ext cx="5221224" cy="283464"/>
           </a:xfrm>
           <a:prstGeom prst="roundRect">
             <a:avLst>
-              <a:gd name="adj" fmla="val 15152"/>
+              <a:gd name="adj" fmla="val 16129"/>
             </a:avLst>
           </a:prstGeom>
           <a:solidFill>
@@ -16694,14 +18835,14 @@
       </p:sp>
       <p:sp>
         <p:nvSpPr>
-          <p:cNvPr id="120" name="Text 118"/>
+          <p:cNvPr id="150" name="Text 148"/>
           <p:cNvSpPr txBox="1"/>
           <p:nvPr/>
         </p:nvSpPr>
         <p:spPr>
           <a:xfrm>
-            <a:off x="6492240" y="4210812"/>
-            <a:ext cx="329184" cy="301752"/>
+            <a:off x="6492240" y="5310835"/>
+            <a:ext cx="329184" cy="283464"/>
           </a:xfrm>
           <a:prstGeom prst="rect">
             <a:avLst/>
@@ -16717,7 +18858,7 @@
               <a:buNone/>
             </a:pPr>
             <a:r>
-              <a:rPr lang="en-US" sz="950" dirty="0">
+              <a:rPr lang="en-US" sz="900" dirty="0">
                 <a:solidFill>
                   <a:srgbClr val="93A1AA"/>
                 </a:solidFill>
@@ -16725,22 +18866,22 @@
                 <a:ea typeface="Calibri" pitchFamily="34" charset="-122"/>
                 <a:cs typeface="Calibri" pitchFamily="34" charset="-120"/>
               </a:rPr>
-              <a:t>20</a:t>
+              <a:t>25</a:t>
             </a:r>
-            <a:endParaRPr lang="en-US" sz="950" dirty="0"/>
+            <a:endParaRPr lang="en-US" sz="900" dirty="0"/>
           </a:p>
         </p:txBody>
       </p:sp>
       <p:sp>
         <p:nvSpPr>
-          <p:cNvPr id="121" name="Text 119"/>
+          <p:cNvPr id="151" name="Text 149"/>
           <p:cNvSpPr txBox="1"/>
           <p:nvPr/>
         </p:nvSpPr>
         <p:spPr>
           <a:xfrm>
-            <a:off x="6912864" y="4210812"/>
-            <a:ext cx="2395728" cy="301752"/>
+            <a:off x="6876288" y="5310835"/>
+            <a:ext cx="2487168" cy="283464"/>
           </a:xfrm>
           <a:prstGeom prst="rect">
             <a:avLst/>
@@ -16756,7 +18897,7 @@
               <a:buNone/>
             </a:pPr>
             <a:r>
-              <a:rPr lang="en-US" sz="1000" dirty="0">
+              <a:rPr lang="en-US" sz="900" dirty="0">
                 <a:solidFill>
                   <a:srgbClr val="93A1AA"/>
                 </a:solidFill>
@@ -16764,22 +18905,22 @@
                 <a:ea typeface="Calibri" pitchFamily="34" charset="-122"/>
                 <a:cs typeface="Calibri" pitchFamily="34" charset="-120"/>
               </a:rPr>
-              <a:t>gpt-5</a:t>
+              <a:t>gpt-5-mini</a:t>
             </a:r>
-            <a:endParaRPr lang="en-US" sz="1000" dirty="0"/>
+            <a:endParaRPr lang="en-US" sz="900" dirty="0"/>
           </a:p>
         </p:txBody>
       </p:sp>
       <p:sp>
         <p:nvSpPr>
-          <p:cNvPr id="122" name="Text 120"/>
+          <p:cNvPr id="152" name="Text 150"/>
           <p:cNvSpPr txBox="1"/>
           <p:nvPr/>
         </p:nvSpPr>
         <p:spPr>
           <a:xfrm>
-            <a:off x="9326880" y="4210812"/>
-            <a:ext cx="841248" cy="301752"/>
+            <a:off x="9400032" y="5310835"/>
+            <a:ext cx="786384" cy="283464"/>
           </a:xfrm>
           <a:prstGeom prst="rect">
             <a:avLst/>
@@ -16795,7 +18936,7 @@
               <a:buNone/>
             </a:pPr>
             <a:r>
-              <a:rPr lang="en-US" sz="750" dirty="0">
+              <a:rPr lang="en-US" sz="700" dirty="0">
                 <a:solidFill>
                   <a:srgbClr val="93A1AA"/>
                 </a:solidFill>
@@ -16805,20 +18946,20 @@
               </a:rPr>
               <a:t>AlgoTuner</a:t>
             </a:r>
-            <a:endParaRPr lang="en-US" sz="750" dirty="0"/>
+            <a:endParaRPr lang="en-US" sz="700" dirty="0"/>
           </a:p>
         </p:txBody>
       </p:sp>
       <p:sp>
         <p:nvSpPr>
-          <p:cNvPr id="123" name="Shape 121"/>
+          <p:cNvPr id="153" name="Shape 151"/>
           <p:cNvSpPr/>
           <p:nvPr/>
         </p:nvSpPr>
         <p:spPr>
           <a:xfrm>
-            <a:off x="10222992" y="4315968"/>
-            <a:ext cx="455991" cy="91440"/>
+            <a:off x="10222992" y="5406847"/>
+            <a:ext cx="430582" cy="91440"/>
           </a:xfrm>
           <a:prstGeom prst="rect">
             <a:avLst/>
@@ -16836,14 +18977,14 @@
       </p:sp>
       <p:sp>
         <p:nvSpPr>
-          <p:cNvPr id="124" name="Text 122"/>
+          <p:cNvPr id="154" name="Text 152"/>
           <p:cNvSpPr txBox="1"/>
           <p:nvPr/>
         </p:nvSpPr>
         <p:spPr>
           <a:xfrm>
-            <a:off x="11082528" y="4210812"/>
-            <a:ext cx="457200" cy="301752"/>
+            <a:off x="11082528" y="5310835"/>
+            <a:ext cx="457200" cy="283464"/>
           </a:xfrm>
           <a:prstGeom prst="rect">
             <a:avLst/>
@@ -16859,631 +19000,7 @@
               <a:buNone/>
             </a:pPr>
             <a:r>
-              <a:rPr lang="en-US" sz="950" dirty="0">
-                <a:solidFill>
-                  <a:srgbClr val="3A4750"/>
-                </a:solidFill>
-                <a:latin typeface="Calibri" pitchFamily="34" charset="0"/>
-                <a:ea typeface="Calibri" pitchFamily="34" charset="-122"/>
-                <a:cs typeface="Calibri" pitchFamily="34" charset="-120"/>
-              </a:rPr>
-              <a:t>1.328</a:t>
-            </a:r>
-            <a:endParaRPr lang="en-US" sz="950" dirty="0"/>
-          </a:p>
-        </p:txBody>
-      </p:sp>
-      <p:sp>
-        <p:nvSpPr>
-          <p:cNvPr id="125" name="Shape 123"/>
-          <p:cNvSpPr/>
-          <p:nvPr/>
-        </p:nvSpPr>
-        <p:spPr>
-          <a:xfrm>
-            <a:off x="6400800" y="4553712"/>
-            <a:ext cx="5221224" cy="301752"/>
-          </a:xfrm>
-          <a:prstGeom prst="roundRect">
-            <a:avLst>
-              <a:gd name="adj" fmla="val 15152"/>
-            </a:avLst>
-          </a:prstGeom>
-          <a:solidFill>
-            <a:srgbClr val="EEF1F3"/>
-          </a:solidFill>
-          <a:ln w="7620">
-            <a:solidFill>
-              <a:srgbClr val="D7DDE2"/>
-            </a:solidFill>
-            <a:prstDash val="solid"/>
-          </a:ln>
-        </p:spPr>
-      </p:sp>
-      <p:sp>
-        <p:nvSpPr>
-          <p:cNvPr id="126" name="Text 124"/>
-          <p:cNvSpPr txBox="1"/>
-          <p:nvPr/>
-        </p:nvSpPr>
-        <p:spPr>
-          <a:xfrm>
-            <a:off x="6492240" y="4553712"/>
-            <a:ext cx="329184" cy="301752"/>
-          </a:xfrm>
-          <a:prstGeom prst="rect">
-            <a:avLst/>
-          </a:prstGeom>
-          <a:noFill/>
-          <a:ln/>
-        </p:spPr>
-        <p:txBody>
-          <a:bodyPr wrap="square" lIns="0" tIns="0" rIns="0" bIns="0" rtlCol="0" anchor="ctr"/>
-          <a:lstStyle/>
-          <a:p>
-            <a:pPr algn="r" indent="0" marL="0">
-              <a:buNone/>
-            </a:pPr>
-            <a:r>
-              <a:rPr lang="en-US" sz="950" dirty="0">
-                <a:solidFill>
-                  <a:srgbClr val="93A1AA"/>
-                </a:solidFill>
-                <a:latin typeface="Calibri" pitchFamily="34" charset="0"/>
-                <a:ea typeface="Calibri" pitchFamily="34" charset="-122"/>
-                <a:cs typeface="Calibri" pitchFamily="34" charset="-120"/>
-              </a:rPr>
-              <a:t>21</a:t>
-            </a:r>
-            <a:endParaRPr lang="en-US" sz="950" dirty="0"/>
-          </a:p>
-        </p:txBody>
-      </p:sp>
-      <p:sp>
-        <p:nvSpPr>
-          <p:cNvPr id="127" name="Text 125"/>
-          <p:cNvSpPr txBox="1"/>
-          <p:nvPr/>
-        </p:nvSpPr>
-        <p:spPr>
-          <a:xfrm>
-            <a:off x="6912864" y="4553712"/>
-            <a:ext cx="2395728" cy="301752"/>
-          </a:xfrm>
-          <a:prstGeom prst="rect">
-            <a:avLst/>
-          </a:prstGeom>
-          <a:noFill/>
-          <a:ln/>
-        </p:spPr>
-        <p:txBody>
-          <a:bodyPr wrap="square" lIns="0" tIns="0" rIns="0" bIns="0" rtlCol="0" anchor="ctr"/>
-          <a:lstStyle/>
-          <a:p>
-            <a:pPr indent="0" marL="0">
-              <a:buNone/>
-            </a:pPr>
-            <a:r>
-              <a:rPr lang="en-US" sz="1000" dirty="0">
-                <a:solidFill>
-                  <a:srgbClr val="93A1AA"/>
-                </a:solidFill>
-                <a:latin typeface="Calibri" pitchFamily="34" charset="0"/>
-                <a:ea typeface="Calibri" pitchFamily="34" charset="-122"/>
-                <a:cs typeface="Calibri" pitchFamily="34" charset="-120"/>
-              </a:rPr>
-              <a:t>gpt-5-pro (medium)</a:t>
-            </a:r>
-            <a:endParaRPr lang="en-US" sz="1000" dirty="0"/>
-          </a:p>
-        </p:txBody>
-      </p:sp>
-      <p:sp>
-        <p:nvSpPr>
-          <p:cNvPr id="128" name="Text 126"/>
-          <p:cNvSpPr txBox="1"/>
-          <p:nvPr/>
-        </p:nvSpPr>
-        <p:spPr>
-          <a:xfrm>
-            <a:off x="9326880" y="4553712"/>
-            <a:ext cx="841248" cy="301752"/>
-          </a:xfrm>
-          <a:prstGeom prst="rect">
-            <a:avLst/>
-          </a:prstGeom>
-          <a:noFill/>
-          <a:ln/>
-        </p:spPr>
-        <p:txBody>
-          <a:bodyPr wrap="square" lIns="0" tIns="0" rIns="0" bIns="0" rtlCol="0" anchor="ctr"/>
-          <a:lstStyle/>
-          <a:p>
-            <a:pPr indent="0" marL="0">
-              <a:buNone/>
-            </a:pPr>
-            <a:r>
-              <a:rPr lang="en-US" sz="750" dirty="0">
-                <a:solidFill>
-                  <a:srgbClr val="93A1AA"/>
-                </a:solidFill>
-                <a:latin typeface="Calibri" pitchFamily="34" charset="0"/>
-                <a:ea typeface="Calibri" pitchFamily="34" charset="-122"/>
-                <a:cs typeface="Calibri" pitchFamily="34" charset="-120"/>
-              </a:rPr>
-              <a:t>AlgoTuner</a:t>
-            </a:r>
-            <a:endParaRPr lang="en-US" sz="750" dirty="0"/>
-          </a:p>
-        </p:txBody>
-      </p:sp>
-      <p:sp>
-        <p:nvSpPr>
-          <p:cNvPr id="129" name="Shape 127"/>
-          <p:cNvSpPr/>
-          <p:nvPr/>
-        </p:nvSpPr>
-        <p:spPr>
-          <a:xfrm>
-            <a:off x="10222992" y="4658868"/>
-            <a:ext cx="449810" cy="91440"/>
-          </a:xfrm>
-          <a:prstGeom prst="rect">
-            <a:avLst/>
-          </a:prstGeom>
-          <a:solidFill>
-            <a:srgbClr val="93A1AA"/>
-          </a:solidFill>
-          <a:ln w="12700">
-            <a:solidFill>
-              <a:srgbClr val="333333"/>
-            </a:solidFill>
-            <a:prstDash val="solid"/>
-          </a:ln>
-        </p:spPr>
-      </p:sp>
-      <p:sp>
-        <p:nvSpPr>
-          <p:cNvPr id="130" name="Text 128"/>
-          <p:cNvSpPr txBox="1"/>
-          <p:nvPr/>
-        </p:nvSpPr>
-        <p:spPr>
-          <a:xfrm>
-            <a:off x="11082528" y="4553712"/>
-            <a:ext cx="457200" cy="301752"/>
-          </a:xfrm>
-          <a:prstGeom prst="rect">
-            <a:avLst/>
-          </a:prstGeom>
-          <a:noFill/>
-          <a:ln/>
-        </p:spPr>
-        <p:txBody>
-          <a:bodyPr wrap="square" lIns="0" tIns="0" rIns="0" bIns="0" rtlCol="0" anchor="ctr"/>
-          <a:lstStyle/>
-          <a:p>
-            <a:pPr algn="r" indent="0" marL="0">
-              <a:buNone/>
-            </a:pPr>
-            <a:r>
-              <a:rPr lang="en-US" sz="950" dirty="0">
-                <a:solidFill>
-                  <a:srgbClr val="3A4750"/>
-                </a:solidFill>
-                <a:latin typeface="Calibri" pitchFamily="34" charset="0"/>
-                <a:ea typeface="Calibri" pitchFamily="34" charset="-122"/>
-                <a:cs typeface="Calibri" pitchFamily="34" charset="-120"/>
-              </a:rPr>
-              <a:t>1.310</a:t>
-            </a:r>
-            <a:endParaRPr lang="en-US" sz="950" dirty="0"/>
-          </a:p>
-        </p:txBody>
-      </p:sp>
-      <p:sp>
-        <p:nvSpPr>
-          <p:cNvPr id="131" name="Shape 129"/>
-          <p:cNvSpPr/>
-          <p:nvPr/>
-        </p:nvSpPr>
-        <p:spPr>
-          <a:xfrm>
-            <a:off x="6400800" y="4896612"/>
-            <a:ext cx="5221224" cy="301752"/>
-          </a:xfrm>
-          <a:prstGeom prst="roundRect">
-            <a:avLst>
-              <a:gd name="adj" fmla="val 15152"/>
-            </a:avLst>
-          </a:prstGeom>
-          <a:solidFill>
-            <a:srgbClr val="FFFFFF"/>
-          </a:solidFill>
-          <a:ln w="7620">
-            <a:solidFill>
-              <a:srgbClr val="D7DDE2"/>
-            </a:solidFill>
-            <a:prstDash val="solid"/>
-          </a:ln>
-        </p:spPr>
-      </p:sp>
-      <p:sp>
-        <p:nvSpPr>
-          <p:cNvPr id="132" name="Text 130"/>
-          <p:cNvSpPr txBox="1"/>
-          <p:nvPr/>
-        </p:nvSpPr>
-        <p:spPr>
-          <a:xfrm>
-            <a:off x="6492240" y="4896612"/>
-            <a:ext cx="329184" cy="301752"/>
-          </a:xfrm>
-          <a:prstGeom prst="rect">
-            <a:avLst/>
-          </a:prstGeom>
-          <a:noFill/>
-          <a:ln/>
-        </p:spPr>
-        <p:txBody>
-          <a:bodyPr wrap="square" lIns="0" tIns="0" rIns="0" bIns="0" rtlCol="0" anchor="ctr"/>
-          <a:lstStyle/>
-          <a:p>
-            <a:pPr algn="r" indent="0" marL="0">
-              <a:buNone/>
-            </a:pPr>
-            <a:r>
-              <a:rPr lang="en-US" sz="950" dirty="0">
-                <a:solidFill>
-                  <a:srgbClr val="93A1AA"/>
-                </a:solidFill>
-                <a:latin typeface="Calibri" pitchFamily="34" charset="0"/>
-                <a:ea typeface="Calibri" pitchFamily="34" charset="-122"/>
-                <a:cs typeface="Calibri" pitchFamily="34" charset="-120"/>
-              </a:rPr>
-              <a:t>22</a:t>
-            </a:r>
-            <a:endParaRPr lang="en-US" sz="950" dirty="0"/>
-          </a:p>
-        </p:txBody>
-      </p:sp>
-      <p:sp>
-        <p:nvSpPr>
-          <p:cNvPr id="133" name="Text 131"/>
-          <p:cNvSpPr txBox="1"/>
-          <p:nvPr/>
-        </p:nvSpPr>
-        <p:spPr>
-          <a:xfrm>
-            <a:off x="6912864" y="4896612"/>
-            <a:ext cx="2395728" cy="301752"/>
-          </a:xfrm>
-          <a:prstGeom prst="rect">
-            <a:avLst/>
-          </a:prstGeom>
-          <a:noFill/>
-          <a:ln/>
-        </p:spPr>
-        <p:txBody>
-          <a:bodyPr wrap="square" lIns="0" tIns="0" rIns="0" bIns="0" rtlCol="0" anchor="ctr"/>
-          <a:lstStyle/>
-          <a:p>
-            <a:pPr indent="0" marL="0">
-              <a:buNone/>
-            </a:pPr>
-            <a:r>
-              <a:rPr lang="en-US" sz="1000" dirty="0">
-                <a:solidFill>
-                  <a:srgbClr val="93A1AA"/>
-                </a:solidFill>
-                <a:latin typeface="Calibri" pitchFamily="34" charset="0"/>
-                <a:ea typeface="Calibri" pitchFamily="34" charset="-122"/>
-                <a:cs typeface="Calibri" pitchFamily="34" charset="-120"/>
-              </a:rPr>
-              <a:t>gpt-oss-120b</a:t>
-            </a:r>
-            <a:endParaRPr lang="en-US" sz="1000" dirty="0"/>
-          </a:p>
-        </p:txBody>
-      </p:sp>
-      <p:sp>
-        <p:nvSpPr>
-          <p:cNvPr id="134" name="Text 132"/>
-          <p:cNvSpPr txBox="1"/>
-          <p:nvPr/>
-        </p:nvSpPr>
-        <p:spPr>
-          <a:xfrm>
-            <a:off x="9326880" y="4896612"/>
-            <a:ext cx="841248" cy="301752"/>
-          </a:xfrm>
-          <a:prstGeom prst="rect">
-            <a:avLst/>
-          </a:prstGeom>
-          <a:noFill/>
-          <a:ln/>
-        </p:spPr>
-        <p:txBody>
-          <a:bodyPr wrap="square" lIns="0" tIns="0" rIns="0" bIns="0" rtlCol="0" anchor="ctr"/>
-          <a:lstStyle/>
-          <a:p>
-            <a:pPr indent="0" marL="0">
-              <a:buNone/>
-            </a:pPr>
-            <a:r>
-              <a:rPr lang="en-US" sz="750" dirty="0">
-                <a:solidFill>
-                  <a:srgbClr val="93A1AA"/>
-                </a:solidFill>
-                <a:latin typeface="Calibri" pitchFamily="34" charset="0"/>
-                <a:ea typeface="Calibri" pitchFamily="34" charset="-122"/>
-                <a:cs typeface="Calibri" pitchFamily="34" charset="-120"/>
-              </a:rPr>
-              <a:t>AlgoTuner</a:t>
-            </a:r>
-            <a:endParaRPr lang="en-US" sz="750" dirty="0"/>
-          </a:p>
-        </p:txBody>
-      </p:sp>
-      <p:sp>
-        <p:nvSpPr>
-          <p:cNvPr id="135" name="Shape 133"/>
-          <p:cNvSpPr/>
-          <p:nvPr/>
-        </p:nvSpPr>
-        <p:spPr>
-          <a:xfrm>
-            <a:off x="10222992" y="5001768"/>
-            <a:ext cx="449467" cy="91440"/>
-          </a:xfrm>
-          <a:prstGeom prst="rect">
-            <a:avLst/>
-          </a:prstGeom>
-          <a:solidFill>
-            <a:srgbClr val="93A1AA"/>
-          </a:solidFill>
-          <a:ln w="12700">
-            <a:solidFill>
-              <a:srgbClr val="333333"/>
-            </a:solidFill>
-            <a:prstDash val="solid"/>
-          </a:ln>
-        </p:spPr>
-      </p:sp>
-      <p:sp>
-        <p:nvSpPr>
-          <p:cNvPr id="136" name="Text 134"/>
-          <p:cNvSpPr txBox="1"/>
-          <p:nvPr/>
-        </p:nvSpPr>
-        <p:spPr>
-          <a:xfrm>
-            <a:off x="11082528" y="4896612"/>
-            <a:ext cx="457200" cy="301752"/>
-          </a:xfrm>
-          <a:prstGeom prst="rect">
-            <a:avLst/>
-          </a:prstGeom>
-          <a:noFill/>
-          <a:ln/>
-        </p:spPr>
-        <p:txBody>
-          <a:bodyPr wrap="square" lIns="0" tIns="0" rIns="0" bIns="0" rtlCol="0" anchor="ctr"/>
-          <a:lstStyle/>
-          <a:p>
-            <a:pPr algn="r" indent="0" marL="0">
-              <a:buNone/>
-            </a:pPr>
-            <a:r>
-              <a:rPr lang="en-US" sz="950" dirty="0">
-                <a:solidFill>
-                  <a:srgbClr val="3A4750"/>
-                </a:solidFill>
-                <a:latin typeface="Calibri" pitchFamily="34" charset="0"/>
-                <a:ea typeface="Calibri" pitchFamily="34" charset="-122"/>
-                <a:cs typeface="Calibri" pitchFamily="34" charset="-120"/>
-              </a:rPr>
-              <a:t>1.309</a:t>
-            </a:r>
-            <a:endParaRPr lang="en-US" sz="950" dirty="0"/>
-          </a:p>
-        </p:txBody>
-      </p:sp>
-      <p:sp>
-        <p:nvSpPr>
-          <p:cNvPr id="137" name="Shape 135"/>
-          <p:cNvSpPr/>
-          <p:nvPr/>
-        </p:nvSpPr>
-        <p:spPr>
-          <a:xfrm>
-            <a:off x="6400800" y="5239512"/>
-            <a:ext cx="5221224" cy="301752"/>
-          </a:xfrm>
-          <a:prstGeom prst="roundRect">
-            <a:avLst>
-              <a:gd name="adj" fmla="val 15152"/>
-            </a:avLst>
-          </a:prstGeom>
-          <a:solidFill>
-            <a:srgbClr val="EEF1F3"/>
-          </a:solidFill>
-          <a:ln w="7620">
-            <a:solidFill>
-              <a:srgbClr val="D7DDE2"/>
-            </a:solidFill>
-            <a:prstDash val="solid"/>
-          </a:ln>
-        </p:spPr>
-      </p:sp>
-      <p:sp>
-        <p:nvSpPr>
-          <p:cNvPr id="138" name="Text 136"/>
-          <p:cNvSpPr txBox="1"/>
-          <p:nvPr/>
-        </p:nvSpPr>
-        <p:spPr>
-          <a:xfrm>
-            <a:off x="6492240" y="5239512"/>
-            <a:ext cx="329184" cy="301752"/>
-          </a:xfrm>
-          <a:prstGeom prst="rect">
-            <a:avLst/>
-          </a:prstGeom>
-          <a:noFill/>
-          <a:ln/>
-        </p:spPr>
-        <p:txBody>
-          <a:bodyPr wrap="square" lIns="0" tIns="0" rIns="0" bIns="0" rtlCol="0" anchor="ctr"/>
-          <a:lstStyle/>
-          <a:p>
-            <a:pPr algn="r" indent="0" marL="0">
-              <a:buNone/>
-            </a:pPr>
-            <a:r>
-              <a:rPr lang="en-US" sz="950" dirty="0">
-                <a:solidFill>
-                  <a:srgbClr val="93A1AA"/>
-                </a:solidFill>
-                <a:latin typeface="Calibri" pitchFamily="34" charset="0"/>
-                <a:ea typeface="Calibri" pitchFamily="34" charset="-122"/>
-                <a:cs typeface="Calibri" pitchFamily="34" charset="-120"/>
-              </a:rPr>
-              <a:t>23</a:t>
-            </a:r>
-            <a:endParaRPr lang="en-US" sz="950" dirty="0"/>
-          </a:p>
-        </p:txBody>
-      </p:sp>
-      <p:sp>
-        <p:nvSpPr>
-          <p:cNvPr id="139" name="Text 137"/>
-          <p:cNvSpPr txBox="1"/>
-          <p:nvPr/>
-        </p:nvSpPr>
-        <p:spPr>
-          <a:xfrm>
-            <a:off x="6912864" y="5239512"/>
-            <a:ext cx="2395728" cy="301752"/>
-          </a:xfrm>
-          <a:prstGeom prst="rect">
-            <a:avLst/>
-          </a:prstGeom>
-          <a:noFill/>
-          <a:ln/>
-        </p:spPr>
-        <p:txBody>
-          <a:bodyPr wrap="square" lIns="0" tIns="0" rIns="0" bIns="0" rtlCol="0" anchor="ctr"/>
-          <a:lstStyle/>
-          <a:p>
-            <a:pPr indent="0" marL="0">
-              <a:buNone/>
-            </a:pPr>
-            <a:r>
-              <a:rPr lang="en-US" sz="1000" dirty="0">
-                <a:solidFill>
-                  <a:srgbClr val="93A1AA"/>
-                </a:solidFill>
-                <a:latin typeface="Calibri" pitchFamily="34" charset="0"/>
-                <a:ea typeface="Calibri" pitchFamily="34" charset="-122"/>
-                <a:cs typeface="Calibri" pitchFamily="34" charset="-120"/>
-              </a:rPr>
-              <a:t>gpt-5-mini</a:t>
-            </a:r>
-            <a:endParaRPr lang="en-US" sz="1000" dirty="0"/>
-          </a:p>
-        </p:txBody>
-      </p:sp>
-      <p:sp>
-        <p:nvSpPr>
-          <p:cNvPr id="140" name="Text 138"/>
-          <p:cNvSpPr txBox="1"/>
-          <p:nvPr/>
-        </p:nvSpPr>
-        <p:spPr>
-          <a:xfrm>
-            <a:off x="9326880" y="5239512"/>
-            <a:ext cx="841248" cy="301752"/>
-          </a:xfrm>
-          <a:prstGeom prst="rect">
-            <a:avLst/>
-          </a:prstGeom>
-          <a:noFill/>
-          <a:ln/>
-        </p:spPr>
-        <p:txBody>
-          <a:bodyPr wrap="square" lIns="0" tIns="0" rIns="0" bIns="0" rtlCol="0" anchor="ctr"/>
-          <a:lstStyle/>
-          <a:p>
-            <a:pPr indent="0" marL="0">
-              <a:buNone/>
-            </a:pPr>
-            <a:r>
-              <a:rPr lang="en-US" sz="750" dirty="0">
-                <a:solidFill>
-                  <a:srgbClr val="93A1AA"/>
-                </a:solidFill>
-                <a:latin typeface="Calibri" pitchFamily="34" charset="0"/>
-                <a:ea typeface="Calibri" pitchFamily="34" charset="-122"/>
-                <a:cs typeface="Calibri" pitchFamily="34" charset="-120"/>
-              </a:rPr>
-              <a:t>AlgoTuner</a:t>
-            </a:r>
-            <a:endParaRPr lang="en-US" sz="750" dirty="0"/>
-          </a:p>
-        </p:txBody>
-      </p:sp>
-      <p:sp>
-        <p:nvSpPr>
-          <p:cNvPr id="141" name="Shape 139"/>
-          <p:cNvSpPr/>
-          <p:nvPr/>
-        </p:nvSpPr>
-        <p:spPr>
-          <a:xfrm>
-            <a:off x="10222992" y="5344668"/>
-            <a:ext cx="430582" cy="91440"/>
-          </a:xfrm>
-          <a:prstGeom prst="rect">
-            <a:avLst/>
-          </a:prstGeom>
-          <a:solidFill>
-            <a:srgbClr val="93A1AA"/>
-          </a:solidFill>
-          <a:ln w="12700">
-            <a:solidFill>
-              <a:srgbClr val="333333"/>
-            </a:solidFill>
-            <a:prstDash val="solid"/>
-          </a:ln>
-        </p:spPr>
-      </p:sp>
-      <p:sp>
-        <p:nvSpPr>
-          <p:cNvPr id="142" name="Text 140"/>
-          <p:cNvSpPr txBox="1"/>
-          <p:nvPr/>
-        </p:nvSpPr>
-        <p:spPr>
-          <a:xfrm>
-            <a:off x="11082528" y="5239512"/>
-            <a:ext cx="457200" cy="301752"/>
-          </a:xfrm>
-          <a:prstGeom prst="rect">
-            <a:avLst/>
-          </a:prstGeom>
-          <a:noFill/>
-          <a:ln/>
-        </p:spPr>
-        <p:txBody>
-          <a:bodyPr wrap="square" lIns="0" tIns="0" rIns="0" bIns="0" rtlCol="0" anchor="ctr"/>
-          <a:lstStyle/>
-          <a:p>
-            <a:pPr algn="r" indent="0" marL="0">
-              <a:buNone/>
-            </a:pPr>
-            <a:r>
-              <a:rPr lang="en-US" sz="950" dirty="0">
+              <a:rPr lang="en-US" sz="900" dirty="0">
                 <a:solidFill>
                   <a:srgbClr val="3A4750"/>
                 </a:solidFill>
@@ -17493,13 +19010,13 @@
               </a:rPr>
               <a:t>1.254</a:t>
             </a:r>
-            <a:endParaRPr lang="en-US" sz="950" dirty="0"/>
+            <a:endParaRPr lang="en-US" sz="900" dirty="0"/>
           </a:p>
         </p:txBody>
       </p:sp>
       <p:sp>
         <p:nvSpPr>
-          <p:cNvPr id="143" name="Shape 141"/>
+          <p:cNvPr id="155" name="Shape 153"/>
           <p:cNvSpPr/>
           <p:nvPr/>
         </p:nvSpPr>
@@ -17526,7 +19043,7 @@
       </p:sp>
       <p:sp>
         <p:nvSpPr>
-          <p:cNvPr id="144" name="Text 142"/>
+          <p:cNvPr id="156" name="Text 154"/>
           <p:cNvSpPr txBox="1"/>
           <p:nvPr/>
         </p:nvSpPr>
@@ -20401,6 +21918,836 @@
                 <a:ea typeface="Calibri" pitchFamily="34" charset="-122"/>
                 <a:cs typeface="Calibri" pitchFamily="34" charset="-120"/>
               </a:rPr>
+              <a:t>HOW MUCH THE PROMPT WAS TOLD</a:t>
+            </a:r>
+            <a:endParaRPr lang="en-US" sz="1100" dirty="0"/>
+          </a:p>
+        </p:txBody>
+      </p:sp>
+      <p:sp>
+        <p:nvSpPr>
+          <p:cNvPr id="3" name="Text 1"/>
+          <p:cNvSpPr txBox="1"/>
+          <p:nvPr/>
+        </p:nvSpPr>
+        <p:spPr>
+          <a:xfrm>
+            <a:off x="566928" y="658368"/>
+            <a:ext cx="11055096" cy="566928"/>
+          </a:xfrm>
+          <a:prstGeom prst="rect">
+            <a:avLst/>
+          </a:prstGeom>
+          <a:noFill/>
+          <a:ln/>
+        </p:spPr>
+        <p:txBody>
+          <a:bodyPr wrap="square" lIns="0" tIns="0" rIns="0" bIns="0" rtlCol="0" anchor="ctr"/>
+          <a:lstStyle/>
+          <a:p>
+            <a:pPr indent="0" marL="0">
+              <a:buNone/>
+            </a:pPr>
+            <a:r>
+              <a:rPr lang="en-US" sz="3300" b="1" dirty="0">
+                <a:solidFill>
+                  <a:srgbClr val="10161C"/>
+                </a:solidFill>
+                <a:latin typeface="Cambria" pitchFamily="34" charset="0"/>
+                <a:ea typeface="Cambria" pitchFamily="34" charset="-122"/>
+                <a:cs typeface="Cambria" pitchFamily="34" charset="-120"/>
+              </a:rPr>
+              <a:t>OpenEvolve, split by phase</a:t>
+            </a:r>
+            <a:endParaRPr lang="en-US" sz="3300" dirty="0"/>
+          </a:p>
+        </p:txBody>
+      </p:sp>
+      <p:sp>
+        <p:nvSpPr>
+          <p:cNvPr id="4" name="Text 2"/>
+          <p:cNvSpPr txBox="1"/>
+          <p:nvPr/>
+        </p:nvSpPr>
+        <p:spPr>
+          <a:xfrm>
+            <a:off x="566928" y="1243584"/>
+            <a:ext cx="11055096" cy="292608"/>
+          </a:xfrm>
+          <a:prstGeom prst="rect">
+            <a:avLst/>
+          </a:prstGeom>
+          <a:noFill/>
+          <a:ln/>
+        </p:spPr>
+        <p:txBody>
+          <a:bodyPr wrap="square" lIns="0" tIns="0" rIns="0" bIns="0" rtlCol="0" anchor="ctr"/>
+          <a:lstStyle/>
+          <a:p>
+            <a:pPr indent="0" marL="0">
+              <a:lnSpc>
+                <a:spcPts val="1800"/>
+              </a:lnSpc>
+              <a:buNone/>
+            </a:pPr>
+            <a:r>
+              <a:rPr lang="en-US" sz="1350" dirty="0">
+                <a:solidFill>
+                  <a:srgbClr val="3A4750"/>
+                </a:solidFill>
+                <a:latin typeface="Calibri" pitchFamily="34" charset="0"/>
+                <a:ea typeface="Calibri" pitchFamily="34" charset="-122"/>
+                <a:cs typeface="Calibri" pitchFamily="34" charset="-120"/>
+              </a:rPr>
+              <a:t>OpenEvolve’s report is four phases with different prompts and a score for each. Their headline is the last one.</a:t>
+            </a:r>
+            <a:endParaRPr lang="en-US" sz="1350" dirty="0"/>
+          </a:p>
+        </p:txBody>
+      </p:sp>
+      <p:sp>
+        <p:nvSpPr>
+          <p:cNvPr id="5" name="Shape 3"/>
+          <p:cNvSpPr/>
+          <p:nvPr/>
+        </p:nvSpPr>
+        <p:spPr>
+          <a:xfrm>
+            <a:off x="566928" y="1773936"/>
+            <a:ext cx="11055096" cy="932688"/>
+          </a:xfrm>
+          <a:prstGeom prst="roundRect">
+            <a:avLst>
+              <a:gd name="adj" fmla="val 5882"/>
+            </a:avLst>
+          </a:prstGeom>
+          <a:solidFill>
+            <a:srgbClr val="E6F2EF"/>
+          </a:solidFill>
+          <a:ln w="9525">
+            <a:solidFill>
+              <a:srgbClr val="D7DDE2"/>
+            </a:solidFill>
+            <a:prstDash val="solid"/>
+          </a:ln>
+          <a:effectLst>
+            <a:outerShdw sx="100000" sy="100000" kx="0" ky="0" algn="bl" rotWithShape="0" blurRad="127000" dist="25400" dir="5400000">
+              <a:srgbClr val="8899A6">
+                <a:alpha val="18000"/>
+              </a:srgbClr>
+            </a:outerShdw>
+          </a:effectLst>
+        </p:spPr>
+      </p:sp>
+      <p:sp>
+        <p:nvSpPr>
+          <p:cNvPr id="6" name="Text 4"/>
+          <p:cNvSpPr txBox="1"/>
+          <p:nvPr/>
+        </p:nvSpPr>
+        <p:spPr>
+          <a:xfrm>
+            <a:off x="822960" y="1883664"/>
+            <a:ext cx="2286000" cy="274320"/>
+          </a:xfrm>
+          <a:prstGeom prst="rect">
+            <a:avLst/>
+          </a:prstGeom>
+          <a:noFill/>
+          <a:ln/>
+        </p:spPr>
+        <p:txBody>
+          <a:bodyPr wrap="square" lIns="0" tIns="0" rIns="0" bIns="0" rtlCol="0" anchor="ctr"/>
+          <a:lstStyle/>
+          <a:p>
+            <a:pPr indent="0" marL="0">
+              <a:buNone/>
+            </a:pPr>
+            <a:r>
+              <a:rPr lang="en-US" sz="1300" b="1" dirty="0">
+                <a:solidFill>
+                  <a:srgbClr val="0E7C66"/>
+                </a:solidFill>
+                <a:latin typeface="Calibri" pitchFamily="34" charset="0"/>
+                <a:ea typeface="Calibri" pitchFamily="34" charset="-122"/>
+                <a:cs typeface="Calibri" pitchFamily="34" charset="-120"/>
+              </a:rPr>
+              <a:t>This port</a:t>
+            </a:r>
+            <a:endParaRPr lang="en-US" sz="1300" dirty="0"/>
+          </a:p>
+        </p:txBody>
+      </p:sp>
+      <p:sp>
+        <p:nvSpPr>
+          <p:cNvPr id="7" name="Text 5"/>
+          <p:cNvSpPr txBox="1"/>
+          <p:nvPr/>
+        </p:nvSpPr>
+        <p:spPr>
+          <a:xfrm>
+            <a:off x="822960" y="2194560"/>
+            <a:ext cx="2286000" cy="402336"/>
+          </a:xfrm>
+          <a:prstGeom prst="rect">
+            <a:avLst/>
+          </a:prstGeom>
+          <a:noFill/>
+          <a:ln/>
+        </p:spPr>
+        <p:txBody>
+          <a:bodyPr wrap="square" lIns="0" tIns="0" rIns="0" bIns="0" rtlCol="0" anchor="ctr"/>
+          <a:lstStyle/>
+          <a:p>
+            <a:pPr indent="0" marL="0">
+              <a:buNone/>
+            </a:pPr>
+            <a:r>
+              <a:rPr lang="en-US" sz="1900" b="1" dirty="0">
+                <a:solidFill>
+                  <a:srgbClr val="0E7C66"/>
+                </a:solidFill>
+                <a:latin typeface="Cambria" pitchFamily="34" charset="0"/>
+                <a:ea typeface="Cambria" pitchFamily="34" charset="-122"/>
+                <a:cs typeface="Cambria" pitchFamily="34" charset="-120"/>
+              </a:rPr>
+              <a:t>2.290 / 2.268x</a:t>
+            </a:r>
+            <a:endParaRPr lang="en-US" sz="1900" dirty="0"/>
+          </a:p>
+        </p:txBody>
+      </p:sp>
+      <p:sp>
+        <p:nvSpPr>
+          <p:cNvPr id="8" name="Text 6"/>
+          <p:cNvSpPr txBox="1"/>
+          <p:nvPr/>
+        </p:nvSpPr>
+        <p:spPr>
+          <a:xfrm>
+            <a:off x="3310128" y="1920240"/>
+            <a:ext cx="8183880" cy="676656"/>
+          </a:xfrm>
+          <a:prstGeom prst="rect">
+            <a:avLst/>
+          </a:prstGeom>
+          <a:noFill/>
+          <a:ln/>
+        </p:spPr>
+        <p:txBody>
+          <a:bodyPr wrap="square" lIns="0" tIns="0" rIns="0" bIns="0" rtlCol="0" anchor="ctr"/>
+          <a:lstStyle/>
+          <a:p>
+            <a:pPr indent="0" marL="0">
+              <a:lnSpc>
+                <a:spcPts val="1600"/>
+              </a:lnSpc>
+              <a:buNone/>
+            </a:pPr>
+            <a:r>
+              <a:rPr lang="en-US" sz="1200" dirty="0">
+                <a:solidFill>
+                  <a:srgbClr val="3A4750"/>
+                </a:solidFill>
+                <a:latin typeface="Calibri" pitchFamily="34" charset="0"/>
+                <a:ea typeface="Calibri" pitchFamily="34" charset="-122"/>
+                <a:cs typeface="Calibri" pitchFamily="34" charset="-120"/>
+              </a:rPr>
+              <a:t>the AlgoTuner system message with upstream’s own bullet list of package names, no gloss on any of them</a:t>
+            </a:r>
+            <a:endParaRPr lang="en-US" sz="1200" dirty="0"/>
+          </a:p>
+        </p:txBody>
+      </p:sp>
+      <p:sp>
+        <p:nvSpPr>
+          <p:cNvPr id="9" name="Shape 7"/>
+          <p:cNvSpPr/>
+          <p:nvPr/>
+        </p:nvSpPr>
+        <p:spPr>
+          <a:xfrm>
+            <a:off x="566928" y="2807208"/>
+            <a:ext cx="11055096" cy="932688"/>
+          </a:xfrm>
+          <a:prstGeom prst="roundRect">
+            <a:avLst>
+              <a:gd name="adj" fmla="val 5882"/>
+            </a:avLst>
+          </a:prstGeom>
+          <a:solidFill>
+            <a:srgbClr val="EEF1F3"/>
+          </a:solidFill>
+          <a:ln w="9525">
+            <a:solidFill>
+              <a:srgbClr val="D7DDE2"/>
+            </a:solidFill>
+            <a:prstDash val="solid"/>
+          </a:ln>
+          <a:effectLst>
+            <a:outerShdw sx="100000" sy="100000" kx="0" ky="0" algn="bl" rotWithShape="0" blurRad="127000" dist="25400" dir="5400000">
+              <a:srgbClr val="8899A6">
+                <a:alpha val="18000"/>
+              </a:srgbClr>
+            </a:outerShdw>
+          </a:effectLst>
+        </p:spPr>
+      </p:sp>
+      <p:sp>
+        <p:nvSpPr>
+          <p:cNvPr id="10" name="Text 8"/>
+          <p:cNvSpPr txBox="1"/>
+          <p:nvPr/>
+        </p:nvSpPr>
+        <p:spPr>
+          <a:xfrm>
+            <a:off x="822960" y="2916936"/>
+            <a:ext cx="2286000" cy="274320"/>
+          </a:xfrm>
+          <a:prstGeom prst="rect">
+            <a:avLst/>
+          </a:prstGeom>
+          <a:noFill/>
+          <a:ln/>
+        </p:spPr>
+        <p:txBody>
+          <a:bodyPr wrap="square" lIns="0" tIns="0" rIns="0" bIns="0" rtlCol="0" anchor="ctr"/>
+          <a:lstStyle/>
+          <a:p>
+            <a:pPr indent="0" marL="0">
+              <a:buNone/>
+            </a:pPr>
+            <a:r>
+              <a:rPr lang="en-US" sz="1300" b="1" dirty="0">
+                <a:solidFill>
+                  <a:srgbClr val="10161C"/>
+                </a:solidFill>
+                <a:latin typeface="Calibri" pitchFamily="34" charset="0"/>
+                <a:ea typeface="Calibri" pitchFamily="34" charset="-122"/>
+                <a:cs typeface="Calibri" pitchFamily="34" charset="-120"/>
+              </a:rPr>
+              <a:t>OpenEvolve ph.1</a:t>
+            </a:r>
+            <a:endParaRPr lang="en-US" sz="1300" dirty="0"/>
+          </a:p>
+        </p:txBody>
+      </p:sp>
+      <p:sp>
+        <p:nvSpPr>
+          <p:cNvPr id="11" name="Text 9"/>
+          <p:cNvSpPr txBox="1"/>
+          <p:nvPr/>
+        </p:nvSpPr>
+        <p:spPr>
+          <a:xfrm>
+            <a:off x="822960" y="3227832"/>
+            <a:ext cx="2286000" cy="402336"/>
+          </a:xfrm>
+          <a:prstGeom prst="rect">
+            <a:avLst/>
+          </a:prstGeom>
+          <a:noFill/>
+          <a:ln/>
+        </p:spPr>
+        <p:txBody>
+          <a:bodyPr wrap="square" lIns="0" tIns="0" rIns="0" bIns="0" rtlCol="0" anchor="ctr"/>
+          <a:lstStyle/>
+          <a:p>
+            <a:pPr indent="0" marL="0">
+              <a:buNone/>
+            </a:pPr>
+            <a:r>
+              <a:rPr lang="en-US" sz="2400" b="1" dirty="0">
+                <a:solidFill>
+                  <a:srgbClr val="3A4750"/>
+                </a:solidFill>
+                <a:latin typeface="Cambria" pitchFamily="34" charset="0"/>
+                <a:ea typeface="Cambria" pitchFamily="34" charset="-122"/>
+                <a:cs typeface="Cambria" pitchFamily="34" charset="-120"/>
+              </a:rPr>
+              <a:t>1.381x</a:t>
+            </a:r>
+            <a:endParaRPr lang="en-US" sz="2400" dirty="0"/>
+          </a:p>
+        </p:txBody>
+      </p:sp>
+      <p:sp>
+        <p:nvSpPr>
+          <p:cNvPr id="12" name="Text 10"/>
+          <p:cNvSpPr txBox="1"/>
+          <p:nvPr/>
+        </p:nvSpPr>
+        <p:spPr>
+          <a:xfrm>
+            <a:off x="3310128" y="2953512"/>
+            <a:ext cx="8183880" cy="676656"/>
+          </a:xfrm>
+          <a:prstGeom prst="rect">
+            <a:avLst/>
+          </a:prstGeom>
+          <a:noFill/>
+          <a:ln/>
+        </p:spPr>
+        <p:txBody>
+          <a:bodyPr wrap="square" lIns="0" tIns="0" rIns="0" bIns="0" rtlCol="0" anchor="ctr"/>
+          <a:lstStyle/>
+          <a:p>
+            <a:pPr indent="0" marL="0">
+              <a:lnSpc>
+                <a:spcPts val="1600"/>
+              </a:lnSpc>
+              <a:buNone/>
+            </a:pPr>
+            <a:r>
+              <a:rPr lang="en-US" sz="1200" dirty="0">
+                <a:solidFill>
+                  <a:srgbClr val="3A4750"/>
+                </a:solidFill>
+                <a:latin typeface="Calibri" pitchFamily="34" charset="0"/>
+                <a:ea typeface="Calibri" pitchFamily="34" charset="-122"/>
+                <a:cs typeface="Calibri" pitchFamily="34" charset="-120"/>
+              </a:rPr>
+              <a:t>“basic library mentions without implementation details”</a:t>
+            </a:r>
+            <a:endParaRPr lang="en-US" sz="1200" dirty="0"/>
+          </a:p>
+        </p:txBody>
+      </p:sp>
+      <p:sp>
+        <p:nvSpPr>
+          <p:cNvPr id="13" name="Shape 11"/>
+          <p:cNvSpPr/>
+          <p:nvPr/>
+        </p:nvSpPr>
+        <p:spPr>
+          <a:xfrm>
+            <a:off x="566928" y="3840480"/>
+            <a:ext cx="11055096" cy="932688"/>
+          </a:xfrm>
+          <a:prstGeom prst="roundRect">
+            <a:avLst>
+              <a:gd name="adj" fmla="val 5882"/>
+            </a:avLst>
+          </a:prstGeom>
+          <a:solidFill>
+            <a:srgbClr val="EEF1F3"/>
+          </a:solidFill>
+          <a:ln w="9525">
+            <a:solidFill>
+              <a:srgbClr val="D7DDE2"/>
+            </a:solidFill>
+            <a:prstDash val="solid"/>
+          </a:ln>
+          <a:effectLst>
+            <a:outerShdw sx="100000" sy="100000" kx="0" ky="0" algn="bl" rotWithShape="0" blurRad="127000" dist="25400" dir="5400000">
+              <a:srgbClr val="8899A6">
+                <a:alpha val="18000"/>
+              </a:srgbClr>
+            </a:outerShdw>
+          </a:effectLst>
+        </p:spPr>
+      </p:sp>
+      <p:sp>
+        <p:nvSpPr>
+          <p:cNvPr id="14" name="Text 12"/>
+          <p:cNvSpPr txBox="1"/>
+          <p:nvPr/>
+        </p:nvSpPr>
+        <p:spPr>
+          <a:xfrm>
+            <a:off x="822960" y="3950208"/>
+            <a:ext cx="2286000" cy="274320"/>
+          </a:xfrm>
+          <a:prstGeom prst="rect">
+            <a:avLst/>
+          </a:prstGeom>
+          <a:noFill/>
+          <a:ln/>
+        </p:spPr>
+        <p:txBody>
+          <a:bodyPr wrap="square" lIns="0" tIns="0" rIns="0" bIns="0" rtlCol="0" anchor="ctr"/>
+          <a:lstStyle/>
+          <a:p>
+            <a:pPr indent="0" marL="0">
+              <a:buNone/>
+            </a:pPr>
+            <a:r>
+              <a:rPr lang="en-US" sz="1300" b="1" dirty="0">
+                <a:solidFill>
+                  <a:srgbClr val="10161C"/>
+                </a:solidFill>
+                <a:latin typeface="Calibri" pitchFamily="34" charset="0"/>
+                <a:ea typeface="Calibri" pitchFamily="34" charset="-122"/>
+                <a:cs typeface="Calibri" pitchFamily="34" charset="-120"/>
+              </a:rPr>
+              <a:t>OpenEvolve ph.3</a:t>
+            </a:r>
+            <a:endParaRPr lang="en-US" sz="1300" dirty="0"/>
+          </a:p>
+        </p:txBody>
+      </p:sp>
+      <p:sp>
+        <p:nvSpPr>
+          <p:cNvPr id="15" name="Text 13"/>
+          <p:cNvSpPr txBox="1"/>
+          <p:nvPr/>
+        </p:nvSpPr>
+        <p:spPr>
+          <a:xfrm>
+            <a:off x="822960" y="4261104"/>
+            <a:ext cx="2286000" cy="402336"/>
+          </a:xfrm>
+          <a:prstGeom prst="rect">
+            <a:avLst/>
+          </a:prstGeom>
+          <a:noFill/>
+          <a:ln/>
+        </p:spPr>
+        <p:txBody>
+          <a:bodyPr wrap="square" lIns="0" tIns="0" rIns="0" bIns="0" rtlCol="0" anchor="ctr"/>
+          <a:lstStyle/>
+          <a:p>
+            <a:pPr indent="0" marL="0">
+              <a:buNone/>
+            </a:pPr>
+            <a:r>
+              <a:rPr lang="en-US" sz="2400" b="1" dirty="0">
+                <a:solidFill>
+                  <a:srgbClr val="3A4750"/>
+                </a:solidFill>
+                <a:latin typeface="Cambria" pitchFamily="34" charset="0"/>
+                <a:ea typeface="Cambria" pitchFamily="34" charset="-122"/>
+                <a:cs typeface="Cambria" pitchFamily="34" charset="-120"/>
+              </a:rPr>
+              <a:t>1.886x</a:t>
+            </a:r>
+            <a:endParaRPr lang="en-US" sz="2400" dirty="0"/>
+          </a:p>
+        </p:txBody>
+      </p:sp>
+      <p:sp>
+        <p:nvSpPr>
+          <p:cNvPr id="16" name="Text 14"/>
+          <p:cNvSpPr txBox="1"/>
+          <p:nvPr/>
+        </p:nvSpPr>
+        <p:spPr>
+          <a:xfrm>
+            <a:off x="3310128" y="3986784"/>
+            <a:ext cx="8183880" cy="676656"/>
+          </a:xfrm>
+          <a:prstGeom prst="rect">
+            <a:avLst/>
+          </a:prstGeom>
+          <a:noFill/>
+          <a:ln/>
+        </p:spPr>
+        <p:txBody>
+          <a:bodyPr wrap="square" lIns="0" tIns="0" rIns="0" bIns="0" rtlCol="0" anchor="ctr"/>
+          <a:lstStyle/>
+          <a:p>
+            <a:pPr indent="0" marL="0">
+              <a:lnSpc>
+                <a:spcPts val="1600"/>
+              </a:lnSpc>
+              <a:buNone/>
+            </a:pPr>
+            <a:r>
+              <a:rPr lang="en-US" sz="1200" dirty="0">
+                <a:solidFill>
+                  <a:srgbClr val="3A4750"/>
+                </a:solidFill>
+                <a:latin typeface="Calibri" pitchFamily="34" charset="0"/>
+                <a:ea typeface="Calibri" pitchFamily="34" charset="-122"/>
+                <a:cs typeface="Calibri" pitchFamily="34" charset="-120"/>
+              </a:rPr>
+              <a:t>detailed implementation hints written from manual discoveries; their note: “best theoretical performance but raised overfitting concerns”</a:t>
+            </a:r>
+            <a:endParaRPr lang="en-US" sz="1200" dirty="0"/>
+          </a:p>
+        </p:txBody>
+      </p:sp>
+      <p:sp>
+        <p:nvSpPr>
+          <p:cNvPr id="17" name="Shape 15"/>
+          <p:cNvSpPr/>
+          <p:nvPr/>
+        </p:nvSpPr>
+        <p:spPr>
+          <a:xfrm>
+            <a:off x="566928" y="4873752"/>
+            <a:ext cx="11055096" cy="932688"/>
+          </a:xfrm>
+          <a:prstGeom prst="roundRect">
+            <a:avLst>
+              <a:gd name="adj" fmla="val 5882"/>
+            </a:avLst>
+          </a:prstGeom>
+          <a:solidFill>
+            <a:srgbClr val="EEF1F3"/>
+          </a:solidFill>
+          <a:ln w="9525">
+            <a:solidFill>
+              <a:srgbClr val="D7DDE2"/>
+            </a:solidFill>
+            <a:prstDash val="solid"/>
+          </a:ln>
+          <a:effectLst>
+            <a:outerShdw sx="100000" sy="100000" kx="0" ky="0" algn="bl" rotWithShape="0" blurRad="127000" dist="25400" dir="5400000">
+              <a:srgbClr val="8899A6">
+                <a:alpha val="18000"/>
+              </a:srgbClr>
+            </a:outerShdw>
+          </a:effectLst>
+        </p:spPr>
+      </p:sp>
+      <p:sp>
+        <p:nvSpPr>
+          <p:cNvPr id="18" name="Text 16"/>
+          <p:cNvSpPr txBox="1"/>
+          <p:nvPr/>
+        </p:nvSpPr>
+        <p:spPr>
+          <a:xfrm>
+            <a:off x="822960" y="4983480"/>
+            <a:ext cx="2286000" cy="274320"/>
+          </a:xfrm>
+          <a:prstGeom prst="rect">
+            <a:avLst/>
+          </a:prstGeom>
+          <a:noFill/>
+          <a:ln/>
+        </p:spPr>
+        <p:txBody>
+          <a:bodyPr wrap="square" lIns="0" tIns="0" rIns="0" bIns="0" rtlCol="0" anchor="ctr"/>
+          <a:lstStyle/>
+          <a:p>
+            <a:pPr indent="0" marL="0">
+              <a:buNone/>
+            </a:pPr>
+            <a:r>
+              <a:rPr lang="en-US" sz="1300" b="1" dirty="0">
+                <a:solidFill>
+                  <a:srgbClr val="10161C"/>
+                </a:solidFill>
+                <a:latin typeface="Calibri" pitchFamily="34" charset="0"/>
+                <a:ea typeface="Calibri" pitchFamily="34" charset="-122"/>
+                <a:cs typeface="Calibri" pitchFamily="34" charset="-120"/>
+              </a:rPr>
+              <a:t>OpenEvolve ph.4</a:t>
+            </a:r>
+            <a:endParaRPr lang="en-US" sz="1300" dirty="0"/>
+          </a:p>
+        </p:txBody>
+      </p:sp>
+      <p:sp>
+        <p:nvSpPr>
+          <p:cNvPr id="19" name="Text 17"/>
+          <p:cNvSpPr txBox="1"/>
+          <p:nvPr/>
+        </p:nvSpPr>
+        <p:spPr>
+          <a:xfrm>
+            <a:off x="822960" y="5294376"/>
+            <a:ext cx="2286000" cy="402336"/>
+          </a:xfrm>
+          <a:prstGeom prst="rect">
+            <a:avLst/>
+          </a:prstGeom>
+          <a:noFill/>
+          <a:ln/>
+        </p:spPr>
+        <p:txBody>
+          <a:bodyPr wrap="square" lIns="0" tIns="0" rIns="0" bIns="0" rtlCol="0" anchor="ctr"/>
+          <a:lstStyle/>
+          <a:p>
+            <a:pPr indent="0" marL="0">
+              <a:buNone/>
+            </a:pPr>
+            <a:r>
+              <a:rPr lang="en-US" sz="2400" b="1" dirty="0">
+                <a:solidFill>
+                  <a:srgbClr val="C2872B"/>
+                </a:solidFill>
+                <a:latin typeface="Cambria" pitchFamily="34" charset="0"/>
+                <a:ea typeface="Cambria" pitchFamily="34" charset="-122"/>
+                <a:cs typeface="Cambria" pitchFamily="34" charset="-120"/>
+              </a:rPr>
+              <a:t>1.984x</a:t>
+            </a:r>
+            <a:endParaRPr lang="en-US" sz="2400" dirty="0"/>
+          </a:p>
+        </p:txBody>
+      </p:sp>
+      <p:sp>
+        <p:nvSpPr>
+          <p:cNvPr id="20" name="Text 18"/>
+          <p:cNvSpPr txBox="1"/>
+          <p:nvPr/>
+        </p:nvSpPr>
+        <p:spPr>
+          <a:xfrm>
+            <a:off x="3310128" y="5020056"/>
+            <a:ext cx="8183880" cy="676656"/>
+          </a:xfrm>
+          <a:prstGeom prst="rect">
+            <a:avLst/>
+          </a:prstGeom>
+          <a:noFill/>
+          <a:ln/>
+        </p:spPr>
+        <p:txBody>
+          <a:bodyPr wrap="square" lIns="0" tIns="0" rIns="0" bIns="0" rtlCol="0" anchor="ctr"/>
+          <a:lstStyle/>
+          <a:p>
+            <a:pPr indent="0" marL="0">
+              <a:lnSpc>
+                <a:spcPts val="1600"/>
+              </a:lnSpc>
+              <a:buNone/>
+            </a:pPr>
+            <a:r>
+              <a:rPr lang="en-US" sz="1200" dirty="0">
+                <a:solidFill>
+                  <a:srgbClr val="3A4750"/>
+                </a:solidFill>
+                <a:latin typeface="Calibri" pitchFamily="34" charset="0"/>
+                <a:ea typeface="Calibri" pitchFamily="34" charset="-122"/>
+                <a:cs typeface="Calibri" pitchFamily="34" charset="-120"/>
+              </a:rPr>
+              <a:t>generic hints plus per-task config tuning — but the block still reads “JAX … can provide 100x+ speedups” and “Lower-order interpolation: Try order=0,1,2,3”</a:t>
+            </a:r>
+            <a:endParaRPr lang="en-US" sz="1200" dirty="0"/>
+          </a:p>
+        </p:txBody>
+      </p:sp>
+      <p:sp>
+        <p:nvSpPr>
+          <p:cNvPr id="21" name="Shape 19"/>
+          <p:cNvSpPr/>
+          <p:nvPr/>
+        </p:nvSpPr>
+        <p:spPr>
+          <a:xfrm>
+            <a:off x="566928" y="6053328"/>
+            <a:ext cx="11055096" cy="768096"/>
+          </a:xfrm>
+          <a:prstGeom prst="roundRect">
+            <a:avLst>
+              <a:gd name="adj" fmla="val 5952"/>
+            </a:avLst>
+          </a:prstGeom>
+          <a:solidFill>
+            <a:srgbClr val="10161C"/>
+          </a:solidFill>
+          <a:ln w="12700">
+            <a:solidFill>
+              <a:srgbClr val="10161C"/>
+            </a:solidFill>
+            <a:prstDash val="solid"/>
+          </a:ln>
+        </p:spPr>
+      </p:sp>
+      <p:sp>
+        <p:nvSpPr>
+          <p:cNvPr id="22" name="Text 20"/>
+          <p:cNvSpPr txBox="1"/>
+          <p:nvPr/>
+        </p:nvSpPr>
+        <p:spPr>
+          <a:xfrm>
+            <a:off x="804672" y="6126480"/>
+            <a:ext cx="10579608" cy="621792"/>
+          </a:xfrm>
+          <a:prstGeom prst="rect">
+            <a:avLst/>
+          </a:prstGeom>
+          <a:noFill/>
+          <a:ln/>
+        </p:spPr>
+        <p:txBody>
+          <a:bodyPr wrap="square" lIns="0" tIns="0" rIns="0" bIns="0" rtlCol="0" anchor="ctr"/>
+          <a:lstStyle/>
+          <a:p>
+            <a:pPr indent="0" marL="0">
+              <a:lnSpc>
+                <a:spcPts val="1400"/>
+              </a:lnSpc>
+              <a:buNone/>
+            </a:pPr>
+            <a:r>
+              <a:rPr lang="en-US" sz="1050" dirty="0">
+                <a:solidFill>
+                  <a:srgbClr val="D6E0E4"/>
+                </a:solidFill>
+                <a:latin typeface="Calibri" pitchFamily="34" charset="0"/>
+                <a:ea typeface="Calibri" pitchFamily="34" charset="-122"/>
+                <a:cs typeface="Calibri" pitchFamily="34" charset="-120"/>
+              </a:rPr>
+              <a:t>Their phases are not ordered by hint strength: the specific-hints arm (1.886x) scored below the generic one (1.984x), and they flagged it for overfitting. What matters for reading the table is that even the 1.984x prompt names JAX with a promised 100x+ and tells the model to try lower interpolation orders — which is most of the answer to affine_transform_2d. This port’s arm carries neither, and no bare-versus-hinted pair was run on these eight tasks, so no number here compares the two directly.</a:t>
+            </a:r>
+            <a:endParaRPr lang="en-US" sz="1050" dirty="0"/>
+          </a:p>
+        </p:txBody>
+      </p:sp>
+    </p:spTree>
+  </p:cSld>
+  <p:clrMapOvr>
+    <a:masterClrMapping/>
+  </p:clrMapOvr>
+</p:sld>
+</file>
+
+<file path=ppt/slides/slide7.xml><?xml version="1.0" encoding="utf-8"?>
+<p:sld xmlns:a="http://schemas.openxmlformats.org/drawingml/2006/main" xmlns:r="http://schemas.openxmlformats.org/officeDocument/2006/relationships" xmlns:p="http://schemas.openxmlformats.org/presentationml/2006/main">
+  <p:cSld name="Slide 7">
+    <p:spTree>
+      <p:nvGrpSpPr>
+        <p:cNvPr id="1" name=""/>
+        <p:cNvGrpSpPr/>
+        <p:nvPr/>
+      </p:nvGrpSpPr>
+      <p:grpSpPr>
+        <a:xfrm>
+          <a:off x="0" y="0"/>
+          <a:ext cx="0" cy="0"/>
+          <a:chOff x="0" y="0"/>
+          <a:chExt cx="0" cy="0"/>
+        </a:xfrm>
+      </p:grpSpPr>
+      <p:sp>
+        <p:nvSpPr>
+          <p:cNvPr id="2" name="Text 0"/>
+          <p:cNvSpPr txBox="1"/>
+          <p:nvPr/>
+        </p:nvSpPr>
+        <p:spPr>
+          <a:xfrm>
+            <a:off x="566928" y="384048"/>
+            <a:ext cx="11055096" cy="237744"/>
+          </a:xfrm>
+          <a:prstGeom prst="rect">
+            <a:avLst/>
+          </a:prstGeom>
+          <a:noFill/>
+          <a:ln/>
+        </p:spPr>
+        <p:txBody>
+          <a:bodyPr wrap="square" lIns="0" tIns="0" rIns="0" bIns="0" rtlCol="0" anchor="ctr"/>
+          <a:lstStyle/>
+          <a:p>
+            <a:pPr indent="0" marL="0">
+              <a:buNone/>
+            </a:pPr>
+            <a:r>
+              <a:rPr lang="en-US" sz="1100" b="1" spc="220" kern="0" dirty="0">
+                <a:solidFill>
+                  <a:srgbClr val="0E7C66"/>
+                </a:solidFill>
+                <a:latin typeface="Calibri" pitchFamily="34" charset="0"/>
+                <a:ea typeface="Calibri" pitchFamily="34" charset="-122"/>
+                <a:cs typeface="Calibri" pitchFamily="34" charset="-120"/>
+              </a:rPr>
               <a:t>EVERYTHING ELSE PUBLISHED ON ALGOTUNE</a:t>
             </a:r>
             <a:endParaRPr lang="en-US" sz="1100" dirty="0"/>
@@ -20490,7 +22837,7 @@
       </p:sp>
       <p:graphicFrame>
         <p:nvGraphicFramePr>
-          <p:cNvPr id="7" name="Table 0"/>
+          <p:cNvPr id="8" name="Table 0"/>
           <p:cNvGraphicFramePr>
             <a:graphicFrameLocks noGrp="1"/>
           </p:cNvGraphicFramePr>
@@ -23055,9 +25402,9 @@
 </p:sld>
 </file>
 
-<file path=ppt/slides/slide7.xml><?xml version="1.0" encoding="utf-8"?>
+<file path=ppt/slides/slide8.xml><?xml version="1.0" encoding="utf-8"?>
 <p:sld xmlns:a="http://schemas.openxmlformats.org/drawingml/2006/main" xmlns:r="http://schemas.openxmlformats.org/officeDocument/2006/relationships" xmlns:p="http://schemas.openxmlformats.org/presentationml/2006/main">
-  <p:cSld name="Slide 7">
+  <p:cSld name="Slide 8">
     <p:spTree>
       <p:nvGrpSpPr>
         <p:cNvPr id="1" name=""/>
@@ -23194,7 +25541,7 @@
       </p:sp>
       <p:graphicFrame>
         <p:nvGraphicFramePr>
-          <p:cNvPr id="8" name="Table 0"/>
+          <p:cNvPr id="9" name="Table 0"/>
           <p:cNvGraphicFramePr>
             <a:graphicFrameLocks noGrp="1"/>
           </p:cNvGraphicFramePr>
@@ -30138,9 +32485,9 @@
 </p:sld>
 </file>
 
-<file path=ppt/slides/slide8.xml><?xml version="1.0" encoding="utf-8"?>
+<file path=ppt/slides/slide9.xml><?xml version="1.0" encoding="utf-8"?>
 <p:sld xmlns:a="http://schemas.openxmlformats.org/drawingml/2006/main" xmlns:r="http://schemas.openxmlformats.org/officeDocument/2006/relationships" xmlns:p="http://schemas.openxmlformats.org/presentationml/2006/main">
-  <p:cSld name="Slide 8">
+  <p:cSld name="Slide 9">
     <p:spTree>
       <p:nvGrpSpPr>
         <p:cNvPr id="1" name=""/>
@@ -30277,7 +32624,7 @@
       </p:sp>
       <p:graphicFrame>
         <p:nvGraphicFramePr>
-          <p:cNvPr id="9" name="Table 0"/>
+          <p:cNvPr id="10" name="Table 0"/>
           <p:cNvGraphicFramePr>
             <a:graphicFrameLocks noGrp="1"/>
           </p:cNvGraphicFramePr>
@@ -31997,1018 +34344,6 @@
               <a:t>Same configuration throughout; only --iterations and the staleness policy changed.</a:t>
             </a:r>
             <a:endParaRPr lang="en-US" sz="950" dirty="0"/>
-          </a:p>
-        </p:txBody>
-      </p:sp>
-    </p:spTree>
-  </p:cSld>
-  <p:clrMapOvr>
-    <a:masterClrMapping/>
-  </p:clrMapOvr>
-</p:sld>
-</file>
-
-<file path=ppt/slides/slide9.xml><?xml version="1.0" encoding="utf-8"?>
-<p:sld xmlns:a="http://schemas.openxmlformats.org/drawingml/2006/main" xmlns:r="http://schemas.openxmlformats.org/officeDocument/2006/relationships" xmlns:p="http://schemas.openxmlformats.org/presentationml/2006/main">
-  <p:cSld name="Slide 9">
-    <p:spTree>
-      <p:nvGrpSpPr>
-        <p:cNvPr id="1" name=""/>
-        <p:cNvGrpSpPr/>
-        <p:nvPr/>
-      </p:nvGrpSpPr>
-      <p:grpSpPr>
-        <a:xfrm>
-          <a:off x="0" y="0"/>
-          <a:ext cx="0" cy="0"/>
-          <a:chOff x="0" y="0"/>
-          <a:chExt cx="0" cy="0"/>
-        </a:xfrm>
-      </p:grpSpPr>
-      <p:sp>
-        <p:nvSpPr>
-          <p:cNvPr id="2" name="Text 0"/>
-          <p:cNvSpPr txBox="1"/>
-          <p:nvPr/>
-        </p:nvSpPr>
-        <p:spPr>
-          <a:xfrm>
-            <a:off x="566928" y="384048"/>
-            <a:ext cx="11055096" cy="237744"/>
-          </a:xfrm>
-          <a:prstGeom prst="rect">
-            <a:avLst/>
-          </a:prstGeom>
-          <a:noFill/>
-          <a:ln/>
-        </p:spPr>
-        <p:txBody>
-          <a:bodyPr wrap="square" lIns="0" tIns="0" rIns="0" bIns="0" rtlCol="0" anchor="ctr"/>
-          <a:lstStyle/>
-          <a:p>
-            <a:pPr indent="0" marL="0">
-              <a:buNone/>
-            </a:pPr>
-            <a:r>
-              <a:rPr lang="en-US" sz="1100" b="1" spc="220" kern="0" dirty="0">
-                <a:solidFill>
-                  <a:srgbClr val="0E7C66"/>
-                </a:solidFill>
-                <a:latin typeface="Calibri" pitchFamily="34" charset="0"/>
-                <a:ea typeface="Calibri" pitchFamily="34" charset="-122"/>
-                <a:cs typeface="Calibri" pitchFamily="34" charset="-120"/>
-              </a:rPr>
-              <a:t>THE FINDING</a:t>
-            </a:r>
-            <a:endParaRPr lang="en-US" sz="1100" dirty="0"/>
-          </a:p>
-        </p:txBody>
-      </p:sp>
-      <p:sp>
-        <p:nvSpPr>
-          <p:cNvPr id="3" name="Text 1"/>
-          <p:cNvSpPr txBox="1"/>
-          <p:nvPr/>
-        </p:nvSpPr>
-        <p:spPr>
-          <a:xfrm>
-            <a:off x="566928" y="658368"/>
-            <a:ext cx="11055096" cy="566928"/>
-          </a:xfrm>
-          <a:prstGeom prst="rect">
-            <a:avLst/>
-          </a:prstGeom>
-          <a:noFill/>
-          <a:ln/>
-        </p:spPr>
-        <p:txBody>
-          <a:bodyPr wrap="square" lIns="0" tIns="0" rIns="0" bIns="0" rtlCol="0" anchor="ctr"/>
-          <a:lstStyle/>
-          <a:p>
-            <a:pPr indent="0" marL="0">
-              <a:buNone/>
-            </a:pPr>
-            <a:r>
-              <a:rPr lang="en-US" sz="3300" b="1" dirty="0">
-                <a:solidFill>
-                  <a:srgbClr val="10161C"/>
-                </a:solidFill>
-                <a:latin typeface="Cambria" pitchFamily="34" charset="0"/>
-                <a:ea typeface="Cambria" pitchFamily="34" charset="-122"/>
-                <a:cs typeface="Cambria" pitchFamily="34" charset="-120"/>
-              </a:rPr>
-              <a:t>Half the comparison is not the same problem</a:t>
-            </a:r>
-            <a:endParaRPr lang="en-US" sz="3300" dirty="0"/>
-          </a:p>
-        </p:txBody>
-      </p:sp>
-      <p:sp>
-        <p:nvSpPr>
-          <p:cNvPr id="4" name="Text 2"/>
-          <p:cNvSpPr txBox="1"/>
-          <p:nvPr/>
-        </p:nvSpPr>
-        <p:spPr>
-          <a:xfrm>
-            <a:off x="566928" y="1243584"/>
-            <a:ext cx="11055096" cy="438912"/>
-          </a:xfrm>
-          <a:prstGeom prst="rect">
-            <a:avLst/>
-          </a:prstGeom>
-          <a:noFill/>
-          <a:ln/>
-        </p:spPr>
-        <p:txBody>
-          <a:bodyPr wrap="square" lIns="0" tIns="0" rIns="0" bIns="0" rtlCol="0" anchor="ctr"/>
-          <a:lstStyle/>
-          <a:p>
-            <a:pPr indent="0" marL="0">
-              <a:lnSpc>
-                <a:spcPts val="1800"/>
-              </a:lnSpc>
-              <a:buNone/>
-            </a:pPr>
-            <a:r>
-              <a:rPr lang="en-US" sz="1350" dirty="0">
-                <a:solidFill>
-                  <a:srgbClr val="3A4750"/>
-                </a:solidFill>
-                <a:latin typeface="Calibri" pitchFamily="34" charset="0"/>
-                <a:ea typeface="Calibri" pitchFamily="34" charset="-122"/>
-                <a:cs typeface="Calibri" pitchFamily="34" charset="-120"/>
-              </a:rPr>
-              <a:t>AlgoTune’s own 14–18 models, at the calibrated n, bracket what is achievable. Three systems fall outside the bracket — in both directions.</a:t>
-            </a:r>
-            <a:endParaRPr lang="en-US" sz="1350" dirty="0"/>
-          </a:p>
-        </p:txBody>
-      </p:sp>
-      <p:sp>
-        <p:nvSpPr>
-          <p:cNvPr id="5" name="Text 3"/>
-          <p:cNvSpPr txBox="1"/>
-          <p:nvPr/>
-        </p:nvSpPr>
-        <p:spPr>
-          <a:xfrm>
-            <a:off x="566928" y="1847088"/>
-            <a:ext cx="5394960" cy="274320"/>
-          </a:xfrm>
-          <a:prstGeom prst="rect">
-            <a:avLst/>
-          </a:prstGeom>
-          <a:noFill/>
-          <a:ln/>
-        </p:spPr>
-        <p:txBody>
-          <a:bodyPr wrap="square" lIns="0" tIns="0" rIns="0" bIns="0" rtlCol="0" anchor="ctr"/>
-          <a:lstStyle/>
-          <a:p>
-            <a:pPr indent="0" marL="0">
-              <a:buNone/>
-            </a:pPr>
-            <a:r>
-              <a:rPr lang="en-US" sz="1250" b="1" spc="60" kern="0" dirty="0">
-                <a:solidFill>
-                  <a:srgbClr val="C2872B"/>
-                </a:solidFill>
-                <a:latin typeface="Calibri" pitchFamily="34" charset="0"/>
-                <a:ea typeface="Calibri" pitchFamily="34" charset="-122"/>
-                <a:cs typeface="Calibri" pitchFamily="34" charset="-120"/>
-              </a:rPr>
-              <a:t>Above the best of every AlgoTune model</a:t>
-            </a:r>
-            <a:endParaRPr lang="en-US" sz="1250" dirty="0"/>
-          </a:p>
-        </p:txBody>
-      </p:sp>
-      <p:sp>
-        <p:nvSpPr>
-          <p:cNvPr id="6" name="Shape 4"/>
-          <p:cNvSpPr/>
-          <p:nvPr/>
-        </p:nvSpPr>
-        <p:spPr>
-          <a:xfrm>
-            <a:off x="566928" y="2231136"/>
-            <a:ext cx="5394960" cy="841248"/>
-          </a:xfrm>
-          <a:prstGeom prst="roundRect">
-            <a:avLst>
-              <a:gd name="adj" fmla="val 6522"/>
-            </a:avLst>
-          </a:prstGeom>
-          <a:solidFill>
-            <a:srgbClr val="EEF1F3"/>
-          </a:solidFill>
-          <a:ln w="9525">
-            <a:solidFill>
-              <a:srgbClr val="D7DDE2"/>
-            </a:solidFill>
-            <a:prstDash val="solid"/>
-          </a:ln>
-        </p:spPr>
-      </p:sp>
-      <p:sp>
-        <p:nvSpPr>
-          <p:cNvPr id="7" name="Text 5"/>
-          <p:cNvSpPr txBox="1"/>
-          <p:nvPr/>
-        </p:nvSpPr>
-        <p:spPr>
-          <a:xfrm>
-            <a:off x="786384" y="2322576"/>
-            <a:ext cx="4983480" cy="237744"/>
-          </a:xfrm>
-          <a:prstGeom prst="rect">
-            <a:avLst/>
-          </a:prstGeom>
-          <a:noFill/>
-          <a:ln/>
-        </p:spPr>
-        <p:txBody>
-          <a:bodyPr wrap="square" lIns="0" tIns="0" rIns="0" bIns="0" rtlCol="0" anchor="ctr"/>
-          <a:lstStyle/>
-          <a:p>
-            <a:pPr indent="0" marL="0">
-              <a:buNone/>
-            </a:pPr>
-            <a:r>
-              <a:rPr lang="en-US" sz="1150" b="1" dirty="0">
-                <a:solidFill>
-                  <a:srgbClr val="10161C"/>
-                </a:solidFill>
-                <a:latin typeface="Calibri" pitchFamily="34" charset="0"/>
-                <a:ea typeface="Calibri" pitchFamily="34" charset="-122"/>
-                <a:cs typeface="Calibri" pitchFamily="34" charset="-120"/>
-              </a:rPr>
-              <a:t>eigenvectors_complex</a:t>
-            </a:r>
-            <a:endParaRPr lang="en-US" sz="1150" dirty="0"/>
-          </a:p>
-        </p:txBody>
-      </p:sp>
-      <p:sp>
-        <p:nvSpPr>
-          <p:cNvPr id="8" name="Text 6"/>
-          <p:cNvSpPr txBox="1"/>
-          <p:nvPr/>
-        </p:nvSpPr>
-        <p:spPr>
-          <a:xfrm>
-            <a:off x="786384" y="2560320"/>
-            <a:ext cx="4983480" cy="219456"/>
-          </a:xfrm>
-          <a:prstGeom prst="rect">
-            <a:avLst/>
-          </a:prstGeom>
-          <a:noFill/>
-          <a:ln/>
-        </p:spPr>
-        <p:txBody>
-          <a:bodyPr wrap="square" lIns="0" tIns="0" rIns="0" bIns="0" rtlCol="0" anchor="ctr"/>
-          <a:lstStyle/>
-          <a:p>
-            <a:pPr indent="0" marL="0">
-              <a:buNone/>
-            </a:pPr>
-            <a:r>
-              <a:rPr lang="en-US" sz="1050" dirty="0">
-                <a:solidFill>
-                  <a:srgbClr val="93A1AA"/>
-                </a:solidFill>
-                <a:latin typeface="Calibri" pitchFamily="34" charset="0"/>
-                <a:ea typeface="Calibri" pitchFamily="34" charset="-122"/>
-                <a:cs typeface="Calibri" pitchFamily="34" charset="-120"/>
-              </a:rPr>
-              <a:t>AlgoTune  max 1.039x over 18 models</a:t>
-            </a:r>
-            <a:endParaRPr lang="en-US" sz="1050" dirty="0"/>
-          </a:p>
-        </p:txBody>
-      </p:sp>
-      <p:sp>
-        <p:nvSpPr>
-          <p:cNvPr id="9" name="Text 7"/>
-          <p:cNvSpPr txBox="1"/>
-          <p:nvPr/>
-        </p:nvSpPr>
-        <p:spPr>
-          <a:xfrm>
-            <a:off x="786384" y="2779776"/>
-            <a:ext cx="4983480" cy="219456"/>
-          </a:xfrm>
-          <a:prstGeom prst="rect">
-            <a:avLst/>
-          </a:prstGeom>
-          <a:noFill/>
-          <a:ln/>
-        </p:spPr>
-        <p:txBody>
-          <a:bodyPr wrap="square" lIns="0" tIns="0" rIns="0" bIns="0" rtlCol="0" anchor="ctr"/>
-          <a:lstStyle/>
-          <a:p>
-            <a:pPr indent="0" marL="0">
-              <a:buNone/>
-            </a:pPr>
-            <a:r>
-              <a:rPr lang="en-US" sz="1050" b="1" dirty="0">
-                <a:solidFill>
-                  <a:srgbClr val="C2872B"/>
-                </a:solidFill>
-                <a:latin typeface="Calibri" pitchFamily="34" charset="0"/>
-                <a:ea typeface="Calibri" pitchFamily="34" charset="-122"/>
-                <a:cs typeface="Calibri" pitchFamily="34" charset="-120"/>
-              </a:rPr>
-              <a:t>no-RL 1.432 · MetaEvolve 1.474 · OpenEvolve 1.48</a:t>
-            </a:r>
-            <a:endParaRPr lang="en-US" sz="1050" dirty="0"/>
-          </a:p>
-        </p:txBody>
-      </p:sp>
-      <p:sp>
-        <p:nvSpPr>
-          <p:cNvPr id="10" name="Shape 8"/>
-          <p:cNvSpPr/>
-          <p:nvPr/>
-        </p:nvSpPr>
-        <p:spPr>
-          <a:xfrm>
-            <a:off x="566928" y="3200400"/>
-            <a:ext cx="5394960" cy="841248"/>
-          </a:xfrm>
-          <a:prstGeom prst="roundRect">
-            <a:avLst>
-              <a:gd name="adj" fmla="val 6522"/>
-            </a:avLst>
-          </a:prstGeom>
-          <a:solidFill>
-            <a:srgbClr val="EEF1F3"/>
-          </a:solidFill>
-          <a:ln w="9525">
-            <a:solidFill>
-              <a:srgbClr val="D7DDE2"/>
-            </a:solidFill>
-            <a:prstDash val="solid"/>
-          </a:ln>
-        </p:spPr>
-      </p:sp>
-      <p:sp>
-        <p:nvSpPr>
-          <p:cNvPr id="11" name="Text 9"/>
-          <p:cNvSpPr txBox="1"/>
-          <p:nvPr/>
-        </p:nvSpPr>
-        <p:spPr>
-          <a:xfrm>
-            <a:off x="786384" y="3291840"/>
-            <a:ext cx="4983480" cy="237744"/>
-          </a:xfrm>
-          <a:prstGeom prst="rect">
-            <a:avLst/>
-          </a:prstGeom>
-          <a:noFill/>
-          <a:ln/>
-        </p:spPr>
-        <p:txBody>
-          <a:bodyPr wrap="square" lIns="0" tIns="0" rIns="0" bIns="0" rtlCol="0" anchor="ctr"/>
-          <a:lstStyle/>
-          <a:p>
-            <a:pPr indent="0" marL="0">
-              <a:buNone/>
-            </a:pPr>
-            <a:r>
-              <a:rPr lang="en-US" sz="1150" b="1" dirty="0">
-                <a:solidFill>
-                  <a:srgbClr val="10161C"/>
-                </a:solidFill>
-                <a:latin typeface="Calibri" pitchFamily="34" charset="0"/>
-                <a:ea typeface="Calibri" pitchFamily="34" charset="-122"/>
-                <a:cs typeface="Calibri" pitchFamily="34" charset="-120"/>
-              </a:rPr>
-              <a:t>affine_transform_2d</a:t>
-            </a:r>
-            <a:endParaRPr lang="en-US" sz="1150" dirty="0"/>
-          </a:p>
-        </p:txBody>
-      </p:sp>
-      <p:sp>
-        <p:nvSpPr>
-          <p:cNvPr id="12" name="Text 10"/>
-          <p:cNvSpPr txBox="1"/>
-          <p:nvPr/>
-        </p:nvSpPr>
-        <p:spPr>
-          <a:xfrm>
-            <a:off x="786384" y="3529584"/>
-            <a:ext cx="4983480" cy="219456"/>
-          </a:xfrm>
-          <a:prstGeom prst="rect">
-            <a:avLst/>
-          </a:prstGeom>
-          <a:noFill/>
-          <a:ln/>
-        </p:spPr>
-        <p:txBody>
-          <a:bodyPr wrap="square" lIns="0" tIns="0" rIns="0" bIns="0" rtlCol="0" anchor="ctr"/>
-          <a:lstStyle/>
-          <a:p>
-            <a:pPr indent="0" marL="0">
-              <a:buNone/>
-            </a:pPr>
-            <a:r>
-              <a:rPr lang="en-US" sz="1050" dirty="0">
-                <a:solidFill>
-                  <a:srgbClr val="93A1AA"/>
-                </a:solidFill>
-                <a:latin typeface="Calibri" pitchFamily="34" charset="0"/>
-                <a:ea typeface="Calibri" pitchFamily="34" charset="-122"/>
-                <a:cs typeface="Calibri" pitchFamily="34" charset="-120"/>
-              </a:rPr>
-              <a:t>AlgoTune  max 1.015x over 14 models</a:t>
-            </a:r>
-            <a:endParaRPr lang="en-US" sz="1050" dirty="0"/>
-          </a:p>
-        </p:txBody>
-      </p:sp>
-      <p:sp>
-        <p:nvSpPr>
-          <p:cNvPr id="13" name="Text 11"/>
-          <p:cNvSpPr txBox="1"/>
-          <p:nvPr/>
-        </p:nvSpPr>
-        <p:spPr>
-          <a:xfrm>
-            <a:off x="786384" y="3749040"/>
-            <a:ext cx="4983480" cy="219456"/>
-          </a:xfrm>
-          <a:prstGeom prst="rect">
-            <a:avLst/>
-          </a:prstGeom>
-          <a:noFill/>
-          <a:ln/>
-        </p:spPr>
-        <p:txBody>
-          <a:bodyPr wrap="square" lIns="0" tIns="0" rIns="0" bIns="0" rtlCol="0" anchor="ctr"/>
-          <a:lstStyle/>
-          <a:p>
-            <a:pPr indent="0" marL="0">
-              <a:buNone/>
-            </a:pPr>
-            <a:r>
-              <a:rPr lang="en-US" sz="1050" b="1" dirty="0">
-                <a:solidFill>
-                  <a:srgbClr val="C2872B"/>
-                </a:solidFill>
-                <a:latin typeface="Calibri" pitchFamily="34" charset="0"/>
-                <a:ea typeface="Calibri" pitchFamily="34" charset="-122"/>
-                <a:cs typeface="Calibri" pitchFamily="34" charset="-120"/>
-              </a:rPr>
-              <a:t>MetaEvolve 6.945 · OpenEvolve 3.22</a:t>
-            </a:r>
-            <a:endParaRPr lang="en-US" sz="1050" dirty="0"/>
-          </a:p>
-        </p:txBody>
-      </p:sp>
-      <p:sp>
-        <p:nvSpPr>
-          <p:cNvPr id="14" name="Shape 12"/>
-          <p:cNvSpPr/>
-          <p:nvPr/>
-        </p:nvSpPr>
-        <p:spPr>
-          <a:xfrm>
-            <a:off x="566928" y="4169664"/>
-            <a:ext cx="5394960" cy="841248"/>
-          </a:xfrm>
-          <a:prstGeom prst="roundRect">
-            <a:avLst>
-              <a:gd name="adj" fmla="val 6522"/>
-            </a:avLst>
-          </a:prstGeom>
-          <a:solidFill>
-            <a:srgbClr val="EEF1F3"/>
-          </a:solidFill>
-          <a:ln w="9525">
-            <a:solidFill>
-              <a:srgbClr val="D7DDE2"/>
-            </a:solidFill>
-            <a:prstDash val="solid"/>
-          </a:ln>
-        </p:spPr>
-      </p:sp>
-      <p:sp>
-        <p:nvSpPr>
-          <p:cNvPr id="15" name="Text 13"/>
-          <p:cNvSpPr txBox="1"/>
-          <p:nvPr/>
-        </p:nvSpPr>
-        <p:spPr>
-          <a:xfrm>
-            <a:off x="786384" y="4261104"/>
-            <a:ext cx="4983480" cy="237744"/>
-          </a:xfrm>
-          <a:prstGeom prst="rect">
-            <a:avLst/>
-          </a:prstGeom>
-          <a:noFill/>
-          <a:ln/>
-        </p:spPr>
-        <p:txBody>
-          <a:bodyPr wrap="square" lIns="0" tIns="0" rIns="0" bIns="0" rtlCol="0" anchor="ctr"/>
-          <a:lstStyle/>
-          <a:p>
-            <a:pPr indent="0" marL="0">
-              <a:buNone/>
-            </a:pPr>
-            <a:r>
-              <a:rPr lang="en-US" sz="1150" b="1" dirty="0">
-                <a:solidFill>
-                  <a:srgbClr val="10161C"/>
-                </a:solidFill>
-                <a:latin typeface="Calibri" pitchFamily="34" charset="0"/>
-                <a:ea typeface="Calibri" pitchFamily="34" charset="-122"/>
-                <a:cs typeface="Calibri" pitchFamily="34" charset="-120"/>
-              </a:rPr>
-              <a:t>fft_convolution</a:t>
-            </a:r>
-            <a:endParaRPr lang="en-US" sz="1150" dirty="0"/>
-          </a:p>
-        </p:txBody>
-      </p:sp>
-      <p:sp>
-        <p:nvSpPr>
-          <p:cNvPr id="16" name="Text 14"/>
-          <p:cNvSpPr txBox="1"/>
-          <p:nvPr/>
-        </p:nvSpPr>
-        <p:spPr>
-          <a:xfrm>
-            <a:off x="786384" y="4498848"/>
-            <a:ext cx="4983480" cy="219456"/>
-          </a:xfrm>
-          <a:prstGeom prst="rect">
-            <a:avLst/>
-          </a:prstGeom>
-          <a:noFill/>
-          <a:ln/>
-        </p:spPr>
-        <p:txBody>
-          <a:bodyPr wrap="square" lIns="0" tIns="0" rIns="0" bIns="0" rtlCol="0" anchor="ctr"/>
-          <a:lstStyle/>
-          <a:p>
-            <a:pPr indent="0" marL="0">
-              <a:buNone/>
-            </a:pPr>
-            <a:r>
-              <a:rPr lang="en-US" sz="1050" dirty="0">
-                <a:solidFill>
-                  <a:srgbClr val="93A1AA"/>
-                </a:solidFill>
-                <a:latin typeface="Calibri" pitchFamily="34" charset="0"/>
-                <a:ea typeface="Calibri" pitchFamily="34" charset="-122"/>
-                <a:cs typeface="Calibri" pitchFamily="34" charset="-120"/>
-              </a:rPr>
-              <a:t>AlgoTune  max 1.021x over 15 models</a:t>
-            </a:r>
-            <a:endParaRPr lang="en-US" sz="1050" dirty="0"/>
-          </a:p>
-        </p:txBody>
-      </p:sp>
-      <p:sp>
-        <p:nvSpPr>
-          <p:cNvPr id="17" name="Text 15"/>
-          <p:cNvSpPr txBox="1"/>
-          <p:nvPr/>
-        </p:nvSpPr>
-        <p:spPr>
-          <a:xfrm>
-            <a:off x="786384" y="4718304"/>
-            <a:ext cx="4983480" cy="219456"/>
-          </a:xfrm>
-          <a:prstGeom prst="rect">
-            <a:avLst/>
-          </a:prstGeom>
-          <a:noFill/>
-          <a:ln/>
-        </p:spPr>
-        <p:txBody>
-          <a:bodyPr wrap="square" lIns="0" tIns="0" rIns="0" bIns="0" rtlCol="0" anchor="ctr"/>
-          <a:lstStyle/>
-          <a:p>
-            <a:pPr indent="0" marL="0">
-              <a:buNone/>
-            </a:pPr>
-            <a:r>
-              <a:rPr lang="en-US" sz="1050" b="1" dirty="0">
-                <a:solidFill>
-                  <a:srgbClr val="C2872B"/>
-                </a:solidFill>
-                <a:latin typeface="Calibri" pitchFamily="34" charset="0"/>
-                <a:ea typeface="Calibri" pitchFamily="34" charset="-122"/>
-                <a:cs typeface="Calibri" pitchFamily="34" charset="-120"/>
-              </a:rPr>
-              <a:t>MetaEvolve 1.346 · OpenEvolve 1.38</a:t>
-            </a:r>
-            <a:endParaRPr lang="en-US" sz="1050" dirty="0"/>
-          </a:p>
-        </p:txBody>
-      </p:sp>
-      <p:sp>
-        <p:nvSpPr>
-          <p:cNvPr id="18" name="Text 16"/>
-          <p:cNvSpPr txBox="1"/>
-          <p:nvPr/>
-        </p:nvSpPr>
-        <p:spPr>
-          <a:xfrm>
-            <a:off x="6190488" y="1847088"/>
-            <a:ext cx="5394960" cy="274320"/>
-          </a:xfrm>
-          <a:prstGeom prst="rect">
-            <a:avLst/>
-          </a:prstGeom>
-          <a:noFill/>
-          <a:ln/>
-        </p:spPr>
-        <p:txBody>
-          <a:bodyPr wrap="square" lIns="0" tIns="0" rIns="0" bIns="0" rtlCol="0" anchor="ctr"/>
-          <a:lstStyle/>
-          <a:p>
-            <a:pPr indent="0" marL="0">
-              <a:buNone/>
-            </a:pPr>
-            <a:r>
-              <a:rPr lang="en-US" sz="1250" b="1" spc="60" kern="0" dirty="0">
-                <a:solidFill>
-                  <a:srgbClr val="93A1AA"/>
-                </a:solidFill>
-                <a:latin typeface="Calibri" pitchFamily="34" charset="0"/>
-                <a:ea typeface="Calibri" pitchFamily="34" charset="-122"/>
-                <a:cs typeface="Calibri" pitchFamily="34" charset="-120"/>
-              </a:rPr>
-              <a:t>Below AlgoTune’s median</a:t>
-            </a:r>
-            <a:endParaRPr lang="en-US" sz="1250" dirty="0"/>
-          </a:p>
-        </p:txBody>
-      </p:sp>
-      <p:sp>
-        <p:nvSpPr>
-          <p:cNvPr id="19" name="Shape 17"/>
-          <p:cNvSpPr/>
-          <p:nvPr/>
-        </p:nvSpPr>
-        <p:spPr>
-          <a:xfrm>
-            <a:off x="6190488" y="2231136"/>
-            <a:ext cx="5394960" cy="841248"/>
-          </a:xfrm>
-          <a:prstGeom prst="roundRect">
-            <a:avLst>
-              <a:gd name="adj" fmla="val 6522"/>
-            </a:avLst>
-          </a:prstGeom>
-          <a:solidFill>
-            <a:srgbClr val="EEF1F3"/>
-          </a:solidFill>
-          <a:ln w="9525">
-            <a:solidFill>
-              <a:srgbClr val="D7DDE2"/>
-            </a:solidFill>
-            <a:prstDash val="solid"/>
-          </a:ln>
-        </p:spPr>
-      </p:sp>
-      <p:sp>
-        <p:nvSpPr>
-          <p:cNvPr id="20" name="Text 18"/>
-          <p:cNvSpPr txBox="1"/>
-          <p:nvPr/>
-        </p:nvSpPr>
-        <p:spPr>
-          <a:xfrm>
-            <a:off x="6409944" y="2322576"/>
-            <a:ext cx="4983480" cy="237744"/>
-          </a:xfrm>
-          <a:prstGeom prst="rect">
-            <a:avLst/>
-          </a:prstGeom>
-          <a:noFill/>
-          <a:ln/>
-        </p:spPr>
-        <p:txBody>
-          <a:bodyPr wrap="square" lIns="0" tIns="0" rIns="0" bIns="0" rtlCol="0" anchor="ctr"/>
-          <a:lstStyle/>
-          <a:p>
-            <a:pPr indent="0" marL="0">
-              <a:buNone/>
-            </a:pPr>
-            <a:r>
-              <a:rPr lang="en-US" sz="1150" b="1" dirty="0">
-                <a:solidFill>
-                  <a:srgbClr val="10161C"/>
-                </a:solidFill>
-                <a:latin typeface="Calibri" pitchFamily="34" charset="0"/>
-                <a:ea typeface="Calibri" pitchFamily="34" charset="-122"/>
-                <a:cs typeface="Calibri" pitchFamily="34" charset="-120"/>
-              </a:rPr>
-              <a:t>psd_cone_projection</a:t>
-            </a:r>
-            <a:endParaRPr lang="en-US" sz="1150" dirty="0"/>
-          </a:p>
-        </p:txBody>
-      </p:sp>
-      <p:sp>
-        <p:nvSpPr>
-          <p:cNvPr id="21" name="Text 19"/>
-          <p:cNvSpPr txBox="1"/>
-          <p:nvPr/>
-        </p:nvSpPr>
-        <p:spPr>
-          <a:xfrm>
-            <a:off x="6409944" y="2560320"/>
-            <a:ext cx="4983480" cy="219456"/>
-          </a:xfrm>
-          <a:prstGeom prst="rect">
-            <a:avLst/>
-          </a:prstGeom>
-          <a:noFill/>
-          <a:ln/>
-        </p:spPr>
-        <p:txBody>
-          <a:bodyPr wrap="square" lIns="0" tIns="0" rIns="0" bIns="0" rtlCol="0" anchor="ctr"/>
-          <a:lstStyle/>
-          <a:p>
-            <a:pPr indent="0" marL="0">
-              <a:buNone/>
-            </a:pPr>
-            <a:r>
-              <a:rPr lang="en-US" sz="1050" dirty="0">
-                <a:solidFill>
-                  <a:srgbClr val="93A1AA"/>
-                </a:solidFill>
-                <a:latin typeface="Calibri" pitchFamily="34" charset="0"/>
-                <a:ea typeface="Calibri" pitchFamily="34" charset="-122"/>
-                <a:cs typeface="Calibri" pitchFamily="34" charset="-120"/>
-              </a:rPr>
-              <a:t>AlgoTune  median 8.728x over 18 models</a:t>
-            </a:r>
-            <a:endParaRPr lang="en-US" sz="1050" dirty="0"/>
-          </a:p>
-        </p:txBody>
-      </p:sp>
-      <p:sp>
-        <p:nvSpPr>
-          <p:cNvPr id="22" name="Text 20"/>
-          <p:cNvSpPr txBox="1"/>
-          <p:nvPr/>
-        </p:nvSpPr>
-        <p:spPr>
-          <a:xfrm>
-            <a:off x="6409944" y="2779776"/>
-            <a:ext cx="4983480" cy="219456"/>
-          </a:xfrm>
-          <a:prstGeom prst="rect">
-            <a:avLst/>
-          </a:prstGeom>
-          <a:noFill/>
-          <a:ln/>
-        </p:spPr>
-        <p:txBody>
-          <a:bodyPr wrap="square" lIns="0" tIns="0" rIns="0" bIns="0" rtlCol="0" anchor="ctr"/>
-          <a:lstStyle/>
-          <a:p>
-            <a:pPr indent="0" marL="0">
-              <a:buNone/>
-            </a:pPr>
-            <a:r>
-              <a:rPr lang="en-US" sz="1050" b="1" dirty="0">
-                <a:solidFill>
-                  <a:srgbClr val="93A1AA"/>
-                </a:solidFill>
-                <a:latin typeface="Calibri" pitchFamily="34" charset="0"/>
-                <a:ea typeface="Calibri" pitchFamily="34" charset="-122"/>
-                <a:cs typeface="Calibri" pitchFamily="34" charset="-120"/>
-              </a:rPr>
-              <a:t>no-RL 1.795 · MetaEvolve 1.914 · OpenEvolve 1.94</a:t>
-            </a:r>
-            <a:endParaRPr lang="en-US" sz="1050" dirty="0"/>
-          </a:p>
-        </p:txBody>
-      </p:sp>
-      <p:sp>
-        <p:nvSpPr>
-          <p:cNvPr id="23" name="Shape 21"/>
-          <p:cNvSpPr/>
-          <p:nvPr/>
-        </p:nvSpPr>
-        <p:spPr>
-          <a:xfrm>
-            <a:off x="6190488" y="3200400"/>
-            <a:ext cx="5394960" cy="841248"/>
-          </a:xfrm>
-          <a:prstGeom prst="roundRect">
-            <a:avLst>
-              <a:gd name="adj" fmla="val 6522"/>
-            </a:avLst>
-          </a:prstGeom>
-          <a:solidFill>
-            <a:srgbClr val="EEF1F3"/>
-          </a:solidFill>
-          <a:ln w="9525">
-            <a:solidFill>
-              <a:srgbClr val="D7DDE2"/>
-            </a:solidFill>
-            <a:prstDash val="solid"/>
-          </a:ln>
-        </p:spPr>
-      </p:sp>
-      <p:sp>
-        <p:nvSpPr>
-          <p:cNvPr id="24" name="Text 22"/>
-          <p:cNvSpPr txBox="1"/>
-          <p:nvPr/>
-        </p:nvSpPr>
-        <p:spPr>
-          <a:xfrm>
-            <a:off x="6409944" y="3291840"/>
-            <a:ext cx="4983480" cy="237744"/>
-          </a:xfrm>
-          <a:prstGeom prst="rect">
-            <a:avLst/>
-          </a:prstGeom>
-          <a:noFill/>
-          <a:ln/>
-        </p:spPr>
-        <p:txBody>
-          <a:bodyPr wrap="square" lIns="0" tIns="0" rIns="0" bIns="0" rtlCol="0" anchor="ctr"/>
-          <a:lstStyle/>
-          <a:p>
-            <a:pPr indent="0" marL="0">
-              <a:buNone/>
-            </a:pPr>
-            <a:r>
-              <a:rPr lang="en-US" sz="1150" b="1" dirty="0">
-                <a:solidFill>
-                  <a:srgbClr val="10161C"/>
-                </a:solidFill>
-                <a:latin typeface="Calibri" pitchFamily="34" charset="0"/>
-                <a:ea typeface="Calibri" pitchFamily="34" charset="-122"/>
-                <a:cs typeface="Calibri" pitchFamily="34" charset="-120"/>
-              </a:rPr>
-              <a:t>convolve2d_full_fill</a:t>
-            </a:r>
-            <a:endParaRPr lang="en-US" sz="1150" dirty="0"/>
-          </a:p>
-        </p:txBody>
-      </p:sp>
-      <p:sp>
-        <p:nvSpPr>
-          <p:cNvPr id="25" name="Text 23"/>
-          <p:cNvSpPr txBox="1"/>
-          <p:nvPr/>
-        </p:nvSpPr>
-        <p:spPr>
-          <a:xfrm>
-            <a:off x="6409944" y="3529584"/>
-            <a:ext cx="4983480" cy="219456"/>
-          </a:xfrm>
-          <a:prstGeom prst="rect">
-            <a:avLst/>
-          </a:prstGeom>
-          <a:noFill/>
-          <a:ln/>
-        </p:spPr>
-        <p:txBody>
-          <a:bodyPr wrap="square" lIns="0" tIns="0" rIns="0" bIns="0" rtlCol="0" anchor="ctr"/>
-          <a:lstStyle/>
-          <a:p>
-            <a:pPr indent="0" marL="0">
-              <a:buNone/>
-            </a:pPr>
-            <a:r>
-              <a:rPr lang="en-US" sz="1050" dirty="0">
-                <a:solidFill>
-                  <a:srgbClr val="93A1AA"/>
-                </a:solidFill>
-                <a:latin typeface="Calibri" pitchFamily="34" charset="0"/>
-                <a:ea typeface="Calibri" pitchFamily="34" charset="-122"/>
-                <a:cs typeface="Calibri" pitchFamily="34" charset="-120"/>
-              </a:rPr>
-              <a:t>AlgoTune  median 144.938x over 18 models</a:t>
-            </a:r>
-            <a:endParaRPr lang="en-US" sz="1050" dirty="0"/>
-          </a:p>
-        </p:txBody>
-      </p:sp>
-      <p:sp>
-        <p:nvSpPr>
-          <p:cNvPr id="26" name="Text 24"/>
-          <p:cNvSpPr txBox="1"/>
-          <p:nvPr/>
-        </p:nvSpPr>
-        <p:spPr>
-          <a:xfrm>
-            <a:off x="6409944" y="3749040"/>
-            <a:ext cx="4983480" cy="219456"/>
-          </a:xfrm>
-          <a:prstGeom prst="rect">
-            <a:avLst/>
-          </a:prstGeom>
-          <a:noFill/>
-          <a:ln/>
-        </p:spPr>
-        <p:txBody>
-          <a:bodyPr wrap="square" lIns="0" tIns="0" rIns="0" bIns="0" rtlCol="0" anchor="ctr"/>
-          <a:lstStyle/>
-          <a:p>
-            <a:pPr indent="0" marL="0">
-              <a:buNone/>
-            </a:pPr>
-            <a:r>
-              <a:rPr lang="en-US" sz="1050" b="1" dirty="0">
-                <a:solidFill>
-                  <a:srgbClr val="93A1AA"/>
-                </a:solidFill>
-                <a:latin typeface="Calibri" pitchFamily="34" charset="0"/>
-                <a:ea typeface="Calibri" pitchFamily="34" charset="-122"/>
-                <a:cs typeface="Calibri" pitchFamily="34" charset="-120"/>
-              </a:rPr>
-              <a:t>MetaEvolve 78.128</a:t>
-            </a:r>
-            <a:endParaRPr lang="en-US" sz="1050" dirty="0"/>
-          </a:p>
-        </p:txBody>
-      </p:sp>
-      <p:sp>
-        <p:nvSpPr>
-          <p:cNvPr id="27" name="Shape 25"/>
-          <p:cNvSpPr/>
-          <p:nvPr/>
-        </p:nvSpPr>
-        <p:spPr>
-          <a:xfrm>
-            <a:off x="566928" y="5175504"/>
-            <a:ext cx="11055096" cy="969264"/>
-          </a:xfrm>
-          <a:prstGeom prst="roundRect">
-            <a:avLst>
-              <a:gd name="adj" fmla="val 5660"/>
-            </a:avLst>
-          </a:prstGeom>
-          <a:solidFill>
-            <a:srgbClr val="10161C"/>
-          </a:solidFill>
-          <a:ln w="12700">
-            <a:solidFill>
-              <a:srgbClr val="10161C"/>
-            </a:solidFill>
-            <a:prstDash val="solid"/>
-          </a:ln>
-        </p:spPr>
-      </p:sp>
-      <p:sp>
-        <p:nvSpPr>
-          <p:cNvPr id="28" name="Text 26"/>
-          <p:cNvSpPr txBox="1"/>
-          <p:nvPr/>
-        </p:nvSpPr>
-        <p:spPr>
-          <a:xfrm>
-            <a:off x="822960" y="5321808"/>
-            <a:ext cx="10543032" cy="694944"/>
-          </a:xfrm>
-          <a:prstGeom prst="rect">
-            <a:avLst/>
-          </a:prstGeom>
-          <a:noFill/>
-          <a:ln/>
-        </p:spPr>
-        <p:txBody>
-          <a:bodyPr wrap="square" lIns="0" tIns="0" rIns="0" bIns="0" rtlCol="0" anchor="ctr"/>
-          <a:lstStyle/>
-          <a:p>
-            <a:pPr indent="0" marL="0">
-              <a:lnSpc>
-                <a:spcPts val="1900"/>
-              </a:lnSpc>
-              <a:buNone/>
-            </a:pPr>
-            <a:r>
-              <a:rPr lang="en-US" sz="1300" dirty="0">
-                <a:solidFill>
-                  <a:srgbClr val="D6E0E4"/>
-                </a:solidFill>
-                <a:latin typeface="Calibri" pitchFamily="34" charset="0"/>
-                <a:ea typeface="Calibri" pitchFamily="34" charset="-122"/>
-                <a:cs typeface="Calibri" pitchFamily="34" charset="-120"/>
-              </a:rPr>
-              <a:t>That two-sided pattern is the signature of a smaller problem, not a better search. Shrink n and the tasks whose only headroom is Python overhead become winnable; the tasks whose win is genuinely algorithmic at scale lose theirs. All three columns run OpenEvolve’s search, and three of the eight agree with OpenEvolve’s own numbers to within 2.5%.</a:t>
-            </a:r>
-            <a:endParaRPr lang="en-US" sz="1300" dirty="0"/>
           </a:p>
         </p:txBody>
       </p:sp>

--- a/bench/results/decks/algotune-eight-tasks.pptx
+++ b/bench/results/decks/algotune-eight-tasks.pptx
@@ -22858,11 +22858,11 @@
             <a:tbl>
               <a:tblPr/>
               <a:tblGrid>
-                <a:gridCol w="2148840"/>
-                <a:gridCol w="2487168"/>
-                <a:gridCol w="2212848"/>
-                <a:gridCol w="2889504"/>
-                <a:gridCol w="1316736"/>
+                <a:gridCol w="2084832"/>
+                <a:gridCol w="2395728"/>
+                <a:gridCol w="2249424"/>
+                <a:gridCol w="3063240"/>
+                <a:gridCol w="1261872"/>
               </a:tblGrid>
               <a:tr h="274320">
                 <a:tc>
@@ -23206,7 +23206,7 @@
                   </a:tcPr>
                 </a:tc>
               </a:tr>
-              <a:tr h="384048">
+              <a:tr h="402336">
                 <a:tc>
                   <a:txBody>
                     <a:bodyPr/>
@@ -23428,7 +23428,7 @@
                           <a:ea typeface="Calibri" pitchFamily="34" charset="-122"/>
                           <a:cs typeface="Calibri" pitchFamily="34" charset="-120"/>
                         </a:rPr>
-                        <a:t>154 tasks, calibrated n</a:t>
+                        <a:t>154 tasks at the calibrated n</a:t>
                       </a:r>
                       <a:endParaRPr lang="en-US" sz="950" dirty="0">
                         <a:latin typeface="Calibri" charset="0"/>
@@ -23496,7 +23496,28 @@
                           <a:ea typeface="Calibri" pitchFamily="34" charset="-122"/>
                           <a:cs typeface="Calibri" pitchFamily="34" charset="-120"/>
                         </a:rPr>
-                        <a:t>reports/agent_summary.json</a:t>
+                        <a:t>reports/</a:t>
+                      </a:r>
+                      <a:endParaRPr lang="en-US" sz="950" dirty="0">
+                        <a:latin typeface="Calibri" charset="0"/>
+                        <a:ea typeface="Calibri" charset="0"/>
+                        <a:cs typeface="Calibri" charset="0"/>
+                      </a:endParaRPr>
+                    </a:p>
+                    <a:p>
+                      <a:pPr algn="l" indent="0" marL="0">
+                        <a:buNone/>
+                      </a:pPr>
+                      <a:r>
+                        <a:rPr lang="en-US" sz="950" dirty="0">
+                          <a:solidFill>
+                            <a:srgbClr val="3A4750"/>
+                          </a:solidFill>
+                          <a:latin typeface="Calibri" pitchFamily="34" charset="0"/>
+                          <a:ea typeface="Calibri" pitchFamily="34" charset="-122"/>
+                          <a:cs typeface="Calibri" pitchFamily="34" charset="-120"/>
+                        </a:rPr>
+                        <a:t>agent_summary.json</a:t>
                       </a:r>
                       <a:endParaRPr lang="en-US" sz="950" dirty="0">
                         <a:latin typeface="Calibri" charset="0"/>
@@ -23548,7 +23569,7 @@
                   </a:tcPr>
                 </a:tc>
               </a:tr>
-              <a:tr h="384048">
+              <a:tr h="420624">
                 <a:tc>
                   <a:txBody>
                     <a:bodyPr/>
@@ -23634,7 +23655,7 @@
                           <a:ea typeface="Calibri" pitchFamily="34" charset="-122"/>
                           <a:cs typeface="Calibri" pitchFamily="34" charset="-120"/>
                         </a:rPr>
-                        <a:t>OpenEvolve’s search</a:t>
+                        <a:t>OpenEvolve’s search (§3.1.3)</a:t>
                       </a:r>
                       <a:endParaRPr lang="en-US" sz="950" dirty="0">
                         <a:latin typeface="Calibri" charset="0"/>
@@ -23770,7 +23791,7 @@
                           <a:ea typeface="Calibri" pitchFamily="34" charset="-122"/>
                           <a:cs typeface="Calibri" pitchFamily="34" charset="-120"/>
                         </a:rPr>
-                        <a:t>8 tasks, sizes not stated</a:t>
+                        <a:t>8 tasks; no sizes, no timing method</a:t>
                       </a:r>
                       <a:endParaRPr lang="en-US" sz="950" dirty="0">
                         <a:latin typeface="Calibri" charset="0"/>
@@ -23890,7 +23911,7 @@
                   </a:tcPr>
                 </a:tc>
               </a:tr>
-              <a:tr h="384048">
+              <a:tr h="457200">
                 <a:tc>
                   <a:txBody>
                     <a:bodyPr/>
@@ -23976,7 +23997,7 @@
                           <a:ea typeface="Calibri" pitchFamily="34" charset="-122"/>
                           <a:cs typeface="Calibri" pitchFamily="34" charset="-120"/>
                         </a:rPr>
-                        <a:t>own</a:t>
+                        <a:t>own — the tool itself</a:t>
                       </a:r>
                       <a:endParaRPr lang="en-US" sz="950" dirty="0">
                         <a:latin typeface="Calibri" charset="0"/>
@@ -24112,7 +24133,7 @@
                           <a:ea typeface="Calibri" pitchFamily="34" charset="-122"/>
                           <a:cs typeface="Calibri" pitchFamily="34" charset="-120"/>
                         </a:rPr>
-                        <a:t>8 tasks, data_size far below calibrated</a:t>
+                        <a:t>8 tasks over 4 phases; data_size far below calibrated</a:t>
                       </a:r>
                       <a:endParaRPr lang="en-US" sz="950" dirty="0">
                         <a:latin typeface="Calibri" charset="0"/>
@@ -24232,7 +24253,7 @@
                   </a:tcPr>
                 </a:tc>
               </a:tr>
-              <a:tr h="658368">
+              <a:tr h="713232">
                 <a:tc>
                   <a:txBody>
                     <a:bodyPr/>
@@ -24407,7 +24428,7 @@
                           <a:ea typeface="Calibri" pitchFamily="34" charset="-122"/>
                           <a:cs typeface="Calibri" pitchFamily="34" charset="-120"/>
                         </a:rPr>
-                        <a:t>Gemini Flash 2.5 2.04x</a:t>
+                        <a:t>Gemini Flash 2.5 2.04x, Gemma 3 27B</a:t>
                       </a:r>
                       <a:endParaRPr lang="en-US" sz="950" dirty="0">
                         <a:latin typeface="Calibri" charset="0"/>
@@ -24428,28 +24449,7 @@
                           <a:ea typeface="Calibri" pitchFamily="34" charset="-122"/>
                           <a:cs typeface="Calibri" pitchFamily="34" charset="-120"/>
                         </a:rPr>
-                        <a:t>Gemma 3 27B 1.63x</a:t>
-                      </a:r>
-                      <a:endParaRPr lang="en-US" sz="950" dirty="0">
-                        <a:latin typeface="Calibri" charset="0"/>
-                        <a:ea typeface="Calibri" charset="0"/>
-                        <a:cs typeface="Calibri" charset="0"/>
-                      </a:endParaRPr>
-                    </a:p>
-                    <a:p>
-                      <a:pPr algn="l" indent="0" marL="0">
-                        <a:buNone/>
-                      </a:pPr>
-                      <a:r>
-                        <a:rPr lang="en-US" sz="950" dirty="0">
-                          <a:solidFill>
-                            <a:srgbClr val="3A4750"/>
-                          </a:solidFill>
-                          <a:latin typeface="Calibri" pitchFamily="34" charset="0"/>
-                          <a:ea typeface="Calibri" pitchFamily="34" charset="-122"/>
-                          <a:cs typeface="Calibri" pitchFamily="34" charset="-120"/>
-                        </a:rPr>
-                        <a:t>Qwen3-Coder 480B 1.41x</a:t>
+                        <a:t>1.63x, Qwen3-Coder 480B 1.41x</a:t>
                       </a:r>
                       <a:endParaRPr lang="en-US" sz="950" dirty="0">
                         <a:latin typeface="Calibri" charset="0"/>
@@ -24517,7 +24517,28 @@
                           <a:ea typeface="Calibri" pitchFamily="34" charset="-122"/>
                           <a:cs typeface="Calibri" pitchFamily="34" charset="-120"/>
                         </a:rPr>
-                        <a:t>30 tasks, sizes not stated</a:t>
+                        <a:t>30 tasks, sizes not stated. Co-authored by</a:t>
+                      </a:r>
+                      <a:endParaRPr lang="en-US" sz="950" dirty="0">
+                        <a:latin typeface="Calibri" charset="0"/>
+                        <a:ea typeface="Calibri" charset="0"/>
+                        <a:cs typeface="Calibri" charset="0"/>
+                      </a:endParaRPr>
+                    </a:p>
+                    <a:p>
+                      <a:pPr algn="l" indent="0" marL="0">
+                        <a:buNone/>
+                      </a:pPr>
+                      <a:r>
+                        <a:rPr lang="en-US" sz="950" dirty="0">
+                          <a:solidFill>
+                            <a:srgbClr val="3A4750"/>
+                          </a:solidFill>
+                          <a:latin typeface="Calibri" pitchFamily="34" charset="0"/>
+                          <a:ea typeface="Calibri" pitchFamily="34" charset="-122"/>
+                          <a:cs typeface="Calibri" pitchFamily="34" charset="-120"/>
+                        </a:rPr>
+                        <a:t>OpenEvolve’s own author — not third-party</a:t>
                       </a:r>
                       <a:endParaRPr lang="en-US" sz="950" dirty="0">
                         <a:latin typeface="Calibri" charset="0"/>
@@ -24585,7 +24606,28 @@
                           <a:ea typeface="Calibri" pitchFamily="34" charset="-122"/>
                           <a:cs typeface="Calibri" pitchFamily="34" charset="-120"/>
                         </a:rPr>
-                        <a:t>HuggingFace, Aug 2025</a:t>
+                        <a:t>HuggingFace</a:t>
+                      </a:r>
+                      <a:endParaRPr lang="en-US" sz="950" dirty="0">
+                        <a:latin typeface="Calibri" charset="0"/>
+                        <a:ea typeface="Calibri" charset="0"/>
+                        <a:cs typeface="Calibri" charset="0"/>
+                      </a:endParaRPr>
+                    </a:p>
+                    <a:p>
+                      <a:pPr algn="l" indent="0" marL="0">
+                        <a:buNone/>
+                      </a:pPr>
+                      <a:r>
+                        <a:rPr lang="en-US" sz="950" dirty="0">
+                          <a:solidFill>
+                            <a:srgbClr val="3A4750"/>
+                          </a:solidFill>
+                          <a:latin typeface="Calibri" pitchFamily="34" charset="0"/>
+                          <a:ea typeface="Calibri" pitchFamily="34" charset="-122"/>
+                          <a:cs typeface="Calibri" pitchFamily="34" charset="-120"/>
+                        </a:rPr>
+                        <a:t>community post</a:t>
                       </a:r>
                       <a:endParaRPr lang="en-US" sz="950" dirty="0">
                         <a:latin typeface="Calibri" charset="0"/>
@@ -25269,7 +25311,7 @@
                           <a:ea typeface="Calibri" pitchFamily="34" charset="-122"/>
                           <a:cs typeface="Calibri" pitchFamily="34" charset="-120"/>
                         </a:rPr>
-                        <a:t>epoch.ai/benchmarks/algotune</a:t>
+                        <a:t>epoch.ai</a:t>
                       </a:r>
                       <a:endParaRPr lang="en-US" sz="950" dirty="0">
                         <a:latin typeface="Calibri" charset="0"/>
@@ -25388,7 +25430,7 @@
                 <a:ea typeface="Calibri" pitchFamily="34" charset="-122"/>
                 <a:cs typeface="Calibri" pitchFamily="34" charset="-120"/>
               </a:rPr>
-              <a:t>Four of the six run OpenEvolve’s converter or its search, and not one of those four states a problem size. Only the AlgoTune leaderboard is known to sit at the calibrated n — which is why this deck’s comparison against those eighteen models is the one it puts weight on, and the three OpenEvolve-derived rows the ones it flags.</a:t>
+              <a:t>Four of the six run OpenEvolve’s converter or its search, not one of those four states a problem size, and two of the four are OpenEvolve’s own author writing about his own tool. Only the AlgoTune leaderboard is known to sit at the calibrated n — so of everything published, exactly one source is both independent and size-verified, which is why the comparison against those eighteen models is the one this deck puts weight on.</a:t>
             </a:r>
             <a:endParaRPr lang="en-US" sz="1200" dirty="0"/>
           </a:p>
